--- a/ECON251/Assignment/T01_Group10_Presentation Slides.pptx
+++ b/ECON251/Assignment/T01_Group10_Presentation Slides.pptx
@@ -5,7 +5,7 @@
     <p:sldMasterId id="2147483648" r:id="rId1"/>
   </p:sldMasterIdLst>
   <p:notesMasterIdLst>
-    <p:notesMasterId r:id="rId15"/>
+    <p:notesMasterId r:id="rId16"/>
   </p:notesMasterIdLst>
   <p:sldIdLst>
     <p:sldId id="256" r:id="rId2"/>
@@ -17,18 +17,19 @@
     <p:sldId id="262" r:id="rId8"/>
     <p:sldId id="263" r:id="rId9"/>
     <p:sldId id="264" r:id="rId10"/>
-    <p:sldId id="265" r:id="rId11"/>
-    <p:sldId id="266" r:id="rId12"/>
-    <p:sldId id="267" r:id="rId13"/>
-    <p:sldId id="268" r:id="rId14"/>
+    <p:sldId id="269" r:id="rId11"/>
+    <p:sldId id="265" r:id="rId12"/>
+    <p:sldId id="266" r:id="rId13"/>
+    <p:sldId id="267" r:id="rId14"/>
+    <p:sldId id="268" r:id="rId15"/>
   </p:sldIdLst>
   <p:sldSz cx="12192000" cy="6858000"/>
   <p:notesSz cx="6858000" cy="9144000"/>
   <p:embeddedFontLst>
     <p:embeddedFont>
-      <p:font typeface="Play" pitchFamily="2" charset="0"/>
-      <p:regular r:id="rId16"/>
-      <p:bold r:id="rId17"/>
+      <p:font typeface="Play" panose="020B0604020202020204" charset="0"/>
+      <p:regular r:id="rId17"/>
+      <p:bold r:id="rId18"/>
     </p:embeddedFont>
   </p:embeddedFontLst>
   <p:defaultTextStyle>
@@ -274,7 +275,7 @@
 <file path=ppt/charts/chart1.xml><?xml version="1.0" encoding="utf-8"?>
 <c:chartSpace xmlns:c="http://schemas.openxmlformats.org/drawingml/2006/chart" xmlns:a="http://schemas.openxmlformats.org/drawingml/2006/main" xmlns:r="http://schemas.openxmlformats.org/officeDocument/2006/relationships" xmlns:c16r2="http://schemas.microsoft.com/office/drawing/2015/06/chart">
   <c:date1904 val="0"/>
-  <c:lang val="en-GB"/>
+  <c:lang val="en-US"/>
   <c:roundedCorners val="0"/>
   <mc:AlternateContent xmlns:mc="http://schemas.openxmlformats.org/markup-compatibility/2006">
     <mc:Choice xmlns:c14="http://schemas.microsoft.com/office/drawing/2007/8/2/chart" Requires="c14">
@@ -1390,7 +1391,7 @@
 <file path=ppt/charts/chart2.xml><?xml version="1.0" encoding="utf-8"?>
 <c:chartSpace xmlns:c="http://schemas.openxmlformats.org/drawingml/2006/chart" xmlns:a="http://schemas.openxmlformats.org/drawingml/2006/main" xmlns:r="http://schemas.openxmlformats.org/officeDocument/2006/relationships" xmlns:c16r2="http://schemas.microsoft.com/office/drawing/2015/06/chart">
   <c:date1904 val="0"/>
-  <c:lang val="en-GB"/>
+  <c:lang val="en-US"/>
   <c:roundedCorners val="0"/>
   <mc:AlternateContent xmlns:mc="http://schemas.openxmlformats.org/markup-compatibility/2006">
     <mc:Choice xmlns:c14="http://schemas.microsoft.com/office/drawing/2007/8/2/chart" Requires="c14">
@@ -2195,7 +2196,7 @@
 <file path=ppt/charts/chart3.xml><?xml version="1.0" encoding="utf-8"?>
 <c:chartSpace xmlns:c="http://schemas.openxmlformats.org/drawingml/2006/chart" xmlns:a="http://schemas.openxmlformats.org/drawingml/2006/main" xmlns:r="http://schemas.openxmlformats.org/officeDocument/2006/relationships" xmlns:c16r2="http://schemas.microsoft.com/office/drawing/2015/06/chart">
   <c:date1904 val="0"/>
-  <c:lang val="en-GB"/>
+  <c:lang val="en-US"/>
   <c:roundedCorners val="0"/>
   <mc:AlternateContent xmlns:mc="http://schemas.openxmlformats.org/markup-compatibility/2006">
     <mc:Choice xmlns:c14="http://schemas.microsoft.com/office/drawing/2007/8/2/chart" Requires="c14">
@@ -2964,7 +2965,2005 @@
 <file path=ppt/charts/chart4.xml><?xml version="1.0" encoding="utf-8"?>
 <c:chartSpace xmlns:c="http://schemas.openxmlformats.org/drawingml/2006/chart" xmlns:a="http://schemas.openxmlformats.org/drawingml/2006/main" xmlns:r="http://schemas.openxmlformats.org/officeDocument/2006/relationships" xmlns:c16r2="http://schemas.microsoft.com/office/drawing/2015/06/chart">
   <c:date1904 val="0"/>
-  <c:lang val="en-GB"/>
+  <c:lang val="en-US"/>
+  <c:roundedCorners val="0"/>
+  <mc:AlternateContent xmlns:mc="http://schemas.openxmlformats.org/markup-compatibility/2006">
+    <mc:Choice xmlns:c14="http://schemas.microsoft.com/office/drawing/2007/8/2/chart" Requires="c14">
+      <c14:style val="102"/>
+    </mc:Choice>
+    <mc:Fallback>
+      <c:style val="2"/>
+    </mc:Fallback>
+  </mc:AlternateContent>
+  <c:chart>
+    <c:title>
+      <c:tx>
+        <c:rich>
+          <a:bodyPr rot="0" spcFirstLastPara="1" vertOverflow="ellipsis" vert="horz" wrap="square" anchor="ctr" anchorCtr="1"/>
+          <a:lstStyle/>
+          <a:p>
+            <a:pPr>
+              <a:defRPr sz="1400" b="0" i="0" u="none" strike="noStrike" kern="1200" spc="0" baseline="0">
+                <a:solidFill>
+                  <a:schemeClr val="tx1">
+                    <a:lumMod val="65000"/>
+                    <a:lumOff val="35000"/>
+                  </a:schemeClr>
+                </a:solidFill>
+                <a:latin typeface="+mn-lt"/>
+                <a:ea typeface="+mn-ea"/>
+                <a:cs typeface="+mn-cs"/>
+              </a:defRPr>
+            </a:pPr>
+            <a:r>
+              <a:rPr lang="en-US" sz="1400" b="1" i="0" u="none" strike="noStrike" baseline="0"/>
+              <a:t>Top 3 Sources of FDI Equity Inflows into India (2000–2025)</a:t>
+            </a:r>
+            <a:endParaRPr lang="en-US" b="1"/>
+          </a:p>
+        </c:rich>
+      </c:tx>
+      <c:overlay val="0"/>
+      <c:spPr>
+        <a:noFill/>
+        <a:ln>
+          <a:noFill/>
+        </a:ln>
+        <a:effectLst/>
+      </c:spPr>
+      <c:txPr>
+        <a:bodyPr rot="0" spcFirstLastPara="1" vertOverflow="ellipsis" vert="horz" wrap="square" anchor="ctr" anchorCtr="1"/>
+        <a:lstStyle/>
+        <a:p>
+          <a:pPr>
+            <a:defRPr sz="1400" b="0" i="0" u="none" strike="noStrike" kern="1200" spc="0" baseline="0">
+              <a:solidFill>
+                <a:schemeClr val="tx1">
+                  <a:lumMod val="65000"/>
+                  <a:lumOff val="35000"/>
+                </a:schemeClr>
+              </a:solidFill>
+              <a:latin typeface="+mn-lt"/>
+              <a:ea typeface="+mn-ea"/>
+              <a:cs typeface="+mn-cs"/>
+            </a:defRPr>
+          </a:pPr>
+          <a:endParaRPr lang="en-US"/>
+        </a:p>
+      </c:txPr>
+    </c:title>
+    <c:autoTitleDeleted val="0"/>
+    <c:plotArea>
+      <c:layout/>
+      <c:barChart>
+        <c:barDir val="bar"/>
+        <c:grouping val="stacked"/>
+        <c:varyColors val="0"/>
+        <c:ser>
+          <c:idx val="0"/>
+          <c:order val="0"/>
+          <c:tx>
+            <c:v>Singapore</c:v>
+          </c:tx>
+          <c:spPr>
+            <a:solidFill>
+              <a:schemeClr val="accent1"/>
+            </a:solidFill>
+            <a:ln>
+              <a:noFill/>
+            </a:ln>
+            <a:effectLst/>
+          </c:spPr>
+          <c:invertIfNegative val="0"/>
+          <c:cat>
+            <c:numRef>
+              <c:f>'India Top 3 FDI Inflows'!$A$4:$A$29</c:f>
+              <c:numCache>
+                <c:formatCode>General</c:formatCode>
+                <c:ptCount val="26"/>
+                <c:pt idx="0">
+                  <c:v>2000</c:v>
+                </c:pt>
+                <c:pt idx="1">
+                  <c:v>2001</c:v>
+                </c:pt>
+                <c:pt idx="2">
+                  <c:v>2002</c:v>
+                </c:pt>
+                <c:pt idx="3">
+                  <c:v>2003</c:v>
+                </c:pt>
+                <c:pt idx="4">
+                  <c:v>2004</c:v>
+                </c:pt>
+                <c:pt idx="5">
+                  <c:v>2005</c:v>
+                </c:pt>
+                <c:pt idx="6">
+                  <c:v>2006</c:v>
+                </c:pt>
+                <c:pt idx="7">
+                  <c:v>2007</c:v>
+                </c:pt>
+                <c:pt idx="8">
+                  <c:v>2008</c:v>
+                </c:pt>
+                <c:pt idx="9">
+                  <c:v>2009</c:v>
+                </c:pt>
+                <c:pt idx="10">
+                  <c:v>2010</c:v>
+                </c:pt>
+                <c:pt idx="11">
+                  <c:v>2011</c:v>
+                </c:pt>
+                <c:pt idx="12">
+                  <c:v>2012</c:v>
+                </c:pt>
+                <c:pt idx="13">
+                  <c:v>2013</c:v>
+                </c:pt>
+                <c:pt idx="14">
+                  <c:v>2014</c:v>
+                </c:pt>
+                <c:pt idx="15">
+                  <c:v>2015</c:v>
+                </c:pt>
+                <c:pt idx="16">
+                  <c:v>2016</c:v>
+                </c:pt>
+                <c:pt idx="17">
+                  <c:v>2017</c:v>
+                </c:pt>
+                <c:pt idx="18">
+                  <c:v>2018</c:v>
+                </c:pt>
+                <c:pt idx="19">
+                  <c:v>2019</c:v>
+                </c:pt>
+                <c:pt idx="20">
+                  <c:v>2020</c:v>
+                </c:pt>
+                <c:pt idx="21">
+                  <c:v>2021</c:v>
+                </c:pt>
+                <c:pt idx="22">
+                  <c:v>2022</c:v>
+                </c:pt>
+                <c:pt idx="23">
+                  <c:v>2023</c:v>
+                </c:pt>
+                <c:pt idx="24">
+                  <c:v>2024</c:v>
+                </c:pt>
+                <c:pt idx="25">
+                  <c:v>2025</c:v>
+                </c:pt>
+              </c:numCache>
+            </c:numRef>
+          </c:cat>
+          <c:val>
+            <c:numRef>
+              <c:f>'India Top 3 FDI Inflows'!$C$4:$C$29</c:f>
+              <c:numCache>
+                <c:formatCode>General</c:formatCode>
+                <c:ptCount val="26"/>
+                <c:pt idx="0">
+                  <c:v>116.63</c:v>
+                </c:pt>
+                <c:pt idx="1">
+                  <c:v>35.700000000000003</c:v>
+                </c:pt>
+                <c:pt idx="2">
+                  <c:v>47.13</c:v>
+                </c:pt>
+                <c:pt idx="3">
+                  <c:v>36.53</c:v>
+                </c:pt>
+                <c:pt idx="4">
+                  <c:v>62.07</c:v>
+                </c:pt>
+                <c:pt idx="5">
+                  <c:v>321.48</c:v>
+                </c:pt>
+                <c:pt idx="6">
+                  <c:v>620.66</c:v>
+                </c:pt>
+                <c:pt idx="7" formatCode="#,##0.00">
+                  <c:v>1455.72</c:v>
+                </c:pt>
+                <c:pt idx="8" formatCode="#,##0.00">
+                  <c:v>3763.49</c:v>
+                </c:pt>
+                <c:pt idx="9" formatCode="#,##0.00">
+                  <c:v>3059.54</c:v>
+                </c:pt>
+                <c:pt idx="10" formatCode="#,##0.00">
+                  <c:v>2121.3200000000002</c:v>
+                </c:pt>
+                <c:pt idx="11" formatCode="#,##0.00">
+                  <c:v>4255.09</c:v>
+                </c:pt>
+                <c:pt idx="12" formatCode="#,##0.00">
+                  <c:v>2897.2</c:v>
+                </c:pt>
+                <c:pt idx="13" formatCode="#,##0.00">
+                  <c:v>3874.14</c:v>
+                </c:pt>
+                <c:pt idx="14" formatCode="#,##0.00">
+                  <c:v>7092.38</c:v>
+                </c:pt>
+                <c:pt idx="15" formatCode="#,##0.00">
+                  <c:v>13414.32</c:v>
+                </c:pt>
+                <c:pt idx="16" formatCode="#,##0.00">
+                  <c:v>9822.18</c:v>
+                </c:pt>
+                <c:pt idx="17" formatCode="#,##0.00">
+                  <c:v>10808.82</c:v>
+                </c:pt>
+                <c:pt idx="18" formatCode="#,##0.00">
+                  <c:v>15943.36</c:v>
+                </c:pt>
+                <c:pt idx="19" formatCode="#,##0.00">
+                  <c:v>14904.18</c:v>
+                </c:pt>
+                <c:pt idx="20" formatCode="#,##0.00">
+                  <c:v>18735.439999999999</c:v>
+                </c:pt>
+                <c:pt idx="21" formatCode="#,##0.00">
+                  <c:v>13392</c:v>
+                </c:pt>
+                <c:pt idx="22" formatCode="#,##0.00">
+                  <c:v>17265.57</c:v>
+                </c:pt>
+                <c:pt idx="23" formatCode="#,##0.00">
+                  <c:v>11568.46</c:v>
+                </c:pt>
+                <c:pt idx="24" formatCode="#,##0.00">
+                  <c:v>16310.16</c:v>
+                </c:pt>
+                <c:pt idx="25" formatCode="#,##0.00">
+                  <c:v>20615.52</c:v>
+                </c:pt>
+              </c:numCache>
+            </c:numRef>
+          </c:val>
+          <c:extLst>
+            <c:ext xmlns:c16="http://schemas.microsoft.com/office/drawing/2014/chart" uri="{C3380CC4-5D6E-409C-BE32-E72D297353CC}">
+              <c16:uniqueId val="{00000000-E5C5-4DD5-9461-2E56FBF7579B}"/>
+            </c:ext>
+          </c:extLst>
+        </c:ser>
+        <c:ser>
+          <c:idx val="1"/>
+          <c:order val="1"/>
+          <c:tx>
+            <c:v>Mauritius</c:v>
+          </c:tx>
+          <c:spPr>
+            <a:solidFill>
+              <a:schemeClr val="accent2"/>
+            </a:solidFill>
+            <a:ln>
+              <a:noFill/>
+            </a:ln>
+            <a:effectLst/>
+          </c:spPr>
+          <c:invertIfNegative val="0"/>
+          <c:cat>
+            <c:numRef>
+              <c:f>'India Top 3 FDI Inflows'!$A$4:$A$29</c:f>
+              <c:numCache>
+                <c:formatCode>General</c:formatCode>
+                <c:ptCount val="26"/>
+                <c:pt idx="0">
+                  <c:v>2000</c:v>
+                </c:pt>
+                <c:pt idx="1">
+                  <c:v>2001</c:v>
+                </c:pt>
+                <c:pt idx="2">
+                  <c:v>2002</c:v>
+                </c:pt>
+                <c:pt idx="3">
+                  <c:v>2003</c:v>
+                </c:pt>
+                <c:pt idx="4">
+                  <c:v>2004</c:v>
+                </c:pt>
+                <c:pt idx="5">
+                  <c:v>2005</c:v>
+                </c:pt>
+                <c:pt idx="6">
+                  <c:v>2006</c:v>
+                </c:pt>
+                <c:pt idx="7">
+                  <c:v>2007</c:v>
+                </c:pt>
+                <c:pt idx="8">
+                  <c:v>2008</c:v>
+                </c:pt>
+                <c:pt idx="9">
+                  <c:v>2009</c:v>
+                </c:pt>
+                <c:pt idx="10">
+                  <c:v>2010</c:v>
+                </c:pt>
+                <c:pt idx="11">
+                  <c:v>2011</c:v>
+                </c:pt>
+                <c:pt idx="12">
+                  <c:v>2012</c:v>
+                </c:pt>
+                <c:pt idx="13">
+                  <c:v>2013</c:v>
+                </c:pt>
+                <c:pt idx="14">
+                  <c:v>2014</c:v>
+                </c:pt>
+                <c:pt idx="15">
+                  <c:v>2015</c:v>
+                </c:pt>
+                <c:pt idx="16">
+                  <c:v>2016</c:v>
+                </c:pt>
+                <c:pt idx="17">
+                  <c:v>2017</c:v>
+                </c:pt>
+                <c:pt idx="18">
+                  <c:v>2018</c:v>
+                </c:pt>
+                <c:pt idx="19">
+                  <c:v>2019</c:v>
+                </c:pt>
+                <c:pt idx="20">
+                  <c:v>2020</c:v>
+                </c:pt>
+                <c:pt idx="21">
+                  <c:v>2021</c:v>
+                </c:pt>
+                <c:pt idx="22">
+                  <c:v>2022</c:v>
+                </c:pt>
+                <c:pt idx="23">
+                  <c:v>2023</c:v>
+                </c:pt>
+                <c:pt idx="24">
+                  <c:v>2024</c:v>
+                </c:pt>
+                <c:pt idx="25">
+                  <c:v>2025</c:v>
+                </c:pt>
+              </c:numCache>
+            </c:numRef>
+          </c:cat>
+          <c:val>
+            <c:numRef>
+              <c:f>'India Top 3 FDI Inflows'!$E$4:$E$29</c:f>
+              <c:numCache>
+                <c:formatCode>#,##0.00</c:formatCode>
+                <c:ptCount val="26"/>
+                <c:pt idx="0" formatCode="General">
+                  <c:v>829.92</c:v>
+                </c:pt>
+                <c:pt idx="1">
+                  <c:v>1667.47</c:v>
+                </c:pt>
+                <c:pt idx="2">
+                  <c:v>1517.6</c:v>
+                </c:pt>
+                <c:pt idx="3" formatCode="General">
+                  <c:v>562.16</c:v>
+                </c:pt>
+                <c:pt idx="4">
+                  <c:v>1003.52</c:v>
+                </c:pt>
+                <c:pt idx="5">
+                  <c:v>2115.19</c:v>
+                </c:pt>
+                <c:pt idx="6">
+                  <c:v>4883.54</c:v>
+                </c:pt>
+                <c:pt idx="7">
+                  <c:v>7711.66</c:v>
+                </c:pt>
+                <c:pt idx="8">
+                  <c:v>14138.01</c:v>
+                </c:pt>
+                <c:pt idx="9">
+                  <c:v>11536.23</c:v>
+                </c:pt>
+                <c:pt idx="10">
+                  <c:v>7207.85</c:v>
+                </c:pt>
+                <c:pt idx="11">
+                  <c:v>9485.16</c:v>
+                </c:pt>
+                <c:pt idx="12">
+                  <c:v>9150.64</c:v>
+                </c:pt>
+                <c:pt idx="13">
+                  <c:v>5722.39</c:v>
+                </c:pt>
+                <c:pt idx="14">
+                  <c:v>7073.12</c:v>
+                </c:pt>
+                <c:pt idx="15">
+                  <c:v>8049.56</c:v>
+                </c:pt>
+                <c:pt idx="16">
+                  <c:v>15069.46</c:v>
+                </c:pt>
+                <c:pt idx="17">
+                  <c:v>16256.73</c:v>
+                </c:pt>
+                <c:pt idx="18">
+                  <c:v>8615.61</c:v>
+                </c:pt>
+                <c:pt idx="19">
+                  <c:v>9516.61</c:v>
+                </c:pt>
+                <c:pt idx="20">
+                  <c:v>4260.71</c:v>
+                </c:pt>
+                <c:pt idx="21">
+                  <c:v>8744.23</c:v>
+                </c:pt>
+                <c:pt idx="22">
+                  <c:v>7543.24</c:v>
+                </c:pt>
+                <c:pt idx="23">
+                  <c:v>8444.6200000000008</c:v>
+                </c:pt>
+                <c:pt idx="24">
+                  <c:v>7892.58</c:v>
+                </c:pt>
+                <c:pt idx="25">
+                  <c:v>6210.3</c:v>
+                </c:pt>
+              </c:numCache>
+            </c:numRef>
+          </c:val>
+          <c:extLst>
+            <c:ext xmlns:c16="http://schemas.microsoft.com/office/drawing/2014/chart" uri="{C3380CC4-5D6E-409C-BE32-E72D297353CC}">
+              <c16:uniqueId val="{00000001-E5C5-4DD5-9461-2E56FBF7579B}"/>
+            </c:ext>
+          </c:extLst>
+        </c:ser>
+        <c:ser>
+          <c:idx val="2"/>
+          <c:order val="2"/>
+          <c:tx>
+            <c:v>USA</c:v>
+          </c:tx>
+          <c:spPr>
+            <a:solidFill>
+              <a:schemeClr val="accent3"/>
+            </a:solidFill>
+            <a:ln>
+              <a:noFill/>
+            </a:ln>
+            <a:effectLst/>
+          </c:spPr>
+          <c:invertIfNegative val="0"/>
+          <c:cat>
+            <c:numRef>
+              <c:f>'India Top 3 FDI Inflows'!$A$4:$A$29</c:f>
+              <c:numCache>
+                <c:formatCode>General</c:formatCode>
+                <c:ptCount val="26"/>
+                <c:pt idx="0">
+                  <c:v>2000</c:v>
+                </c:pt>
+                <c:pt idx="1">
+                  <c:v>2001</c:v>
+                </c:pt>
+                <c:pt idx="2">
+                  <c:v>2002</c:v>
+                </c:pt>
+                <c:pt idx="3">
+                  <c:v>2003</c:v>
+                </c:pt>
+                <c:pt idx="4">
+                  <c:v>2004</c:v>
+                </c:pt>
+                <c:pt idx="5">
+                  <c:v>2005</c:v>
+                </c:pt>
+                <c:pt idx="6">
+                  <c:v>2006</c:v>
+                </c:pt>
+                <c:pt idx="7">
+                  <c:v>2007</c:v>
+                </c:pt>
+                <c:pt idx="8">
+                  <c:v>2008</c:v>
+                </c:pt>
+                <c:pt idx="9">
+                  <c:v>2009</c:v>
+                </c:pt>
+                <c:pt idx="10">
+                  <c:v>2010</c:v>
+                </c:pt>
+                <c:pt idx="11">
+                  <c:v>2011</c:v>
+                </c:pt>
+                <c:pt idx="12">
+                  <c:v>2012</c:v>
+                </c:pt>
+                <c:pt idx="13">
+                  <c:v>2013</c:v>
+                </c:pt>
+                <c:pt idx="14">
+                  <c:v>2014</c:v>
+                </c:pt>
+                <c:pt idx="15">
+                  <c:v>2015</c:v>
+                </c:pt>
+                <c:pt idx="16">
+                  <c:v>2016</c:v>
+                </c:pt>
+                <c:pt idx="17">
+                  <c:v>2017</c:v>
+                </c:pt>
+                <c:pt idx="18">
+                  <c:v>2018</c:v>
+                </c:pt>
+                <c:pt idx="19">
+                  <c:v>2019</c:v>
+                </c:pt>
+                <c:pt idx="20">
+                  <c:v>2020</c:v>
+                </c:pt>
+                <c:pt idx="21">
+                  <c:v>2021</c:v>
+                </c:pt>
+                <c:pt idx="22">
+                  <c:v>2022</c:v>
+                </c:pt>
+                <c:pt idx="23">
+                  <c:v>2023</c:v>
+                </c:pt>
+                <c:pt idx="24">
+                  <c:v>2024</c:v>
+                </c:pt>
+                <c:pt idx="25">
+                  <c:v>2025</c:v>
+                </c:pt>
+              </c:numCache>
+            </c:numRef>
+          </c:cat>
+          <c:val>
+            <c:numRef>
+              <c:f>'India Top 3 FDI Inflows'!$G$4:$G$29</c:f>
+              <c:numCache>
+                <c:formatCode>General</c:formatCode>
+                <c:ptCount val="26"/>
+                <c:pt idx="0">
+                  <c:v>418.44</c:v>
+                </c:pt>
+                <c:pt idx="1">
+                  <c:v>367.59</c:v>
+                </c:pt>
+                <c:pt idx="2">
+                  <c:v>282.75</c:v>
+                </c:pt>
+                <c:pt idx="3">
+                  <c:v>413.93</c:v>
+                </c:pt>
+                <c:pt idx="4">
+                  <c:v>647.65</c:v>
+                </c:pt>
+                <c:pt idx="5">
+                  <c:v>472.15</c:v>
+                </c:pt>
+                <c:pt idx="6">
+                  <c:v>732.34</c:v>
+                </c:pt>
+                <c:pt idx="7">
+                  <c:v>875.5</c:v>
+                </c:pt>
+                <c:pt idx="8" formatCode="#,##0.00">
+                  <c:v>1797.18</c:v>
+                </c:pt>
+                <c:pt idx="9" formatCode="#,##0.00">
+                  <c:v>2051.0100000000002</c:v>
+                </c:pt>
+                <c:pt idx="10" formatCode="#,##0.00">
+                  <c:v>1414.19</c:v>
+                </c:pt>
+                <c:pt idx="11" formatCode="#,##0.00">
+                  <c:v>1000.08</c:v>
+                </c:pt>
+                <c:pt idx="12">
+                  <c:v>639.09</c:v>
+                </c:pt>
+                <c:pt idx="13">
+                  <c:v>771.9</c:v>
+                </c:pt>
+                <c:pt idx="14" formatCode="#,##0.00">
+                  <c:v>1663.45</c:v>
+                </c:pt>
+                <c:pt idx="15" formatCode="#,##0.00">
+                  <c:v>3855.07</c:v>
+                </c:pt>
+                <c:pt idx="16" formatCode="#,##0.00">
+                  <c:v>2621.2199999999998</c:v>
+                </c:pt>
+                <c:pt idx="17" formatCode="#,##0.00">
+                  <c:v>2183.16</c:v>
+                </c:pt>
+                <c:pt idx="18" formatCode="#,##0.00">
+                  <c:v>2692.58</c:v>
+                </c:pt>
+                <c:pt idx="19" formatCode="#,##0.00">
+                  <c:v>3589.88</c:v>
+                </c:pt>
+                <c:pt idx="20" formatCode="#,##0.00">
+                  <c:v>14257.8</c:v>
+                </c:pt>
+                <c:pt idx="21" formatCode="#,##0.00">
+                  <c:v>8517.81</c:v>
+                </c:pt>
+                <c:pt idx="22" formatCode="#,##0.00">
+                  <c:v>7983.22</c:v>
+                </c:pt>
+                <c:pt idx="23" formatCode="#,##0.00">
+                  <c:v>3922.92</c:v>
+                </c:pt>
+                <c:pt idx="24" formatCode="#,##0.00">
+                  <c:v>5900.74</c:v>
+                </c:pt>
+                <c:pt idx="25" formatCode="#,##0.00">
+                  <c:v>9527.2900000000009</c:v>
+                </c:pt>
+              </c:numCache>
+            </c:numRef>
+          </c:val>
+          <c:extLst>
+            <c:ext xmlns:c16="http://schemas.microsoft.com/office/drawing/2014/chart" uri="{C3380CC4-5D6E-409C-BE32-E72D297353CC}">
+              <c16:uniqueId val="{00000002-E5C5-4DD5-9461-2E56FBF7579B}"/>
+            </c:ext>
+          </c:extLst>
+        </c:ser>
+        <c:dLbls>
+          <c:showLegendKey val="0"/>
+          <c:showVal val="0"/>
+          <c:showCatName val="0"/>
+          <c:showSerName val="0"/>
+          <c:showPercent val="0"/>
+          <c:showBubbleSize val="0"/>
+        </c:dLbls>
+        <c:gapWidth val="150"/>
+        <c:overlap val="100"/>
+        <c:axId val="456070400"/>
+        <c:axId val="134807568"/>
+      </c:barChart>
+      <c:catAx>
+        <c:axId val="456070400"/>
+        <c:scaling>
+          <c:orientation val="minMax"/>
+        </c:scaling>
+        <c:delete val="0"/>
+        <c:axPos val="l"/>
+        <c:title>
+          <c:tx>
+            <c:rich>
+              <a:bodyPr rot="-5400000" spcFirstLastPara="1" vertOverflow="ellipsis" vert="horz" wrap="square" anchor="ctr" anchorCtr="1"/>
+              <a:lstStyle/>
+              <a:p>
+                <a:pPr>
+                  <a:defRPr sz="1000" b="1" i="0" u="none" strike="noStrike" kern="1200" baseline="0">
+                    <a:solidFill>
+                      <a:schemeClr val="tx1">
+                        <a:lumMod val="65000"/>
+                        <a:lumOff val="35000"/>
+                      </a:schemeClr>
+                    </a:solidFill>
+                    <a:latin typeface="+mn-lt"/>
+                    <a:ea typeface="+mn-ea"/>
+                    <a:cs typeface="+mn-cs"/>
+                  </a:defRPr>
+                </a:pPr>
+                <a:r>
+                  <a:rPr lang="en-US" b="1"/>
+                  <a:t>Years</a:t>
+                </a:r>
+              </a:p>
+            </c:rich>
+          </c:tx>
+          <c:overlay val="0"/>
+          <c:spPr>
+            <a:noFill/>
+            <a:ln>
+              <a:noFill/>
+            </a:ln>
+            <a:effectLst/>
+          </c:spPr>
+          <c:txPr>
+            <a:bodyPr rot="-5400000" spcFirstLastPara="1" vertOverflow="ellipsis" vert="horz" wrap="square" anchor="ctr" anchorCtr="1"/>
+            <a:lstStyle/>
+            <a:p>
+              <a:pPr>
+                <a:defRPr sz="1000" b="1" i="0" u="none" strike="noStrike" kern="1200" baseline="0">
+                  <a:solidFill>
+                    <a:schemeClr val="tx1">
+                      <a:lumMod val="65000"/>
+                      <a:lumOff val="35000"/>
+                    </a:schemeClr>
+                  </a:solidFill>
+                  <a:latin typeface="+mn-lt"/>
+                  <a:ea typeface="+mn-ea"/>
+                  <a:cs typeface="+mn-cs"/>
+                </a:defRPr>
+              </a:pPr>
+              <a:endParaRPr lang="en-US"/>
+            </a:p>
+          </c:txPr>
+        </c:title>
+        <c:numFmt formatCode="General" sourceLinked="1"/>
+        <c:majorTickMark val="none"/>
+        <c:minorTickMark val="none"/>
+        <c:tickLblPos val="nextTo"/>
+        <c:spPr>
+          <a:noFill/>
+          <a:ln w="9525" cap="flat" cmpd="sng" algn="ctr">
+            <a:solidFill>
+              <a:schemeClr val="tx1">
+                <a:lumMod val="15000"/>
+                <a:lumOff val="85000"/>
+              </a:schemeClr>
+            </a:solidFill>
+            <a:round/>
+          </a:ln>
+          <a:effectLst/>
+        </c:spPr>
+        <c:txPr>
+          <a:bodyPr rot="-60000000" spcFirstLastPara="1" vertOverflow="ellipsis" vert="horz" wrap="square" anchor="ctr" anchorCtr="1"/>
+          <a:lstStyle/>
+          <a:p>
+            <a:pPr>
+              <a:defRPr sz="900" b="0" i="0" u="none" strike="noStrike" kern="1200" baseline="0">
+                <a:solidFill>
+                  <a:schemeClr val="tx1">
+                    <a:lumMod val="65000"/>
+                    <a:lumOff val="35000"/>
+                  </a:schemeClr>
+                </a:solidFill>
+                <a:latin typeface="+mn-lt"/>
+                <a:ea typeface="+mn-ea"/>
+                <a:cs typeface="+mn-cs"/>
+              </a:defRPr>
+            </a:pPr>
+            <a:endParaRPr lang="en-US"/>
+          </a:p>
+        </c:txPr>
+        <c:crossAx val="134807568"/>
+        <c:crosses val="autoZero"/>
+        <c:auto val="1"/>
+        <c:lblAlgn val="ctr"/>
+        <c:lblOffset val="100"/>
+        <c:noMultiLvlLbl val="0"/>
+      </c:catAx>
+      <c:valAx>
+        <c:axId val="134807568"/>
+        <c:scaling>
+          <c:orientation val="minMax"/>
+        </c:scaling>
+        <c:delete val="0"/>
+        <c:axPos val="b"/>
+        <c:majorGridlines>
+          <c:spPr>
+            <a:ln w="9525" cap="flat" cmpd="sng" algn="ctr">
+              <a:solidFill>
+                <a:schemeClr val="tx1">
+                  <a:lumMod val="15000"/>
+                  <a:lumOff val="85000"/>
+                </a:schemeClr>
+              </a:solidFill>
+              <a:round/>
+            </a:ln>
+            <a:effectLst/>
+          </c:spPr>
+        </c:majorGridlines>
+        <c:title>
+          <c:tx>
+            <c:rich>
+              <a:bodyPr rot="0" spcFirstLastPara="1" vertOverflow="ellipsis" vert="horz" wrap="square" anchor="ctr" anchorCtr="1"/>
+              <a:lstStyle/>
+              <a:p>
+                <a:pPr>
+                  <a:defRPr sz="1000" b="0" i="0" u="none" strike="noStrike" kern="1200" baseline="0">
+                    <a:solidFill>
+                      <a:schemeClr val="tx1">
+                        <a:lumMod val="65000"/>
+                        <a:lumOff val="35000"/>
+                      </a:schemeClr>
+                    </a:solidFill>
+                    <a:latin typeface="+mn-lt"/>
+                    <a:ea typeface="+mn-ea"/>
+                    <a:cs typeface="+mn-cs"/>
+                  </a:defRPr>
+                </a:pPr>
+                <a:r>
+                  <a:rPr lang="en-US" sz="1000" b="1" i="0" u="none" strike="noStrike" baseline="0">
+                    <a:effectLst/>
+                  </a:rPr>
+                  <a:t>USD in Million</a:t>
+                </a:r>
+                <a:r>
+                  <a:rPr lang="en-US" sz="1000" b="0" i="0" u="none" strike="noStrike" baseline="0">
+                    <a:effectLst/>
+                  </a:rPr>
+                  <a:t> </a:t>
+                </a:r>
+                <a:endParaRPr lang="en-US"/>
+              </a:p>
+            </c:rich>
+          </c:tx>
+          <c:overlay val="0"/>
+          <c:spPr>
+            <a:noFill/>
+            <a:ln>
+              <a:noFill/>
+            </a:ln>
+            <a:effectLst/>
+          </c:spPr>
+          <c:txPr>
+            <a:bodyPr rot="0" spcFirstLastPara="1" vertOverflow="ellipsis" vert="horz" wrap="square" anchor="ctr" anchorCtr="1"/>
+            <a:lstStyle/>
+            <a:p>
+              <a:pPr>
+                <a:defRPr sz="1000" b="0" i="0" u="none" strike="noStrike" kern="1200" baseline="0">
+                  <a:solidFill>
+                    <a:schemeClr val="tx1">
+                      <a:lumMod val="65000"/>
+                      <a:lumOff val="35000"/>
+                    </a:schemeClr>
+                  </a:solidFill>
+                  <a:latin typeface="+mn-lt"/>
+                  <a:ea typeface="+mn-ea"/>
+                  <a:cs typeface="+mn-cs"/>
+                </a:defRPr>
+              </a:pPr>
+              <a:endParaRPr lang="en-US"/>
+            </a:p>
+          </c:txPr>
+        </c:title>
+        <c:numFmt formatCode="General" sourceLinked="1"/>
+        <c:majorTickMark val="none"/>
+        <c:minorTickMark val="none"/>
+        <c:tickLblPos val="nextTo"/>
+        <c:spPr>
+          <a:noFill/>
+          <a:ln>
+            <a:noFill/>
+          </a:ln>
+          <a:effectLst/>
+        </c:spPr>
+        <c:txPr>
+          <a:bodyPr rot="-60000000" spcFirstLastPara="1" vertOverflow="ellipsis" vert="horz" wrap="square" anchor="ctr" anchorCtr="1"/>
+          <a:lstStyle/>
+          <a:p>
+            <a:pPr>
+              <a:defRPr sz="900" b="0" i="0" u="none" strike="noStrike" kern="1200" baseline="0">
+                <a:solidFill>
+                  <a:schemeClr val="tx1">
+                    <a:lumMod val="65000"/>
+                    <a:lumOff val="35000"/>
+                  </a:schemeClr>
+                </a:solidFill>
+                <a:latin typeface="+mn-lt"/>
+                <a:ea typeface="+mn-ea"/>
+                <a:cs typeface="+mn-cs"/>
+              </a:defRPr>
+            </a:pPr>
+            <a:endParaRPr lang="en-US"/>
+          </a:p>
+        </c:txPr>
+        <c:crossAx val="456070400"/>
+        <c:crosses val="autoZero"/>
+        <c:crossBetween val="between"/>
+      </c:valAx>
+      <c:spPr>
+        <a:noFill/>
+        <a:ln>
+          <a:noFill/>
+        </a:ln>
+        <a:effectLst/>
+      </c:spPr>
+    </c:plotArea>
+    <c:legend>
+      <c:legendPos val="b"/>
+      <c:overlay val="0"/>
+      <c:spPr>
+        <a:noFill/>
+        <a:ln>
+          <a:noFill/>
+        </a:ln>
+        <a:effectLst/>
+      </c:spPr>
+      <c:txPr>
+        <a:bodyPr rot="0" spcFirstLastPara="1" vertOverflow="ellipsis" vert="horz" wrap="square" anchor="ctr" anchorCtr="1"/>
+        <a:lstStyle/>
+        <a:p>
+          <a:pPr>
+            <a:defRPr sz="1200" b="0" i="0" u="none" strike="noStrike" kern="1200" baseline="0">
+              <a:solidFill>
+                <a:schemeClr val="tx1">
+                  <a:lumMod val="65000"/>
+                  <a:lumOff val="35000"/>
+                </a:schemeClr>
+              </a:solidFill>
+              <a:latin typeface="+mn-lt"/>
+              <a:ea typeface="+mn-ea"/>
+              <a:cs typeface="+mn-cs"/>
+            </a:defRPr>
+          </a:pPr>
+          <a:endParaRPr lang="en-US"/>
+        </a:p>
+      </c:txPr>
+    </c:legend>
+    <c:plotVisOnly val="1"/>
+    <c:dispBlanksAs val="gap"/>
+    <c:showDLblsOverMax val="0"/>
+    <c:extLst>
+      <c:ext xmlns:c16r3="http://schemas.microsoft.com/office/drawing/2017/03/chart" uri="{56B9EC1D-385E-4148-901F-78D8002777C0}">
+        <c16r3:dataDisplayOptions16>
+          <c16r3:dispNaAsBlank val="1"/>
+        </c16r3:dataDisplayOptions16>
+      </c:ext>
+    </c:extLst>
+  </c:chart>
+  <c:spPr>
+    <a:solidFill>
+      <a:schemeClr val="bg1"/>
+    </a:solidFill>
+    <a:ln w="9525" cap="flat" cmpd="sng" algn="ctr">
+      <a:solidFill>
+        <a:sysClr val="windowText" lastClr="000000"/>
+      </a:solidFill>
+      <a:round/>
+    </a:ln>
+    <a:effectLst/>
+  </c:spPr>
+  <c:txPr>
+    <a:bodyPr/>
+    <a:lstStyle/>
+    <a:p>
+      <a:pPr>
+        <a:defRPr/>
+      </a:pPr>
+      <a:endParaRPr lang="en-US"/>
+    </a:p>
+  </c:txPr>
+  <c:externalData r:id="rId3">
+    <c:autoUpdate val="0"/>
+  </c:externalData>
+</c:chartSpace>
+</file>
+
+<file path=ppt/charts/chart5.xml><?xml version="1.0" encoding="utf-8"?>
+<c:chartSpace xmlns:c="http://schemas.openxmlformats.org/drawingml/2006/chart" xmlns:a="http://schemas.openxmlformats.org/drawingml/2006/main" xmlns:r="http://schemas.openxmlformats.org/officeDocument/2006/relationships" xmlns:c16r2="http://schemas.microsoft.com/office/drawing/2015/06/chart">
+  <c:date1904 val="0"/>
+  <c:lang val="en-US"/>
+  <c:roundedCorners val="0"/>
+  <mc:AlternateContent xmlns:mc="http://schemas.openxmlformats.org/markup-compatibility/2006">
+    <mc:Choice xmlns:c14="http://schemas.microsoft.com/office/drawing/2007/8/2/chart" Requires="c14">
+      <c14:style val="102"/>
+    </mc:Choice>
+    <mc:Fallback>
+      <c:style val="2"/>
+    </mc:Fallback>
+  </mc:AlternateContent>
+  <c:chart>
+    <c:title>
+      <c:tx>
+        <c:rich>
+          <a:bodyPr rot="0" spcFirstLastPara="1" vertOverflow="ellipsis" vert="horz" wrap="square" anchor="ctr" anchorCtr="1"/>
+          <a:lstStyle/>
+          <a:p>
+            <a:pPr>
+              <a:defRPr sz="1400" b="0" i="0" u="none" strike="noStrike" kern="1200" spc="0" baseline="0">
+                <a:solidFill>
+                  <a:schemeClr val="tx1">
+                    <a:lumMod val="65000"/>
+                    <a:lumOff val="35000"/>
+                  </a:schemeClr>
+                </a:solidFill>
+                <a:latin typeface="+mn-lt"/>
+                <a:ea typeface="+mn-ea"/>
+                <a:cs typeface="+mn-cs"/>
+              </a:defRPr>
+            </a:pPr>
+            <a:r>
+              <a:rPr lang="en-US" sz="1400" b="1" i="0" u="none" strike="noStrike" baseline="0"/>
+              <a:t>India–Singapore Trade and FDI Relationship (2000–2023)</a:t>
+            </a:r>
+            <a:endParaRPr lang="en-US" b="1"/>
+          </a:p>
+        </c:rich>
+      </c:tx>
+      <c:overlay val="0"/>
+      <c:spPr>
+        <a:noFill/>
+        <a:ln>
+          <a:noFill/>
+        </a:ln>
+        <a:effectLst/>
+      </c:spPr>
+      <c:txPr>
+        <a:bodyPr rot="0" spcFirstLastPara="1" vertOverflow="ellipsis" vert="horz" wrap="square" anchor="ctr" anchorCtr="1"/>
+        <a:lstStyle/>
+        <a:p>
+          <a:pPr>
+            <a:defRPr sz="1400" b="0" i="0" u="none" strike="noStrike" kern="1200" spc="0" baseline="0">
+              <a:solidFill>
+                <a:schemeClr val="tx1">
+                  <a:lumMod val="65000"/>
+                  <a:lumOff val="35000"/>
+                </a:schemeClr>
+              </a:solidFill>
+              <a:latin typeface="+mn-lt"/>
+              <a:ea typeface="+mn-ea"/>
+              <a:cs typeface="+mn-cs"/>
+            </a:defRPr>
+          </a:pPr>
+          <a:endParaRPr lang="en-US"/>
+        </a:p>
+      </c:txPr>
+    </c:title>
+    <c:autoTitleDeleted val="0"/>
+    <c:plotArea>
+      <c:layout/>
+      <c:lineChart>
+        <c:grouping val="standard"/>
+        <c:varyColors val="0"/>
+        <c:ser>
+          <c:idx val="1"/>
+          <c:order val="0"/>
+          <c:tx>
+            <c:strRef>
+              <c:f>'India-SG Import, Export &amp; FDI'!$F$1</c:f>
+              <c:strCache>
+                <c:ptCount val="1"/>
+                <c:pt idx="0">
+                  <c:v>Exports to Singapore
+(US$ million)</c:v>
+                </c:pt>
+              </c:strCache>
+            </c:strRef>
+          </c:tx>
+          <c:spPr>
+            <a:ln w="28575" cap="rnd">
+              <a:solidFill>
+                <a:schemeClr val="accent2"/>
+              </a:solidFill>
+              <a:round/>
+            </a:ln>
+            <a:effectLst/>
+          </c:spPr>
+          <c:marker>
+            <c:symbol val="none"/>
+          </c:marker>
+          <c:cat>
+            <c:numRef>
+              <c:f>'India-SG Import, Export &amp; FDI'!$A$2:$A$25</c:f>
+              <c:numCache>
+                <c:formatCode>General</c:formatCode>
+                <c:ptCount val="24"/>
+                <c:pt idx="0">
+                  <c:v>2000</c:v>
+                </c:pt>
+                <c:pt idx="1">
+                  <c:v>2001</c:v>
+                </c:pt>
+                <c:pt idx="2">
+                  <c:v>2002</c:v>
+                </c:pt>
+                <c:pt idx="3">
+                  <c:v>2003</c:v>
+                </c:pt>
+                <c:pt idx="4">
+                  <c:v>2004</c:v>
+                </c:pt>
+                <c:pt idx="5">
+                  <c:v>2005</c:v>
+                </c:pt>
+                <c:pt idx="6">
+                  <c:v>2006</c:v>
+                </c:pt>
+                <c:pt idx="7">
+                  <c:v>2007</c:v>
+                </c:pt>
+                <c:pt idx="8">
+                  <c:v>2008</c:v>
+                </c:pt>
+                <c:pt idx="9">
+                  <c:v>2009</c:v>
+                </c:pt>
+                <c:pt idx="10">
+                  <c:v>2010</c:v>
+                </c:pt>
+                <c:pt idx="11">
+                  <c:v>2011</c:v>
+                </c:pt>
+                <c:pt idx="12">
+                  <c:v>2012</c:v>
+                </c:pt>
+                <c:pt idx="13">
+                  <c:v>2013</c:v>
+                </c:pt>
+                <c:pt idx="14">
+                  <c:v>2014</c:v>
+                </c:pt>
+                <c:pt idx="15">
+                  <c:v>2015</c:v>
+                </c:pt>
+                <c:pt idx="16">
+                  <c:v>2016</c:v>
+                </c:pt>
+                <c:pt idx="17">
+                  <c:v>2017</c:v>
+                </c:pt>
+                <c:pt idx="18">
+                  <c:v>2018</c:v>
+                </c:pt>
+                <c:pt idx="19">
+                  <c:v>2019</c:v>
+                </c:pt>
+                <c:pt idx="20">
+                  <c:v>2020</c:v>
+                </c:pt>
+                <c:pt idx="21">
+                  <c:v>2021</c:v>
+                </c:pt>
+                <c:pt idx="22">
+                  <c:v>2022</c:v>
+                </c:pt>
+                <c:pt idx="23">
+                  <c:v>2023</c:v>
+                </c:pt>
+              </c:numCache>
+            </c:numRef>
+          </c:cat>
+          <c:val>
+            <c:numRef>
+              <c:f>'India-SG Import, Export &amp; FDI'!$F$2:$F$25</c:f>
+              <c:numCache>
+                <c:formatCode>General</c:formatCode>
+                <c:ptCount val="24"/>
+                <c:pt idx="0">
+                  <c:v>787.04812000000004</c:v>
+                </c:pt>
+                <c:pt idx="1">
+                  <c:v>926.00160199999993</c:v>
+                </c:pt>
+                <c:pt idx="2">
+                  <c:v>1380.3937559999999</c:v>
+                </c:pt>
+                <c:pt idx="3">
+                  <c:v>1701.905229</c:v>
+                </c:pt>
+                <c:pt idx="4">
+                  <c:v>3416.4593990000003</c:v>
+                </c:pt>
+                <c:pt idx="5">
+                  <c:v>5427.5547240000005</c:v>
+                </c:pt>
+                <c:pt idx="6">
+                  <c:v>6127.2499150000003</c:v>
+                </c:pt>
+                <c:pt idx="7">
+                  <c:v>6390.0679650000002</c:v>
+                </c:pt>
+                <c:pt idx="8">
+                  <c:v>8853.8996079999997</c:v>
+                </c:pt>
+                <c:pt idx="9">
+                  <c:v>6827.539205</c:v>
+                </c:pt>
+                <c:pt idx="10">
+                  <c:v>9066.2300799999994</c:v>
+                </c:pt>
+                <c:pt idx="11">
+                  <c:v>15627.481315999999</c:v>
+                </c:pt>
+                <c:pt idx="12">
+                  <c:v>13552.71081</c:v>
+                </c:pt>
+                <c:pt idx="13">
+                  <c:v>14189.021907</c:v>
+                </c:pt>
+                <c:pt idx="14">
+                  <c:v>9676.6160240000008</c:v>
+                </c:pt>
+                <c:pt idx="15">
+                  <c:v>7805.0839930000002</c:v>
+                </c:pt>
+                <c:pt idx="16">
+                  <c:v>7354.8551459999999</c:v>
+                </c:pt>
+                <c:pt idx="17">
+                  <c:v>11559.9406680704</c:v>
+                </c:pt>
+                <c:pt idx="18">
+                  <c:v>10450.884382922</c:v>
+                </c:pt>
+                <c:pt idx="19">
+                  <c:v>10738.6886032972</c:v>
+                </c:pt>
+                <c:pt idx="20">
+                  <c:v>8295.02016616131</c:v>
+                </c:pt>
+                <c:pt idx="21">
+                  <c:v>10650.086591573401</c:v>
+                </c:pt>
+                <c:pt idx="22">
+                  <c:v>11830.795241580998</c:v>
+                </c:pt>
+                <c:pt idx="23">
+                  <c:v>12035.71927894</c:v>
+                </c:pt>
+              </c:numCache>
+            </c:numRef>
+          </c:val>
+          <c:smooth val="0"/>
+          <c:extLst>
+            <c:ext xmlns:c16="http://schemas.microsoft.com/office/drawing/2014/chart" uri="{C3380CC4-5D6E-409C-BE32-E72D297353CC}">
+              <c16:uniqueId val="{00000000-F6B5-4F31-B6A3-B7164399E31D}"/>
+            </c:ext>
+          </c:extLst>
+        </c:ser>
+        <c:ser>
+          <c:idx val="2"/>
+          <c:order val="1"/>
+          <c:tx>
+            <c:strRef>
+              <c:f>'India-SG Import, Export &amp; FDI'!$H$1</c:f>
+              <c:strCache>
+                <c:ptCount val="1"/>
+                <c:pt idx="0">
+                  <c:v>Imports from Singapore 
+(US$ million)</c:v>
+                </c:pt>
+              </c:strCache>
+            </c:strRef>
+          </c:tx>
+          <c:spPr>
+            <a:ln w="28575" cap="rnd">
+              <a:solidFill>
+                <a:schemeClr val="accent3"/>
+              </a:solidFill>
+              <a:round/>
+            </a:ln>
+            <a:effectLst/>
+          </c:spPr>
+          <c:marker>
+            <c:symbol val="none"/>
+          </c:marker>
+          <c:cat>
+            <c:numRef>
+              <c:f>'India-SG Import, Export &amp; FDI'!$A$2:$A$25</c:f>
+              <c:numCache>
+                <c:formatCode>General</c:formatCode>
+                <c:ptCount val="24"/>
+                <c:pt idx="0">
+                  <c:v>2000</c:v>
+                </c:pt>
+                <c:pt idx="1">
+                  <c:v>2001</c:v>
+                </c:pt>
+                <c:pt idx="2">
+                  <c:v>2002</c:v>
+                </c:pt>
+                <c:pt idx="3">
+                  <c:v>2003</c:v>
+                </c:pt>
+                <c:pt idx="4">
+                  <c:v>2004</c:v>
+                </c:pt>
+                <c:pt idx="5">
+                  <c:v>2005</c:v>
+                </c:pt>
+                <c:pt idx="6">
+                  <c:v>2006</c:v>
+                </c:pt>
+                <c:pt idx="7">
+                  <c:v>2007</c:v>
+                </c:pt>
+                <c:pt idx="8">
+                  <c:v>2008</c:v>
+                </c:pt>
+                <c:pt idx="9">
+                  <c:v>2009</c:v>
+                </c:pt>
+                <c:pt idx="10">
+                  <c:v>2010</c:v>
+                </c:pt>
+                <c:pt idx="11">
+                  <c:v>2011</c:v>
+                </c:pt>
+                <c:pt idx="12">
+                  <c:v>2012</c:v>
+                </c:pt>
+                <c:pt idx="13">
+                  <c:v>2013</c:v>
+                </c:pt>
+                <c:pt idx="14">
+                  <c:v>2014</c:v>
+                </c:pt>
+                <c:pt idx="15">
+                  <c:v>2015</c:v>
+                </c:pt>
+                <c:pt idx="16">
+                  <c:v>2016</c:v>
+                </c:pt>
+                <c:pt idx="17">
+                  <c:v>2017</c:v>
+                </c:pt>
+                <c:pt idx="18">
+                  <c:v>2018</c:v>
+                </c:pt>
+                <c:pt idx="19">
+                  <c:v>2019</c:v>
+                </c:pt>
+                <c:pt idx="20">
+                  <c:v>2020</c:v>
+                </c:pt>
+                <c:pt idx="21">
+                  <c:v>2021</c:v>
+                </c:pt>
+                <c:pt idx="22">
+                  <c:v>2022</c:v>
+                </c:pt>
+                <c:pt idx="23">
+                  <c:v>2023</c:v>
+                </c:pt>
+              </c:numCache>
+            </c:numRef>
+          </c:cat>
+          <c:val>
+            <c:numRef>
+              <c:f>'India-SG Import, Export &amp; FDI'!$H$2:$H$25</c:f>
+              <c:numCache>
+                <c:formatCode>General</c:formatCode>
+                <c:ptCount val="24"/>
+                <c:pt idx="0">
+                  <c:v>1401.5597890000001</c:v>
+                </c:pt>
+                <c:pt idx="1">
+                  <c:v>1354.741831</c:v>
+                </c:pt>
+                <c:pt idx="2">
+                  <c:v>1333.6909539999999</c:v>
+                </c:pt>
+                <c:pt idx="3">
+                  <c:v>1867.0286540000002</c:v>
+                </c:pt>
+                <c:pt idx="4">
+                  <c:v>2492.1549100000002</c:v>
+                </c:pt>
+                <c:pt idx="5">
+                  <c:v>3159.4158629999997</c:v>
+                </c:pt>
+                <c:pt idx="6">
+                  <c:v>5184.5618679999998</c:v>
+                </c:pt>
+                <c:pt idx="7">
+                  <c:v>6901.607086</c:v>
+                </c:pt>
+                <c:pt idx="8">
+                  <c:v>8304.7506890000004</c:v>
+                </c:pt>
+                <c:pt idx="9">
+                  <c:v>6141.6342340000001</c:v>
+                </c:pt>
+                <c:pt idx="10">
+                  <c:v>7263.1362429999999</c:v>
+                </c:pt>
+                <c:pt idx="11">
+                  <c:v>8155.3020390000001</c:v>
+                </c:pt>
+                <c:pt idx="12">
+                  <c:v>7797.3272219999999</c:v>
+                </c:pt>
+                <c:pt idx="13">
+                  <c:v>7026.6365140000007</c:v>
+                </c:pt>
+                <c:pt idx="14">
+                  <c:v>7069.4166660000001</c:v>
+                </c:pt>
+                <c:pt idx="15">
+                  <c:v>7395.997582</c:v>
+                </c:pt>
+                <c:pt idx="16">
+                  <c:v>6719.4792450000004</c:v>
+                </c:pt>
+                <c:pt idx="17">
+                  <c:v>7235.4162966757904</c:v>
+                </c:pt>
+                <c:pt idx="18">
+                  <c:v>14436.507548189</c:v>
+                </c:pt>
+                <c:pt idx="19">
+                  <c:v>14893.8918553071</c:v>
+                </c:pt>
+                <c:pt idx="20">
+                  <c:v>12306.746977528199</c:v>
+                </c:pt>
+                <c:pt idx="21">
+                  <c:v>18201.531477632801</c:v>
+                </c:pt>
+                <c:pt idx="22">
+                  <c:v>24418.725272813001</c:v>
+                </c:pt>
+                <c:pt idx="23">
+                  <c:v>6934.7884869769996</c:v>
+                </c:pt>
+              </c:numCache>
+            </c:numRef>
+          </c:val>
+          <c:smooth val="0"/>
+          <c:extLst>
+            <c:ext xmlns:c16="http://schemas.microsoft.com/office/drawing/2014/chart" uri="{C3380CC4-5D6E-409C-BE32-E72D297353CC}">
+              <c16:uniqueId val="{00000001-F6B5-4F31-B6A3-B7164399E31D}"/>
+            </c:ext>
+          </c:extLst>
+        </c:ser>
+        <c:dLbls>
+          <c:showLegendKey val="0"/>
+          <c:showVal val="0"/>
+          <c:showCatName val="0"/>
+          <c:showSerName val="0"/>
+          <c:showPercent val="0"/>
+          <c:showBubbleSize val="0"/>
+        </c:dLbls>
+        <c:marker val="1"/>
+        <c:smooth val="0"/>
+        <c:axId val="632490927"/>
+        <c:axId val="600779311"/>
+      </c:lineChart>
+      <c:lineChart>
+        <c:grouping val="standard"/>
+        <c:varyColors val="0"/>
+        <c:ser>
+          <c:idx val="3"/>
+          <c:order val="2"/>
+          <c:tx>
+            <c:v>FDI Equity Inflow from Singapore (US$ million)</c:v>
+          </c:tx>
+          <c:spPr>
+            <a:ln w="28575" cap="rnd">
+              <a:solidFill>
+                <a:schemeClr val="accent4"/>
+              </a:solidFill>
+              <a:round/>
+            </a:ln>
+            <a:effectLst/>
+          </c:spPr>
+          <c:marker>
+            <c:symbol val="none"/>
+          </c:marker>
+          <c:val>
+            <c:numRef>
+              <c:f>'India-SG Import, Export &amp; FDI'!$I$2:$I$25</c:f>
+              <c:numCache>
+                <c:formatCode>0.00</c:formatCode>
+                <c:ptCount val="24"/>
+                <c:pt idx="0">
+                  <c:v>116.63</c:v>
+                </c:pt>
+                <c:pt idx="1">
+                  <c:v>35.700000000000003</c:v>
+                </c:pt>
+                <c:pt idx="2">
+                  <c:v>47.13</c:v>
+                </c:pt>
+                <c:pt idx="3">
+                  <c:v>36.53</c:v>
+                </c:pt>
+                <c:pt idx="4">
+                  <c:v>62.07</c:v>
+                </c:pt>
+                <c:pt idx="5">
+                  <c:v>321.48</c:v>
+                </c:pt>
+                <c:pt idx="6">
+                  <c:v>620.66</c:v>
+                </c:pt>
+                <c:pt idx="7" formatCode="#,##0.00">
+                  <c:v>1455.72</c:v>
+                </c:pt>
+                <c:pt idx="8" formatCode="#,##0.00">
+                  <c:v>3763.49</c:v>
+                </c:pt>
+                <c:pt idx="9" formatCode="#,##0.00">
+                  <c:v>3059.54</c:v>
+                </c:pt>
+                <c:pt idx="10" formatCode="#,##0.00">
+                  <c:v>2121.3200000000002</c:v>
+                </c:pt>
+                <c:pt idx="11" formatCode="#,##0.00">
+                  <c:v>4255.09</c:v>
+                </c:pt>
+                <c:pt idx="12" formatCode="#,##0.00">
+                  <c:v>2897.2</c:v>
+                </c:pt>
+                <c:pt idx="13" formatCode="#,##0.00">
+                  <c:v>3874.14</c:v>
+                </c:pt>
+                <c:pt idx="14" formatCode="#,##0.00">
+                  <c:v>7092.38</c:v>
+                </c:pt>
+                <c:pt idx="15" formatCode="#,##0.00">
+                  <c:v>13414.32</c:v>
+                </c:pt>
+                <c:pt idx="16" formatCode="#,##0.00">
+                  <c:v>9822.18</c:v>
+                </c:pt>
+                <c:pt idx="17" formatCode="#,##0.00">
+                  <c:v>10808.82</c:v>
+                </c:pt>
+                <c:pt idx="18" formatCode="#,##0.00">
+                  <c:v>15943.36</c:v>
+                </c:pt>
+                <c:pt idx="19" formatCode="#,##0.00">
+                  <c:v>14904.18</c:v>
+                </c:pt>
+                <c:pt idx="20" formatCode="#,##0.00">
+                  <c:v>18735.439999999999</c:v>
+                </c:pt>
+                <c:pt idx="21" formatCode="#,##0.00">
+                  <c:v>13392</c:v>
+                </c:pt>
+                <c:pt idx="22" formatCode="#,##0.00">
+                  <c:v>17265.57</c:v>
+                </c:pt>
+                <c:pt idx="23" formatCode="#,##0.00">
+                  <c:v>11568.46</c:v>
+                </c:pt>
+              </c:numCache>
+            </c:numRef>
+          </c:val>
+          <c:smooth val="0"/>
+          <c:extLst>
+            <c:ext xmlns:c16="http://schemas.microsoft.com/office/drawing/2014/chart" uri="{C3380CC4-5D6E-409C-BE32-E72D297353CC}">
+              <c16:uniqueId val="{00000002-F6B5-4F31-B6A3-B7164399E31D}"/>
+            </c:ext>
+          </c:extLst>
+        </c:ser>
+        <c:dLbls>
+          <c:showLegendKey val="0"/>
+          <c:showVal val="0"/>
+          <c:showCatName val="0"/>
+          <c:showSerName val="0"/>
+          <c:showPercent val="0"/>
+          <c:showBubbleSize val="0"/>
+        </c:dLbls>
+        <c:marker val="1"/>
+        <c:smooth val="0"/>
+        <c:axId val="632393023"/>
+        <c:axId val="600792751"/>
+      </c:lineChart>
+      <c:catAx>
+        <c:axId val="632490927"/>
+        <c:scaling>
+          <c:orientation val="minMax"/>
+        </c:scaling>
+        <c:delete val="0"/>
+        <c:axPos val="b"/>
+        <c:title>
+          <c:tx>
+            <c:rich>
+              <a:bodyPr rot="0" spcFirstLastPara="1" vertOverflow="ellipsis" vert="horz" wrap="square" anchor="ctr" anchorCtr="1"/>
+              <a:lstStyle/>
+              <a:p>
+                <a:pPr>
+                  <a:defRPr sz="1000" b="0" i="0" u="none" strike="noStrike" kern="1200" baseline="0">
+                    <a:solidFill>
+                      <a:schemeClr val="tx1">
+                        <a:lumMod val="65000"/>
+                        <a:lumOff val="35000"/>
+                      </a:schemeClr>
+                    </a:solidFill>
+                    <a:latin typeface="+mn-lt"/>
+                    <a:ea typeface="+mn-ea"/>
+                    <a:cs typeface="+mn-cs"/>
+                  </a:defRPr>
+                </a:pPr>
+                <a:r>
+                  <a:rPr lang="en-US" sz="1000" b="1" i="0" u="none" strike="noStrike" baseline="0"/>
+                  <a:t>Year</a:t>
+                </a:r>
+                <a:endParaRPr lang="en-US" b="1"/>
+              </a:p>
+            </c:rich>
+          </c:tx>
+          <c:overlay val="0"/>
+          <c:spPr>
+            <a:noFill/>
+            <a:ln>
+              <a:noFill/>
+            </a:ln>
+            <a:effectLst/>
+          </c:spPr>
+          <c:txPr>
+            <a:bodyPr rot="0" spcFirstLastPara="1" vertOverflow="ellipsis" vert="horz" wrap="square" anchor="ctr" anchorCtr="1"/>
+            <a:lstStyle/>
+            <a:p>
+              <a:pPr>
+                <a:defRPr sz="1000" b="0" i="0" u="none" strike="noStrike" kern="1200" baseline="0">
+                  <a:solidFill>
+                    <a:schemeClr val="tx1">
+                      <a:lumMod val="65000"/>
+                      <a:lumOff val="35000"/>
+                    </a:schemeClr>
+                  </a:solidFill>
+                  <a:latin typeface="+mn-lt"/>
+                  <a:ea typeface="+mn-ea"/>
+                  <a:cs typeface="+mn-cs"/>
+                </a:defRPr>
+              </a:pPr>
+              <a:endParaRPr lang="en-US"/>
+            </a:p>
+          </c:txPr>
+        </c:title>
+        <c:numFmt formatCode="General" sourceLinked="1"/>
+        <c:majorTickMark val="none"/>
+        <c:minorTickMark val="none"/>
+        <c:tickLblPos val="nextTo"/>
+        <c:spPr>
+          <a:noFill/>
+          <a:ln w="9525" cap="flat" cmpd="sng" algn="ctr">
+            <a:solidFill>
+              <a:schemeClr val="tx1">
+                <a:lumMod val="15000"/>
+                <a:lumOff val="85000"/>
+              </a:schemeClr>
+            </a:solidFill>
+            <a:round/>
+          </a:ln>
+          <a:effectLst/>
+        </c:spPr>
+        <c:txPr>
+          <a:bodyPr rot="-60000000" spcFirstLastPara="1" vertOverflow="ellipsis" vert="horz" wrap="square" anchor="ctr" anchorCtr="1"/>
+          <a:lstStyle/>
+          <a:p>
+            <a:pPr>
+              <a:defRPr sz="900" b="0" i="0" u="none" strike="noStrike" kern="1200" baseline="0">
+                <a:solidFill>
+                  <a:schemeClr val="tx1">
+                    <a:lumMod val="65000"/>
+                    <a:lumOff val="35000"/>
+                  </a:schemeClr>
+                </a:solidFill>
+                <a:latin typeface="+mn-lt"/>
+                <a:ea typeface="+mn-ea"/>
+                <a:cs typeface="+mn-cs"/>
+              </a:defRPr>
+            </a:pPr>
+            <a:endParaRPr lang="en-US"/>
+          </a:p>
+        </c:txPr>
+        <c:crossAx val="600779311"/>
+        <c:crosses val="autoZero"/>
+        <c:auto val="1"/>
+        <c:lblAlgn val="ctr"/>
+        <c:lblOffset val="100"/>
+        <c:tickLblSkip val="2"/>
+        <c:noMultiLvlLbl val="0"/>
+      </c:catAx>
+      <c:valAx>
+        <c:axId val="600779311"/>
+        <c:scaling>
+          <c:orientation val="minMax"/>
+        </c:scaling>
+        <c:delete val="0"/>
+        <c:axPos val="l"/>
+        <c:majorGridlines>
+          <c:spPr>
+            <a:ln w="9525" cap="flat" cmpd="sng" algn="ctr">
+              <a:solidFill>
+                <a:schemeClr val="tx1">
+                  <a:lumMod val="15000"/>
+                  <a:lumOff val="85000"/>
+                </a:schemeClr>
+              </a:solidFill>
+              <a:round/>
+            </a:ln>
+            <a:effectLst/>
+          </c:spPr>
+        </c:majorGridlines>
+        <c:title>
+          <c:tx>
+            <c:rich>
+              <a:bodyPr rot="-5400000" spcFirstLastPara="1" vertOverflow="ellipsis" vert="horz" wrap="square" anchor="ctr" anchorCtr="1"/>
+              <a:lstStyle/>
+              <a:p>
+                <a:pPr>
+                  <a:defRPr sz="1000" b="0" i="0" u="none" strike="noStrike" kern="1200" baseline="0">
+                    <a:solidFill>
+                      <a:schemeClr val="tx1">
+                        <a:lumMod val="65000"/>
+                        <a:lumOff val="35000"/>
+                      </a:schemeClr>
+                    </a:solidFill>
+                    <a:latin typeface="+mn-lt"/>
+                    <a:ea typeface="+mn-ea"/>
+                    <a:cs typeface="+mn-cs"/>
+                  </a:defRPr>
+                </a:pPr>
+                <a:r>
+                  <a:rPr lang="en-US" sz="1000" b="1" i="0" u="none" strike="noStrike" baseline="0"/>
+                  <a:t>Trade (US$ million)</a:t>
+                </a:r>
+                <a:endParaRPr lang="en-US" b="1"/>
+              </a:p>
+            </c:rich>
+          </c:tx>
+          <c:overlay val="0"/>
+          <c:spPr>
+            <a:noFill/>
+            <a:ln>
+              <a:noFill/>
+            </a:ln>
+            <a:effectLst/>
+          </c:spPr>
+          <c:txPr>
+            <a:bodyPr rot="-5400000" spcFirstLastPara="1" vertOverflow="ellipsis" vert="horz" wrap="square" anchor="ctr" anchorCtr="1"/>
+            <a:lstStyle/>
+            <a:p>
+              <a:pPr>
+                <a:defRPr sz="1000" b="0" i="0" u="none" strike="noStrike" kern="1200" baseline="0">
+                  <a:solidFill>
+                    <a:schemeClr val="tx1">
+                      <a:lumMod val="65000"/>
+                      <a:lumOff val="35000"/>
+                    </a:schemeClr>
+                  </a:solidFill>
+                  <a:latin typeface="+mn-lt"/>
+                  <a:ea typeface="+mn-ea"/>
+                  <a:cs typeface="+mn-cs"/>
+                </a:defRPr>
+              </a:pPr>
+              <a:endParaRPr lang="en-US"/>
+            </a:p>
+          </c:txPr>
+        </c:title>
+        <c:numFmt formatCode="General" sourceLinked="1"/>
+        <c:majorTickMark val="none"/>
+        <c:minorTickMark val="none"/>
+        <c:tickLblPos val="nextTo"/>
+        <c:spPr>
+          <a:noFill/>
+          <a:ln>
+            <a:noFill/>
+          </a:ln>
+          <a:effectLst/>
+        </c:spPr>
+        <c:txPr>
+          <a:bodyPr rot="-60000000" spcFirstLastPara="1" vertOverflow="ellipsis" vert="horz" wrap="square" anchor="ctr" anchorCtr="1"/>
+          <a:lstStyle/>
+          <a:p>
+            <a:pPr>
+              <a:defRPr sz="900" b="0" i="0" u="none" strike="noStrike" kern="1200" baseline="0">
+                <a:solidFill>
+                  <a:schemeClr val="tx1">
+                    <a:lumMod val="65000"/>
+                    <a:lumOff val="35000"/>
+                  </a:schemeClr>
+                </a:solidFill>
+                <a:latin typeface="+mn-lt"/>
+                <a:ea typeface="+mn-ea"/>
+                <a:cs typeface="+mn-cs"/>
+              </a:defRPr>
+            </a:pPr>
+            <a:endParaRPr lang="en-US"/>
+          </a:p>
+        </c:txPr>
+        <c:crossAx val="632490927"/>
+        <c:crosses val="autoZero"/>
+        <c:crossBetween val="between"/>
+      </c:valAx>
+      <c:valAx>
+        <c:axId val="600792751"/>
+        <c:scaling>
+          <c:orientation val="minMax"/>
+        </c:scaling>
+        <c:delete val="0"/>
+        <c:axPos val="r"/>
+        <c:title>
+          <c:tx>
+            <c:rich>
+              <a:bodyPr rot="-5400000" spcFirstLastPara="1" vertOverflow="ellipsis" vert="horz" wrap="square" anchor="ctr" anchorCtr="1"/>
+              <a:lstStyle/>
+              <a:p>
+                <a:pPr>
+                  <a:defRPr sz="1000" b="0" i="0" u="none" strike="noStrike" kern="1200" baseline="0">
+                    <a:solidFill>
+                      <a:schemeClr val="tx1">
+                        <a:lumMod val="65000"/>
+                        <a:lumOff val="35000"/>
+                      </a:schemeClr>
+                    </a:solidFill>
+                    <a:latin typeface="+mn-lt"/>
+                    <a:ea typeface="+mn-ea"/>
+                    <a:cs typeface="+mn-cs"/>
+                  </a:defRPr>
+                </a:pPr>
+                <a:r>
+                  <a:rPr lang="en-US" sz="1000" b="1" i="0" u="none" strike="noStrike" baseline="0"/>
+                  <a:t>FDI Equity Inflows (US$ million)</a:t>
+                </a:r>
+                <a:endParaRPr lang="en-US" b="1"/>
+              </a:p>
+            </c:rich>
+          </c:tx>
+          <c:overlay val="0"/>
+          <c:spPr>
+            <a:noFill/>
+            <a:ln>
+              <a:noFill/>
+            </a:ln>
+            <a:effectLst/>
+          </c:spPr>
+          <c:txPr>
+            <a:bodyPr rot="-5400000" spcFirstLastPara="1" vertOverflow="ellipsis" vert="horz" wrap="square" anchor="ctr" anchorCtr="1"/>
+            <a:lstStyle/>
+            <a:p>
+              <a:pPr>
+                <a:defRPr sz="1000" b="0" i="0" u="none" strike="noStrike" kern="1200" baseline="0">
+                  <a:solidFill>
+                    <a:schemeClr val="tx1">
+                      <a:lumMod val="65000"/>
+                      <a:lumOff val="35000"/>
+                    </a:schemeClr>
+                  </a:solidFill>
+                  <a:latin typeface="+mn-lt"/>
+                  <a:ea typeface="+mn-ea"/>
+                  <a:cs typeface="+mn-cs"/>
+                </a:defRPr>
+              </a:pPr>
+              <a:endParaRPr lang="en-US"/>
+            </a:p>
+          </c:txPr>
+        </c:title>
+        <c:numFmt formatCode="0.00" sourceLinked="1"/>
+        <c:majorTickMark val="out"/>
+        <c:minorTickMark val="none"/>
+        <c:tickLblPos val="nextTo"/>
+        <c:spPr>
+          <a:noFill/>
+          <a:ln>
+            <a:noFill/>
+          </a:ln>
+          <a:effectLst/>
+        </c:spPr>
+        <c:txPr>
+          <a:bodyPr rot="-60000000" spcFirstLastPara="1" vertOverflow="ellipsis" vert="horz" wrap="square" anchor="ctr" anchorCtr="1"/>
+          <a:lstStyle/>
+          <a:p>
+            <a:pPr>
+              <a:defRPr sz="900" b="0" i="0" u="none" strike="noStrike" kern="1200" baseline="0">
+                <a:solidFill>
+                  <a:schemeClr val="tx1">
+                    <a:lumMod val="65000"/>
+                    <a:lumOff val="35000"/>
+                  </a:schemeClr>
+                </a:solidFill>
+                <a:latin typeface="+mn-lt"/>
+                <a:ea typeface="+mn-ea"/>
+                <a:cs typeface="+mn-cs"/>
+              </a:defRPr>
+            </a:pPr>
+            <a:endParaRPr lang="en-US"/>
+          </a:p>
+        </c:txPr>
+        <c:crossAx val="632393023"/>
+        <c:crosses val="max"/>
+        <c:crossBetween val="between"/>
+      </c:valAx>
+      <c:catAx>
+        <c:axId val="632393023"/>
+        <c:scaling>
+          <c:orientation val="minMax"/>
+        </c:scaling>
+        <c:delete val="1"/>
+        <c:axPos val="b"/>
+        <c:majorTickMark val="out"/>
+        <c:minorTickMark val="none"/>
+        <c:tickLblPos val="nextTo"/>
+        <c:crossAx val="600792751"/>
+        <c:crosses val="autoZero"/>
+        <c:auto val="1"/>
+        <c:lblAlgn val="ctr"/>
+        <c:lblOffset val="100"/>
+        <c:noMultiLvlLbl val="0"/>
+      </c:catAx>
+      <c:spPr>
+        <a:noFill/>
+        <a:ln>
+          <a:noFill/>
+        </a:ln>
+        <a:effectLst/>
+      </c:spPr>
+    </c:plotArea>
+    <c:legend>
+      <c:legendPos val="b"/>
+      <c:overlay val="0"/>
+      <c:spPr>
+        <a:noFill/>
+        <a:ln>
+          <a:noFill/>
+        </a:ln>
+        <a:effectLst/>
+      </c:spPr>
+      <c:txPr>
+        <a:bodyPr rot="0" spcFirstLastPara="1" vertOverflow="ellipsis" vert="horz" wrap="square" anchor="ctr" anchorCtr="1"/>
+        <a:lstStyle/>
+        <a:p>
+          <a:pPr>
+            <a:defRPr sz="1200" b="0" i="0" u="none" strike="noStrike" kern="1200" baseline="0">
+              <a:solidFill>
+                <a:schemeClr val="tx1">
+                  <a:lumMod val="65000"/>
+                  <a:lumOff val="35000"/>
+                </a:schemeClr>
+              </a:solidFill>
+              <a:latin typeface="+mn-lt"/>
+              <a:ea typeface="+mn-ea"/>
+              <a:cs typeface="+mn-cs"/>
+            </a:defRPr>
+          </a:pPr>
+          <a:endParaRPr lang="en-US"/>
+        </a:p>
+      </c:txPr>
+    </c:legend>
+    <c:plotVisOnly val="1"/>
+    <c:dispBlanksAs val="gap"/>
+    <c:showDLblsOverMax val="0"/>
+    <c:extLst>
+      <c:ext xmlns:c16r3="http://schemas.microsoft.com/office/drawing/2017/03/chart" uri="{56B9EC1D-385E-4148-901F-78D8002777C0}">
+        <c16r3:dataDisplayOptions16>
+          <c16r3:dispNaAsBlank val="1"/>
+        </c16r3:dataDisplayOptions16>
+      </c:ext>
+    </c:extLst>
+  </c:chart>
+  <c:spPr>
+    <a:solidFill>
+      <a:schemeClr val="bg1"/>
+    </a:solidFill>
+    <a:ln w="9525" cap="flat" cmpd="sng" algn="ctr">
+      <a:solidFill>
+        <a:sysClr val="windowText" lastClr="000000"/>
+      </a:solidFill>
+      <a:round/>
+    </a:ln>
+    <a:effectLst/>
+  </c:spPr>
+  <c:txPr>
+    <a:bodyPr/>
+    <a:lstStyle/>
+    <a:p>
+      <a:pPr>
+        <a:defRPr/>
+      </a:pPr>
+      <a:endParaRPr lang="en-US"/>
+    </a:p>
+  </c:txPr>
+  <c:externalData r:id="rId3">
+    <c:autoUpdate val="0"/>
+  </c:externalData>
+</c:chartSpace>
+</file>
+
+<file path=ppt/charts/chart6.xml><?xml version="1.0" encoding="utf-8"?>
+<c:chartSpace xmlns:c="http://schemas.openxmlformats.org/drawingml/2006/chart" xmlns:a="http://schemas.openxmlformats.org/drawingml/2006/main" xmlns:r="http://schemas.openxmlformats.org/officeDocument/2006/relationships" xmlns:c16r2="http://schemas.microsoft.com/office/drawing/2015/06/chart">
+  <c:date1904 val="0"/>
+  <c:lang val="en-US"/>
   <c:roundedCorners val="0"/>
   <mc:AlternateContent xmlns:mc="http://schemas.openxmlformats.org/markup-compatibility/2006">
     <mc:Choice xmlns:c14="http://schemas.microsoft.com/office/drawing/2007/8/2/chart" Requires="c14">
@@ -3875,6 +5874,86 @@
 </file>
 
 <file path=ppt/charts/colors4.xml><?xml version="1.0" encoding="utf-8"?>
+<cs:colorStyle xmlns:cs="http://schemas.microsoft.com/office/drawing/2012/chartStyle" xmlns:a="http://schemas.openxmlformats.org/drawingml/2006/main" meth="cycle" id="10">
+  <a:schemeClr val="accent1"/>
+  <a:schemeClr val="accent2"/>
+  <a:schemeClr val="accent3"/>
+  <a:schemeClr val="accent4"/>
+  <a:schemeClr val="accent5"/>
+  <a:schemeClr val="accent6"/>
+  <cs:variation/>
+  <cs:variation>
+    <a:lumMod val="60000"/>
+  </cs:variation>
+  <cs:variation>
+    <a:lumMod val="80000"/>
+    <a:lumOff val="20000"/>
+  </cs:variation>
+  <cs:variation>
+    <a:lumMod val="80000"/>
+  </cs:variation>
+  <cs:variation>
+    <a:lumMod val="60000"/>
+    <a:lumOff val="40000"/>
+  </cs:variation>
+  <cs:variation>
+    <a:lumMod val="50000"/>
+  </cs:variation>
+  <cs:variation>
+    <a:lumMod val="70000"/>
+    <a:lumOff val="30000"/>
+  </cs:variation>
+  <cs:variation>
+    <a:lumMod val="70000"/>
+  </cs:variation>
+  <cs:variation>
+    <a:lumMod val="50000"/>
+    <a:lumOff val="50000"/>
+  </cs:variation>
+</cs:colorStyle>
+</file>
+
+<file path=ppt/charts/colors5.xml><?xml version="1.0" encoding="utf-8"?>
+<cs:colorStyle xmlns:cs="http://schemas.microsoft.com/office/drawing/2012/chartStyle" xmlns:a="http://schemas.openxmlformats.org/drawingml/2006/main" meth="cycle" id="10">
+  <a:schemeClr val="accent1"/>
+  <a:schemeClr val="accent2"/>
+  <a:schemeClr val="accent3"/>
+  <a:schemeClr val="accent4"/>
+  <a:schemeClr val="accent5"/>
+  <a:schemeClr val="accent6"/>
+  <cs:variation/>
+  <cs:variation>
+    <a:lumMod val="60000"/>
+  </cs:variation>
+  <cs:variation>
+    <a:lumMod val="80000"/>
+    <a:lumOff val="20000"/>
+  </cs:variation>
+  <cs:variation>
+    <a:lumMod val="80000"/>
+  </cs:variation>
+  <cs:variation>
+    <a:lumMod val="60000"/>
+    <a:lumOff val="40000"/>
+  </cs:variation>
+  <cs:variation>
+    <a:lumMod val="50000"/>
+  </cs:variation>
+  <cs:variation>
+    <a:lumMod val="70000"/>
+    <a:lumOff val="30000"/>
+  </cs:variation>
+  <cs:variation>
+    <a:lumMod val="70000"/>
+  </cs:variation>
+  <cs:variation>
+    <a:lumMod val="50000"/>
+    <a:lumOff val="50000"/>
+  </cs:variation>
+</cs:colorStyle>
+</file>
+
+<file path=ppt/charts/colors6.xml><?xml version="1.0" encoding="utf-8"?>
 <cs:colorStyle xmlns:cs="http://schemas.microsoft.com/office/drawing/2012/chartStyle" xmlns:a="http://schemas.openxmlformats.org/drawingml/2006/main" meth="cycle" id="10">
   <a:schemeClr val="accent1"/>
   <a:schemeClr val="accent2"/>
@@ -5452,6 +7531,1014 @@
 </file>
 
 <file path=ppt/charts/style4.xml><?xml version="1.0" encoding="utf-8"?>
+<cs:chartStyle xmlns:cs="http://schemas.microsoft.com/office/drawing/2012/chartStyle" xmlns:a="http://schemas.openxmlformats.org/drawingml/2006/main" id="297">
+  <cs:axisTitle>
+    <cs:lnRef idx="0"/>
+    <cs:fillRef idx="0"/>
+    <cs:effectRef idx="0"/>
+    <cs:fontRef idx="minor">
+      <a:schemeClr val="tx1">
+        <a:lumMod val="65000"/>
+        <a:lumOff val="35000"/>
+      </a:schemeClr>
+    </cs:fontRef>
+    <cs:defRPr sz="1000" kern="1200"/>
+  </cs:axisTitle>
+  <cs:categoryAxis>
+    <cs:lnRef idx="0"/>
+    <cs:fillRef idx="0"/>
+    <cs:effectRef idx="0"/>
+    <cs:fontRef idx="minor">
+      <a:schemeClr val="tx1">
+        <a:lumMod val="65000"/>
+        <a:lumOff val="35000"/>
+      </a:schemeClr>
+    </cs:fontRef>
+    <cs:spPr>
+      <a:ln w="9525" cap="flat" cmpd="sng" algn="ctr">
+        <a:solidFill>
+          <a:schemeClr val="tx1">
+            <a:lumMod val="15000"/>
+            <a:lumOff val="85000"/>
+          </a:schemeClr>
+        </a:solidFill>
+        <a:round/>
+      </a:ln>
+    </cs:spPr>
+    <cs:defRPr sz="900" kern="1200"/>
+  </cs:categoryAxis>
+  <cs:chartArea mods="allowNoFillOverride allowNoLineOverride">
+    <cs:lnRef idx="0"/>
+    <cs:fillRef idx="0"/>
+    <cs:effectRef idx="0"/>
+    <cs:fontRef idx="minor">
+      <a:schemeClr val="tx1"/>
+    </cs:fontRef>
+    <cs:spPr>
+      <a:solidFill>
+        <a:schemeClr val="bg1"/>
+      </a:solidFill>
+      <a:ln w="9525" cap="flat" cmpd="sng" algn="ctr">
+        <a:solidFill>
+          <a:schemeClr val="tx1">
+            <a:lumMod val="15000"/>
+            <a:lumOff val="85000"/>
+          </a:schemeClr>
+        </a:solidFill>
+        <a:round/>
+      </a:ln>
+    </cs:spPr>
+    <cs:defRPr sz="1000" kern="1200"/>
+  </cs:chartArea>
+  <cs:dataLabel>
+    <cs:lnRef idx="0"/>
+    <cs:fillRef idx="0"/>
+    <cs:effectRef idx="0"/>
+    <cs:fontRef idx="minor">
+      <a:schemeClr val="tx1">
+        <a:lumMod val="75000"/>
+        <a:lumOff val="25000"/>
+      </a:schemeClr>
+    </cs:fontRef>
+    <cs:defRPr sz="900" kern="1200"/>
+  </cs:dataLabel>
+  <cs:dataLabelCallout>
+    <cs:lnRef idx="0"/>
+    <cs:fillRef idx="0"/>
+    <cs:effectRef idx="0"/>
+    <cs:fontRef idx="minor">
+      <a:schemeClr val="dk1">
+        <a:lumMod val="65000"/>
+        <a:lumOff val="35000"/>
+      </a:schemeClr>
+    </cs:fontRef>
+    <cs:spPr>
+      <a:solidFill>
+        <a:schemeClr val="lt1"/>
+      </a:solidFill>
+      <a:ln>
+        <a:solidFill>
+          <a:schemeClr val="dk1">
+            <a:lumMod val="25000"/>
+            <a:lumOff val="75000"/>
+          </a:schemeClr>
+        </a:solidFill>
+      </a:ln>
+    </cs:spPr>
+    <cs:defRPr sz="900" kern="1200"/>
+    <cs:bodyPr rot="0" spcFirstLastPara="1" vertOverflow="clip" horzOverflow="clip" vert="horz" wrap="square" lIns="36576" tIns="18288" rIns="36576" bIns="18288" anchor="ctr" anchorCtr="1">
+      <a:spAutoFit/>
+    </cs:bodyPr>
+  </cs:dataLabelCallout>
+  <cs:dataPoint>
+    <cs:lnRef idx="0"/>
+    <cs:fillRef idx="1">
+      <cs:styleClr val="auto"/>
+    </cs:fillRef>
+    <cs:effectRef idx="0"/>
+    <cs:fontRef idx="minor">
+      <a:schemeClr val="tx1"/>
+    </cs:fontRef>
+  </cs:dataPoint>
+  <cs:dataPoint3D>
+    <cs:lnRef idx="0"/>
+    <cs:fillRef idx="1">
+      <cs:styleClr val="auto"/>
+    </cs:fillRef>
+    <cs:effectRef idx="0"/>
+    <cs:fontRef idx="minor">
+      <a:schemeClr val="tx1"/>
+    </cs:fontRef>
+  </cs:dataPoint3D>
+  <cs:dataPointLine>
+    <cs:lnRef idx="0">
+      <cs:styleClr val="auto"/>
+    </cs:lnRef>
+    <cs:fillRef idx="1"/>
+    <cs:effectRef idx="0"/>
+    <cs:fontRef idx="minor">
+      <a:schemeClr val="tx1"/>
+    </cs:fontRef>
+    <cs:spPr>
+      <a:ln w="28575" cap="rnd">
+        <a:solidFill>
+          <a:schemeClr val="phClr"/>
+        </a:solidFill>
+        <a:round/>
+      </a:ln>
+    </cs:spPr>
+  </cs:dataPointLine>
+  <cs:dataPointMarker>
+    <cs:lnRef idx="0">
+      <cs:styleClr val="auto"/>
+    </cs:lnRef>
+    <cs:fillRef idx="1">
+      <cs:styleClr val="auto"/>
+    </cs:fillRef>
+    <cs:effectRef idx="0"/>
+    <cs:fontRef idx="minor">
+      <a:schemeClr val="tx1"/>
+    </cs:fontRef>
+    <cs:spPr>
+      <a:ln w="9525">
+        <a:solidFill>
+          <a:schemeClr val="phClr"/>
+        </a:solidFill>
+      </a:ln>
+    </cs:spPr>
+  </cs:dataPointMarker>
+  <cs:dataPointMarkerLayout symbol="circle" size="5"/>
+  <cs:dataPointWireframe>
+    <cs:lnRef idx="0">
+      <cs:styleClr val="auto"/>
+    </cs:lnRef>
+    <cs:fillRef idx="1"/>
+    <cs:effectRef idx="0"/>
+    <cs:fontRef idx="minor">
+      <a:schemeClr val="tx1"/>
+    </cs:fontRef>
+    <cs:spPr>
+      <a:ln w="9525" cap="rnd">
+        <a:solidFill>
+          <a:schemeClr val="phClr"/>
+        </a:solidFill>
+        <a:round/>
+      </a:ln>
+    </cs:spPr>
+  </cs:dataPointWireframe>
+  <cs:dataTable>
+    <cs:lnRef idx="0"/>
+    <cs:fillRef idx="0"/>
+    <cs:effectRef idx="0"/>
+    <cs:fontRef idx="minor">
+      <a:schemeClr val="tx1">
+        <a:lumMod val="65000"/>
+        <a:lumOff val="35000"/>
+      </a:schemeClr>
+    </cs:fontRef>
+    <cs:spPr>
+      <a:noFill/>
+      <a:ln w="9525" cap="flat" cmpd="sng" algn="ctr">
+        <a:solidFill>
+          <a:schemeClr val="tx1">
+            <a:lumMod val="15000"/>
+            <a:lumOff val="85000"/>
+          </a:schemeClr>
+        </a:solidFill>
+        <a:round/>
+      </a:ln>
+    </cs:spPr>
+    <cs:defRPr sz="900" kern="1200"/>
+  </cs:dataTable>
+  <cs:downBar>
+    <cs:lnRef idx="0"/>
+    <cs:fillRef idx="0"/>
+    <cs:effectRef idx="0"/>
+    <cs:fontRef idx="minor">
+      <a:schemeClr val="tx1"/>
+    </cs:fontRef>
+    <cs:spPr>
+      <a:solidFill>
+        <a:schemeClr val="dk1">
+          <a:lumMod val="75000"/>
+          <a:lumOff val="25000"/>
+        </a:schemeClr>
+      </a:solidFill>
+      <a:ln w="9525" cap="flat" cmpd="sng" algn="ctr">
+        <a:solidFill>
+          <a:schemeClr val="tx1">
+            <a:lumMod val="65000"/>
+            <a:lumOff val="35000"/>
+          </a:schemeClr>
+        </a:solidFill>
+        <a:round/>
+      </a:ln>
+    </cs:spPr>
+  </cs:downBar>
+  <cs:dropLine>
+    <cs:lnRef idx="0"/>
+    <cs:fillRef idx="0"/>
+    <cs:effectRef idx="0"/>
+    <cs:fontRef idx="minor">
+      <a:schemeClr val="tx1"/>
+    </cs:fontRef>
+    <cs:spPr>
+      <a:ln w="9525" cap="flat" cmpd="sng" algn="ctr">
+        <a:solidFill>
+          <a:schemeClr val="tx1">
+            <a:lumMod val="35000"/>
+            <a:lumOff val="65000"/>
+          </a:schemeClr>
+        </a:solidFill>
+        <a:round/>
+      </a:ln>
+    </cs:spPr>
+  </cs:dropLine>
+  <cs:errorBar>
+    <cs:lnRef idx="0"/>
+    <cs:fillRef idx="0"/>
+    <cs:effectRef idx="0"/>
+    <cs:fontRef idx="minor">
+      <a:schemeClr val="tx1"/>
+    </cs:fontRef>
+    <cs:spPr>
+      <a:ln w="9525" cap="flat" cmpd="sng" algn="ctr">
+        <a:solidFill>
+          <a:schemeClr val="tx1">
+            <a:lumMod val="65000"/>
+            <a:lumOff val="35000"/>
+          </a:schemeClr>
+        </a:solidFill>
+        <a:round/>
+      </a:ln>
+    </cs:spPr>
+  </cs:errorBar>
+  <cs:floor>
+    <cs:lnRef idx="0"/>
+    <cs:fillRef idx="0"/>
+    <cs:effectRef idx="0"/>
+    <cs:fontRef idx="minor">
+      <a:schemeClr val="tx1"/>
+    </cs:fontRef>
+    <cs:spPr>
+      <a:noFill/>
+      <a:ln>
+        <a:noFill/>
+      </a:ln>
+    </cs:spPr>
+  </cs:floor>
+  <cs:gridlineMajor>
+    <cs:lnRef idx="0"/>
+    <cs:fillRef idx="0"/>
+    <cs:effectRef idx="0"/>
+    <cs:fontRef idx="minor">
+      <a:schemeClr val="tx1"/>
+    </cs:fontRef>
+    <cs:spPr>
+      <a:ln w="9525" cap="flat" cmpd="sng" algn="ctr">
+        <a:solidFill>
+          <a:schemeClr val="tx1">
+            <a:lumMod val="15000"/>
+            <a:lumOff val="85000"/>
+          </a:schemeClr>
+        </a:solidFill>
+        <a:round/>
+      </a:ln>
+    </cs:spPr>
+  </cs:gridlineMajor>
+  <cs:gridlineMinor>
+    <cs:lnRef idx="0"/>
+    <cs:fillRef idx="0"/>
+    <cs:effectRef idx="0"/>
+    <cs:fontRef idx="minor">
+      <a:schemeClr val="tx1"/>
+    </cs:fontRef>
+    <cs:spPr>
+      <a:ln w="9525" cap="flat" cmpd="sng" algn="ctr">
+        <a:solidFill>
+          <a:schemeClr val="tx1">
+            <a:lumMod val="5000"/>
+            <a:lumOff val="95000"/>
+          </a:schemeClr>
+        </a:solidFill>
+        <a:round/>
+      </a:ln>
+    </cs:spPr>
+  </cs:gridlineMinor>
+  <cs:hiLoLine>
+    <cs:lnRef idx="0"/>
+    <cs:fillRef idx="0"/>
+    <cs:effectRef idx="0"/>
+    <cs:fontRef idx="minor">
+      <a:schemeClr val="tx1"/>
+    </cs:fontRef>
+    <cs:spPr>
+      <a:ln w="9525" cap="flat" cmpd="sng" algn="ctr">
+        <a:solidFill>
+          <a:schemeClr val="tx1">
+            <a:lumMod val="50000"/>
+            <a:lumOff val="50000"/>
+          </a:schemeClr>
+        </a:solidFill>
+        <a:round/>
+      </a:ln>
+    </cs:spPr>
+  </cs:hiLoLine>
+  <cs:leaderLine>
+    <cs:lnRef idx="0"/>
+    <cs:fillRef idx="0"/>
+    <cs:effectRef idx="0"/>
+    <cs:fontRef idx="minor">
+      <a:schemeClr val="tx1"/>
+    </cs:fontRef>
+    <cs:spPr>
+      <a:ln w="9525" cap="flat" cmpd="sng" algn="ctr">
+        <a:solidFill>
+          <a:schemeClr val="tx1">
+            <a:lumMod val="35000"/>
+            <a:lumOff val="65000"/>
+          </a:schemeClr>
+        </a:solidFill>
+        <a:round/>
+      </a:ln>
+    </cs:spPr>
+  </cs:leaderLine>
+  <cs:legend>
+    <cs:lnRef idx="0"/>
+    <cs:fillRef idx="0"/>
+    <cs:effectRef idx="0"/>
+    <cs:fontRef idx="minor">
+      <a:schemeClr val="tx1">
+        <a:lumMod val="65000"/>
+        <a:lumOff val="35000"/>
+      </a:schemeClr>
+    </cs:fontRef>
+    <cs:defRPr sz="900" kern="1200"/>
+  </cs:legend>
+  <cs:plotArea mods="allowNoFillOverride allowNoLineOverride">
+    <cs:lnRef idx="0"/>
+    <cs:fillRef idx="0"/>
+    <cs:effectRef idx="0"/>
+    <cs:fontRef idx="minor">
+      <a:schemeClr val="tx1"/>
+    </cs:fontRef>
+  </cs:plotArea>
+  <cs:plotArea3D mods="allowNoFillOverride allowNoLineOverride">
+    <cs:lnRef idx="0"/>
+    <cs:fillRef idx="0"/>
+    <cs:effectRef idx="0"/>
+    <cs:fontRef idx="minor">
+      <a:schemeClr val="tx1"/>
+    </cs:fontRef>
+  </cs:plotArea3D>
+  <cs:seriesAxis>
+    <cs:lnRef idx="0"/>
+    <cs:fillRef idx="0"/>
+    <cs:effectRef idx="0"/>
+    <cs:fontRef idx="minor">
+      <a:schemeClr val="tx1">
+        <a:lumMod val="65000"/>
+        <a:lumOff val="35000"/>
+      </a:schemeClr>
+    </cs:fontRef>
+    <cs:defRPr sz="900" kern="1200"/>
+  </cs:seriesAxis>
+  <cs:seriesLine>
+    <cs:lnRef idx="0"/>
+    <cs:fillRef idx="0"/>
+    <cs:effectRef idx="0"/>
+    <cs:fontRef idx="minor">
+      <a:schemeClr val="tx1"/>
+    </cs:fontRef>
+    <cs:spPr>
+      <a:ln w="9525" cap="flat" cmpd="sng" algn="ctr">
+        <a:solidFill>
+          <a:schemeClr val="tx1">
+            <a:lumMod val="35000"/>
+            <a:lumOff val="65000"/>
+          </a:schemeClr>
+        </a:solidFill>
+        <a:round/>
+      </a:ln>
+    </cs:spPr>
+  </cs:seriesLine>
+  <cs:title>
+    <cs:lnRef idx="0"/>
+    <cs:fillRef idx="0"/>
+    <cs:effectRef idx="0"/>
+    <cs:fontRef idx="minor">
+      <a:schemeClr val="tx1">
+        <a:lumMod val="65000"/>
+        <a:lumOff val="35000"/>
+      </a:schemeClr>
+    </cs:fontRef>
+    <cs:defRPr sz="1400" b="0" kern="1200" spc="0" baseline="0"/>
+  </cs:title>
+  <cs:trendline>
+    <cs:lnRef idx="0">
+      <cs:styleClr val="auto"/>
+    </cs:lnRef>
+    <cs:fillRef idx="0"/>
+    <cs:effectRef idx="0"/>
+    <cs:fontRef idx="minor">
+      <a:schemeClr val="tx1"/>
+    </cs:fontRef>
+    <cs:spPr>
+      <a:ln w="19050" cap="rnd">
+        <a:solidFill>
+          <a:schemeClr val="phClr"/>
+        </a:solidFill>
+        <a:prstDash val="sysDot"/>
+      </a:ln>
+    </cs:spPr>
+  </cs:trendline>
+  <cs:trendlineLabel>
+    <cs:lnRef idx="0"/>
+    <cs:fillRef idx="0"/>
+    <cs:effectRef idx="0"/>
+    <cs:fontRef idx="minor">
+      <a:schemeClr val="tx1">
+        <a:lumMod val="65000"/>
+        <a:lumOff val="35000"/>
+      </a:schemeClr>
+    </cs:fontRef>
+    <cs:defRPr sz="900" kern="1200"/>
+  </cs:trendlineLabel>
+  <cs:upBar>
+    <cs:lnRef idx="0"/>
+    <cs:fillRef idx="0"/>
+    <cs:effectRef idx="0"/>
+    <cs:fontRef idx="minor">
+      <a:schemeClr val="tx1"/>
+    </cs:fontRef>
+    <cs:spPr>
+      <a:solidFill>
+        <a:schemeClr val="lt1"/>
+      </a:solidFill>
+      <a:ln w="9525" cap="flat" cmpd="sng" algn="ctr">
+        <a:solidFill>
+          <a:schemeClr val="tx1">
+            <a:lumMod val="65000"/>
+            <a:lumOff val="35000"/>
+          </a:schemeClr>
+        </a:solidFill>
+        <a:round/>
+      </a:ln>
+    </cs:spPr>
+  </cs:upBar>
+  <cs:valueAxis>
+    <cs:lnRef idx="0"/>
+    <cs:fillRef idx="0"/>
+    <cs:effectRef idx="0"/>
+    <cs:fontRef idx="minor">
+      <a:schemeClr val="tx1">
+        <a:lumMod val="65000"/>
+        <a:lumOff val="35000"/>
+      </a:schemeClr>
+    </cs:fontRef>
+    <cs:defRPr sz="900" kern="1200"/>
+  </cs:valueAxis>
+  <cs:wall>
+    <cs:lnRef idx="0"/>
+    <cs:fillRef idx="0"/>
+    <cs:effectRef idx="0"/>
+    <cs:fontRef idx="minor">
+      <a:schemeClr val="tx1"/>
+    </cs:fontRef>
+    <cs:spPr>
+      <a:noFill/>
+      <a:ln>
+        <a:noFill/>
+      </a:ln>
+    </cs:spPr>
+  </cs:wall>
+</cs:chartStyle>
+</file>
+
+<file path=ppt/charts/style5.xml><?xml version="1.0" encoding="utf-8"?>
+<cs:chartStyle xmlns:cs="http://schemas.microsoft.com/office/drawing/2012/chartStyle" xmlns:a="http://schemas.openxmlformats.org/drawingml/2006/main" id="201">
+  <cs:axisTitle>
+    <cs:lnRef idx="0"/>
+    <cs:fillRef idx="0"/>
+    <cs:effectRef idx="0"/>
+    <cs:fontRef idx="minor">
+      <a:schemeClr val="tx1">
+        <a:lumMod val="65000"/>
+        <a:lumOff val="35000"/>
+      </a:schemeClr>
+    </cs:fontRef>
+    <cs:defRPr sz="1000" kern="1200"/>
+  </cs:axisTitle>
+  <cs:categoryAxis>
+    <cs:lnRef idx="0"/>
+    <cs:fillRef idx="0"/>
+    <cs:effectRef idx="0"/>
+    <cs:fontRef idx="minor">
+      <a:schemeClr val="tx1">
+        <a:lumMod val="65000"/>
+        <a:lumOff val="35000"/>
+      </a:schemeClr>
+    </cs:fontRef>
+    <cs:spPr>
+      <a:ln w="9525" cap="flat" cmpd="sng" algn="ctr">
+        <a:solidFill>
+          <a:schemeClr val="tx1">
+            <a:lumMod val="15000"/>
+            <a:lumOff val="85000"/>
+          </a:schemeClr>
+        </a:solidFill>
+        <a:round/>
+      </a:ln>
+    </cs:spPr>
+    <cs:defRPr sz="900" kern="1200"/>
+  </cs:categoryAxis>
+  <cs:chartArea mods="allowNoFillOverride allowNoLineOverride">
+    <cs:lnRef idx="0"/>
+    <cs:fillRef idx="0"/>
+    <cs:effectRef idx="0"/>
+    <cs:fontRef idx="minor">
+      <a:schemeClr val="tx1"/>
+    </cs:fontRef>
+    <cs:spPr>
+      <a:solidFill>
+        <a:schemeClr val="bg1"/>
+      </a:solidFill>
+      <a:ln w="9525" cap="flat" cmpd="sng" algn="ctr">
+        <a:solidFill>
+          <a:schemeClr val="tx1">
+            <a:lumMod val="15000"/>
+            <a:lumOff val="85000"/>
+          </a:schemeClr>
+        </a:solidFill>
+        <a:round/>
+      </a:ln>
+    </cs:spPr>
+    <cs:defRPr sz="1000" kern="1200"/>
+  </cs:chartArea>
+  <cs:dataLabel>
+    <cs:lnRef idx="0"/>
+    <cs:fillRef idx="0"/>
+    <cs:effectRef idx="0"/>
+    <cs:fontRef idx="minor">
+      <a:schemeClr val="tx1">
+        <a:lumMod val="75000"/>
+        <a:lumOff val="25000"/>
+      </a:schemeClr>
+    </cs:fontRef>
+    <cs:defRPr sz="900" kern="1200"/>
+  </cs:dataLabel>
+  <cs:dataLabelCallout>
+    <cs:lnRef idx="0"/>
+    <cs:fillRef idx="0"/>
+    <cs:effectRef idx="0"/>
+    <cs:fontRef idx="minor">
+      <a:schemeClr val="dk1">
+        <a:lumMod val="65000"/>
+        <a:lumOff val="35000"/>
+      </a:schemeClr>
+    </cs:fontRef>
+    <cs:spPr>
+      <a:solidFill>
+        <a:schemeClr val="lt1"/>
+      </a:solidFill>
+      <a:ln>
+        <a:solidFill>
+          <a:schemeClr val="dk1">
+            <a:lumMod val="25000"/>
+            <a:lumOff val="75000"/>
+          </a:schemeClr>
+        </a:solidFill>
+      </a:ln>
+    </cs:spPr>
+    <cs:defRPr sz="900" kern="1200"/>
+    <cs:bodyPr rot="0" spcFirstLastPara="1" vertOverflow="clip" horzOverflow="clip" vert="horz" wrap="square" lIns="36576" tIns="18288" rIns="36576" bIns="18288" anchor="ctr" anchorCtr="1">
+      <a:spAutoFit/>
+    </cs:bodyPr>
+  </cs:dataLabelCallout>
+  <cs:dataPoint>
+    <cs:lnRef idx="0"/>
+    <cs:fillRef idx="1">
+      <cs:styleClr val="auto"/>
+    </cs:fillRef>
+    <cs:effectRef idx="0"/>
+    <cs:fontRef idx="minor">
+      <a:schemeClr val="tx1"/>
+    </cs:fontRef>
+  </cs:dataPoint>
+  <cs:dataPoint3D>
+    <cs:lnRef idx="0"/>
+    <cs:fillRef idx="1">
+      <cs:styleClr val="auto"/>
+    </cs:fillRef>
+    <cs:effectRef idx="0"/>
+    <cs:fontRef idx="minor">
+      <a:schemeClr val="tx1"/>
+    </cs:fontRef>
+  </cs:dataPoint3D>
+  <cs:dataPointLine>
+    <cs:lnRef idx="0">
+      <cs:styleClr val="auto"/>
+    </cs:lnRef>
+    <cs:fillRef idx="1"/>
+    <cs:effectRef idx="0"/>
+    <cs:fontRef idx="minor">
+      <a:schemeClr val="tx1"/>
+    </cs:fontRef>
+    <cs:spPr>
+      <a:ln w="28575" cap="rnd">
+        <a:solidFill>
+          <a:schemeClr val="phClr"/>
+        </a:solidFill>
+        <a:round/>
+      </a:ln>
+    </cs:spPr>
+  </cs:dataPointLine>
+  <cs:dataPointMarker>
+    <cs:lnRef idx="0">
+      <cs:styleClr val="auto"/>
+    </cs:lnRef>
+    <cs:fillRef idx="1">
+      <cs:styleClr val="auto"/>
+    </cs:fillRef>
+    <cs:effectRef idx="0"/>
+    <cs:fontRef idx="minor">
+      <a:schemeClr val="tx1"/>
+    </cs:fontRef>
+    <cs:spPr>
+      <a:ln w="9525">
+        <a:solidFill>
+          <a:schemeClr val="phClr"/>
+        </a:solidFill>
+      </a:ln>
+    </cs:spPr>
+  </cs:dataPointMarker>
+  <cs:dataPointMarkerLayout symbol="circle" size="5"/>
+  <cs:dataPointWireframe>
+    <cs:lnRef idx="0">
+      <cs:styleClr val="auto"/>
+    </cs:lnRef>
+    <cs:fillRef idx="1"/>
+    <cs:effectRef idx="0"/>
+    <cs:fontRef idx="minor">
+      <a:schemeClr val="tx1"/>
+    </cs:fontRef>
+    <cs:spPr>
+      <a:ln w="9525" cap="rnd">
+        <a:solidFill>
+          <a:schemeClr val="phClr"/>
+        </a:solidFill>
+        <a:round/>
+      </a:ln>
+    </cs:spPr>
+  </cs:dataPointWireframe>
+  <cs:dataTable>
+    <cs:lnRef idx="0"/>
+    <cs:fillRef idx="0"/>
+    <cs:effectRef idx="0"/>
+    <cs:fontRef idx="minor">
+      <a:schemeClr val="tx1">
+        <a:lumMod val="65000"/>
+        <a:lumOff val="35000"/>
+      </a:schemeClr>
+    </cs:fontRef>
+    <cs:spPr>
+      <a:noFill/>
+      <a:ln w="9525" cap="flat" cmpd="sng" algn="ctr">
+        <a:solidFill>
+          <a:schemeClr val="tx1">
+            <a:lumMod val="15000"/>
+            <a:lumOff val="85000"/>
+          </a:schemeClr>
+        </a:solidFill>
+        <a:round/>
+      </a:ln>
+    </cs:spPr>
+    <cs:defRPr sz="900" kern="1200"/>
+  </cs:dataTable>
+  <cs:downBar>
+    <cs:lnRef idx="0"/>
+    <cs:fillRef idx="0"/>
+    <cs:effectRef idx="0"/>
+    <cs:fontRef idx="minor">
+      <a:schemeClr val="dk1"/>
+    </cs:fontRef>
+    <cs:spPr>
+      <a:solidFill>
+        <a:schemeClr val="dk1">
+          <a:lumMod val="65000"/>
+          <a:lumOff val="35000"/>
+        </a:schemeClr>
+      </a:solidFill>
+      <a:ln w="9525">
+        <a:solidFill>
+          <a:schemeClr val="tx1">
+            <a:lumMod val="65000"/>
+            <a:lumOff val="35000"/>
+          </a:schemeClr>
+        </a:solidFill>
+      </a:ln>
+    </cs:spPr>
+  </cs:downBar>
+  <cs:dropLine>
+    <cs:lnRef idx="0"/>
+    <cs:fillRef idx="0"/>
+    <cs:effectRef idx="0"/>
+    <cs:fontRef idx="minor">
+      <a:schemeClr val="tx1"/>
+    </cs:fontRef>
+    <cs:spPr>
+      <a:ln w="9525" cap="flat" cmpd="sng" algn="ctr">
+        <a:solidFill>
+          <a:schemeClr val="tx1">
+            <a:lumMod val="35000"/>
+            <a:lumOff val="65000"/>
+          </a:schemeClr>
+        </a:solidFill>
+        <a:round/>
+      </a:ln>
+    </cs:spPr>
+  </cs:dropLine>
+  <cs:errorBar>
+    <cs:lnRef idx="0"/>
+    <cs:fillRef idx="0"/>
+    <cs:effectRef idx="0"/>
+    <cs:fontRef idx="minor">
+      <a:schemeClr val="tx1"/>
+    </cs:fontRef>
+    <cs:spPr>
+      <a:ln w="9525" cap="flat" cmpd="sng" algn="ctr">
+        <a:solidFill>
+          <a:schemeClr val="tx1">
+            <a:lumMod val="65000"/>
+            <a:lumOff val="35000"/>
+          </a:schemeClr>
+        </a:solidFill>
+        <a:round/>
+      </a:ln>
+    </cs:spPr>
+  </cs:errorBar>
+  <cs:floor>
+    <cs:lnRef idx="0"/>
+    <cs:fillRef idx="0"/>
+    <cs:effectRef idx="0"/>
+    <cs:fontRef idx="minor">
+      <a:schemeClr val="tx1"/>
+    </cs:fontRef>
+    <cs:spPr>
+      <a:noFill/>
+      <a:ln>
+        <a:noFill/>
+      </a:ln>
+    </cs:spPr>
+  </cs:floor>
+  <cs:gridlineMajor>
+    <cs:lnRef idx="0"/>
+    <cs:fillRef idx="0"/>
+    <cs:effectRef idx="0"/>
+    <cs:fontRef idx="minor">
+      <a:schemeClr val="tx1"/>
+    </cs:fontRef>
+    <cs:spPr>
+      <a:ln w="9525" cap="flat" cmpd="sng" algn="ctr">
+        <a:solidFill>
+          <a:schemeClr val="tx1">
+            <a:lumMod val="15000"/>
+            <a:lumOff val="85000"/>
+          </a:schemeClr>
+        </a:solidFill>
+        <a:round/>
+      </a:ln>
+    </cs:spPr>
+  </cs:gridlineMajor>
+  <cs:gridlineMinor>
+    <cs:lnRef idx="0"/>
+    <cs:fillRef idx="0"/>
+    <cs:effectRef idx="0"/>
+    <cs:fontRef idx="minor">
+      <a:schemeClr val="tx1"/>
+    </cs:fontRef>
+    <cs:spPr>
+      <a:ln w="9525" cap="flat" cmpd="sng" algn="ctr">
+        <a:solidFill>
+          <a:schemeClr val="tx1">
+            <a:lumMod val="5000"/>
+            <a:lumOff val="95000"/>
+          </a:schemeClr>
+        </a:solidFill>
+        <a:round/>
+      </a:ln>
+    </cs:spPr>
+  </cs:gridlineMinor>
+  <cs:hiLoLine>
+    <cs:lnRef idx="0"/>
+    <cs:fillRef idx="0"/>
+    <cs:effectRef idx="0"/>
+    <cs:fontRef idx="minor">
+      <a:schemeClr val="tx1"/>
+    </cs:fontRef>
+    <cs:spPr>
+      <a:ln w="9525" cap="flat" cmpd="sng" algn="ctr">
+        <a:solidFill>
+          <a:schemeClr val="tx1">
+            <a:lumMod val="75000"/>
+            <a:lumOff val="25000"/>
+          </a:schemeClr>
+        </a:solidFill>
+        <a:round/>
+      </a:ln>
+    </cs:spPr>
+  </cs:hiLoLine>
+  <cs:leaderLine>
+    <cs:lnRef idx="0"/>
+    <cs:fillRef idx="0"/>
+    <cs:effectRef idx="0"/>
+    <cs:fontRef idx="minor">
+      <a:schemeClr val="tx1"/>
+    </cs:fontRef>
+    <cs:spPr>
+      <a:ln w="9525" cap="flat" cmpd="sng" algn="ctr">
+        <a:solidFill>
+          <a:schemeClr val="tx1">
+            <a:lumMod val="35000"/>
+            <a:lumOff val="65000"/>
+          </a:schemeClr>
+        </a:solidFill>
+        <a:round/>
+      </a:ln>
+    </cs:spPr>
+  </cs:leaderLine>
+  <cs:legend>
+    <cs:lnRef idx="0"/>
+    <cs:fillRef idx="0"/>
+    <cs:effectRef idx="0"/>
+    <cs:fontRef idx="minor">
+      <a:schemeClr val="tx1">
+        <a:lumMod val="65000"/>
+        <a:lumOff val="35000"/>
+      </a:schemeClr>
+    </cs:fontRef>
+    <cs:defRPr sz="900" kern="1200"/>
+  </cs:legend>
+  <cs:plotArea mods="allowNoFillOverride allowNoLineOverride">
+    <cs:lnRef idx="0"/>
+    <cs:fillRef idx="0"/>
+    <cs:effectRef idx="0"/>
+    <cs:fontRef idx="minor">
+      <a:schemeClr val="tx1"/>
+    </cs:fontRef>
+  </cs:plotArea>
+  <cs:plotArea3D mods="allowNoFillOverride allowNoLineOverride">
+    <cs:lnRef idx="0"/>
+    <cs:fillRef idx="0"/>
+    <cs:effectRef idx="0"/>
+    <cs:fontRef idx="minor">
+      <a:schemeClr val="tx1"/>
+    </cs:fontRef>
+  </cs:plotArea3D>
+  <cs:seriesAxis>
+    <cs:lnRef idx="0"/>
+    <cs:fillRef idx="0"/>
+    <cs:effectRef idx="0"/>
+    <cs:fontRef idx="minor">
+      <a:schemeClr val="tx1">
+        <a:lumMod val="65000"/>
+        <a:lumOff val="35000"/>
+      </a:schemeClr>
+    </cs:fontRef>
+    <cs:defRPr sz="900" kern="1200"/>
+  </cs:seriesAxis>
+  <cs:seriesLine>
+    <cs:lnRef idx="0"/>
+    <cs:fillRef idx="0"/>
+    <cs:effectRef idx="0"/>
+    <cs:fontRef idx="minor">
+      <a:schemeClr val="tx1"/>
+    </cs:fontRef>
+    <cs:spPr>
+      <a:ln w="9525" cap="flat" cmpd="sng" algn="ctr">
+        <a:solidFill>
+          <a:schemeClr val="tx1">
+            <a:lumMod val="35000"/>
+            <a:lumOff val="65000"/>
+          </a:schemeClr>
+        </a:solidFill>
+        <a:round/>
+      </a:ln>
+    </cs:spPr>
+  </cs:seriesLine>
+  <cs:title>
+    <cs:lnRef idx="0"/>
+    <cs:fillRef idx="0"/>
+    <cs:effectRef idx="0"/>
+    <cs:fontRef idx="minor">
+      <a:schemeClr val="tx1">
+        <a:lumMod val="65000"/>
+        <a:lumOff val="35000"/>
+      </a:schemeClr>
+    </cs:fontRef>
+    <cs:defRPr sz="1400" b="0" kern="1200" spc="0" baseline="0"/>
+  </cs:title>
+  <cs:trendline>
+    <cs:lnRef idx="0">
+      <cs:styleClr val="auto"/>
+    </cs:lnRef>
+    <cs:fillRef idx="0"/>
+    <cs:effectRef idx="0"/>
+    <cs:fontRef idx="minor">
+      <a:schemeClr val="tx1"/>
+    </cs:fontRef>
+    <cs:spPr>
+      <a:ln w="19050" cap="rnd">
+        <a:solidFill>
+          <a:schemeClr val="phClr"/>
+        </a:solidFill>
+        <a:prstDash val="sysDot"/>
+      </a:ln>
+    </cs:spPr>
+  </cs:trendline>
+  <cs:trendlineLabel>
+    <cs:lnRef idx="0"/>
+    <cs:fillRef idx="0"/>
+    <cs:effectRef idx="0"/>
+    <cs:fontRef idx="minor">
+      <a:schemeClr val="tx1">
+        <a:lumMod val="65000"/>
+        <a:lumOff val="35000"/>
+      </a:schemeClr>
+    </cs:fontRef>
+    <cs:defRPr sz="900" kern="1200"/>
+  </cs:trendlineLabel>
+  <cs:upBar>
+    <cs:lnRef idx="0"/>
+    <cs:fillRef idx="0"/>
+    <cs:effectRef idx="0"/>
+    <cs:fontRef idx="minor">
+      <a:schemeClr val="dk1"/>
+    </cs:fontRef>
+    <cs:spPr>
+      <a:solidFill>
+        <a:schemeClr val="lt1"/>
+      </a:solidFill>
+      <a:ln w="9525">
+        <a:solidFill>
+          <a:schemeClr val="tx1">
+            <a:lumMod val="15000"/>
+            <a:lumOff val="85000"/>
+          </a:schemeClr>
+        </a:solidFill>
+      </a:ln>
+    </cs:spPr>
+  </cs:upBar>
+  <cs:valueAxis>
+    <cs:lnRef idx="0"/>
+    <cs:fillRef idx="0"/>
+    <cs:effectRef idx="0"/>
+    <cs:fontRef idx="minor">
+      <a:schemeClr val="tx1">
+        <a:lumMod val="65000"/>
+        <a:lumOff val="35000"/>
+      </a:schemeClr>
+    </cs:fontRef>
+    <cs:defRPr sz="900" kern="1200"/>
+  </cs:valueAxis>
+  <cs:wall>
+    <cs:lnRef idx="0"/>
+    <cs:fillRef idx="0"/>
+    <cs:effectRef idx="0"/>
+    <cs:fontRef idx="minor">
+      <a:schemeClr val="tx1"/>
+    </cs:fontRef>
+    <cs:spPr>
+      <a:noFill/>
+      <a:ln>
+        <a:noFill/>
+      </a:ln>
+    </cs:spPr>
+  </cs:wall>
+</cs:chartStyle>
+</file>
+
+<file path=ppt/charts/style6.xml><?xml version="1.0" encoding="utf-8"?>
 <cs:chartStyle xmlns:cs="http://schemas.microsoft.com/office/drawing/2012/chartStyle" xmlns:a="http://schemas.openxmlformats.org/drawingml/2006/main" id="201">
   <cs:axisTitle>
     <cs:lnRef idx="0"/>
@@ -7517,96 +10604,7 @@
               <a:buSzPts val="1400"/>
               <a:buNone/>
             </a:pPr>
-            <a:r>
-              <a:rPr lang="en-US" dirty="0"/>
-              <a:t>Good day, Miss Clare.</a:t>
-            </a:r>
-          </a:p>
-          <a:p>
-            <a:pPr marL="0" lvl="0" indent="0" algn="l" rtl="0">
-              <a:lnSpc>
-                <a:spcPct val="100000"/>
-              </a:lnSpc>
-              <a:spcBef>
-                <a:spcPts val="0"/>
-              </a:spcBef>
-              <a:spcAft>
-                <a:spcPts val="0"/>
-              </a:spcAft>
-              <a:buSzPts val="1400"/>
-              <a:buNone/>
-            </a:pPr>
-            <a:endParaRPr lang="en-US" dirty="0"/>
-          </a:p>
-          <a:p>
-            <a:pPr marL="0" lvl="0" indent="0" algn="l" rtl="0">
-              <a:lnSpc>
-                <a:spcPct val="100000"/>
-              </a:lnSpc>
-              <a:spcBef>
-                <a:spcPts val="0"/>
-              </a:spcBef>
-              <a:spcAft>
-                <a:spcPts val="0"/>
-              </a:spcAft>
-              <a:buSzPts val="1400"/>
-              <a:buNone/>
-            </a:pPr>
-            <a:r>
-              <a:rPr lang="en-US" dirty="0"/>
-              <a:t>My name is Joseph and I’m the leader of Tutorial 1 Group 10.  </a:t>
-            </a:r>
-          </a:p>
-          <a:p>
-            <a:pPr marL="0" lvl="0" indent="0" algn="l" rtl="0">
-              <a:lnSpc>
-                <a:spcPct val="100000"/>
-              </a:lnSpc>
-              <a:spcBef>
-                <a:spcPts val="0"/>
-              </a:spcBef>
-              <a:spcAft>
-                <a:spcPts val="0"/>
-              </a:spcAft>
-              <a:buSzPts val="1400"/>
-              <a:buNone/>
-            </a:pPr>
-            <a:endParaRPr lang="en-US" dirty="0"/>
-          </a:p>
-          <a:p>
-            <a:pPr marL="0" lvl="0" indent="0" algn="l" rtl="0">
-              <a:lnSpc>
-                <a:spcPct val="100000"/>
-              </a:lnSpc>
-              <a:spcBef>
-                <a:spcPts val="0"/>
-              </a:spcBef>
-              <a:spcAft>
-                <a:spcPts val="0"/>
-              </a:spcAft>
-              <a:buSzPts val="1400"/>
-              <a:buNone/>
-            </a:pPr>
-            <a:r>
-              <a:rPr lang="en-US" dirty="0"/>
-              <a:t>I will be presenting first. </a:t>
-            </a:r>
-          </a:p>
-          <a:p>
-            <a:pPr marL="0" lvl="0" indent="0" algn="l" rtl="0">
-              <a:lnSpc>
-                <a:spcPct val="100000"/>
-              </a:lnSpc>
-              <a:spcBef>
-                <a:spcPts val="0"/>
-              </a:spcBef>
-              <a:spcAft>
-                <a:spcPts val="0"/>
-              </a:spcAft>
-              <a:buSzPts val="1400"/>
-              <a:buNone/>
-            </a:pPr>
-            <a:endParaRPr dirty="0"/>
+            <a:endParaRPr/>
           </a:p>
         </p:txBody>
       </p:sp>
@@ -7669,6 +10667,174 @@
 </file>
 
 <file path=ppt/notesSlides/notesSlide10.xml><?xml version="1.0" encoding="utf-8"?>
+<p:notes xmlns:a="http://schemas.openxmlformats.org/drawingml/2006/main" xmlns:r="http://schemas.openxmlformats.org/officeDocument/2006/relationships" xmlns:p="http://schemas.openxmlformats.org/presentationml/2006/main" showMasterSp="0" showMasterPhAnim="0">
+  <p:cSld>
+    <p:spTree>
+      <p:nvGrpSpPr>
+        <p:cNvPr id="1" name="Shape 150">
+          <a:extLst>
+            <a:ext uri="{FF2B5EF4-FFF2-40B4-BE49-F238E27FC236}">
+              <a16:creationId xmlns:a16="http://schemas.microsoft.com/office/drawing/2014/main" id="{F71360E7-1965-A5A6-8CD4-AADEC55E8010}"/>
+            </a:ext>
+          </a:extLst>
+        </p:cNvPr>
+        <p:cNvGrpSpPr/>
+        <p:nvPr/>
+      </p:nvGrpSpPr>
+      <p:grpSpPr>
+        <a:xfrm>
+          <a:off x="0" y="0"/>
+          <a:ext cx="0" cy="0"/>
+          <a:chOff x="0" y="0"/>
+          <a:chExt cx="0" cy="0"/>
+        </a:xfrm>
+      </p:grpSpPr>
+      <p:sp>
+        <p:nvSpPr>
+          <p:cNvPr id="151" name="Google Shape;151;p9:notes">
+            <a:extLst>
+              <a:ext uri="{FF2B5EF4-FFF2-40B4-BE49-F238E27FC236}">
+                <a16:creationId xmlns:a16="http://schemas.microsoft.com/office/drawing/2014/main" id="{D8647BA0-015C-AC84-66DE-D79EE81D940A}"/>
+              </a:ext>
+            </a:extLst>
+          </p:cNvPr>
+          <p:cNvSpPr txBox="1">
+            <a:spLocks noGrp="1"/>
+          </p:cNvSpPr>
+          <p:nvPr>
+            <p:ph type="body" idx="1"/>
+          </p:nvPr>
+        </p:nvSpPr>
+        <p:spPr>
+          <a:xfrm>
+            <a:off x="685800" y="4400550"/>
+            <a:ext cx="5486400" cy="3600450"/>
+          </a:xfrm>
+          <a:prstGeom prst="rect">
+            <a:avLst/>
+          </a:prstGeom>
+          <a:noFill/>
+          <a:ln>
+            <a:noFill/>
+          </a:ln>
+        </p:spPr>
+        <p:txBody>
+          <a:bodyPr spcFirstLastPara="1" wrap="square" lIns="91425" tIns="45700" rIns="91425" bIns="45700" anchor="t" anchorCtr="0">
+            <a:noAutofit/>
+          </a:bodyPr>
+          <a:lstStyle/>
+          <a:p>
+            <a:pPr marL="0" lvl="0" indent="0" algn="l" rtl="0">
+              <a:lnSpc>
+                <a:spcPct val="100000"/>
+              </a:lnSpc>
+              <a:spcBef>
+                <a:spcPts val="0"/>
+              </a:spcBef>
+              <a:spcAft>
+                <a:spcPts val="0"/>
+              </a:spcAft>
+              <a:buSzPts val="1400"/>
+              <a:buNone/>
+            </a:pPr>
+            <a:r>
+              <a:rPr lang="en-US" dirty="0"/>
+              <a:t>Source:</a:t>
+            </a:r>
+          </a:p>
+          <a:p>
+            <a:pPr marL="0" lvl="0" indent="0" algn="l" rtl="0">
+              <a:lnSpc>
+                <a:spcPct val="100000"/>
+              </a:lnSpc>
+              <a:spcBef>
+                <a:spcPts val="0"/>
+              </a:spcBef>
+              <a:spcAft>
+                <a:spcPts val="0"/>
+              </a:spcAft>
+              <a:buSzPts val="1400"/>
+              <a:buNone/>
+            </a:pPr>
+            <a:r>
+              <a:rPr lang="en-US" dirty="0"/>
+              <a:t>https://wits.worldbank.org/CountryProfile/IND?utm_source=chatgpt.com</a:t>
+            </a:r>
+            <a:endParaRPr dirty="0"/>
+          </a:p>
+        </p:txBody>
+      </p:sp>
+      <p:sp>
+        <p:nvSpPr>
+          <p:cNvPr id="152" name="Google Shape;152;p9:notes">
+            <a:extLst>
+              <a:ext uri="{FF2B5EF4-FFF2-40B4-BE49-F238E27FC236}">
+                <a16:creationId xmlns:a16="http://schemas.microsoft.com/office/drawing/2014/main" id="{DEA74012-7CEB-2535-0166-939FA05F3260}"/>
+              </a:ext>
+            </a:extLst>
+          </p:cNvPr>
+          <p:cNvSpPr>
+            <a:spLocks noGrp="1" noRot="1" noChangeAspect="1"/>
+          </p:cNvSpPr>
+          <p:nvPr>
+            <p:ph type="sldImg" idx="2"/>
+          </p:nvPr>
+        </p:nvSpPr>
+        <p:spPr>
+          <a:xfrm>
+            <a:off x="685800" y="1143000"/>
+            <a:ext cx="5486400" cy="3086100"/>
+          </a:xfrm>
+          <a:custGeom>
+            <a:avLst/>
+            <a:gdLst/>
+            <a:ahLst/>
+            <a:cxnLst/>
+            <a:rect l="l" t="t" r="r" b="b"/>
+            <a:pathLst>
+              <a:path w="120000" h="120000" extrusionOk="0">
+                <a:moveTo>
+                  <a:pt x="0" y="0"/>
+                </a:moveTo>
+                <a:lnTo>
+                  <a:pt x="120000" y="0"/>
+                </a:lnTo>
+                <a:lnTo>
+                  <a:pt x="120000" y="120000"/>
+                </a:lnTo>
+                <a:lnTo>
+                  <a:pt x="0" y="120000"/>
+                </a:lnTo>
+                <a:close/>
+              </a:path>
+            </a:pathLst>
+          </a:custGeom>
+          <a:noFill/>
+          <a:ln w="12700" cap="flat" cmpd="sng">
+            <a:solidFill>
+              <a:srgbClr val="000000"/>
+            </a:solidFill>
+            <a:prstDash val="solid"/>
+            <a:round/>
+            <a:headEnd type="none" w="sm" len="sm"/>
+            <a:tailEnd type="none" w="sm" len="sm"/>
+          </a:ln>
+        </p:spPr>
+      </p:sp>
+    </p:spTree>
+    <p:extLst>
+      <p:ext uri="{BB962C8B-B14F-4D97-AF65-F5344CB8AC3E}">
+        <p14:creationId xmlns:p14="http://schemas.microsoft.com/office/powerpoint/2010/main" val="958484170"/>
+      </p:ext>
+    </p:extLst>
+  </p:cSld>
+  <p:clrMapOvr>
+    <a:masterClrMapping/>
+  </p:clrMapOvr>
+</p:notes>
+</file>
+
+<file path=ppt/notesSlides/notesSlide11.xml><?xml version="1.0" encoding="utf-8"?>
 <p:notes xmlns:a="http://schemas.openxmlformats.org/drawingml/2006/main" xmlns:r="http://schemas.openxmlformats.org/officeDocument/2006/relationships" xmlns:p="http://schemas.openxmlformats.org/presentationml/2006/main" showMasterSp="0" showMasterPhAnim="0">
   <p:cSld>
     <p:spTree>
@@ -7790,7 +10956,7 @@
 </p:notes>
 </file>
 
-<file path=ppt/notesSlides/notesSlide11.xml><?xml version="1.0" encoding="utf-8"?>
+<file path=ppt/notesSlides/notesSlide12.xml><?xml version="1.0" encoding="utf-8"?>
 <p:notes xmlns:a="http://schemas.openxmlformats.org/drawingml/2006/main" xmlns:r="http://schemas.openxmlformats.org/officeDocument/2006/relationships" xmlns:p="http://schemas.openxmlformats.org/presentationml/2006/main" showMasterSp="0" showMasterPhAnim="0">
   <p:cSld>
     <p:spTree>
@@ -7912,7 +11078,7 @@
 </p:notes>
 </file>
 
-<file path=ppt/notesSlides/notesSlide12.xml><?xml version="1.0" encoding="utf-8"?>
+<file path=ppt/notesSlides/notesSlide13.xml><?xml version="1.0" encoding="utf-8"?>
 <p:notes xmlns:a="http://schemas.openxmlformats.org/drawingml/2006/main" xmlns:r="http://schemas.openxmlformats.org/officeDocument/2006/relationships" xmlns:p="http://schemas.openxmlformats.org/presentationml/2006/main" showMasterSp="0" showMasterPhAnim="0">
   <p:cSld>
     <p:spTree>
@@ -8034,7 +11200,7 @@
 </p:notes>
 </file>
 
-<file path=ppt/notesSlides/notesSlide13.xml><?xml version="1.0" encoding="utf-8"?>
+<file path=ppt/notesSlides/notesSlide14.xml><?xml version="1.0" encoding="utf-8"?>
 <p:notes xmlns:a="http://schemas.openxmlformats.org/drawingml/2006/main" xmlns:r="http://schemas.openxmlformats.org/officeDocument/2006/relationships" xmlns:p="http://schemas.openxmlformats.org/presentationml/2006/main" showMasterSp="0" showMasterPhAnim="0">
   <p:cSld>
     <p:spTree>
@@ -8215,203 +11381,7 @@
               <a:buSzPts val="1400"/>
               <a:buNone/>
             </a:pPr>
-            <a:r>
-              <a:rPr lang="en-US" dirty="0"/>
-              <a:t>We have chosen India as our host Country .</a:t>
-            </a:r>
-          </a:p>
-          <a:p>
-            <a:pPr marL="0" lvl="0" indent="0" algn="l" rtl="0">
-              <a:lnSpc>
-                <a:spcPct val="100000"/>
-              </a:lnSpc>
-              <a:spcBef>
-                <a:spcPts val="0"/>
-              </a:spcBef>
-              <a:spcAft>
-                <a:spcPts val="0"/>
-              </a:spcAft>
-              <a:buSzPts val="1400"/>
-              <a:buNone/>
-            </a:pPr>
-            <a:endParaRPr lang="en-US" dirty="0"/>
-          </a:p>
-          <a:p>
-            <a:pPr marL="0" lvl="0" indent="0" algn="l" rtl="0">
-              <a:lnSpc>
-                <a:spcPct val="100000"/>
-              </a:lnSpc>
-              <a:spcBef>
-                <a:spcPts val="0"/>
-              </a:spcBef>
-              <a:spcAft>
-                <a:spcPts val="0"/>
-              </a:spcAft>
-              <a:buSzPts val="1400"/>
-              <a:buNone/>
-            </a:pPr>
-            <a:r>
-              <a:rPr lang="en-US" dirty="0"/>
-              <a:t>As of 2026, India is the world’s most populous country overtaking China. ~1.47b people </a:t>
-            </a:r>
-          </a:p>
-          <a:p>
-            <a:pPr marL="0" lvl="0" indent="0" algn="l" rtl="0">
-              <a:lnSpc>
-                <a:spcPct val="100000"/>
-              </a:lnSpc>
-              <a:spcBef>
-                <a:spcPts val="0"/>
-              </a:spcBef>
-              <a:spcAft>
-                <a:spcPts val="0"/>
-              </a:spcAft>
-              <a:buSzPts val="1400"/>
-              <a:buNone/>
-            </a:pPr>
-            <a:endParaRPr lang="en-US" dirty="0"/>
-          </a:p>
-          <a:p>
-            <a:pPr marL="0" lvl="0" indent="0" algn="l" rtl="0">
-              <a:lnSpc>
-                <a:spcPct val="100000"/>
-              </a:lnSpc>
-              <a:spcBef>
-                <a:spcPts val="0"/>
-              </a:spcBef>
-              <a:spcAft>
-                <a:spcPts val="0"/>
-              </a:spcAft>
-              <a:buSzPts val="1400"/>
-              <a:buNone/>
-            </a:pPr>
-            <a:r>
-              <a:rPr lang="en-US" dirty="0"/>
-              <a:t>4.2% unemployment rate is considered relatively low </a:t>
-            </a:r>
-            <a:r>
-              <a:rPr lang="en-US" dirty="0" err="1"/>
-              <a:t>esp</a:t>
-            </a:r>
-            <a:r>
-              <a:rPr lang="en-US" dirty="0"/>
-              <a:t> for a country as large as India. </a:t>
-            </a:r>
-          </a:p>
-          <a:p>
-            <a:pPr marL="0" lvl="0" indent="0" algn="l" rtl="0">
-              <a:lnSpc>
-                <a:spcPct val="100000"/>
-              </a:lnSpc>
-              <a:spcBef>
-                <a:spcPts val="0"/>
-              </a:spcBef>
-              <a:spcAft>
-                <a:spcPts val="0"/>
-              </a:spcAft>
-              <a:buSzPts val="1400"/>
-              <a:buNone/>
-            </a:pPr>
-            <a:endParaRPr lang="en-US" dirty="0"/>
-          </a:p>
-          <a:p>
-            <a:pPr marL="0" lvl="0" indent="0" algn="l" rtl="0">
-              <a:lnSpc>
-                <a:spcPct val="100000"/>
-              </a:lnSpc>
-              <a:spcBef>
-                <a:spcPts val="0"/>
-              </a:spcBef>
-              <a:spcAft>
-                <a:spcPts val="0"/>
-              </a:spcAft>
-              <a:buSzPts val="1400"/>
-              <a:buNone/>
-            </a:pPr>
-            <a:r>
-              <a:rPr lang="en-US" dirty="0"/>
-              <a:t>India has a trade openness of 46.2%  which means India’s total import and export make up 46.2% of its GDP. This suggests it has significant integration with the global economy. </a:t>
-            </a:r>
-          </a:p>
-          <a:p>
-            <a:pPr marL="0" lvl="0" indent="0" algn="l" rtl="0">
-              <a:lnSpc>
-                <a:spcPct val="100000"/>
-              </a:lnSpc>
-              <a:spcBef>
-                <a:spcPts val="0"/>
-              </a:spcBef>
-              <a:spcAft>
-                <a:spcPts val="0"/>
-              </a:spcAft>
-              <a:buSzPts val="1400"/>
-              <a:buNone/>
-            </a:pPr>
-            <a:endParaRPr lang="en-US" dirty="0"/>
-          </a:p>
-          <a:p>
-            <a:pPr marL="0" lvl="0" indent="0" algn="l" rtl="0">
-              <a:lnSpc>
-                <a:spcPct val="100000"/>
-              </a:lnSpc>
-              <a:spcBef>
-                <a:spcPts val="0"/>
-              </a:spcBef>
-              <a:spcAft>
-                <a:spcPts val="0"/>
-              </a:spcAft>
-              <a:buSzPts val="1400"/>
-              <a:buNone/>
-            </a:pPr>
-            <a:endParaRPr lang="en-US" dirty="0"/>
-          </a:p>
-          <a:p>
-            <a:pPr marL="0" lvl="0" indent="0" algn="l" rtl="0">
-              <a:lnSpc>
-                <a:spcPct val="100000"/>
-              </a:lnSpc>
-              <a:spcBef>
-                <a:spcPts val="0"/>
-              </a:spcBef>
-              <a:spcAft>
-                <a:spcPts val="0"/>
-              </a:spcAft>
-              <a:buSzPts val="1400"/>
-              <a:buNone/>
-            </a:pPr>
-            <a:endParaRPr lang="en-US" dirty="0"/>
-          </a:p>
-          <a:p>
-            <a:pPr marL="0" lvl="0" indent="0" algn="l" rtl="0">
-              <a:lnSpc>
-                <a:spcPct val="100000"/>
-              </a:lnSpc>
-              <a:spcBef>
-                <a:spcPts val="0"/>
-              </a:spcBef>
-              <a:spcAft>
-                <a:spcPts val="0"/>
-              </a:spcAft>
-              <a:buSzPts val="1400"/>
-              <a:buNone/>
-            </a:pPr>
-            <a:endParaRPr lang="en-US" dirty="0"/>
-          </a:p>
-          <a:p>
-            <a:pPr marL="0" lvl="0" indent="0" algn="l" rtl="0">
-              <a:lnSpc>
-                <a:spcPct val="100000"/>
-              </a:lnSpc>
-              <a:spcBef>
-                <a:spcPts val="0"/>
-              </a:spcBef>
-              <a:spcAft>
-                <a:spcPts val="0"/>
-              </a:spcAft>
-              <a:buSzPts val="1400"/>
-              <a:buNone/>
-            </a:pPr>
-            <a:endParaRPr dirty="0"/>
+            <a:endParaRPr/>
           </a:p>
         </p:txBody>
       </p:sp>
@@ -8584,236 +11554,7 @@
               <a:buSzPts val="1400"/>
               <a:buNone/>
             </a:pPr>
-            <a:r>
-              <a:rPr lang="en-US" dirty="0"/>
-              <a:t>This is a stacked column chart of employment by sector in India from 1991 to 2025 (more than 30 years of data)</a:t>
-            </a:r>
-          </a:p>
-          <a:p>
-            <a:pPr marL="0" lvl="0" indent="0" algn="l" rtl="0">
-              <a:lnSpc>
-                <a:spcPct val="100000"/>
-              </a:lnSpc>
-              <a:spcBef>
-                <a:spcPts val="0"/>
-              </a:spcBef>
-              <a:spcAft>
-                <a:spcPts val="0"/>
-              </a:spcAft>
-              <a:buSzPts val="1400"/>
-              <a:buNone/>
-            </a:pPr>
-            <a:endParaRPr lang="en-US" dirty="0"/>
-          </a:p>
-          <a:p>
-            <a:pPr marL="0" lvl="0" indent="0" algn="l" rtl="0">
-              <a:lnSpc>
-                <a:spcPct val="100000"/>
-              </a:lnSpc>
-              <a:spcBef>
-                <a:spcPts val="0"/>
-              </a:spcBef>
-              <a:spcAft>
-                <a:spcPts val="0"/>
-              </a:spcAft>
-              <a:buSzPts val="1400"/>
-              <a:buNone/>
-            </a:pPr>
-            <a:r>
-              <a:rPr lang="en-US" dirty="0"/>
-              <a:t>So the orange bar = employment in agriculture, green bar = employment in industry, blue bar = employment in services</a:t>
-            </a:r>
-          </a:p>
-          <a:p>
-            <a:pPr marL="0" lvl="0" indent="0" algn="l" rtl="0">
-              <a:lnSpc>
-                <a:spcPct val="100000"/>
-              </a:lnSpc>
-              <a:spcBef>
-                <a:spcPts val="0"/>
-              </a:spcBef>
-              <a:spcAft>
-                <a:spcPts val="0"/>
-              </a:spcAft>
-              <a:buSzPts val="1400"/>
-              <a:buNone/>
-            </a:pPr>
-            <a:endParaRPr lang="en-US" dirty="0"/>
-          </a:p>
-          <a:p>
-            <a:pPr marL="0" lvl="0" indent="0" algn="l" rtl="0">
-              <a:lnSpc>
-                <a:spcPct val="100000"/>
-              </a:lnSpc>
-              <a:spcBef>
-                <a:spcPts val="0"/>
-              </a:spcBef>
-              <a:spcAft>
-                <a:spcPts val="0"/>
-              </a:spcAft>
-              <a:buSzPts val="1400"/>
-              <a:buNone/>
-            </a:pPr>
-            <a:r>
-              <a:rPr lang="en-US" dirty="0"/>
-              <a:t>Over the years, we see a very clear downtrend in employment in agriculture </a:t>
-            </a:r>
-          </a:p>
-          <a:p>
-            <a:pPr marL="0" lvl="0" indent="0" algn="l" rtl="0">
-              <a:lnSpc>
-                <a:spcPct val="100000"/>
-              </a:lnSpc>
-              <a:spcBef>
-                <a:spcPts val="0"/>
-              </a:spcBef>
-              <a:spcAft>
-                <a:spcPts val="0"/>
-              </a:spcAft>
-              <a:buSzPts val="1400"/>
-              <a:buNone/>
-            </a:pPr>
-            <a:endParaRPr lang="en-US" dirty="0"/>
-          </a:p>
-          <a:p>
-            <a:pPr marL="0" lvl="0" indent="0" algn="l" rtl="0">
-              <a:lnSpc>
-                <a:spcPct val="100000"/>
-              </a:lnSpc>
-              <a:spcBef>
-                <a:spcPts val="0"/>
-              </a:spcBef>
-              <a:spcAft>
-                <a:spcPts val="0"/>
-              </a:spcAft>
-              <a:buSzPts val="1400"/>
-              <a:buNone/>
-            </a:pPr>
-            <a:r>
-              <a:rPr lang="en-US" dirty="0"/>
-              <a:t>Especially in 2010, there is a very sharp drop in employment in agriculture and employment in services and industry gained a large share. </a:t>
-            </a:r>
-          </a:p>
-          <a:p>
-            <a:pPr marL="0" lvl="0" indent="0" algn="l" rtl="0">
-              <a:lnSpc>
-                <a:spcPct val="100000"/>
-              </a:lnSpc>
-              <a:spcBef>
-                <a:spcPts val="0"/>
-              </a:spcBef>
-              <a:spcAft>
-                <a:spcPts val="0"/>
-              </a:spcAft>
-              <a:buSzPts val="1400"/>
-              <a:buNone/>
-            </a:pPr>
-            <a:endParaRPr lang="en-US" dirty="0"/>
-          </a:p>
-          <a:p>
-            <a:pPr marL="0" lvl="0" indent="0" algn="l" rtl="0">
-              <a:lnSpc>
-                <a:spcPct val="100000"/>
-              </a:lnSpc>
-              <a:spcBef>
-                <a:spcPts val="0"/>
-              </a:spcBef>
-              <a:spcAft>
-                <a:spcPts val="0"/>
-              </a:spcAft>
-              <a:buSzPts val="1400"/>
-              <a:buNone/>
-            </a:pPr>
-            <a:r>
-              <a:rPr lang="en-US" dirty="0"/>
-              <a:t>So over the years, employment in services actually gained a larger share compared to employment in manufacturing. </a:t>
-            </a:r>
-          </a:p>
-          <a:p>
-            <a:pPr marL="0" lvl="0" indent="0" algn="l" rtl="0">
-              <a:lnSpc>
-                <a:spcPct val="100000"/>
-              </a:lnSpc>
-              <a:spcBef>
-                <a:spcPts val="0"/>
-              </a:spcBef>
-              <a:spcAft>
-                <a:spcPts val="0"/>
-              </a:spcAft>
-              <a:buSzPts val="1400"/>
-              <a:buNone/>
-            </a:pPr>
-            <a:endParaRPr lang="en-US" dirty="0"/>
-          </a:p>
-          <a:p>
-            <a:pPr marL="0" lvl="0" indent="0" algn="l" rtl="0">
-              <a:lnSpc>
-                <a:spcPct val="100000"/>
-              </a:lnSpc>
-              <a:spcBef>
-                <a:spcPts val="0"/>
-              </a:spcBef>
-              <a:spcAft>
-                <a:spcPts val="0"/>
-              </a:spcAft>
-              <a:buSzPts val="1400"/>
-              <a:buNone/>
-            </a:pPr>
-            <a:r>
-              <a:rPr lang="en-US" dirty="0"/>
-              <a:t>There is growth in employment in manufacturing but not as large as employment in services.</a:t>
-            </a:r>
-          </a:p>
-          <a:p>
-            <a:pPr marL="0" lvl="0" indent="0" algn="l" rtl="0">
-              <a:lnSpc>
-                <a:spcPct val="100000"/>
-              </a:lnSpc>
-              <a:spcBef>
-                <a:spcPts val="0"/>
-              </a:spcBef>
-              <a:spcAft>
-                <a:spcPts val="0"/>
-              </a:spcAft>
-              <a:buSzPts val="1400"/>
-              <a:buNone/>
-            </a:pPr>
-            <a:endParaRPr lang="en-US" dirty="0"/>
-          </a:p>
-          <a:p>
-            <a:pPr marL="0" lvl="0" indent="0" algn="l" rtl="0">
-              <a:lnSpc>
-                <a:spcPct val="100000"/>
-              </a:lnSpc>
-              <a:spcBef>
-                <a:spcPts val="0"/>
-              </a:spcBef>
-              <a:spcAft>
-                <a:spcPts val="0"/>
-              </a:spcAft>
-              <a:buSzPts val="1400"/>
-              <a:buNone/>
-            </a:pPr>
-            <a:r>
-              <a:rPr lang="en-US" dirty="0"/>
-              <a:t>So in conclusion, India is transitioning towards a service-led economy rather than manufacturing economy </a:t>
-            </a:r>
-          </a:p>
-          <a:p>
-            <a:pPr marL="0" lvl="0" indent="0" algn="l" rtl="0">
-              <a:lnSpc>
-                <a:spcPct val="100000"/>
-              </a:lnSpc>
-              <a:spcBef>
-                <a:spcPts val="0"/>
-              </a:spcBef>
-              <a:spcAft>
-                <a:spcPts val="0"/>
-              </a:spcAft>
-              <a:buSzPts val="1400"/>
-              <a:buNone/>
-            </a:pPr>
-            <a:endParaRPr lang="en-US" dirty="0"/>
+            <a:endParaRPr/>
           </a:p>
         </p:txBody>
       </p:sp>
@@ -8972,271 +11713,6 @@
           </a:bodyPr>
           <a:lstStyle/>
           <a:p>
-            <a:pPr marL="0" lvl="0" indent="0" algn="l" rtl="0">
-              <a:lnSpc>
-                <a:spcPct val="100000"/>
-              </a:lnSpc>
-              <a:spcBef>
-                <a:spcPts val="0"/>
-              </a:spcBef>
-              <a:spcAft>
-                <a:spcPts val="0"/>
-              </a:spcAft>
-              <a:buSzPts val="1400"/>
-              <a:buNone/>
-            </a:pPr>
-            <a:r>
-              <a:rPr lang="en-US" b="1" dirty="0"/>
-              <a:t>Trendline and Relationship:</a:t>
-            </a:r>
-            <a:br>
-              <a:rPr lang="en-US" dirty="0"/>
-            </a:br>
-            <a:endParaRPr lang="en-US" dirty="0"/>
-          </a:p>
-          <a:p>
-            <a:pPr marL="0" lvl="0" indent="0" algn="l" rtl="0">
-              <a:lnSpc>
-                <a:spcPct val="100000"/>
-              </a:lnSpc>
-              <a:spcBef>
-                <a:spcPts val="0"/>
-              </a:spcBef>
-              <a:spcAft>
-                <a:spcPts val="0"/>
-              </a:spcAft>
-              <a:buSzPts val="1400"/>
-              <a:buNone/>
-            </a:pPr>
-            <a:r>
-              <a:rPr lang="en-US" dirty="0"/>
-              <a:t>This is a chart to determine the relationship between manufacturing growth </a:t>
-            </a:r>
-            <a:r>
-              <a:rPr lang="en-US" dirty="0" err="1"/>
-              <a:t>labour</a:t>
-            </a:r>
-            <a:r>
-              <a:rPr lang="en-US" dirty="0"/>
-              <a:t> productivity.</a:t>
-            </a:r>
-          </a:p>
-          <a:p>
-            <a:pPr marL="0" lvl="0" indent="0" algn="l" rtl="0">
-              <a:lnSpc>
-                <a:spcPct val="100000"/>
-              </a:lnSpc>
-              <a:spcBef>
-                <a:spcPts val="0"/>
-              </a:spcBef>
-              <a:spcAft>
-                <a:spcPts val="0"/>
-              </a:spcAft>
-              <a:buSzPts val="1400"/>
-              <a:buNone/>
-            </a:pPr>
-            <a:endParaRPr lang="en-US" dirty="0"/>
-          </a:p>
-          <a:p>
-            <a:pPr marL="0" lvl="0" indent="0" algn="l" rtl="0">
-              <a:lnSpc>
-                <a:spcPct val="100000"/>
-              </a:lnSpc>
-              <a:spcBef>
-                <a:spcPts val="0"/>
-              </a:spcBef>
-              <a:spcAft>
-                <a:spcPts val="0"/>
-              </a:spcAft>
-              <a:buSzPts val="1400"/>
-              <a:buNone/>
-            </a:pPr>
-            <a:r>
-              <a:rPr lang="en-US" dirty="0"/>
-              <a:t>The trendline has a very slight positive slope, indicating a weak positive relationship between </a:t>
-            </a:r>
-            <a:r>
-              <a:rPr lang="en-US" dirty="0" err="1"/>
-              <a:t>labour</a:t>
-            </a:r>
-            <a:r>
-              <a:rPr lang="en-US" dirty="0"/>
-              <a:t> productivity and manufacturing growth in India over the period 1991–2025. </a:t>
-            </a:r>
-            <a:endParaRPr dirty="0"/>
-          </a:p>
-          <a:p>
-            <a:pPr marL="0" lvl="0" indent="0" algn="l" rtl="0">
-              <a:lnSpc>
-                <a:spcPct val="100000"/>
-              </a:lnSpc>
-              <a:spcBef>
-                <a:spcPts val="0"/>
-              </a:spcBef>
-              <a:spcAft>
-                <a:spcPts val="0"/>
-              </a:spcAft>
-              <a:buSzPts val="1400"/>
-              <a:buNone/>
-            </a:pPr>
-            <a:r>
-              <a:rPr lang="en-US" dirty="0"/>
-              <a:t>However, the data points are widely scattered around the trendline, showing that increases in </a:t>
-            </a:r>
-            <a:r>
-              <a:rPr lang="en-US" dirty="0" err="1"/>
-              <a:t>labour</a:t>
-            </a:r>
-            <a:r>
-              <a:rPr lang="en-US" dirty="0"/>
-              <a:t> productivity are not consistently associated with increases in manufacturing growth. </a:t>
-            </a:r>
-            <a:endParaRPr dirty="0"/>
-          </a:p>
-          <a:p>
-            <a:pPr marL="0" lvl="0" indent="0" algn="l" rtl="0">
-              <a:lnSpc>
-                <a:spcPct val="100000"/>
-              </a:lnSpc>
-              <a:spcBef>
-                <a:spcPts val="0"/>
-              </a:spcBef>
-              <a:spcAft>
-                <a:spcPts val="0"/>
-              </a:spcAft>
-              <a:buSzPts val="1400"/>
-              <a:buNone/>
-            </a:pPr>
-            <a:r>
-              <a:rPr lang="en-US" dirty="0"/>
-              <a:t>This is further supported by the very low coefficient of determination (</a:t>
-            </a:r>
-            <a:r>
-              <a:rPr lang="en-US" b="1" dirty="0"/>
-              <a:t>R² = 0.0015</a:t>
-            </a:r>
-            <a:r>
-              <a:rPr lang="en-US" dirty="0"/>
-              <a:t>), which means that </a:t>
-            </a:r>
-            <a:r>
-              <a:rPr lang="en-US" dirty="0" err="1"/>
-              <a:t>labour</a:t>
-            </a:r>
-            <a:r>
-              <a:rPr lang="en-US" dirty="0"/>
-              <a:t> productivity explains only </a:t>
-            </a:r>
-            <a:r>
-              <a:rPr lang="en-US" b="1" dirty="0"/>
-              <a:t>0.15%</a:t>
-            </a:r>
-            <a:r>
-              <a:rPr lang="en-US" dirty="0"/>
-              <a:t> of the variation in manufacturing growth. </a:t>
-            </a:r>
-            <a:endParaRPr dirty="0"/>
-          </a:p>
-          <a:p>
-            <a:pPr marL="0" lvl="0" indent="0" algn="l" rtl="0">
-              <a:lnSpc>
-                <a:spcPct val="100000"/>
-              </a:lnSpc>
-              <a:spcBef>
-                <a:spcPts val="0"/>
-              </a:spcBef>
-              <a:spcAft>
-                <a:spcPts val="0"/>
-              </a:spcAft>
-              <a:buSzPts val="1400"/>
-              <a:buNone/>
-            </a:pPr>
-            <a:r>
-              <a:rPr lang="en-US" dirty="0"/>
-              <a:t>Therefore, the relationship between the two variables is extremely weak.</a:t>
-            </a:r>
-            <a:endParaRPr dirty="0"/>
-          </a:p>
-          <a:p>
-            <a:pPr marL="0" lvl="0" indent="0" algn="l" rtl="0">
-              <a:lnSpc>
-                <a:spcPct val="100000"/>
-              </a:lnSpc>
-              <a:spcBef>
-                <a:spcPts val="0"/>
-              </a:spcBef>
-              <a:spcAft>
-                <a:spcPts val="0"/>
-              </a:spcAft>
-              <a:buSzPts val="1400"/>
-              <a:buNone/>
-            </a:pPr>
-            <a:endParaRPr b="1" dirty="0"/>
-          </a:p>
-          <a:p>
-            <a:pPr marL="0" lvl="0" indent="0" algn="l" rtl="0">
-              <a:lnSpc>
-                <a:spcPct val="100000"/>
-              </a:lnSpc>
-              <a:spcBef>
-                <a:spcPts val="0"/>
-              </a:spcBef>
-              <a:spcAft>
-                <a:spcPts val="0"/>
-              </a:spcAft>
-              <a:buSzPts val="1400"/>
-              <a:buNone/>
-            </a:pPr>
-            <a:r>
-              <a:rPr lang="en-US" b="1" dirty="0"/>
-              <a:t>Prediction:</a:t>
-            </a:r>
-            <a:br>
-              <a:rPr lang="en-US" dirty="0"/>
-            </a:br>
-            <a:r>
-              <a:rPr lang="en-US" dirty="0"/>
-              <a:t>Because the trendline provides a very poor fit to the data, it has </a:t>
-            </a:r>
-            <a:r>
-              <a:rPr lang="en-US" b="1" dirty="0"/>
-              <a:t>little predictive power</a:t>
-            </a:r>
-            <a:r>
-              <a:rPr lang="en-US" dirty="0"/>
-              <a:t>. Using </a:t>
-            </a:r>
-            <a:r>
-              <a:rPr lang="en-US" dirty="0" err="1"/>
-              <a:t>labour</a:t>
-            </a:r>
-            <a:r>
-              <a:rPr lang="en-US" dirty="0"/>
-              <a:t> productivity alone to predict manufacturing growth would result in unreliable predictions. </a:t>
-            </a:r>
-            <a:endParaRPr dirty="0"/>
-          </a:p>
-          <a:p>
-            <a:pPr marL="0" lvl="0" indent="0" algn="l" rtl="0">
-              <a:lnSpc>
-                <a:spcPct val="100000"/>
-              </a:lnSpc>
-              <a:spcBef>
-                <a:spcPts val="0"/>
-              </a:spcBef>
-              <a:spcAft>
-                <a:spcPts val="0"/>
-              </a:spcAft>
-              <a:buSzPts val="1400"/>
-              <a:buNone/>
-            </a:pPr>
-            <a:r>
-              <a:rPr lang="en-US" dirty="0"/>
-              <a:t>This suggests that manufacturing growth in India is influenced by many other factors, such as </a:t>
-            </a:r>
-            <a:endParaRPr dirty="0"/>
-          </a:p>
-          <a:p>
             <a:pPr marL="285750" lvl="0" indent="-285750" algn="l" rtl="0">
               <a:lnSpc>
                 <a:spcPct val="100000"/>
@@ -9254,67 +11730,7 @@
               <a:buFont typeface="Arial"/>
               <a:buChar char="-"/>
             </a:pPr>
-            <a:r>
-              <a:rPr lang="en-US" dirty="0"/>
-              <a:t>Economic reforms (1991 liberalization)</a:t>
-            </a:r>
-            <a:endParaRPr dirty="0"/>
-          </a:p>
-          <a:p>
-            <a:pPr marL="285750" lvl="0" indent="-285750" algn="l" rtl="0">
-              <a:lnSpc>
-                <a:spcPct val="100000"/>
-              </a:lnSpc>
-              <a:spcBef>
-                <a:spcPts val="0"/>
-              </a:spcBef>
-              <a:spcAft>
-                <a:spcPts val="0"/>
-              </a:spcAft>
-              <a:buClr>
-                <a:schemeClr val="dk1"/>
-              </a:buClr>
-              <a:buSzPts val="1200"/>
-              <a:buFont typeface="Arial"/>
-              <a:buChar char="-"/>
-            </a:pPr>
-            <a:r>
-              <a:rPr lang="en-US" dirty="0"/>
-              <a:t>Foreign direct investment (FDI)</a:t>
-            </a:r>
-            <a:endParaRPr dirty="0"/>
-          </a:p>
-          <a:p>
-            <a:pPr marL="285750" lvl="0" indent="-285750" algn="l" rtl="0">
-              <a:lnSpc>
-                <a:spcPct val="100000"/>
-              </a:lnSpc>
-              <a:spcBef>
-                <a:spcPts val="0"/>
-              </a:spcBef>
-              <a:spcAft>
-                <a:spcPts val="0"/>
-              </a:spcAft>
-              <a:buClr>
-                <a:schemeClr val="dk1"/>
-              </a:buClr>
-              <a:buSzPts val="1200"/>
-              <a:buFont typeface="Arial"/>
-              <a:buChar char="-"/>
-            </a:pPr>
-            <a:r>
-              <a:rPr lang="en-US" dirty="0"/>
-              <a:t>Government initiatives (e.g., </a:t>
-            </a:r>
-            <a:r>
-              <a:rPr lang="en-US" i="1" dirty="0"/>
-              <a:t>Make in India</a:t>
-            </a:r>
-            <a:r>
-              <a:rPr lang="en-US" dirty="0"/>
-              <a:t>)</a:t>
-            </a:r>
-            <a:endParaRPr dirty="0"/>
+            <a:endParaRPr/>
           </a:p>
         </p:txBody>
       </p:sp>
@@ -9486,312 +11902,7 @@
               <a:buSzPts val="1400"/>
               <a:buNone/>
             </a:pPr>
-            <a:r>
-              <a:rPr lang="en-US" b="1" dirty="0"/>
-              <a:t>Trendline and Relationship:</a:t>
-            </a:r>
-            <a:br>
-              <a:rPr lang="en-US" dirty="0"/>
-            </a:br>
-            <a:endParaRPr lang="en-US" dirty="0"/>
-          </a:p>
-          <a:p>
-            <a:pPr marL="0" marR="0" lvl="0" indent="0" algn="l" defTabSz="914400" rtl="0" eaLnBrk="1" fontAlgn="auto" latinLnBrk="0" hangingPunct="1">
-              <a:lnSpc>
-                <a:spcPct val="100000"/>
-              </a:lnSpc>
-              <a:spcBef>
-                <a:spcPts val="0"/>
-              </a:spcBef>
-              <a:spcAft>
-                <a:spcPts val="0"/>
-              </a:spcAft>
-              <a:buClr>
-                <a:srgbClr val="000000"/>
-              </a:buClr>
-              <a:buSzPts val="1400"/>
-              <a:buFont typeface="Arial"/>
-              <a:buNone/>
-              <a:tabLst/>
-              <a:defRPr/>
-            </a:pPr>
-            <a:r>
-              <a:rPr lang="en-US" dirty="0"/>
-              <a:t>This is a chart to determine the relationship between manufacturing growth and capital per worker growth </a:t>
-            </a:r>
-          </a:p>
-          <a:p>
-            <a:pPr marL="0" marR="0" lvl="0" indent="0" algn="l" defTabSz="914400" rtl="0" eaLnBrk="1" fontAlgn="auto" latinLnBrk="0" hangingPunct="1">
-              <a:lnSpc>
-                <a:spcPct val="100000"/>
-              </a:lnSpc>
-              <a:spcBef>
-                <a:spcPts val="0"/>
-              </a:spcBef>
-              <a:spcAft>
-                <a:spcPts val="0"/>
-              </a:spcAft>
-              <a:buClr>
-                <a:srgbClr val="000000"/>
-              </a:buClr>
-              <a:buSzPts val="1400"/>
-              <a:buFont typeface="Arial"/>
-              <a:buNone/>
-              <a:tabLst/>
-              <a:defRPr/>
-            </a:pPr>
-            <a:endParaRPr lang="en-US" dirty="0"/>
-          </a:p>
-          <a:p>
-            <a:pPr marL="0" lvl="0" indent="0" algn="l" rtl="0">
-              <a:lnSpc>
-                <a:spcPct val="100000"/>
-              </a:lnSpc>
-              <a:spcBef>
-                <a:spcPts val="0"/>
-              </a:spcBef>
-              <a:spcAft>
-                <a:spcPts val="0"/>
-              </a:spcAft>
-              <a:buSzPts val="1400"/>
-              <a:buNone/>
-            </a:pPr>
-            <a:r>
-              <a:rPr lang="en-US" dirty="0"/>
-              <a:t>The trendline has a slight positive slope, indicating a weak positive relationship between the growth of capital per worker and manufacturing growth in India over the period 1992–2025. </a:t>
-            </a:r>
-            <a:endParaRPr dirty="0"/>
-          </a:p>
-          <a:p>
-            <a:pPr marL="0" lvl="0" indent="0" algn="l" rtl="0">
-              <a:lnSpc>
-                <a:spcPct val="100000"/>
-              </a:lnSpc>
-              <a:spcBef>
-                <a:spcPts val="0"/>
-              </a:spcBef>
-              <a:spcAft>
-                <a:spcPts val="0"/>
-              </a:spcAft>
-              <a:buSzPts val="1400"/>
-              <a:buNone/>
-            </a:pPr>
-            <a:r>
-              <a:rPr lang="en-US" dirty="0"/>
-              <a:t>However, the data points are widely scattered around the trendline, suggesting that increases in the growth of capital per worker are not consistently associated with increases in manufacturing growth. </a:t>
-            </a:r>
-            <a:endParaRPr dirty="0"/>
-          </a:p>
-          <a:p>
-            <a:pPr marL="0" lvl="0" indent="0" algn="l" rtl="0">
-              <a:lnSpc>
-                <a:spcPct val="100000"/>
-              </a:lnSpc>
-              <a:spcBef>
-                <a:spcPts val="0"/>
-              </a:spcBef>
-              <a:spcAft>
-                <a:spcPts val="0"/>
-              </a:spcAft>
-              <a:buSzPts val="1400"/>
-              <a:buNone/>
-            </a:pPr>
-            <a:r>
-              <a:rPr lang="en-US" dirty="0"/>
-              <a:t>This is supported by the low coefficient of determination (</a:t>
-            </a:r>
-            <a:r>
-              <a:rPr lang="en-US" b="1" dirty="0"/>
-              <a:t>R² = 0.0211</a:t>
-            </a:r>
-            <a:r>
-              <a:rPr lang="en-US" dirty="0"/>
-              <a:t>), which means that the growth of capital per worker explains only </a:t>
-            </a:r>
-            <a:r>
-              <a:rPr lang="en-US" b="1" dirty="0"/>
-              <a:t>2.11%</a:t>
-            </a:r>
-            <a:r>
-              <a:rPr lang="en-US" dirty="0"/>
-              <a:t> of the variation in manufacturing growth. </a:t>
-            </a:r>
-            <a:endParaRPr dirty="0"/>
-          </a:p>
-          <a:p>
-            <a:pPr marL="0" lvl="0" indent="0" algn="l" rtl="0">
-              <a:lnSpc>
-                <a:spcPct val="100000"/>
-              </a:lnSpc>
-              <a:spcBef>
-                <a:spcPts val="0"/>
-              </a:spcBef>
-              <a:spcAft>
-                <a:spcPts val="0"/>
-              </a:spcAft>
-              <a:buSzPts val="1400"/>
-              <a:buNone/>
-            </a:pPr>
-            <a:r>
-              <a:rPr lang="en-US" dirty="0"/>
-              <a:t>Therefore, the relationship between the two variables is </a:t>
-            </a:r>
-            <a:r>
-              <a:rPr lang="en-US" b="1" dirty="0"/>
-              <a:t>extremely weak</a:t>
-            </a:r>
-            <a:r>
-              <a:rPr lang="en-US" dirty="0"/>
-              <a:t>.</a:t>
-            </a:r>
-            <a:endParaRPr dirty="0"/>
-          </a:p>
-          <a:p>
-            <a:pPr marL="0" lvl="0" indent="0" algn="l" rtl="0">
-              <a:lnSpc>
-                <a:spcPct val="100000"/>
-              </a:lnSpc>
-              <a:spcBef>
-                <a:spcPts val="0"/>
-              </a:spcBef>
-              <a:spcAft>
-                <a:spcPts val="0"/>
-              </a:spcAft>
-              <a:buSzPts val="1400"/>
-              <a:buNone/>
-            </a:pPr>
-            <a:endParaRPr b="1" dirty="0"/>
-          </a:p>
-          <a:p>
-            <a:pPr marL="0" lvl="0" indent="0" algn="l" rtl="0">
-              <a:lnSpc>
-                <a:spcPct val="100000"/>
-              </a:lnSpc>
-              <a:spcBef>
-                <a:spcPts val="0"/>
-              </a:spcBef>
-              <a:spcAft>
-                <a:spcPts val="0"/>
-              </a:spcAft>
-              <a:buSzPts val="1400"/>
-              <a:buNone/>
-            </a:pPr>
-            <a:r>
-              <a:rPr lang="en-US" b="1" dirty="0"/>
-              <a:t>Prediction:</a:t>
-            </a:r>
-            <a:br>
-              <a:rPr lang="en-US" dirty="0"/>
-            </a:br>
-            <a:r>
-              <a:rPr lang="en-US" dirty="0"/>
-              <a:t>Because the trendline provides a poor fit to the data, it has </a:t>
-            </a:r>
-            <a:r>
-              <a:rPr lang="en-US" b="1" dirty="0"/>
-              <a:t>little predictive power</a:t>
-            </a:r>
-            <a:r>
-              <a:rPr lang="en-US" dirty="0"/>
-              <a:t>. Using the growth of capital per worker alone to predict manufacturing growth would result in unreliable predictions. This suggests that manufacturing growth in India is influenced by many other factors, such as:</a:t>
-            </a:r>
-            <a:endParaRPr dirty="0"/>
-          </a:p>
-          <a:p>
-            <a:pPr marL="285750" lvl="0" indent="-285750" algn="l" rtl="0">
-              <a:lnSpc>
-                <a:spcPct val="100000"/>
-              </a:lnSpc>
-              <a:spcBef>
-                <a:spcPts val="0"/>
-              </a:spcBef>
-              <a:spcAft>
-                <a:spcPts val="0"/>
-              </a:spcAft>
-              <a:buClr>
-                <a:schemeClr val="dk1"/>
-              </a:buClr>
-              <a:buSzPts val="1200"/>
-              <a:buFont typeface="Arial"/>
-              <a:buChar char="-"/>
-            </a:pPr>
-            <a:r>
-              <a:rPr lang="en-US" dirty="0"/>
-              <a:t>Economic reforms (1991 liberalization)</a:t>
-            </a:r>
-            <a:endParaRPr dirty="0"/>
-          </a:p>
-          <a:p>
-            <a:pPr marL="285750" lvl="0" indent="-285750" algn="l" rtl="0">
-              <a:lnSpc>
-                <a:spcPct val="100000"/>
-              </a:lnSpc>
-              <a:spcBef>
-                <a:spcPts val="0"/>
-              </a:spcBef>
-              <a:spcAft>
-                <a:spcPts val="0"/>
-              </a:spcAft>
-              <a:buClr>
-                <a:schemeClr val="dk1"/>
-              </a:buClr>
-              <a:buSzPts val="1200"/>
-              <a:buFont typeface="Arial"/>
-              <a:buChar char="-"/>
-            </a:pPr>
-            <a:r>
-              <a:rPr lang="en-US" dirty="0"/>
-              <a:t>Foreign direct investment (FDI)</a:t>
-            </a:r>
-            <a:endParaRPr dirty="0"/>
-          </a:p>
-          <a:p>
-            <a:pPr marL="285750" lvl="0" indent="-285750" algn="l" rtl="0">
-              <a:lnSpc>
-                <a:spcPct val="100000"/>
-              </a:lnSpc>
-              <a:spcBef>
-                <a:spcPts val="0"/>
-              </a:spcBef>
-              <a:spcAft>
-                <a:spcPts val="0"/>
-              </a:spcAft>
-              <a:buClr>
-                <a:schemeClr val="dk1"/>
-              </a:buClr>
-              <a:buSzPts val="1200"/>
-              <a:buFont typeface="Arial"/>
-              <a:buChar char="-"/>
-            </a:pPr>
-            <a:r>
-              <a:rPr lang="en-US" dirty="0"/>
-              <a:t>Government initiatives (e.g., </a:t>
-            </a:r>
-            <a:r>
-              <a:rPr lang="en-US" i="1" dirty="0"/>
-              <a:t>Make in India</a:t>
-            </a:r>
-            <a:r>
-              <a:rPr lang="en-US" dirty="0"/>
-              <a:t>)</a:t>
-            </a:r>
-            <a:endParaRPr dirty="0"/>
-          </a:p>
-          <a:p>
-            <a:pPr marL="0" lvl="0" indent="0" algn="l" rtl="0">
-              <a:lnSpc>
-                <a:spcPct val="100000"/>
-              </a:lnSpc>
-              <a:spcBef>
-                <a:spcPts val="0"/>
-              </a:spcBef>
-              <a:spcAft>
-                <a:spcPts val="0"/>
-              </a:spcAft>
-              <a:buSzPts val="1400"/>
-              <a:buNone/>
-            </a:pPr>
-            <a:endParaRPr dirty="0"/>
+            <a:endParaRPr/>
           </a:p>
         </p:txBody>
       </p:sp>
@@ -10034,7 +12145,7 @@
               <a:buSzPts val="1400"/>
               <a:buNone/>
             </a:pPr>
-            <a:endParaRPr/>
+            <a:endParaRPr dirty="0"/>
           </a:p>
         </p:txBody>
       </p:sp>
@@ -10156,7 +12267,279 @@
               <a:buSzPts val="1400"/>
               <a:buNone/>
             </a:pPr>
-            <a:endParaRPr/>
+            <a:r>
+              <a:rPr lang="en-US" dirty="0"/>
+              <a:t>Source:</a:t>
+            </a:r>
+          </a:p>
+          <a:p>
+            <a:pPr rtl="0"/>
+            <a:endParaRPr lang="en-US" sz="1200" b="0" i="0" u="none" strike="noStrike" cap="none" spc="0" dirty="0">
+              <a:solidFill>
+                <a:schemeClr val="dk1"/>
+              </a:solidFill>
+              <a:effectLst/>
+              <a:latin typeface="Arial"/>
+              <a:ea typeface="Arial"/>
+              <a:cs typeface="Arial"/>
+              <a:sym typeface="Arial"/>
+            </a:endParaRPr>
+          </a:p>
+          <a:p>
+            <a:pPr rtl="0"/>
+            <a:r>
+              <a:rPr lang="en-US" sz="1200" b="0" i="0" u="none" strike="noStrike" cap="none" spc="0" dirty="0">
+                <a:solidFill>
+                  <a:schemeClr val="dk1"/>
+                </a:solidFill>
+                <a:effectLst/>
+                <a:latin typeface="Arial"/>
+                <a:ea typeface="Arial"/>
+                <a:cs typeface="Arial"/>
+                <a:sym typeface="Arial"/>
+              </a:rPr>
+              <a:t>Overview of FDI countries in India</a:t>
+            </a:r>
+          </a:p>
+          <a:p>
+            <a:pPr rtl="0"/>
+            <a:r>
+              <a:rPr lang="en-US" sz="1200" b="0" i="0" u="none" strike="noStrike" cap="none" spc="0" dirty="0">
+                <a:solidFill>
+                  <a:schemeClr val="dk1"/>
+                </a:solidFill>
+                <a:effectLst/>
+                <a:latin typeface="Arial"/>
+                <a:ea typeface="Arial"/>
+                <a:cs typeface="Arial"/>
+                <a:sym typeface="Arial"/>
+              </a:rPr>
+              <a:t>Step 1:</a:t>
+            </a:r>
+          </a:p>
+          <a:p>
+            <a:pPr rtl="0" fontAlgn="b"/>
+            <a:r>
+              <a:rPr lang="en-US" sz="1200" b="0" i="0" u="none" strike="noStrike" cap="none" spc="0" dirty="0">
+                <a:solidFill>
+                  <a:schemeClr val="dk1"/>
+                </a:solidFill>
+                <a:effectLst/>
+                <a:latin typeface="Arial"/>
+                <a:ea typeface="Arial"/>
+                <a:cs typeface="Arial"/>
+                <a:sym typeface="Arial"/>
+              </a:rPr>
+              <a:t>Go to official DPIIT website: https://www.dpiit.gov.in/documents/publications?page=1</a:t>
+            </a:r>
+          </a:p>
+          <a:p>
+            <a:pPr rtl="0"/>
+            <a:r>
+              <a:rPr lang="en-US" sz="1200" b="0" i="0" u="none" strike="noStrike" cap="none" spc="0" dirty="0">
+                <a:solidFill>
+                  <a:schemeClr val="dk1"/>
+                </a:solidFill>
+                <a:effectLst/>
+                <a:latin typeface="Arial"/>
+                <a:ea typeface="Arial"/>
+                <a:cs typeface="Arial"/>
+                <a:sym typeface="Arial"/>
+              </a:rPr>
+              <a:t>Step 2:</a:t>
+            </a:r>
+          </a:p>
+          <a:p>
+            <a:pPr rtl="0" fontAlgn="b"/>
+            <a:r>
+              <a:rPr lang="en-US" sz="1200" b="0" i="0" u="none" strike="noStrike" cap="none" spc="0" dirty="0">
+                <a:solidFill>
+                  <a:schemeClr val="dk1"/>
+                </a:solidFill>
+                <a:effectLst/>
+                <a:latin typeface="Arial"/>
+                <a:ea typeface="Arial"/>
+                <a:cs typeface="Arial"/>
+                <a:sym typeface="Arial"/>
+              </a:rPr>
+              <a:t>Click VIEW ALL on FOREIGN DIRECT INVESTMENT IN INDIA - ANNUAL ISSUE 2025</a:t>
+            </a:r>
+          </a:p>
+          <a:p>
+            <a:pPr rtl="0"/>
+            <a:r>
+              <a:rPr lang="en-US" sz="1200" b="0" i="0" u="none" strike="noStrike" cap="none" spc="0" dirty="0">
+                <a:solidFill>
+                  <a:schemeClr val="dk1"/>
+                </a:solidFill>
+                <a:effectLst/>
+                <a:latin typeface="Arial"/>
+                <a:ea typeface="Arial"/>
+                <a:cs typeface="Arial"/>
+                <a:sym typeface="Arial"/>
+              </a:rPr>
+              <a:t>Step 3:</a:t>
+            </a:r>
+          </a:p>
+          <a:p>
+            <a:pPr rtl="0" fontAlgn="b"/>
+            <a:r>
+              <a:rPr lang="en-US" sz="1200" b="0" i="0" u="none" strike="noStrike" cap="none" spc="0" dirty="0">
+                <a:solidFill>
+                  <a:schemeClr val="dk1"/>
+                </a:solidFill>
+                <a:effectLst/>
+                <a:latin typeface="Arial"/>
+                <a:ea typeface="Arial"/>
+                <a:cs typeface="Arial"/>
+                <a:sym typeface="Arial"/>
+              </a:rPr>
+              <a:t>Scroll down to CHAPTER – III: CUMULATIVEFDI EQUITY INFLOW DATA STATEMENTS (During January 2000 to December 2025)</a:t>
+            </a:r>
+          </a:p>
+          <a:p>
+            <a:pPr rtl="0" fontAlgn="b"/>
+            <a:r>
+              <a:rPr lang="en-US" sz="1200" b="0" i="0" u="none" strike="noStrike" cap="none" spc="0" dirty="0">
+                <a:solidFill>
+                  <a:schemeClr val="dk1"/>
+                </a:solidFill>
+                <a:effectLst/>
+                <a:latin typeface="Arial"/>
+                <a:ea typeface="Arial"/>
+                <a:cs typeface="Arial"/>
+                <a:sym typeface="Arial"/>
+              </a:rPr>
+              <a:t>Click VIEW on 2. Statement on Country-wise / Year-wise</a:t>
+            </a:r>
+          </a:p>
+          <a:p>
+            <a:pPr rtl="0"/>
+            <a:r>
+              <a:rPr lang="en-US" sz="1200" b="0" i="0" u="none" strike="noStrike" cap="none" spc="0" dirty="0">
+                <a:solidFill>
+                  <a:schemeClr val="dk1"/>
+                </a:solidFill>
+                <a:effectLst/>
+                <a:latin typeface="Arial"/>
+                <a:ea typeface="Arial"/>
+                <a:cs typeface="Arial"/>
+                <a:sym typeface="Arial"/>
+              </a:rPr>
+              <a:t>Step 4:</a:t>
+            </a:r>
+          </a:p>
+          <a:p>
+            <a:pPr rtl="0" fontAlgn="b"/>
+            <a:r>
+              <a:rPr lang="en-US" sz="1200" b="0" i="0" u="none" strike="noStrike" cap="none" spc="0" dirty="0">
+                <a:solidFill>
+                  <a:schemeClr val="dk1"/>
+                </a:solidFill>
+                <a:effectLst/>
+                <a:latin typeface="Arial"/>
+                <a:ea typeface="Arial"/>
+                <a:cs typeface="Arial"/>
+                <a:sym typeface="Arial"/>
+              </a:rPr>
+              <a:t>Download the pdf file and convert to excel file</a:t>
+            </a:r>
+          </a:p>
+          <a:p>
+            <a:pPr marL="0" lvl="0" indent="0" algn="l" rtl="0">
+              <a:lnSpc>
+                <a:spcPct val="100000"/>
+              </a:lnSpc>
+              <a:spcBef>
+                <a:spcPts val="0"/>
+              </a:spcBef>
+              <a:spcAft>
+                <a:spcPts val="0"/>
+              </a:spcAft>
+              <a:buSzPts val="1400"/>
+              <a:buNone/>
+            </a:pPr>
+            <a:br>
+              <a:rPr lang="en-US" dirty="0"/>
+            </a:br>
+            <a:endParaRPr lang="en-US" dirty="0"/>
+          </a:p>
+          <a:p>
+            <a:pPr rtl="0" fontAlgn="b"/>
+            <a:endParaRPr lang="en-US" sz="1200" b="0" i="0" u="none" strike="noStrike" cap="none" spc="0" dirty="0">
+              <a:solidFill>
+                <a:schemeClr val="dk1"/>
+              </a:solidFill>
+              <a:effectLst/>
+              <a:latin typeface="Arial"/>
+              <a:ea typeface="Arial"/>
+              <a:cs typeface="Arial"/>
+              <a:sym typeface="Arial"/>
+            </a:endParaRPr>
+          </a:p>
+          <a:p>
+            <a:pPr rtl="0" fontAlgn="b"/>
+            <a:r>
+              <a:rPr lang="en-US" sz="1200" b="0" i="0" u="none" strike="noStrike" cap="none" spc="0" dirty="0">
+                <a:solidFill>
+                  <a:schemeClr val="dk1"/>
+                </a:solidFill>
+                <a:effectLst/>
+                <a:latin typeface="Arial"/>
+                <a:ea typeface="Arial"/>
+                <a:cs typeface="Arial"/>
+                <a:sym typeface="Arial"/>
+              </a:rPr>
+              <a:t>Top 3 Individual FDI Country – SG, MAURITUS, USA </a:t>
+            </a:r>
+          </a:p>
+          <a:p>
+            <a:pPr rtl="0" fontAlgn="b"/>
+            <a:r>
+              <a:rPr lang="en-US" sz="1200" b="0" i="0" u="none" strike="noStrike" cap="none" spc="0" dirty="0">
+                <a:solidFill>
+                  <a:schemeClr val="dk1"/>
+                </a:solidFill>
+                <a:effectLst/>
+                <a:latin typeface="Arial"/>
+                <a:ea typeface="Arial"/>
+                <a:cs typeface="Arial"/>
+                <a:sym typeface="Arial"/>
+              </a:rPr>
+              <a:t>CHAPTER - VI: FDI SYNOPSIS ON COUNTRY, SECTOR &amp; STATE-WISE RECEIVED HIGHEST FDI EQUITY INFLOW</a:t>
+            </a:r>
+          </a:p>
+          <a:p>
+            <a:pPr rtl="0" fontAlgn="b"/>
+            <a:r>
+              <a:rPr lang="en-US" sz="1200" b="0" i="0" u="none" strike="noStrike" cap="none" spc="0" dirty="0">
+                <a:solidFill>
+                  <a:schemeClr val="dk1"/>
+                </a:solidFill>
+                <a:effectLst/>
+                <a:latin typeface="Arial"/>
+                <a:ea typeface="Arial"/>
+                <a:cs typeface="Arial"/>
+                <a:sym typeface="Arial"/>
+              </a:rPr>
+              <a:t>Country Profile: (period from January 2000 to December 2025)</a:t>
+            </a:r>
+          </a:p>
+          <a:p>
+            <a:pPr marL="0" lvl="0" indent="0" algn="l" rtl="0">
+              <a:lnSpc>
+                <a:spcPct val="100000"/>
+              </a:lnSpc>
+              <a:spcBef>
+                <a:spcPts val="0"/>
+              </a:spcBef>
+              <a:spcAft>
+                <a:spcPts val="0"/>
+              </a:spcAft>
+              <a:buSzPts val="1400"/>
+              <a:buNone/>
+            </a:pPr>
+            <a:endParaRPr dirty="0"/>
           </a:p>
         </p:txBody>
       </p:sp>
@@ -10278,7 +12661,188 @@
               <a:buSzPts val="1400"/>
               <a:buNone/>
             </a:pPr>
-            <a:endParaRPr/>
+            <a:r>
+              <a:rPr lang="en-US" dirty="0"/>
+              <a:t>Source:</a:t>
+            </a:r>
+          </a:p>
+          <a:p>
+            <a:pPr marL="0" lvl="0" indent="0" algn="l" rtl="0">
+              <a:lnSpc>
+                <a:spcPct val="100000"/>
+              </a:lnSpc>
+              <a:spcBef>
+                <a:spcPts val="0"/>
+              </a:spcBef>
+              <a:spcAft>
+                <a:spcPts val="0"/>
+              </a:spcAft>
+              <a:buSzPts val="1400"/>
+              <a:buNone/>
+            </a:pPr>
+            <a:r>
+              <a:rPr lang="en-US" dirty="0"/>
+              <a:t>https://wits.worldbank.org/</a:t>
+            </a:r>
+          </a:p>
+          <a:p>
+            <a:pPr marL="0" lvl="0" indent="0" algn="l" rtl="0">
+              <a:lnSpc>
+                <a:spcPct val="100000"/>
+              </a:lnSpc>
+              <a:spcBef>
+                <a:spcPts val="0"/>
+              </a:spcBef>
+              <a:spcAft>
+                <a:spcPts val="0"/>
+              </a:spcAft>
+              <a:buSzPts val="1400"/>
+              <a:buNone/>
+            </a:pPr>
+            <a:endParaRPr lang="en-US" dirty="0"/>
+          </a:p>
+          <a:p>
+            <a:pPr marL="0" lvl="0" indent="0" algn="l" rtl="0">
+              <a:lnSpc>
+                <a:spcPct val="100000"/>
+              </a:lnSpc>
+              <a:spcBef>
+                <a:spcPts val="0"/>
+              </a:spcBef>
+              <a:spcAft>
+                <a:spcPts val="0"/>
+              </a:spcAft>
+              <a:buSzPts val="1400"/>
+              <a:buNone/>
+            </a:pPr>
+            <a:r>
+              <a:rPr lang="en-US" dirty="0"/>
+              <a:t>https://wits.worldbank.org/CountryProfile/en/IND</a:t>
+            </a:r>
+          </a:p>
+          <a:p>
+            <a:pPr marL="0" lvl="0" indent="0" algn="l" rtl="0">
+              <a:lnSpc>
+                <a:spcPct val="100000"/>
+              </a:lnSpc>
+              <a:spcBef>
+                <a:spcPts val="0"/>
+              </a:spcBef>
+              <a:spcAft>
+                <a:spcPts val="0"/>
+              </a:spcAft>
+              <a:buSzPts val="1400"/>
+              <a:buNone/>
+            </a:pPr>
+            <a:endParaRPr lang="en-US" dirty="0"/>
+          </a:p>
+          <a:p>
+            <a:pPr marL="0" lvl="0" indent="0" algn="l" rtl="0">
+              <a:lnSpc>
+                <a:spcPct val="100000"/>
+              </a:lnSpc>
+              <a:spcBef>
+                <a:spcPts val="0"/>
+              </a:spcBef>
+              <a:spcAft>
+                <a:spcPts val="0"/>
+              </a:spcAft>
+              <a:buSzPts val="1400"/>
+              <a:buNone/>
+            </a:pPr>
+            <a:endParaRPr lang="en-US" dirty="0"/>
+          </a:p>
+          <a:p>
+            <a:pPr marL="0" lvl="0" indent="0" algn="l" rtl="0">
+              <a:lnSpc>
+                <a:spcPct val="100000"/>
+              </a:lnSpc>
+              <a:spcBef>
+                <a:spcPts val="0"/>
+              </a:spcBef>
+              <a:spcAft>
+                <a:spcPts val="0"/>
+              </a:spcAft>
+              <a:buSzPts val="1400"/>
+              <a:buNone/>
+            </a:pPr>
+            <a:r>
+              <a:rPr lang="en-US" dirty="0"/>
+              <a:t>Import:</a:t>
+            </a:r>
+          </a:p>
+          <a:p>
+            <a:pPr marL="0" lvl="0" indent="0" algn="l" rtl="0">
+              <a:lnSpc>
+                <a:spcPct val="100000"/>
+              </a:lnSpc>
+              <a:spcBef>
+                <a:spcPts val="0"/>
+              </a:spcBef>
+              <a:spcAft>
+                <a:spcPts val="0"/>
+              </a:spcAft>
+              <a:buSzPts val="1400"/>
+              <a:buNone/>
+            </a:pPr>
+            <a:r>
+              <a:rPr lang="en-US" dirty="0"/>
+              <a:t>https://wits.worldbank.org/CountryProfile/en/Country/IND/StartYear/2000/EndYear/2023/TradeFlow/Import/Indicator/MPRT-TRD-VL/Partner/SGP/Product/all-groups#</a:t>
+            </a:r>
+          </a:p>
+          <a:p>
+            <a:pPr marL="0" lvl="0" indent="0" algn="l" rtl="0">
+              <a:lnSpc>
+                <a:spcPct val="100000"/>
+              </a:lnSpc>
+              <a:spcBef>
+                <a:spcPts val="0"/>
+              </a:spcBef>
+              <a:spcAft>
+                <a:spcPts val="0"/>
+              </a:spcAft>
+              <a:buSzPts val="1400"/>
+              <a:buNone/>
+            </a:pPr>
+            <a:endParaRPr lang="en-US" dirty="0"/>
+          </a:p>
+          <a:p>
+            <a:pPr marL="0" lvl="0" indent="0" algn="l" rtl="0">
+              <a:lnSpc>
+                <a:spcPct val="100000"/>
+              </a:lnSpc>
+              <a:spcBef>
+                <a:spcPts val="0"/>
+              </a:spcBef>
+              <a:spcAft>
+                <a:spcPts val="0"/>
+              </a:spcAft>
+              <a:buSzPts val="1400"/>
+              <a:buNone/>
+            </a:pPr>
+            <a:r>
+              <a:rPr lang="en-US" dirty="0"/>
+              <a:t>Export:</a:t>
+            </a:r>
+          </a:p>
+          <a:p>
+            <a:pPr marL="0" lvl="0" indent="0" algn="l" rtl="0">
+              <a:lnSpc>
+                <a:spcPct val="100000"/>
+              </a:lnSpc>
+              <a:spcBef>
+                <a:spcPts val="0"/>
+              </a:spcBef>
+              <a:spcAft>
+                <a:spcPts val="0"/>
+              </a:spcAft>
+              <a:buSzPts val="1400"/>
+              <a:buNone/>
+            </a:pPr>
+            <a:r>
+              <a:rPr lang="en-US" dirty="0"/>
+              <a:t>https://wits.worldbank.org/CountryProfile/en/Country/IND/StartYear/2000/EndYear/2023/TradeFlow/Export/Indicator/XPRT-TRD-VL/Partner/SGP/Product/All-Groups#</a:t>
+            </a:r>
           </a:p>
         </p:txBody>
       </p:sp>
@@ -23708,7 +26272,13 @@
         <p:nvGraphicFramePr>
           <p:cNvPr id="90" name="Google Shape;90;p1"/>
           <p:cNvGraphicFramePr/>
-          <p:nvPr/>
+          <p:nvPr>
+            <p:extLst>
+              <p:ext uri="{D42A27DB-BD31-4B8C-83A1-F6EECF244321}">
+                <p14:modId xmlns:p14="http://schemas.microsoft.com/office/powerpoint/2010/main" val="2203269424"/>
+              </p:ext>
+            </p:extLst>
+          </p:nvPr>
         </p:nvGraphicFramePr>
         <p:xfrm>
           <a:off x="2032000" y="3063240"/>
@@ -23719,7 +26289,7 @@
             <a:tbl>
               <a:tblPr firstRow="1" bandRow="1">
                 <a:noFill/>
-                <a:tableStyleId>{5E857613-3C74-4FD0-9007-D5EFDE0F1E00}</a:tableStyleId>
+                <a:tableStyleId>{0101B945-CFBE-4B7F-9C81-F9404CCB7111}</a:tableStyleId>
               </a:tblPr>
               <a:tblGrid>
                 <a:gridCol w="3792725">
@@ -23830,10 +26400,10 @@
                         <a:buNone/>
                       </a:pPr>
                       <a:r>
-                        <a:rPr lang="en-US" sz="1800" u="none" strike="noStrike" cap="none"/>
+                        <a:rPr lang="en-US" sz="1800" u="none" strike="noStrike" cap="none" dirty="0"/>
                         <a:t>KOH EE HUI JOSEPH (LEADER)</a:t>
                       </a:r>
-                      <a:endParaRPr sz="1400" u="none" strike="noStrike" cap="none"/>
+                      <a:endParaRPr sz="1400" u="none" strike="noStrike" cap="none" dirty="0"/>
                     </a:p>
                   </a:txBody>
                   <a:tcPr marL="91450" marR="91450" marT="45725" marB="45725"/>
@@ -23861,10 +26431,10 @@
                         <a:buNone/>
                       </a:pPr>
                       <a:r>
-                        <a:rPr lang="en-US" sz="1800" u="none" strike="noStrike" cap="none"/>
+                        <a:rPr lang="en-US" sz="1800" u="none" strike="noStrike" cap="none" dirty="0"/>
                         <a:t>INTRODUCTION</a:t>
                       </a:r>
-                      <a:endParaRPr sz="1400" u="none" strike="noStrike" cap="none"/>
+                      <a:endParaRPr sz="1400" u="none" strike="noStrike" cap="none" dirty="0"/>
                     </a:p>
                     <a:p>
                       <a:pPr marL="0" marR="0" lvl="0" indent="0" algn="l" rtl="0">
@@ -23885,10 +26455,9 @@
                         <a:buNone/>
                       </a:pPr>
                       <a:r>
-                        <a:rPr lang="en-US" sz="1800" u="none" strike="noStrike" cap="none"/>
+                        <a:rPr lang="en-US" sz="1800" u="none" strike="noStrike" cap="none" dirty="0"/>
                         <a:t>PILLAR 1: FDI AND EVIDENCE OF INDUSTRIALIZATION</a:t>
                       </a:r>
-                      <a:endParaRPr sz="1400" u="none" strike="noStrike" cap="none"/>
                     </a:p>
                   </a:txBody>
                   <a:tcPr marL="91450" marR="91450" marT="45725" marB="45725"/>
@@ -23923,7 +26492,7 @@
                         <a:buNone/>
                       </a:pPr>
                       <a:r>
-                        <a:rPr lang="en-US" sz="1800"/>
+                        <a:rPr lang="en-US" sz="1800" u="none" strike="noStrike" cap="none"/>
                         <a:t>Tun Lin Aung</a:t>
                       </a:r>
                       <a:endParaRPr sz="1800" u="none" strike="noStrike" cap="none"/>
@@ -23992,7 +26561,7 @@
                         <a:buNone/>
                       </a:pPr>
                       <a:r>
-                        <a:rPr lang="en-US" sz="1800"/>
+                        <a:rPr lang="en-US" sz="1800" u="none" strike="noStrike" cap="none"/>
                         <a:t>Arcega Ellexys Lyxanne San Agustin</a:t>
                       </a:r>
                       <a:endParaRPr sz="1800" u="none" strike="noStrike" cap="none"/>
@@ -24061,7 +26630,7 @@
                         <a:buNone/>
                       </a:pPr>
                       <a:r>
-                        <a:rPr lang="en-US" sz="1800"/>
+                        <a:rPr lang="en-US" sz="1800" u="none" strike="noStrike" cap="none"/>
                         <a:t>Vincent</a:t>
                       </a:r>
                       <a:endParaRPr sz="1800" u="none" strike="noStrike" cap="none"/>
@@ -24092,18 +26661,10 @@
                         <a:buNone/>
                       </a:pPr>
                       <a:r>
-                        <a:rPr lang="en-US" sz="1800" u="none" strike="noStrike" cap="none"/>
-                        <a:t>PILLAR 4: THE CHINA DYNAMIC (COLLABORATION VS </a:t>
+                        <a:rPr lang="en-US" sz="1800" u="none" strike="noStrike" cap="none" dirty="0"/>
+                        <a:t>PILLAR 4: THE CHINA DYNAMIC (COLLABORATION VS COMPETITION)</a:t>
                       </a:r>
-                      <a:r>
-                        <a:rPr lang="en-US" sz="1800"/>
-                        <a:t>COMPETITION</a:t>
-                      </a:r>
-                      <a:r>
-                        <a:rPr lang="en-US" sz="1800" u="none" strike="noStrike" cap="none"/>
-                        <a:t>)</a:t>
-                      </a:r>
-                      <a:endParaRPr sz="1400" u="none" strike="noStrike" cap="none"/>
+                      <a:endParaRPr sz="1400" u="none" strike="noStrike" cap="none" dirty="0"/>
                     </a:p>
                   </a:txBody>
                   <a:tcPr marL="91450" marR="91450" marT="45725" marB="45725"/>
@@ -24127,6 +26688,462 @@
 </file>
 
 <file path=ppt/slides/slide10.xml><?xml version="1.0" encoding="utf-8"?>
+<p:sld xmlns:a="http://schemas.openxmlformats.org/drawingml/2006/main" xmlns:r="http://schemas.openxmlformats.org/officeDocument/2006/relationships" xmlns:p="http://schemas.openxmlformats.org/presentationml/2006/main">
+  <p:cSld>
+    <p:spTree>
+      <p:nvGrpSpPr>
+        <p:cNvPr id="1" name="Shape 153">
+          <a:extLst>
+            <a:ext uri="{FF2B5EF4-FFF2-40B4-BE49-F238E27FC236}">
+              <a16:creationId xmlns:a16="http://schemas.microsoft.com/office/drawing/2014/main" id="{4528FEA2-1B26-0076-C9B4-6B1DE586A004}"/>
+            </a:ext>
+          </a:extLst>
+        </p:cNvPr>
+        <p:cNvGrpSpPr/>
+        <p:nvPr/>
+      </p:nvGrpSpPr>
+      <p:grpSpPr>
+        <a:xfrm>
+          <a:off x="0" y="0"/>
+          <a:ext cx="0" cy="0"/>
+          <a:chOff x="0" y="0"/>
+          <a:chExt cx="0" cy="0"/>
+        </a:xfrm>
+      </p:grpSpPr>
+      <p:sp>
+        <p:nvSpPr>
+          <p:cNvPr id="154" name="Google Shape;154;p9">
+            <a:extLst>
+              <a:ext uri="{FF2B5EF4-FFF2-40B4-BE49-F238E27FC236}">
+                <a16:creationId xmlns:a16="http://schemas.microsoft.com/office/drawing/2014/main" id="{F8E956A8-B585-7AAD-68B1-D81B6D2C2222}"/>
+              </a:ext>
+            </a:extLst>
+          </p:cNvPr>
+          <p:cNvSpPr txBox="1">
+            <a:spLocks noGrp="1"/>
+          </p:cNvSpPr>
+          <p:nvPr>
+            <p:ph type="title"/>
+          </p:nvPr>
+        </p:nvSpPr>
+        <p:spPr>
+          <a:xfrm>
+            <a:off x="838200" y="365125"/>
+            <a:ext cx="10515600" cy="1325563"/>
+          </a:xfrm>
+          <a:prstGeom prst="rect">
+            <a:avLst/>
+          </a:prstGeom>
+          <a:noFill/>
+          <a:ln>
+            <a:noFill/>
+          </a:ln>
+        </p:spPr>
+        <p:txBody>
+          <a:bodyPr spcFirstLastPara="1" wrap="square" lIns="91425" tIns="45700" rIns="91425" bIns="45700" anchor="ctr" anchorCtr="0">
+            <a:normAutofit/>
+          </a:bodyPr>
+          <a:lstStyle/>
+          <a:p>
+            <a:pPr marL="0" lvl="0" indent="0" algn="l" rtl="0">
+              <a:lnSpc>
+                <a:spcPct val="90000"/>
+              </a:lnSpc>
+              <a:spcBef>
+                <a:spcPts val="0"/>
+              </a:spcBef>
+              <a:spcAft>
+                <a:spcPts val="0"/>
+              </a:spcAft>
+              <a:buClr>
+                <a:schemeClr val="dk1"/>
+              </a:buClr>
+              <a:buSzPts val="4400"/>
+              <a:buFont typeface="Play"/>
+              <a:buNone/>
+            </a:pPr>
+            <a:r>
+              <a:rPr lang="en-US"/>
+              <a:t>3. Sources of FDI Inflow </a:t>
+            </a:r>
+            <a:endParaRPr/>
+          </a:p>
+        </p:txBody>
+      </p:sp>
+      <p:sp>
+        <p:nvSpPr>
+          <p:cNvPr id="155" name="Google Shape;155;p9">
+            <a:extLst>
+              <a:ext uri="{FF2B5EF4-FFF2-40B4-BE49-F238E27FC236}">
+                <a16:creationId xmlns:a16="http://schemas.microsoft.com/office/drawing/2014/main" id="{A67D69A3-8F2B-AD2B-F06D-E1BE877BB2B3}"/>
+              </a:ext>
+            </a:extLst>
+          </p:cNvPr>
+          <p:cNvSpPr txBox="1"/>
+          <p:nvPr/>
+        </p:nvSpPr>
+        <p:spPr>
+          <a:xfrm>
+            <a:off x="709174" y="1885156"/>
+            <a:ext cx="10515599" cy="4524315"/>
+          </a:xfrm>
+          <a:prstGeom prst="rect">
+            <a:avLst/>
+          </a:prstGeom>
+          <a:noFill/>
+          <a:ln>
+            <a:noFill/>
+          </a:ln>
+        </p:spPr>
+        <p:txBody>
+          <a:bodyPr spcFirstLastPara="1" wrap="square" lIns="91425" tIns="45700" rIns="91425" bIns="45700" anchor="t" anchorCtr="0">
+            <a:spAutoFit/>
+          </a:bodyPr>
+          <a:lstStyle/>
+          <a:p>
+            <a:pPr marL="0" marR="0" lvl="0" indent="0" algn="l" rtl="0">
+              <a:lnSpc>
+                <a:spcPct val="100000"/>
+              </a:lnSpc>
+              <a:spcBef>
+                <a:spcPts val="0"/>
+              </a:spcBef>
+              <a:spcAft>
+                <a:spcPts val="0"/>
+              </a:spcAft>
+              <a:buClr>
+                <a:srgbClr val="000000"/>
+              </a:buClr>
+              <a:buSzPts val="2400"/>
+              <a:buFont typeface="Arial"/>
+              <a:buNone/>
+            </a:pPr>
+            <a:endParaRPr sz="2400" b="1" i="0" u="none" strike="noStrike" cap="none" dirty="0">
+              <a:solidFill>
+                <a:schemeClr val="dk1"/>
+              </a:solidFill>
+              <a:latin typeface="Arial"/>
+              <a:ea typeface="Arial"/>
+              <a:cs typeface="Arial"/>
+              <a:sym typeface="Arial"/>
+            </a:endParaRPr>
+          </a:p>
+          <a:p>
+            <a:pPr marL="0" marR="0" lvl="0" indent="0" algn="l" rtl="0">
+              <a:lnSpc>
+                <a:spcPct val="100000"/>
+              </a:lnSpc>
+              <a:spcBef>
+                <a:spcPts val="0"/>
+              </a:spcBef>
+              <a:spcAft>
+                <a:spcPts val="0"/>
+              </a:spcAft>
+              <a:buClr>
+                <a:srgbClr val="000000"/>
+              </a:buClr>
+              <a:buSzPts val="2400"/>
+              <a:buFont typeface="Arial"/>
+              <a:buNone/>
+            </a:pPr>
+            <a:r>
+              <a:rPr lang="en-US" sz="2400" b="1" i="0" u="none" strike="noStrike" cap="none" dirty="0">
+                <a:solidFill>
+                  <a:schemeClr val="dk1"/>
+                </a:solidFill>
+                <a:latin typeface="Arial"/>
+                <a:ea typeface="Arial"/>
+                <a:cs typeface="Arial"/>
+                <a:sym typeface="Arial"/>
+              </a:rPr>
+              <a:t>Key Chart 5 : Bilateral Focus:</a:t>
+            </a:r>
+            <a:r>
+              <a:rPr lang="en-US" sz="2400" b="0" i="0" u="none" strike="noStrike" cap="none" dirty="0">
+                <a:solidFill>
+                  <a:schemeClr val="dk1"/>
+                </a:solidFill>
+                <a:latin typeface="Arial"/>
+                <a:ea typeface="Arial"/>
+                <a:cs typeface="Arial"/>
+                <a:sym typeface="Arial"/>
+              </a:rPr>
+              <a:t> Identify the </a:t>
+            </a:r>
+            <a:r>
+              <a:rPr lang="en-US" sz="2400" b="1" i="0" u="none" strike="noStrike" cap="none" dirty="0">
+                <a:solidFill>
+                  <a:schemeClr val="dk1"/>
+                </a:solidFill>
+                <a:latin typeface="Arial"/>
+                <a:ea typeface="Arial"/>
+                <a:cs typeface="Arial"/>
+                <a:sym typeface="Arial"/>
+              </a:rPr>
+              <a:t>single largest source </a:t>
+            </a:r>
+            <a:r>
+              <a:rPr lang="en-US" sz="2400" b="0" i="0" u="none" strike="noStrike" cap="none" dirty="0">
+                <a:solidFill>
+                  <a:schemeClr val="dk1"/>
+                </a:solidFill>
+                <a:latin typeface="Arial"/>
+                <a:ea typeface="Arial"/>
+                <a:cs typeface="Arial"/>
+                <a:sym typeface="Arial"/>
+              </a:rPr>
+              <a:t>country from your chart. </a:t>
+            </a:r>
+            <a:endParaRPr sz="1400" b="0" i="0" u="none" strike="noStrike" cap="none" dirty="0">
+              <a:solidFill>
+                <a:srgbClr val="000000"/>
+              </a:solidFill>
+              <a:latin typeface="Arial"/>
+              <a:ea typeface="Arial"/>
+              <a:cs typeface="Arial"/>
+              <a:sym typeface="Arial"/>
+            </a:endParaRPr>
+          </a:p>
+          <a:p>
+            <a:pPr marL="0" marR="0" lvl="0" indent="0" algn="l" rtl="0">
+              <a:lnSpc>
+                <a:spcPct val="100000"/>
+              </a:lnSpc>
+              <a:spcBef>
+                <a:spcPts val="0"/>
+              </a:spcBef>
+              <a:spcAft>
+                <a:spcPts val="0"/>
+              </a:spcAft>
+              <a:buClr>
+                <a:srgbClr val="000000"/>
+              </a:buClr>
+              <a:buSzPts val="2400"/>
+              <a:buFont typeface="Arial"/>
+              <a:buNone/>
+            </a:pPr>
+            <a:endParaRPr sz="2400" b="0" i="0" u="none" strike="noStrike" cap="none" dirty="0">
+              <a:solidFill>
+                <a:schemeClr val="dk1"/>
+              </a:solidFill>
+              <a:latin typeface="Arial"/>
+              <a:ea typeface="Arial"/>
+              <a:cs typeface="Arial"/>
+              <a:sym typeface="Arial"/>
+            </a:endParaRPr>
+          </a:p>
+          <a:p>
+            <a:pPr marL="0" marR="0" lvl="0" indent="0" algn="l" rtl="0">
+              <a:lnSpc>
+                <a:spcPct val="100000"/>
+              </a:lnSpc>
+              <a:spcBef>
+                <a:spcPts val="0"/>
+              </a:spcBef>
+              <a:spcAft>
+                <a:spcPts val="0"/>
+              </a:spcAft>
+              <a:buClr>
+                <a:srgbClr val="000000"/>
+              </a:buClr>
+              <a:buSzPts val="2400"/>
+              <a:buFont typeface="Arial"/>
+              <a:buNone/>
+            </a:pPr>
+            <a:r>
+              <a:rPr lang="en-US" sz="2400" b="0" i="0" u="none" strike="noStrike" cap="none" dirty="0">
+                <a:solidFill>
+                  <a:schemeClr val="dk1"/>
+                </a:solidFill>
+                <a:latin typeface="Arial"/>
+                <a:ea typeface="Arial"/>
+                <a:cs typeface="Arial"/>
+                <a:sym typeface="Arial"/>
+              </a:rPr>
+              <a:t>Plot using </a:t>
+            </a:r>
+            <a:r>
+              <a:rPr lang="en-US" sz="2400" b="1" i="0" u="none" strike="noStrike" cap="none" dirty="0">
+                <a:solidFill>
+                  <a:schemeClr val="dk1"/>
+                </a:solidFill>
+                <a:latin typeface="Arial"/>
+                <a:ea typeface="Arial"/>
+                <a:cs typeface="Arial"/>
+                <a:sym typeface="Arial"/>
+              </a:rPr>
+              <a:t>line chart </a:t>
+            </a:r>
+            <a:r>
+              <a:rPr lang="en-US" sz="2400" b="0" i="0" u="none" strike="noStrike" cap="none" dirty="0">
+                <a:solidFill>
+                  <a:schemeClr val="dk1"/>
+                </a:solidFill>
+                <a:latin typeface="Arial"/>
+                <a:ea typeface="Arial"/>
+                <a:cs typeface="Arial"/>
+                <a:sym typeface="Arial"/>
+              </a:rPr>
+              <a:t>to analyze the long-term trendlines of both trade volumes (export and import)  and net FDI inflows </a:t>
+            </a:r>
+            <a:r>
+              <a:rPr lang="en-US" sz="2400" b="1" i="0" u="none" strike="noStrike" cap="none" dirty="0">
+                <a:solidFill>
+                  <a:schemeClr val="dk1"/>
+                </a:solidFill>
+                <a:latin typeface="Arial"/>
+                <a:ea typeface="Arial"/>
+                <a:cs typeface="Arial"/>
+                <a:sym typeface="Arial"/>
+              </a:rPr>
+              <a:t>from this partner</a:t>
+            </a:r>
+            <a:r>
+              <a:rPr lang="en-US" sz="2400" b="0" i="0" u="none" strike="noStrike" cap="none" dirty="0">
+                <a:solidFill>
+                  <a:schemeClr val="dk1"/>
+                </a:solidFill>
+                <a:latin typeface="Arial"/>
+                <a:ea typeface="Arial"/>
+                <a:cs typeface="Arial"/>
+                <a:sym typeface="Arial"/>
+              </a:rPr>
+              <a:t>. </a:t>
+            </a:r>
+            <a:endParaRPr sz="1400" b="0" i="0" u="none" strike="noStrike" cap="none" dirty="0">
+              <a:solidFill>
+                <a:srgbClr val="000000"/>
+              </a:solidFill>
+              <a:latin typeface="Arial"/>
+              <a:ea typeface="Arial"/>
+              <a:cs typeface="Arial"/>
+              <a:sym typeface="Arial"/>
+            </a:endParaRPr>
+          </a:p>
+          <a:p>
+            <a:pPr marL="0" marR="0" lvl="0" indent="0" algn="l" rtl="0">
+              <a:lnSpc>
+                <a:spcPct val="100000"/>
+              </a:lnSpc>
+              <a:spcBef>
+                <a:spcPts val="0"/>
+              </a:spcBef>
+              <a:spcAft>
+                <a:spcPts val="0"/>
+              </a:spcAft>
+              <a:buClr>
+                <a:srgbClr val="000000"/>
+              </a:buClr>
+              <a:buSzPts val="2400"/>
+              <a:buFont typeface="Arial"/>
+              <a:buNone/>
+            </a:pPr>
+            <a:r>
+              <a:rPr lang="en-US" sz="2400" b="0" i="0" u="none" strike="noStrike" cap="none" dirty="0">
+                <a:solidFill>
+                  <a:schemeClr val="dk1"/>
+                </a:solidFill>
+                <a:latin typeface="Arial"/>
+                <a:ea typeface="Arial"/>
+                <a:cs typeface="Arial"/>
+                <a:sym typeface="Arial"/>
+              </a:rPr>
+              <a:t>[You may need to use the combo chart – secondary axis to present the data clearly] </a:t>
+            </a:r>
+            <a:endParaRPr sz="1400" b="0" i="0" u="none" strike="noStrike" cap="none" dirty="0">
+              <a:solidFill>
+                <a:srgbClr val="000000"/>
+              </a:solidFill>
+              <a:latin typeface="Arial"/>
+              <a:ea typeface="Arial"/>
+              <a:cs typeface="Arial"/>
+              <a:sym typeface="Arial"/>
+            </a:endParaRPr>
+          </a:p>
+          <a:p>
+            <a:pPr marL="0" marR="0" lvl="0" indent="0" algn="l" rtl="0">
+              <a:lnSpc>
+                <a:spcPct val="100000"/>
+              </a:lnSpc>
+              <a:spcBef>
+                <a:spcPts val="0"/>
+              </a:spcBef>
+              <a:spcAft>
+                <a:spcPts val="0"/>
+              </a:spcAft>
+              <a:buClr>
+                <a:srgbClr val="000000"/>
+              </a:buClr>
+              <a:buSzPts val="2400"/>
+              <a:buFont typeface="Arial"/>
+              <a:buNone/>
+            </a:pPr>
+            <a:endParaRPr sz="2400" b="0" i="0" u="none" strike="noStrike" cap="none" dirty="0">
+              <a:solidFill>
+                <a:schemeClr val="dk1"/>
+              </a:solidFill>
+              <a:latin typeface="Arial"/>
+              <a:ea typeface="Arial"/>
+              <a:cs typeface="Arial"/>
+              <a:sym typeface="Arial"/>
+            </a:endParaRPr>
+          </a:p>
+          <a:p>
+            <a:pPr marL="0" marR="0" lvl="0" indent="0" algn="l" rtl="0">
+              <a:lnSpc>
+                <a:spcPct val="100000"/>
+              </a:lnSpc>
+              <a:spcBef>
+                <a:spcPts val="0"/>
+              </a:spcBef>
+              <a:spcAft>
+                <a:spcPts val="0"/>
+              </a:spcAft>
+              <a:buClr>
+                <a:srgbClr val="000000"/>
+              </a:buClr>
+              <a:buSzPts val="2400"/>
+              <a:buFont typeface="Arial"/>
+              <a:buNone/>
+            </a:pPr>
+            <a:r>
+              <a:rPr lang="en-US" sz="2400" b="0" i="0" u="none" strike="noStrike" cap="none" dirty="0">
+                <a:solidFill>
+                  <a:schemeClr val="dk1"/>
+                </a:solidFill>
+                <a:latin typeface="Arial"/>
+                <a:ea typeface="Arial"/>
+                <a:cs typeface="Arial"/>
+                <a:sym typeface="Arial"/>
+              </a:rPr>
+              <a:t>Discuss the trendlines and project  their future level of economic cooperation—will their interdependence strengthen, or are they hitting a structural ceiling?</a:t>
+            </a:r>
+            <a:endParaRPr sz="1400" b="0" i="0" u="none" strike="noStrike" cap="none" dirty="0">
+              <a:solidFill>
+                <a:srgbClr val="000000"/>
+              </a:solidFill>
+              <a:latin typeface="Arial"/>
+              <a:ea typeface="Arial"/>
+              <a:cs typeface="Arial"/>
+              <a:sym typeface="Arial"/>
+            </a:endParaRPr>
+          </a:p>
+        </p:txBody>
+      </p:sp>
+    </p:spTree>
+    <p:extLst>
+      <p:ext uri="{BB962C8B-B14F-4D97-AF65-F5344CB8AC3E}">
+        <p14:creationId xmlns:p14="http://schemas.microsoft.com/office/powerpoint/2010/main" val="970933641"/>
+      </p:ext>
+    </p:extLst>
+  </p:cSld>
+  <p:clrMapOvr>
+    <a:masterClrMapping/>
+  </p:clrMapOvr>
+</p:sld>
+</file>
+
+<file path=ppt/slides/slide11.xml><?xml version="1.0" encoding="utf-8"?>
 <p:sld xmlns:a="http://schemas.openxmlformats.org/drawingml/2006/main" xmlns:r="http://schemas.openxmlformats.org/officeDocument/2006/relationships" xmlns:p="http://schemas.openxmlformats.org/presentationml/2006/main">
   <p:cSld>
     <p:spTree>
@@ -24240,17 +27257,25 @@
               <a:buNone/>
             </a:pPr>
             <a:r>
-              <a:rPr lang="en-US" sz="2300" b="1">
+              <a:rPr lang="en-US" sz="2300" b="1" i="0" u="none" strike="noStrike" cap="none">
                 <a:solidFill>
                   <a:schemeClr val="dk1"/>
                 </a:solidFill>
+                <a:latin typeface="Arial"/>
+                <a:ea typeface="Arial"/>
+                <a:cs typeface="Arial"/>
+                <a:sym typeface="Arial"/>
               </a:rPr>
               <a:t>Time-series regression, 1976–2025 | Dependent variable: FDI inflows (current US$)</a:t>
             </a:r>
-            <a:endParaRPr sz="2300" b="1">
+            <a:endParaRPr sz="2300" b="1" i="0" u="none" strike="noStrike" cap="none">
               <a:solidFill>
                 <a:schemeClr val="dk1"/>
               </a:solidFill>
+              <a:latin typeface="Arial"/>
+              <a:ea typeface="Arial"/>
+              <a:cs typeface="Arial"/>
+              <a:sym typeface="Arial"/>
             </a:endParaRPr>
           </a:p>
         </p:txBody>
@@ -24263,14 +27288,14 @@
         </p:nvGraphicFramePr>
         <p:xfrm>
           <a:off x="838200" y="2319075"/>
-          <a:ext cx="3000000" cy="3000000"/>
+          <a:ext cx="10287000" cy="3535500"/>
         </p:xfrm>
         <a:graphic>
           <a:graphicData uri="http://schemas.openxmlformats.org/drawingml/2006/table">
             <a:tbl>
               <a:tblPr>
                 <a:noFill/>
-                <a:tableStyleId>{DDB6B1F6-9251-4644-B0B7-88294BBA8601}</a:tableStyleId>
+                <a:tableStyleId>{929B3A2D-4F79-4D1E-BBA7-132FF4286924}</a:tableStyleId>
               </a:tblPr>
               <a:tblGrid>
                 <a:gridCol w="2571750">
@@ -24308,20 +27333,28 @@
                     <a:bodyPr/>
                     <a:lstStyle/>
                     <a:p>
-                      <a:pPr marL="0" lvl="0" indent="0" algn="l" rtl="0">
+                      <a:pPr marL="0" marR="0" lvl="0" indent="0" algn="l" rtl="0">
+                        <a:lnSpc>
+                          <a:spcPct val="100000"/>
+                        </a:lnSpc>
                         <a:spcBef>
                           <a:spcPts val="0"/>
                         </a:spcBef>
                         <a:spcAft>
                           <a:spcPts val="0"/>
                         </a:spcAft>
+                        <a:buClr>
+                          <a:srgbClr val="000000"/>
+                        </a:buClr>
+                        <a:buSzPts val="2000"/>
+                        <a:buFont typeface="Arial"/>
                         <a:buNone/>
                       </a:pPr>
                       <a:r>
-                        <a:rPr lang="en-US" sz="2000" b="1"/>
+                        <a:rPr lang="en-US" sz="2000" b="1" u="none" strike="noStrike" cap="none"/>
                         <a:t>Variable</a:t>
                       </a:r>
-                      <a:endParaRPr sz="2000" b="1"/>
+                      <a:endParaRPr sz="2000" b="1" u="none" strike="noStrike" cap="none"/>
                     </a:p>
                   </a:txBody>
                   <a:tcPr marL="91425" marR="91425" marT="91425" marB="91425"/>
@@ -24331,20 +27364,28 @@
                     <a:bodyPr/>
                     <a:lstStyle/>
                     <a:p>
-                      <a:pPr marL="0" lvl="0" indent="0" algn="l" rtl="0">
+                      <a:pPr marL="0" marR="0" lvl="0" indent="0" algn="l" rtl="0">
+                        <a:lnSpc>
+                          <a:spcPct val="100000"/>
+                        </a:lnSpc>
                         <a:spcBef>
                           <a:spcPts val="0"/>
                         </a:spcBef>
                         <a:spcAft>
                           <a:spcPts val="0"/>
                         </a:spcAft>
+                        <a:buClr>
+                          <a:srgbClr val="000000"/>
+                        </a:buClr>
+                        <a:buSzPts val="2000"/>
+                        <a:buFont typeface="Arial"/>
                         <a:buNone/>
                       </a:pPr>
                       <a:r>
-                        <a:rPr lang="en-US" sz="2000" b="1"/>
+                        <a:rPr lang="en-US" sz="2000" b="1" u="none" strike="noStrike" cap="none"/>
                         <a:t>Coefficient</a:t>
                       </a:r>
-                      <a:endParaRPr sz="2000" b="1"/>
+                      <a:endParaRPr sz="2000" b="1" u="none" strike="noStrike" cap="none"/>
                     </a:p>
                   </a:txBody>
                   <a:tcPr marL="91425" marR="91425" marT="91425" marB="91425"/>
@@ -24354,20 +27395,28 @@
                     <a:bodyPr/>
                     <a:lstStyle/>
                     <a:p>
-                      <a:pPr marL="0" lvl="0" indent="0" algn="l" rtl="0">
+                      <a:pPr marL="0" marR="0" lvl="0" indent="0" algn="l" rtl="0">
+                        <a:lnSpc>
+                          <a:spcPct val="100000"/>
+                        </a:lnSpc>
                         <a:spcBef>
                           <a:spcPts val="0"/>
                         </a:spcBef>
                         <a:spcAft>
                           <a:spcPts val="0"/>
                         </a:spcAft>
+                        <a:buClr>
+                          <a:srgbClr val="000000"/>
+                        </a:buClr>
+                        <a:buSzPts val="2000"/>
+                        <a:buFont typeface="Arial"/>
                         <a:buNone/>
                       </a:pPr>
                       <a:r>
-                        <a:rPr lang="en-US" sz="2000" b="1"/>
+                        <a:rPr lang="en-US" sz="2000" b="1" u="none" strike="noStrike" cap="none"/>
                         <a:t>P-value </a:t>
                       </a:r>
-                      <a:endParaRPr sz="2000" b="1"/>
+                      <a:endParaRPr sz="2000" b="1" u="none" strike="noStrike" cap="none"/>
                     </a:p>
                   </a:txBody>
                   <a:tcPr marL="91425" marR="91425" marT="91425" marB="91425"/>
@@ -24377,20 +27426,28 @@
                     <a:bodyPr/>
                     <a:lstStyle/>
                     <a:p>
-                      <a:pPr marL="0" lvl="0" indent="0" algn="l" rtl="0">
+                      <a:pPr marL="0" marR="0" lvl="0" indent="0" algn="l" rtl="0">
+                        <a:lnSpc>
+                          <a:spcPct val="100000"/>
+                        </a:lnSpc>
                         <a:spcBef>
                           <a:spcPts val="0"/>
                         </a:spcBef>
                         <a:spcAft>
                           <a:spcPts val="0"/>
                         </a:spcAft>
+                        <a:buClr>
+                          <a:srgbClr val="000000"/>
+                        </a:buClr>
+                        <a:buSzPts val="2000"/>
+                        <a:buFont typeface="Arial"/>
                         <a:buNone/>
                       </a:pPr>
                       <a:r>
-                        <a:rPr lang="en-US" sz="2000" b="1"/>
+                        <a:rPr lang="en-US" sz="2000" b="1" u="none" strike="noStrike" cap="none"/>
                         <a:t>Result</a:t>
                       </a:r>
-                      <a:endParaRPr sz="2000" b="1"/>
+                      <a:endParaRPr sz="2000" b="1" u="none" strike="noStrike" cap="none"/>
                     </a:p>
                   </a:txBody>
                   <a:tcPr marL="91425" marR="91425" marT="91425" marB="91425"/>
@@ -24407,20 +27464,28 @@
                     <a:bodyPr/>
                     <a:lstStyle/>
                     <a:p>
-                      <a:pPr marL="0" lvl="0" indent="0" algn="l" rtl="0">
+                      <a:pPr marL="0" marR="0" lvl="0" indent="0" algn="l" rtl="0">
+                        <a:lnSpc>
+                          <a:spcPct val="100000"/>
+                        </a:lnSpc>
                         <a:spcBef>
                           <a:spcPts val="0"/>
                         </a:spcBef>
                         <a:spcAft>
                           <a:spcPts val="0"/>
                         </a:spcAft>
+                        <a:buClr>
+                          <a:srgbClr val="000000"/>
+                        </a:buClr>
+                        <a:buSzPts val="2000"/>
+                        <a:buFont typeface="Arial"/>
                         <a:buNone/>
                       </a:pPr>
                       <a:r>
-                        <a:rPr lang="en-US" sz="2000" b="1"/>
+                        <a:rPr lang="en-US" sz="2000" b="1" u="none" strike="noStrike" cap="none"/>
                         <a:t>Trade Openness (% GDP)</a:t>
                       </a:r>
-                      <a:endParaRPr sz="2000" b="1"/>
+                      <a:endParaRPr sz="2000" b="1" u="none" strike="noStrike" cap="none"/>
                     </a:p>
                   </a:txBody>
                   <a:tcPr marL="91425" marR="91425" marT="91425" marB="91425"/>
@@ -24430,20 +27495,28 @@
                     <a:bodyPr/>
                     <a:lstStyle/>
                     <a:p>
-                      <a:pPr marL="0" lvl="0" indent="0" algn="l" rtl="0">
+                      <a:pPr marL="0" marR="0" lvl="0" indent="0" algn="l" rtl="0">
+                        <a:lnSpc>
+                          <a:spcPct val="100000"/>
+                        </a:lnSpc>
                         <a:spcBef>
                           <a:spcPts val="0"/>
                         </a:spcBef>
                         <a:spcAft>
                           <a:spcPts val="0"/>
                         </a:spcAft>
+                        <a:buClr>
+                          <a:srgbClr val="000000"/>
+                        </a:buClr>
+                        <a:buSzPts val="2000"/>
+                        <a:buFont typeface="Arial"/>
                         <a:buNone/>
                       </a:pPr>
                       <a:r>
-                        <a:rPr lang="en-US" sz="2000" b="1"/>
+                        <a:rPr lang="en-US" sz="2000" b="1" u="none" strike="noStrike" cap="none"/>
                         <a:t>+US$966.8M</a:t>
                       </a:r>
-                      <a:endParaRPr sz="2000" b="1"/>
+                      <a:endParaRPr sz="2000" b="1" u="none" strike="noStrike" cap="none"/>
                     </a:p>
                   </a:txBody>
                   <a:tcPr marL="91425" marR="91425" marT="91425" marB="91425"/>
@@ -24453,20 +27526,28 @@
                     <a:bodyPr/>
                     <a:lstStyle/>
                     <a:p>
-                      <a:pPr marL="0" lvl="0" indent="0" algn="l" rtl="0">
+                      <a:pPr marL="0" marR="0" lvl="0" indent="0" algn="l" rtl="0">
+                        <a:lnSpc>
+                          <a:spcPct val="100000"/>
+                        </a:lnSpc>
                         <a:spcBef>
                           <a:spcPts val="0"/>
                         </a:spcBef>
                         <a:spcAft>
                           <a:spcPts val="0"/>
                         </a:spcAft>
+                        <a:buClr>
+                          <a:srgbClr val="000000"/>
+                        </a:buClr>
+                        <a:buSzPts val="2000"/>
+                        <a:buFont typeface="Arial"/>
                         <a:buNone/>
                       </a:pPr>
                       <a:r>
-                        <a:rPr lang="en-US" sz="2000"/>
+                        <a:rPr lang="en-US" sz="2000" u="none" strike="noStrike" cap="none"/>
                         <a:t>&lt;0.001</a:t>
                       </a:r>
-                      <a:endParaRPr sz="2000"/>
+                      <a:endParaRPr sz="2000" u="none" strike="noStrike" cap="none"/>
                     </a:p>
                   </a:txBody>
                   <a:tcPr marL="91425" marR="91425" marT="91425" marB="91425"/>
@@ -24476,20 +27557,28 @@
                     <a:bodyPr/>
                     <a:lstStyle/>
                     <a:p>
-                      <a:pPr marL="0" lvl="0" indent="0" algn="l" rtl="0">
+                      <a:pPr marL="0" marR="0" lvl="0" indent="0" algn="l" rtl="0">
+                        <a:lnSpc>
+                          <a:spcPct val="100000"/>
+                        </a:lnSpc>
                         <a:spcBef>
                           <a:spcPts val="0"/>
                         </a:spcBef>
                         <a:spcAft>
                           <a:spcPts val="0"/>
                         </a:spcAft>
+                        <a:buClr>
+                          <a:srgbClr val="000000"/>
+                        </a:buClr>
+                        <a:buSzPts val="2000"/>
+                        <a:buFont typeface="Arial"/>
                         <a:buNone/>
                       </a:pPr>
                       <a:r>
-                        <a:rPr lang="en-US" sz="2000"/>
+                        <a:rPr lang="en-US" sz="2000" u="none" strike="noStrike" cap="none"/>
                         <a:t>Significant (+)</a:t>
                       </a:r>
-                      <a:endParaRPr sz="2000"/>
+                      <a:endParaRPr sz="2000" u="none" strike="noStrike" cap="none"/>
                     </a:p>
                   </a:txBody>
                   <a:tcPr marL="91425" marR="91425" marT="91425" marB="91425"/>
@@ -24506,20 +27595,28 @@
                     <a:bodyPr/>
                     <a:lstStyle/>
                     <a:p>
-                      <a:pPr marL="0" lvl="0" indent="0" algn="l" rtl="0">
+                      <a:pPr marL="0" marR="0" lvl="0" indent="0" algn="l" rtl="0">
+                        <a:lnSpc>
+                          <a:spcPct val="100000"/>
+                        </a:lnSpc>
                         <a:spcBef>
                           <a:spcPts val="0"/>
                         </a:spcBef>
                         <a:spcAft>
                           <a:spcPts val="0"/>
                         </a:spcAft>
+                        <a:buClr>
+                          <a:srgbClr val="000000"/>
+                        </a:buClr>
+                        <a:buSzPts val="2000"/>
+                        <a:buFont typeface="Arial"/>
                         <a:buNone/>
                       </a:pPr>
                       <a:r>
-                        <a:rPr lang="en-US" sz="2000" b="1"/>
+                        <a:rPr lang="en-US" sz="2000" b="1" u="none" strike="noStrike" cap="none"/>
                         <a:t>Manufacturing (% GDP)</a:t>
                       </a:r>
-                      <a:endParaRPr sz="2000" b="1"/>
+                      <a:endParaRPr sz="2000" b="1" u="none" strike="noStrike" cap="none"/>
                     </a:p>
                   </a:txBody>
                   <a:tcPr marL="91425" marR="91425" marT="91425" marB="91425"/>
@@ -24529,20 +27626,28 @@
                     <a:bodyPr/>
                     <a:lstStyle/>
                     <a:p>
-                      <a:pPr marL="0" lvl="0" indent="0" algn="l" rtl="0">
+                      <a:pPr marL="0" marR="0" lvl="0" indent="0" algn="l" rtl="0">
+                        <a:lnSpc>
+                          <a:spcPct val="100000"/>
+                        </a:lnSpc>
                         <a:spcBef>
                           <a:spcPts val="0"/>
                         </a:spcBef>
                         <a:spcAft>
                           <a:spcPts val="0"/>
                         </a:spcAft>
+                        <a:buClr>
+                          <a:srgbClr val="000000"/>
+                        </a:buClr>
+                        <a:buSzPts val="2000"/>
+                        <a:buFont typeface="Arial"/>
                         <a:buNone/>
                       </a:pPr>
                       <a:r>
-                        <a:rPr lang="en-US" sz="2000" b="1"/>
+                        <a:rPr lang="en-US" sz="2000" b="1" u="none" strike="noStrike" cap="none"/>
                         <a:t>−US$4.01B</a:t>
                       </a:r>
-                      <a:endParaRPr sz="2000" b="1"/>
+                      <a:endParaRPr sz="2000" b="1" u="none" strike="noStrike" cap="none"/>
                     </a:p>
                   </a:txBody>
                   <a:tcPr marL="91425" marR="91425" marT="91425" marB="91425"/>
@@ -24552,20 +27657,28 @@
                     <a:bodyPr/>
                     <a:lstStyle/>
                     <a:p>
-                      <a:pPr marL="0" lvl="0" indent="0" algn="l" rtl="0">
+                      <a:pPr marL="0" marR="0" lvl="0" indent="0" algn="l" rtl="0">
+                        <a:lnSpc>
+                          <a:spcPct val="100000"/>
+                        </a:lnSpc>
                         <a:spcBef>
                           <a:spcPts val="0"/>
                         </a:spcBef>
                         <a:spcAft>
                           <a:spcPts val="0"/>
                         </a:spcAft>
+                        <a:buClr>
+                          <a:srgbClr val="000000"/>
+                        </a:buClr>
+                        <a:buSzPts val="2000"/>
+                        <a:buFont typeface="Arial"/>
                         <a:buNone/>
                       </a:pPr>
                       <a:r>
-                        <a:rPr lang="en-US" sz="2000"/>
+                        <a:rPr lang="en-US" sz="2000" u="none" strike="noStrike" cap="none"/>
                         <a:t>0.004</a:t>
                       </a:r>
-                      <a:endParaRPr sz="2000"/>
+                      <a:endParaRPr sz="2000" u="none" strike="noStrike" cap="none"/>
                     </a:p>
                   </a:txBody>
                   <a:tcPr marL="91425" marR="91425" marT="91425" marB="91425"/>
@@ -24575,20 +27688,28 @@
                     <a:bodyPr/>
                     <a:lstStyle/>
                     <a:p>
-                      <a:pPr marL="0" lvl="0" indent="0" algn="l" rtl="0">
+                      <a:pPr marL="0" marR="0" lvl="0" indent="0" algn="l" rtl="0">
+                        <a:lnSpc>
+                          <a:spcPct val="100000"/>
+                        </a:lnSpc>
                         <a:spcBef>
                           <a:spcPts val="0"/>
                         </a:spcBef>
                         <a:spcAft>
                           <a:spcPts val="0"/>
                         </a:spcAft>
+                        <a:buClr>
+                          <a:srgbClr val="000000"/>
+                        </a:buClr>
+                        <a:buSzPts val="2000"/>
+                        <a:buFont typeface="Arial"/>
                         <a:buNone/>
                       </a:pPr>
                       <a:r>
-                        <a:rPr lang="en-US" sz="2000"/>
+                        <a:rPr lang="en-US" sz="2000" u="none" strike="noStrike" cap="none"/>
                         <a:t>Significant (−)</a:t>
                       </a:r>
-                      <a:endParaRPr sz="2000"/>
+                      <a:endParaRPr sz="2000" u="none" strike="noStrike" cap="none"/>
                     </a:p>
                   </a:txBody>
                   <a:tcPr marL="91425" marR="91425" marT="91425" marB="91425"/>
@@ -24605,20 +27726,28 @@
                     <a:bodyPr/>
                     <a:lstStyle/>
                     <a:p>
-                      <a:pPr marL="0" lvl="0" indent="0" algn="l" rtl="0">
+                      <a:pPr marL="0" marR="0" lvl="0" indent="0" algn="l" rtl="0">
+                        <a:lnSpc>
+                          <a:spcPct val="100000"/>
+                        </a:lnSpc>
                         <a:spcBef>
                           <a:spcPts val="0"/>
                         </a:spcBef>
                         <a:spcAft>
                           <a:spcPts val="0"/>
                         </a:spcAft>
+                        <a:buClr>
+                          <a:srgbClr val="000000"/>
+                        </a:buClr>
+                        <a:buSzPts val="2000"/>
+                        <a:buFont typeface="Arial"/>
                         <a:buNone/>
                       </a:pPr>
                       <a:r>
-                        <a:rPr lang="en-US" sz="2000" b="1"/>
+                        <a:rPr lang="en-US" sz="2000" b="1" u="none" strike="noStrike" cap="none"/>
                         <a:t>GDP Growth (%)</a:t>
                       </a:r>
-                      <a:endParaRPr sz="2000" b="1"/>
+                      <a:endParaRPr sz="2000" b="1" u="none" strike="noStrike" cap="none"/>
                     </a:p>
                   </a:txBody>
                   <a:tcPr marL="91425" marR="91425" marT="91425" marB="91425"/>
@@ -24628,20 +27757,28 @@
                     <a:bodyPr/>
                     <a:lstStyle/>
                     <a:p>
-                      <a:pPr marL="0" lvl="0" indent="0" algn="l" rtl="0">
+                      <a:pPr marL="0" marR="0" lvl="0" indent="0" algn="l" rtl="0">
+                        <a:lnSpc>
+                          <a:spcPct val="100000"/>
+                        </a:lnSpc>
                         <a:spcBef>
                           <a:spcPts val="0"/>
                         </a:spcBef>
                         <a:spcAft>
                           <a:spcPts val="0"/>
                         </a:spcAft>
+                        <a:buClr>
+                          <a:srgbClr val="000000"/>
+                        </a:buClr>
+                        <a:buSzPts val="2000"/>
+                        <a:buFont typeface="Arial"/>
                         <a:buNone/>
                       </a:pPr>
                       <a:r>
-                        <a:rPr lang="en-US" sz="2000" b="1"/>
+                        <a:rPr lang="en-US" sz="2000" b="1" u="none" strike="noStrike" cap="none"/>
                         <a:t>−US$1.06B</a:t>
                       </a:r>
-                      <a:endParaRPr sz="2000" b="1"/>
+                      <a:endParaRPr sz="2000" b="1" u="none" strike="noStrike" cap="none"/>
                     </a:p>
                   </a:txBody>
                   <a:tcPr marL="91425" marR="91425" marT="91425" marB="91425"/>
@@ -24651,20 +27788,28 @@
                     <a:bodyPr/>
                     <a:lstStyle/>
                     <a:p>
-                      <a:pPr marL="0" lvl="0" indent="0" algn="l" rtl="0">
+                      <a:pPr marL="0" marR="0" lvl="0" indent="0" algn="l" rtl="0">
+                        <a:lnSpc>
+                          <a:spcPct val="100000"/>
+                        </a:lnSpc>
                         <a:spcBef>
                           <a:spcPts val="0"/>
                         </a:spcBef>
                         <a:spcAft>
                           <a:spcPts val="0"/>
                         </a:spcAft>
+                        <a:buClr>
+                          <a:srgbClr val="000000"/>
+                        </a:buClr>
+                        <a:buSzPts val="2000"/>
+                        <a:buFont typeface="Arial"/>
                         <a:buNone/>
                       </a:pPr>
                       <a:r>
-                        <a:rPr lang="en-US" sz="2000"/>
+                        <a:rPr lang="en-US" sz="2000" u="none" strike="noStrike" cap="none"/>
                         <a:t>0.063</a:t>
                       </a:r>
-                      <a:endParaRPr sz="2000"/>
+                      <a:endParaRPr sz="2000" u="none" strike="noStrike" cap="none"/>
                     </a:p>
                   </a:txBody>
                   <a:tcPr marL="91425" marR="91425" marT="91425" marB="91425"/>
@@ -24674,20 +27819,28 @@
                     <a:bodyPr/>
                     <a:lstStyle/>
                     <a:p>
-                      <a:pPr marL="0" lvl="0" indent="0" algn="l" rtl="0">
+                      <a:pPr marL="0" marR="0" lvl="0" indent="0" algn="l" rtl="0">
+                        <a:lnSpc>
+                          <a:spcPct val="100000"/>
+                        </a:lnSpc>
                         <a:spcBef>
                           <a:spcPts val="0"/>
                         </a:spcBef>
                         <a:spcAft>
                           <a:spcPts val="0"/>
                         </a:spcAft>
+                        <a:buClr>
+                          <a:srgbClr val="000000"/>
+                        </a:buClr>
+                        <a:buSzPts val="2000"/>
+                        <a:buFont typeface="Arial"/>
                         <a:buNone/>
                       </a:pPr>
                       <a:r>
-                        <a:rPr lang="en-US" sz="2000"/>
+                        <a:rPr lang="en-US" sz="2000" u="none" strike="noStrike" cap="none"/>
                         <a:t>Not significant</a:t>
                       </a:r>
-                      <a:endParaRPr sz="2000"/>
+                      <a:endParaRPr sz="2000" u="none" strike="noStrike" cap="none"/>
                     </a:p>
                   </a:txBody>
                   <a:tcPr marL="91425" marR="91425" marT="91425" marB="91425"/>
@@ -24704,20 +27857,28 @@
                     <a:bodyPr/>
                     <a:lstStyle/>
                     <a:p>
-                      <a:pPr marL="0" lvl="0" indent="0" algn="l" rtl="0">
+                      <a:pPr marL="0" marR="0" lvl="0" indent="0" algn="l" rtl="0">
+                        <a:lnSpc>
+                          <a:spcPct val="100000"/>
+                        </a:lnSpc>
                         <a:spcBef>
                           <a:spcPts val="0"/>
                         </a:spcBef>
                         <a:spcAft>
                           <a:spcPts val="0"/>
                         </a:spcAft>
+                        <a:buClr>
+                          <a:srgbClr val="000000"/>
+                        </a:buClr>
+                        <a:buSzPts val="2000"/>
+                        <a:buFont typeface="Arial"/>
                         <a:buNone/>
                       </a:pPr>
                       <a:r>
-                        <a:rPr lang="en-US" sz="2000" b="1"/>
+                        <a:rPr lang="en-US" sz="2000" b="1" u="none" strike="noStrike" cap="none"/>
                         <a:t>GFCF Growth (%)</a:t>
                       </a:r>
-                      <a:endParaRPr sz="2000" b="1"/>
+                      <a:endParaRPr sz="2000" b="1" u="none" strike="noStrike" cap="none"/>
                     </a:p>
                   </a:txBody>
                   <a:tcPr marL="91425" marR="91425" marT="91425" marB="91425"/>
@@ -24727,20 +27888,28 @@
                     <a:bodyPr/>
                     <a:lstStyle/>
                     <a:p>
-                      <a:pPr marL="0" lvl="0" indent="0" algn="l" rtl="0">
+                      <a:pPr marL="0" marR="0" lvl="0" indent="0" algn="l" rtl="0">
+                        <a:lnSpc>
+                          <a:spcPct val="100000"/>
+                        </a:lnSpc>
                         <a:spcBef>
                           <a:spcPts val="0"/>
                         </a:spcBef>
                         <a:spcAft>
                           <a:spcPts val="0"/>
                         </a:spcAft>
+                        <a:buClr>
+                          <a:srgbClr val="000000"/>
+                        </a:buClr>
+                        <a:buSzPts val="2000"/>
+                        <a:buFont typeface="Arial"/>
                         <a:buNone/>
                       </a:pPr>
                       <a:r>
-                        <a:rPr lang="en-US" sz="2000" b="1"/>
+                        <a:rPr lang="en-US" sz="2000" b="1" u="none" strike="noStrike" cap="none"/>
                         <a:t>−US$119.0M</a:t>
                       </a:r>
-                      <a:endParaRPr sz="2000" b="1"/>
+                      <a:endParaRPr sz="2000" b="1" u="none" strike="noStrike" cap="none"/>
                     </a:p>
                   </a:txBody>
                   <a:tcPr marL="91425" marR="91425" marT="91425" marB="91425"/>
@@ -24750,20 +27919,28 @@
                     <a:bodyPr/>
                     <a:lstStyle/>
                     <a:p>
-                      <a:pPr marL="0" lvl="0" indent="0" algn="l" rtl="0">
+                      <a:pPr marL="0" marR="0" lvl="0" indent="0" algn="l" rtl="0">
+                        <a:lnSpc>
+                          <a:spcPct val="100000"/>
+                        </a:lnSpc>
                         <a:spcBef>
                           <a:spcPts val="0"/>
                         </a:spcBef>
                         <a:spcAft>
                           <a:spcPts val="0"/>
                         </a:spcAft>
+                        <a:buClr>
+                          <a:srgbClr val="000000"/>
+                        </a:buClr>
+                        <a:buSzPts val="2000"/>
+                        <a:buFont typeface="Arial"/>
                         <a:buNone/>
                       </a:pPr>
                       <a:r>
-                        <a:rPr lang="en-US" sz="2000"/>
+                        <a:rPr lang="en-US" sz="2000" u="none" strike="noStrike" cap="none"/>
                         <a:t>0.655</a:t>
                       </a:r>
-                      <a:endParaRPr sz="2000"/>
+                      <a:endParaRPr sz="2000" u="none" strike="noStrike" cap="none"/>
                     </a:p>
                   </a:txBody>
                   <a:tcPr marL="91425" marR="91425" marT="91425" marB="91425"/>
@@ -24773,20 +27950,28 @@
                     <a:bodyPr/>
                     <a:lstStyle/>
                     <a:p>
-                      <a:pPr marL="0" lvl="0" indent="0" algn="l" rtl="0">
+                      <a:pPr marL="0" marR="0" lvl="0" indent="0" algn="l" rtl="0">
+                        <a:lnSpc>
+                          <a:spcPct val="100000"/>
+                        </a:lnSpc>
                         <a:spcBef>
                           <a:spcPts val="0"/>
                         </a:spcBef>
                         <a:spcAft>
                           <a:spcPts val="0"/>
                         </a:spcAft>
+                        <a:buClr>
+                          <a:srgbClr val="000000"/>
+                        </a:buClr>
+                        <a:buSzPts val="2000"/>
+                        <a:buFont typeface="Arial"/>
                         <a:buNone/>
                       </a:pPr>
                       <a:r>
-                        <a:rPr lang="en-US" sz="2000"/>
+                        <a:rPr lang="en-US" sz="2000" u="none" strike="noStrike" cap="none"/>
                         <a:t>Not significant</a:t>
                       </a:r>
-                      <a:endParaRPr sz="2000"/>
+                      <a:endParaRPr sz="2000" u="none" strike="noStrike" cap="none"/>
                     </a:p>
                   </a:txBody>
                   <a:tcPr marL="91425" marR="91425" marT="91425" marB="91425"/>
@@ -24803,20 +27988,28 @@
                     <a:bodyPr/>
                     <a:lstStyle/>
                     <a:p>
-                      <a:pPr marL="0" lvl="0" indent="0" algn="l" rtl="0">
+                      <a:pPr marL="0" marR="0" lvl="0" indent="0" algn="l" rtl="0">
+                        <a:lnSpc>
+                          <a:spcPct val="100000"/>
+                        </a:lnSpc>
                         <a:spcBef>
                           <a:spcPts val="0"/>
                         </a:spcBef>
                         <a:spcAft>
                           <a:spcPts val="0"/>
                         </a:spcAft>
+                        <a:buClr>
+                          <a:srgbClr val="000000"/>
+                        </a:buClr>
+                        <a:buSzPts val="2000"/>
+                        <a:buFont typeface="Arial"/>
                         <a:buNone/>
                       </a:pPr>
                       <a:r>
-                        <a:rPr lang="en-US" sz="2000" b="1"/>
+                        <a:rPr lang="en-US" sz="2000" b="1" u="none" strike="noStrike" cap="none"/>
                         <a:t>Intercept</a:t>
                       </a:r>
-                      <a:endParaRPr sz="2000" b="1"/>
+                      <a:endParaRPr sz="2000" b="1" u="none" strike="noStrike" cap="none"/>
                     </a:p>
                   </a:txBody>
                   <a:tcPr marL="91425" marR="91425" marT="91425" marB="91425"/>
@@ -24826,20 +28019,28 @@
                     <a:bodyPr/>
                     <a:lstStyle/>
                     <a:p>
-                      <a:pPr marL="0" lvl="0" indent="0" algn="l" rtl="0">
+                      <a:pPr marL="0" marR="0" lvl="0" indent="0" algn="l" rtl="0">
+                        <a:lnSpc>
+                          <a:spcPct val="100000"/>
+                        </a:lnSpc>
                         <a:spcBef>
                           <a:spcPts val="0"/>
                         </a:spcBef>
                         <a:spcAft>
                           <a:spcPts val="0"/>
                         </a:spcAft>
+                        <a:buClr>
+                          <a:srgbClr val="000000"/>
+                        </a:buClr>
+                        <a:buSzPts val="2000"/>
+                        <a:buFont typeface="Arial"/>
                         <a:buNone/>
                       </a:pPr>
                       <a:r>
-                        <a:rPr lang="en-US" sz="2000" b="1"/>
+                        <a:rPr lang="en-US" sz="2000" b="1" u="none" strike="noStrike" cap="none"/>
                         <a:t>+US$57.0B</a:t>
                       </a:r>
-                      <a:endParaRPr sz="2000" b="1"/>
+                      <a:endParaRPr sz="2000" b="1" u="none" strike="noStrike" cap="none"/>
                     </a:p>
                   </a:txBody>
                   <a:tcPr marL="91425" marR="91425" marT="91425" marB="91425"/>
@@ -24849,20 +28050,28 @@
                     <a:bodyPr/>
                     <a:lstStyle/>
                     <a:p>
-                      <a:pPr marL="0" lvl="0" indent="0" algn="l" rtl="0">
+                      <a:pPr marL="0" marR="0" lvl="0" indent="0" algn="l" rtl="0">
+                        <a:lnSpc>
+                          <a:spcPct val="100000"/>
+                        </a:lnSpc>
                         <a:spcBef>
                           <a:spcPts val="0"/>
                         </a:spcBef>
                         <a:spcAft>
                           <a:spcPts val="0"/>
                         </a:spcAft>
+                        <a:buClr>
+                          <a:srgbClr val="000000"/>
+                        </a:buClr>
+                        <a:buSzPts val="2000"/>
+                        <a:buFont typeface="Arial"/>
                         <a:buNone/>
                       </a:pPr>
                       <a:r>
-                        <a:rPr lang="en-US" sz="2000"/>
+                        <a:rPr lang="en-US" sz="2000" u="none" strike="noStrike" cap="none"/>
                         <a:t>0.015</a:t>
                       </a:r>
-                      <a:endParaRPr sz="2000"/>
+                      <a:endParaRPr sz="2000" u="none" strike="noStrike" cap="none"/>
                     </a:p>
                   </a:txBody>
                   <a:tcPr marL="91425" marR="91425" marT="91425" marB="91425"/>
@@ -24872,20 +28081,28 @@
                     <a:bodyPr/>
                     <a:lstStyle/>
                     <a:p>
-                      <a:pPr marL="0" lvl="0" indent="0" algn="l" rtl="0">
+                      <a:pPr marL="0" marR="0" lvl="0" indent="0" algn="l" rtl="0">
+                        <a:lnSpc>
+                          <a:spcPct val="100000"/>
+                        </a:lnSpc>
                         <a:spcBef>
                           <a:spcPts val="0"/>
                         </a:spcBef>
                         <a:spcAft>
                           <a:spcPts val="0"/>
                         </a:spcAft>
+                        <a:buClr>
+                          <a:srgbClr val="000000"/>
+                        </a:buClr>
+                        <a:buSzPts val="2000"/>
+                        <a:buFont typeface="Arial"/>
                         <a:buNone/>
                       </a:pPr>
                       <a:r>
-                        <a:rPr lang="en-US" sz="2000"/>
+                        <a:rPr lang="en-US" sz="2000" u="none" strike="noStrike" cap="none"/>
                         <a:t>Significant</a:t>
                       </a:r>
-                      <a:endParaRPr sz="2000"/>
+                      <a:endParaRPr sz="2000" u="none" strike="noStrike" cap="none"/>
                     </a:p>
                   </a:txBody>
                   <a:tcPr marL="91425" marR="91425" marT="91425" marB="91425"/>
@@ -24943,17 +28160,25 @@
               <a:buNone/>
             </a:pPr>
             <a:r>
-              <a:rPr lang="en-US" sz="2300" b="1">
+              <a:rPr lang="en-US" sz="2300" b="1" i="0" u="none" strike="noStrike" cap="none">
                 <a:solidFill>
                   <a:schemeClr val="dk1"/>
                 </a:solidFill>
+                <a:latin typeface="Arial"/>
+                <a:ea typeface="Arial"/>
+                <a:cs typeface="Arial"/>
+                <a:sym typeface="Arial"/>
               </a:rPr>
               <a:t>R² = 0.763 | Adjusted R² = 0.742 | N = 50 | Model p-value &lt; 0.001</a:t>
             </a:r>
-            <a:endParaRPr sz="2300" b="1">
+            <a:endParaRPr sz="2300" b="1" i="0" u="none" strike="noStrike" cap="none">
               <a:solidFill>
                 <a:schemeClr val="dk1"/>
               </a:solidFill>
+              <a:latin typeface="Arial"/>
+              <a:ea typeface="Arial"/>
+              <a:cs typeface="Arial"/>
+              <a:sym typeface="Arial"/>
             </a:endParaRPr>
           </a:p>
         </p:txBody>
@@ -24966,7 +28191,7 @@
 </p:sld>
 </file>
 
-<file path=ppt/slides/slide11.xml><?xml version="1.0" encoding="utf-8"?>
+<file path=ppt/slides/slide12.xml><?xml version="1.0" encoding="utf-8"?>
 <p:sld xmlns:a="http://schemas.openxmlformats.org/drawingml/2006/main" xmlns:r="http://schemas.openxmlformats.org/officeDocument/2006/relationships" xmlns:p="http://schemas.openxmlformats.org/presentationml/2006/main">
   <p:cSld>
     <p:spTree>
@@ -25062,23 +28287,38 @@
           </a:bodyPr>
           <a:lstStyle/>
           <a:p>
-            <a:pPr marL="0" lvl="0" indent="0" algn="ctr" rtl="0">
-              <a:spcBef>
-                <a:spcPts val="0"/>
-              </a:spcBef>
-              <a:spcAft>
-                <a:spcPts val="0"/>
-              </a:spcAft>
+            <a:pPr marL="0" marR="0" lvl="0" indent="0" algn="ctr" rtl="0">
+              <a:lnSpc>
+                <a:spcPct val="100000"/>
+              </a:lnSpc>
+              <a:spcBef>
+                <a:spcPts val="0"/>
+              </a:spcBef>
+              <a:spcAft>
+                <a:spcPts val="0"/>
+              </a:spcAft>
+              <a:buClr>
+                <a:srgbClr val="000000"/>
+              </a:buClr>
+              <a:buSzPts val="2100"/>
+              <a:buFont typeface="Arial"/>
               <a:buNone/>
             </a:pPr>
-            <a:endParaRPr sz="2100" b="1">
+            <a:endParaRPr sz="2100" b="1" i="0" u="none" strike="noStrike" cap="none">
               <a:solidFill>
                 <a:schemeClr val="dk1"/>
               </a:solidFill>
+              <a:latin typeface="Arial"/>
+              <a:ea typeface="Arial"/>
+              <a:cs typeface="Arial"/>
+              <a:sym typeface="Arial"/>
             </a:endParaRPr>
           </a:p>
           <a:p>
-            <a:pPr marL="0" lvl="0" indent="0" algn="ctr" rtl="0">
+            <a:pPr marL="0" marR="0" lvl="0" indent="0" algn="ctr" rtl="0">
+              <a:lnSpc>
+                <a:spcPct val="100000"/>
+              </a:lnSpc>
               <a:spcBef>
                 <a:spcPts val="0"/>
               </a:spcBef>
@@ -25093,21 +28333,32 @@
               <a:buNone/>
             </a:pPr>
             <a:r>
-              <a:rPr lang="en-US" sz="2100" b="1">
+              <a:rPr lang="en-US" sz="2100" b="1" i="0" u="none" strike="noStrike" cap="none">
                 <a:solidFill>
                   <a:schemeClr val="dk1"/>
                 </a:solidFill>
+                <a:latin typeface="Arial"/>
+                <a:ea typeface="Arial"/>
+                <a:cs typeface="Arial"/>
+                <a:sym typeface="Arial"/>
               </a:rPr>
               <a:t>TRADE OPENNESS ↑</a:t>
             </a:r>
-            <a:endParaRPr sz="2100" b="1">
+            <a:endParaRPr sz="2100" b="1" i="0" u="none" strike="noStrike" cap="none">
               <a:solidFill>
                 <a:schemeClr val="dk1"/>
               </a:solidFill>
+              <a:latin typeface="Arial"/>
+              <a:ea typeface="Arial"/>
+              <a:cs typeface="Arial"/>
+              <a:sym typeface="Arial"/>
             </a:endParaRPr>
           </a:p>
           <a:p>
-            <a:pPr marL="0" lvl="0" indent="0" algn="ctr" rtl="0">
+            <a:pPr marL="0" marR="0" lvl="0" indent="0" algn="ctr" rtl="0">
+              <a:lnSpc>
+                <a:spcPct val="100000"/>
+              </a:lnSpc>
               <a:spcBef>
                 <a:spcPts val="0"/>
               </a:spcBef>
@@ -25122,21 +28373,32 @@
               <a:buNone/>
             </a:pPr>
             <a:r>
-              <a:rPr lang="en-US" sz="2100">
+              <a:rPr lang="en-US" sz="2100" b="0" i="0" u="none" strike="noStrike" cap="none">
                 <a:solidFill>
                   <a:schemeClr val="dk1"/>
                 </a:solidFill>
+                <a:latin typeface="Arial"/>
+                <a:ea typeface="Arial"/>
+                <a:cs typeface="Arial"/>
+                <a:sym typeface="Arial"/>
               </a:rPr>
               <a:t>Strongest positive driver</a:t>
             </a:r>
-            <a:endParaRPr sz="2100">
+            <a:endParaRPr sz="2100" b="0" i="0" u="none" strike="noStrike" cap="none">
               <a:solidFill>
                 <a:schemeClr val="dk1"/>
               </a:solidFill>
+              <a:latin typeface="Arial"/>
+              <a:ea typeface="Arial"/>
+              <a:cs typeface="Arial"/>
+              <a:sym typeface="Arial"/>
             </a:endParaRPr>
           </a:p>
           <a:p>
-            <a:pPr marL="0" lvl="0" indent="0" algn="ctr" rtl="0">
+            <a:pPr marL="0" marR="0" lvl="0" indent="0" algn="ctr" rtl="0">
+              <a:lnSpc>
+                <a:spcPct val="100000"/>
+              </a:lnSpc>
               <a:spcBef>
                 <a:spcPts val="0"/>
               </a:spcBef>
@@ -25151,49 +28413,77 @@
               <a:buNone/>
             </a:pPr>
             <a:r>
-              <a:rPr lang="en-US" sz="2100" b="1">
+              <a:rPr lang="en-US" sz="2100" b="1" i="0" u="none" strike="noStrike" cap="none">
                 <a:solidFill>
                   <a:schemeClr val="dk1"/>
                 </a:solidFill>
+                <a:latin typeface="Arial"/>
+                <a:ea typeface="Arial"/>
+                <a:cs typeface="Arial"/>
+                <a:sym typeface="Arial"/>
               </a:rPr>
               <a:t>+US$966.8M</a:t>
             </a:r>
             <a:r>
-              <a:rPr lang="en-US" sz="2100">
+              <a:rPr lang="en-US" sz="2100" b="0" i="0" u="none" strike="noStrike" cap="none">
                 <a:solidFill>
                   <a:schemeClr val="dk1"/>
                 </a:solidFill>
+                <a:latin typeface="Arial"/>
+                <a:ea typeface="Arial"/>
+                <a:cs typeface="Arial"/>
+                <a:sym typeface="Arial"/>
               </a:rPr>
               <a:t> per 1%-point increase</a:t>
             </a:r>
-            <a:endParaRPr sz="2100">
+            <a:endParaRPr sz="2100" b="0" i="0" u="none" strike="noStrike" cap="none">
               <a:solidFill>
                 <a:schemeClr val="dk1"/>
               </a:solidFill>
+              <a:latin typeface="Arial"/>
+              <a:ea typeface="Arial"/>
+              <a:cs typeface="Arial"/>
+              <a:sym typeface="Arial"/>
             </a:endParaRPr>
           </a:p>
           <a:p>
-            <a:pPr marL="0" lvl="0" indent="0" algn="ctr" rtl="0">
-              <a:spcBef>
-                <a:spcPts val="0"/>
-              </a:spcBef>
-              <a:spcAft>
-                <a:spcPts val="0"/>
-              </a:spcAft>
+            <a:pPr marL="0" marR="0" lvl="0" indent="0" algn="ctr" rtl="0">
+              <a:lnSpc>
+                <a:spcPct val="100000"/>
+              </a:lnSpc>
+              <a:spcBef>
+                <a:spcPts val="0"/>
+              </a:spcBef>
+              <a:spcAft>
+                <a:spcPts val="0"/>
+              </a:spcAft>
+              <a:buClr>
+                <a:srgbClr val="000000"/>
+              </a:buClr>
+              <a:buSzPts val="2100"/>
+              <a:buFont typeface="Arial"/>
               <a:buNone/>
             </a:pPr>
             <a:r>
-              <a:rPr lang="en-US" sz="2100" b="1">
+              <a:rPr lang="en-US" sz="2100" b="1" i="0" u="none" strike="noStrike" cap="none">
                 <a:solidFill>
                   <a:schemeClr val="dk1"/>
                 </a:solidFill>
+                <a:latin typeface="Arial"/>
+                <a:ea typeface="Arial"/>
+                <a:cs typeface="Arial"/>
+                <a:sym typeface="Arial"/>
               </a:rPr>
               <a:t>p &lt; 0.001</a:t>
             </a:r>
-            <a:endParaRPr sz="2100">
+            <a:endParaRPr sz="2100" b="0" i="0" u="none" strike="noStrike" cap="none">
               <a:solidFill>
                 <a:schemeClr val="dk1"/>
               </a:solidFill>
+              <a:latin typeface="Arial"/>
+              <a:ea typeface="Arial"/>
+              <a:cs typeface="Arial"/>
+              <a:sym typeface="Arial"/>
             </a:endParaRPr>
           </a:p>
         </p:txBody>
@@ -25223,23 +28513,38 @@
           </a:bodyPr>
           <a:lstStyle/>
           <a:p>
-            <a:pPr marL="0" lvl="0" indent="0" algn="ctr" rtl="0">
-              <a:spcBef>
-                <a:spcPts val="0"/>
-              </a:spcBef>
-              <a:spcAft>
-                <a:spcPts val="0"/>
-              </a:spcAft>
+            <a:pPr marL="0" marR="0" lvl="0" indent="0" algn="ctr" rtl="0">
+              <a:lnSpc>
+                <a:spcPct val="100000"/>
+              </a:lnSpc>
+              <a:spcBef>
+                <a:spcPts val="0"/>
+              </a:spcBef>
+              <a:spcAft>
+                <a:spcPts val="0"/>
+              </a:spcAft>
+              <a:buClr>
+                <a:srgbClr val="000000"/>
+              </a:buClr>
+              <a:buSzPts val="2100"/>
+              <a:buFont typeface="Arial"/>
               <a:buNone/>
             </a:pPr>
-            <a:endParaRPr sz="2100" b="1">
+            <a:endParaRPr sz="2100" b="1" i="0" u="none" strike="noStrike" cap="none">
               <a:solidFill>
                 <a:schemeClr val="dk1"/>
               </a:solidFill>
+              <a:latin typeface="Arial"/>
+              <a:ea typeface="Arial"/>
+              <a:cs typeface="Arial"/>
+              <a:sym typeface="Arial"/>
             </a:endParaRPr>
           </a:p>
           <a:p>
-            <a:pPr marL="0" lvl="0" indent="0" algn="ctr" rtl="0">
+            <a:pPr marL="0" marR="0" lvl="0" indent="0" algn="ctr" rtl="0">
+              <a:lnSpc>
+                <a:spcPct val="100000"/>
+              </a:lnSpc>
               <a:spcBef>
                 <a:spcPts val="0"/>
               </a:spcBef>
@@ -25254,21 +28559,32 @@
               <a:buNone/>
             </a:pPr>
             <a:r>
-              <a:rPr lang="en-US" sz="2100" b="1">
+              <a:rPr lang="en-US" sz="2100" b="1" i="0" u="none" strike="noStrike" cap="none">
                 <a:solidFill>
                   <a:schemeClr val="dk1"/>
                 </a:solidFill>
+                <a:latin typeface="Arial"/>
+                <a:ea typeface="Arial"/>
+                <a:cs typeface="Arial"/>
+                <a:sym typeface="Arial"/>
               </a:rPr>
               <a:t>MANUFACTURING ↓</a:t>
             </a:r>
-            <a:endParaRPr sz="2100" b="1">
+            <a:endParaRPr sz="2100" b="1" i="0" u="none" strike="noStrike" cap="none">
               <a:solidFill>
                 <a:schemeClr val="dk1"/>
               </a:solidFill>
+              <a:latin typeface="Arial"/>
+              <a:ea typeface="Arial"/>
+              <a:cs typeface="Arial"/>
+              <a:sym typeface="Arial"/>
             </a:endParaRPr>
           </a:p>
           <a:p>
-            <a:pPr marL="0" lvl="0" indent="0" algn="ctr" rtl="0">
+            <a:pPr marL="0" marR="0" lvl="0" indent="0" algn="ctr" rtl="0">
+              <a:lnSpc>
+                <a:spcPct val="100000"/>
+              </a:lnSpc>
               <a:spcBef>
                 <a:spcPts val="0"/>
               </a:spcBef>
@@ -25283,21 +28599,32 @@
               <a:buNone/>
             </a:pPr>
             <a:r>
-              <a:rPr lang="en-US" sz="2100">
+              <a:rPr lang="en-US" sz="2100" b="0" i="0" u="none" strike="noStrike" cap="none">
                 <a:solidFill>
                   <a:schemeClr val="dk1"/>
                 </a:solidFill>
+                <a:latin typeface="Arial"/>
+                <a:ea typeface="Arial"/>
+                <a:cs typeface="Arial"/>
+                <a:sym typeface="Arial"/>
               </a:rPr>
               <a:t>Significant negative relationship</a:t>
             </a:r>
-            <a:endParaRPr sz="2100">
+            <a:endParaRPr sz="2100" b="0" i="0" u="none" strike="noStrike" cap="none">
               <a:solidFill>
                 <a:schemeClr val="dk1"/>
               </a:solidFill>
+              <a:latin typeface="Arial"/>
+              <a:ea typeface="Arial"/>
+              <a:cs typeface="Arial"/>
+              <a:sym typeface="Arial"/>
             </a:endParaRPr>
           </a:p>
           <a:p>
-            <a:pPr marL="0" lvl="0" indent="0" algn="ctr" rtl="0">
+            <a:pPr marL="0" marR="0" lvl="0" indent="0" algn="ctr" rtl="0">
+              <a:lnSpc>
+                <a:spcPct val="100000"/>
+              </a:lnSpc>
               <a:spcBef>
                 <a:spcPts val="0"/>
               </a:spcBef>
@@ -25312,49 +28639,77 @@
               <a:buNone/>
             </a:pPr>
             <a:r>
-              <a:rPr lang="en-US" sz="2100" b="1">
+              <a:rPr lang="en-US" sz="2100" b="1" i="0" u="none" strike="noStrike" cap="none">
                 <a:solidFill>
                   <a:schemeClr val="dk1"/>
                 </a:solidFill>
+                <a:latin typeface="Arial"/>
+                <a:ea typeface="Arial"/>
+                <a:cs typeface="Arial"/>
+                <a:sym typeface="Arial"/>
               </a:rPr>
               <a:t>−US$4.01B</a:t>
             </a:r>
             <a:r>
-              <a:rPr lang="en-US" sz="2100">
+              <a:rPr lang="en-US" sz="2100" b="0" i="0" u="none" strike="noStrike" cap="none">
                 <a:solidFill>
                   <a:schemeClr val="dk1"/>
                 </a:solidFill>
+                <a:latin typeface="Arial"/>
+                <a:ea typeface="Arial"/>
+                <a:cs typeface="Arial"/>
+                <a:sym typeface="Arial"/>
               </a:rPr>
               <a:t> per 1%-point increase</a:t>
             </a:r>
-            <a:endParaRPr sz="2100">
+            <a:endParaRPr sz="2100" b="0" i="0" u="none" strike="noStrike" cap="none">
               <a:solidFill>
                 <a:schemeClr val="dk1"/>
               </a:solidFill>
+              <a:latin typeface="Arial"/>
+              <a:ea typeface="Arial"/>
+              <a:cs typeface="Arial"/>
+              <a:sym typeface="Arial"/>
             </a:endParaRPr>
           </a:p>
           <a:p>
-            <a:pPr marL="0" lvl="0" indent="0" algn="ctr" rtl="0">
-              <a:spcBef>
-                <a:spcPts val="0"/>
-              </a:spcBef>
-              <a:spcAft>
-                <a:spcPts val="0"/>
-              </a:spcAft>
+            <a:pPr marL="0" marR="0" lvl="0" indent="0" algn="ctr" rtl="0">
+              <a:lnSpc>
+                <a:spcPct val="100000"/>
+              </a:lnSpc>
+              <a:spcBef>
+                <a:spcPts val="0"/>
+              </a:spcBef>
+              <a:spcAft>
+                <a:spcPts val="0"/>
+              </a:spcAft>
+              <a:buClr>
+                <a:srgbClr val="000000"/>
+              </a:buClr>
+              <a:buSzPts val="2100"/>
+              <a:buFont typeface="Arial"/>
               <a:buNone/>
             </a:pPr>
             <a:r>
-              <a:rPr lang="en-US" sz="2100" b="1">
+              <a:rPr lang="en-US" sz="2100" b="1" i="0" u="none" strike="noStrike" cap="none">
                 <a:solidFill>
                   <a:schemeClr val="dk1"/>
                 </a:solidFill>
+                <a:latin typeface="Arial"/>
+                <a:ea typeface="Arial"/>
+                <a:cs typeface="Arial"/>
+                <a:sym typeface="Arial"/>
               </a:rPr>
               <a:t>p = 0.004</a:t>
             </a:r>
-            <a:endParaRPr sz="2100">
+            <a:endParaRPr sz="2100" b="0" i="0" u="none" strike="noStrike" cap="none">
               <a:solidFill>
                 <a:schemeClr val="dk1"/>
               </a:solidFill>
+              <a:latin typeface="Arial"/>
+              <a:ea typeface="Arial"/>
+              <a:cs typeface="Arial"/>
+              <a:sym typeface="Arial"/>
             </a:endParaRPr>
           </a:p>
         </p:txBody>
@@ -25384,23 +28739,38 @@
           </a:bodyPr>
           <a:lstStyle/>
           <a:p>
-            <a:pPr marL="0" lvl="0" indent="0" algn="ctr" rtl="0">
-              <a:spcBef>
-                <a:spcPts val="0"/>
-              </a:spcBef>
-              <a:spcAft>
-                <a:spcPts val="0"/>
-              </a:spcAft>
+            <a:pPr marL="0" marR="0" lvl="0" indent="0" algn="ctr" rtl="0">
+              <a:lnSpc>
+                <a:spcPct val="100000"/>
+              </a:lnSpc>
+              <a:spcBef>
+                <a:spcPts val="0"/>
+              </a:spcBef>
+              <a:spcAft>
+                <a:spcPts val="0"/>
+              </a:spcAft>
+              <a:buClr>
+                <a:srgbClr val="000000"/>
+              </a:buClr>
+              <a:buSzPts val="2100"/>
+              <a:buFont typeface="Arial"/>
               <a:buNone/>
             </a:pPr>
-            <a:endParaRPr sz="2100" b="1">
+            <a:endParaRPr sz="2100" b="1" i="0" u="none" strike="noStrike" cap="none">
               <a:solidFill>
                 <a:schemeClr val="dk1"/>
               </a:solidFill>
+              <a:latin typeface="Arial"/>
+              <a:ea typeface="Arial"/>
+              <a:cs typeface="Arial"/>
+              <a:sym typeface="Arial"/>
             </a:endParaRPr>
           </a:p>
           <a:p>
-            <a:pPr marL="0" lvl="0" indent="0" algn="ctr" rtl="0">
+            <a:pPr marL="0" marR="0" lvl="0" indent="0" algn="ctr" rtl="0">
+              <a:lnSpc>
+                <a:spcPct val="100000"/>
+              </a:lnSpc>
               <a:spcBef>
                 <a:spcPts val="0"/>
               </a:spcBef>
@@ -25415,21 +28785,32 @@
               <a:buNone/>
             </a:pPr>
             <a:r>
-              <a:rPr lang="en-US" sz="2100" b="1">
+              <a:rPr lang="en-US" sz="2100" b="1" i="0" u="none" strike="noStrike" cap="none">
                 <a:solidFill>
                   <a:schemeClr val="dk1"/>
                 </a:solidFill>
+                <a:latin typeface="Arial"/>
+                <a:ea typeface="Arial"/>
+                <a:cs typeface="Arial"/>
+                <a:sym typeface="Arial"/>
               </a:rPr>
               <a:t>OTHER FACTORS</a:t>
             </a:r>
-            <a:endParaRPr sz="2100" b="1">
+            <a:endParaRPr sz="2100" b="1" i="0" u="none" strike="noStrike" cap="none">
               <a:solidFill>
                 <a:schemeClr val="dk1"/>
               </a:solidFill>
+              <a:latin typeface="Arial"/>
+              <a:ea typeface="Arial"/>
+              <a:cs typeface="Arial"/>
+              <a:sym typeface="Arial"/>
             </a:endParaRPr>
           </a:p>
           <a:p>
-            <a:pPr marL="0" lvl="0" indent="0" algn="ctr" rtl="0">
+            <a:pPr marL="0" marR="0" lvl="0" indent="0" algn="ctr" rtl="0">
+              <a:lnSpc>
+                <a:spcPct val="100000"/>
+              </a:lnSpc>
               <a:spcBef>
                 <a:spcPts val="0"/>
               </a:spcBef>
@@ -25444,89 +28825,141 @@
               <a:buNone/>
             </a:pPr>
             <a:r>
-              <a:rPr lang="en-US" sz="2100">
+              <a:rPr lang="en-US" sz="2100" b="0" i="0" u="none" strike="noStrike" cap="none">
                 <a:solidFill>
                   <a:schemeClr val="dk1"/>
                 </a:solidFill>
+                <a:latin typeface="Arial"/>
+                <a:ea typeface="Arial"/>
+                <a:cs typeface="Arial"/>
+                <a:sym typeface="Arial"/>
               </a:rPr>
               <a:t>GDP Growth → Not significant (</a:t>
             </a:r>
             <a:r>
-              <a:rPr lang="en-US" sz="2100" b="1">
+              <a:rPr lang="en-US" sz="2100" b="1" i="0" u="none" strike="noStrike" cap="none">
                 <a:solidFill>
                   <a:schemeClr val="dk1"/>
                 </a:solidFill>
+                <a:latin typeface="Arial"/>
+                <a:ea typeface="Arial"/>
+                <a:cs typeface="Arial"/>
+                <a:sym typeface="Arial"/>
               </a:rPr>
               <a:t>p = 0.063</a:t>
             </a:r>
             <a:r>
-              <a:rPr lang="en-US" sz="2100">
+              <a:rPr lang="en-US" sz="2100" b="0" i="0" u="none" strike="noStrike" cap="none">
                 <a:solidFill>
                   <a:schemeClr val="dk1"/>
                 </a:solidFill>
+                <a:latin typeface="Arial"/>
+                <a:ea typeface="Arial"/>
+                <a:cs typeface="Arial"/>
+                <a:sym typeface="Arial"/>
               </a:rPr>
               <a:t>)</a:t>
             </a:r>
-            <a:endParaRPr sz="2100">
+            <a:endParaRPr sz="2100" b="0" i="0" u="none" strike="noStrike" cap="none">
               <a:solidFill>
                 <a:schemeClr val="dk1"/>
               </a:solidFill>
+              <a:latin typeface="Arial"/>
+              <a:ea typeface="Arial"/>
+              <a:cs typeface="Arial"/>
+              <a:sym typeface="Arial"/>
             </a:endParaRPr>
           </a:p>
           <a:p>
-            <a:pPr marL="0" lvl="0" indent="0" algn="ctr" rtl="0">
-              <a:spcBef>
-                <a:spcPts val="0"/>
-              </a:spcBef>
-              <a:spcAft>
-                <a:spcPts val="0"/>
-              </a:spcAft>
+            <a:pPr marL="0" marR="0" lvl="0" indent="0" algn="ctr" rtl="0">
+              <a:lnSpc>
+                <a:spcPct val="100000"/>
+              </a:lnSpc>
+              <a:spcBef>
+                <a:spcPts val="0"/>
+              </a:spcBef>
+              <a:spcAft>
+                <a:spcPts val="0"/>
+              </a:spcAft>
+              <a:buClr>
+                <a:srgbClr val="000000"/>
+              </a:buClr>
+              <a:buSzPts val="2100"/>
+              <a:buFont typeface="Arial"/>
               <a:buNone/>
             </a:pPr>
             <a:r>
-              <a:rPr lang="en-US" sz="2100">
+              <a:rPr lang="en-US" sz="2100" b="0" i="0" u="none" strike="noStrike" cap="none">
                 <a:solidFill>
                   <a:schemeClr val="dk1"/>
                 </a:solidFill>
+                <a:latin typeface="Arial"/>
+                <a:ea typeface="Arial"/>
+                <a:cs typeface="Arial"/>
+                <a:sym typeface="Arial"/>
               </a:rPr>
               <a:t>GFCF Growth → Not significant (</a:t>
             </a:r>
             <a:r>
-              <a:rPr lang="en-US" sz="2100" b="1">
+              <a:rPr lang="en-US" sz="2100" b="1" i="0" u="none" strike="noStrike" cap="none">
                 <a:solidFill>
                   <a:schemeClr val="dk1"/>
                 </a:solidFill>
+                <a:latin typeface="Arial"/>
+                <a:ea typeface="Arial"/>
+                <a:cs typeface="Arial"/>
+                <a:sym typeface="Arial"/>
               </a:rPr>
               <a:t>p = 0.655</a:t>
             </a:r>
             <a:r>
-              <a:rPr lang="en-US" sz="2100">
+              <a:rPr lang="en-US" sz="2100" b="0" i="0" u="none" strike="noStrike" cap="none">
                 <a:solidFill>
                   <a:schemeClr val="dk1"/>
                 </a:solidFill>
+                <a:latin typeface="Arial"/>
+                <a:ea typeface="Arial"/>
+                <a:cs typeface="Arial"/>
+                <a:sym typeface="Arial"/>
               </a:rPr>
               <a:t>)</a:t>
             </a:r>
-            <a:endParaRPr sz="2100">
+            <a:endParaRPr sz="2100" b="0" i="0" u="none" strike="noStrike" cap="none">
               <a:solidFill>
                 <a:schemeClr val="dk1"/>
               </a:solidFill>
+              <a:latin typeface="Arial"/>
+              <a:ea typeface="Arial"/>
+              <a:cs typeface="Arial"/>
+              <a:sym typeface="Arial"/>
             </a:endParaRPr>
           </a:p>
           <a:p>
-            <a:pPr marL="0" lvl="0" indent="0" algn="ctr" rtl="0">
-              <a:spcBef>
-                <a:spcPts val="0"/>
-              </a:spcBef>
-              <a:spcAft>
-                <a:spcPts val="0"/>
-              </a:spcAft>
+            <a:pPr marL="0" marR="0" lvl="0" indent="0" algn="ctr" rtl="0">
+              <a:lnSpc>
+                <a:spcPct val="100000"/>
+              </a:lnSpc>
+              <a:spcBef>
+                <a:spcPts val="0"/>
+              </a:spcBef>
+              <a:spcAft>
+                <a:spcPts val="0"/>
+              </a:spcAft>
+              <a:buClr>
+                <a:srgbClr val="000000"/>
+              </a:buClr>
+              <a:buSzPts val="2100"/>
+              <a:buFont typeface="Arial"/>
               <a:buNone/>
             </a:pPr>
-            <a:endParaRPr sz="2100">
+            <a:endParaRPr sz="2100" b="0" i="0" u="none" strike="noStrike" cap="none">
               <a:solidFill>
                 <a:schemeClr val="dk1"/>
               </a:solidFill>
+              <a:latin typeface="Arial"/>
+              <a:ea typeface="Arial"/>
+              <a:cs typeface="Arial"/>
+              <a:sym typeface="Arial"/>
             </a:endParaRPr>
           </a:p>
         </p:txBody>
@@ -25562,16 +28995,32 @@
           </a:bodyPr>
           <a:lstStyle/>
           <a:p>
-            <a:pPr marL="0" lvl="0" indent="0" algn="ctr" rtl="0">
-              <a:spcBef>
-                <a:spcPts val="0"/>
-              </a:spcBef>
-              <a:spcAft>
-                <a:spcPts val="0"/>
-              </a:spcAft>
+            <a:pPr marL="0" marR="0" lvl="0" indent="0" algn="ctr" rtl="0">
+              <a:lnSpc>
+                <a:spcPct val="100000"/>
+              </a:lnSpc>
+              <a:spcBef>
+                <a:spcPts val="0"/>
+              </a:spcBef>
+              <a:spcAft>
+                <a:spcPts val="0"/>
+              </a:spcAft>
+              <a:buClr>
+                <a:srgbClr val="000000"/>
+              </a:buClr>
+              <a:buSzPts val="1400"/>
+              <a:buFont typeface="Arial"/>
               <a:buNone/>
             </a:pPr>
-            <a:endParaRPr/>
+            <a:endParaRPr sz="1400" b="0" i="0" u="none" strike="noStrike" cap="none">
+              <a:solidFill>
+                <a:srgbClr val="000000"/>
+              </a:solidFill>
+              <a:latin typeface="Arial"/>
+              <a:ea typeface="Arial"/>
+              <a:cs typeface="Arial"/>
+              <a:sym typeface="Arial"/>
+            </a:endParaRPr>
           </a:p>
         </p:txBody>
       </p:sp>
@@ -25606,16 +29055,32 @@
           </a:bodyPr>
           <a:lstStyle/>
           <a:p>
-            <a:pPr marL="0" lvl="0" indent="0" algn="ctr" rtl="0">
-              <a:spcBef>
-                <a:spcPts val="0"/>
-              </a:spcBef>
-              <a:spcAft>
-                <a:spcPts val="0"/>
-              </a:spcAft>
+            <a:pPr marL="0" marR="0" lvl="0" indent="0" algn="ctr" rtl="0">
+              <a:lnSpc>
+                <a:spcPct val="100000"/>
+              </a:lnSpc>
+              <a:spcBef>
+                <a:spcPts val="0"/>
+              </a:spcBef>
+              <a:spcAft>
+                <a:spcPts val="0"/>
+              </a:spcAft>
+              <a:buClr>
+                <a:srgbClr val="000000"/>
+              </a:buClr>
+              <a:buSzPts val="1400"/>
+              <a:buFont typeface="Arial"/>
               <a:buNone/>
             </a:pPr>
-            <a:endParaRPr/>
+            <a:endParaRPr sz="1400" b="0" i="0" u="none" strike="noStrike" cap="none">
+              <a:solidFill>
+                <a:srgbClr val="000000"/>
+              </a:solidFill>
+              <a:latin typeface="Arial"/>
+              <a:ea typeface="Arial"/>
+              <a:cs typeface="Arial"/>
+              <a:sym typeface="Arial"/>
+            </a:endParaRPr>
           </a:p>
         </p:txBody>
       </p:sp>
@@ -25650,16 +29115,32 @@
           </a:bodyPr>
           <a:lstStyle/>
           <a:p>
-            <a:pPr marL="0" lvl="0" indent="0" algn="ctr" rtl="0">
-              <a:spcBef>
-                <a:spcPts val="0"/>
-              </a:spcBef>
-              <a:spcAft>
-                <a:spcPts val="0"/>
-              </a:spcAft>
+            <a:pPr marL="0" marR="0" lvl="0" indent="0" algn="ctr" rtl="0">
+              <a:lnSpc>
+                <a:spcPct val="100000"/>
+              </a:lnSpc>
+              <a:spcBef>
+                <a:spcPts val="0"/>
+              </a:spcBef>
+              <a:spcAft>
+                <a:spcPts val="0"/>
+              </a:spcAft>
+              <a:buClr>
+                <a:srgbClr val="000000"/>
+              </a:buClr>
+              <a:buSzPts val="1400"/>
+              <a:buFont typeface="Arial"/>
               <a:buNone/>
             </a:pPr>
-            <a:endParaRPr/>
+            <a:endParaRPr sz="1400" b="0" i="0" u="none" strike="noStrike" cap="none">
+              <a:solidFill>
+                <a:srgbClr val="000000"/>
+              </a:solidFill>
+              <a:latin typeface="Arial"/>
+              <a:ea typeface="Arial"/>
+              <a:cs typeface="Arial"/>
+              <a:sym typeface="Arial"/>
+            </a:endParaRPr>
           </a:p>
         </p:txBody>
       </p:sp>
@@ -25688,7 +29169,7 @@
           </a:bodyPr>
           <a:lstStyle/>
           <a:p>
-            <a:pPr marL="0" lvl="0" indent="0" algn="ctr" rtl="0">
+            <a:pPr marL="0" marR="0" lvl="0" indent="0" algn="ctr" rtl="0">
               <a:lnSpc>
                 <a:spcPct val="115000"/>
               </a:lnSpc>
@@ -25698,40 +29179,61 @@
               <a:spcAft>
                 <a:spcPts val="0"/>
               </a:spcAft>
+              <a:buClr>
+                <a:srgbClr val="000000"/>
+              </a:buClr>
+              <a:buSzPts val="2400"/>
+              <a:buFont typeface="Arial"/>
               <a:buNone/>
             </a:pPr>
             <a:r>
-              <a:rPr lang="en-US" sz="2400" b="1">
+              <a:rPr lang="en-US" sz="2400" b="1" i="0" u="none" strike="noStrike" cap="none">
                 <a:solidFill>
                   <a:schemeClr val="dk1"/>
                 </a:solidFill>
+                <a:latin typeface="Arial"/>
+                <a:ea typeface="Arial"/>
+                <a:cs typeface="Arial"/>
+                <a:sym typeface="Arial"/>
               </a:rPr>
               <a:t>OVERALL FINDING: R² = 0.763</a:t>
             </a:r>
             <a:r>
-              <a:rPr lang="en-US" sz="2400">
+              <a:rPr lang="en-US" sz="2400" b="0" i="0" u="none" strike="noStrike" cap="none">
                 <a:solidFill>
                   <a:schemeClr val="dk1"/>
                 </a:solidFill>
+                <a:latin typeface="Arial"/>
+                <a:ea typeface="Arial"/>
+                <a:cs typeface="Arial"/>
+                <a:sym typeface="Arial"/>
               </a:rPr>
               <a:t> → Model explains </a:t>
             </a:r>
             <a:r>
-              <a:rPr lang="en-US" sz="2400" b="1">
+              <a:rPr lang="en-US" sz="2400" b="1" i="0" u="none" strike="noStrike" cap="none">
                 <a:solidFill>
                   <a:schemeClr val="dk1"/>
                 </a:solidFill>
+                <a:latin typeface="Arial"/>
+                <a:ea typeface="Arial"/>
+                <a:cs typeface="Arial"/>
+                <a:sym typeface="Arial"/>
               </a:rPr>
               <a:t>76.3% of variation in FDI inflows</a:t>
             </a:r>
-            <a:endParaRPr sz="2400" b="1">
+            <a:endParaRPr sz="2400" b="1" i="0" u="none" strike="noStrike" cap="none">
               <a:solidFill>
                 <a:schemeClr val="dk1"/>
               </a:solidFill>
+              <a:latin typeface="Arial"/>
+              <a:ea typeface="Arial"/>
+              <a:cs typeface="Arial"/>
+              <a:sym typeface="Arial"/>
             </a:endParaRPr>
           </a:p>
           <a:p>
-            <a:pPr marL="0" lvl="0" indent="0" algn="ctr" rtl="0">
+            <a:pPr marL="0" marR="0" lvl="0" indent="0" algn="ctr" rtl="0">
               <a:lnSpc>
                 <a:spcPct val="115000"/>
               </a:lnSpc>
@@ -25749,33 +29251,53 @@
               <a:buNone/>
             </a:pPr>
             <a:r>
-              <a:rPr lang="en-US" sz="2400" b="1">
+              <a:rPr lang="en-US" sz="2400" b="1" i="0" u="none" strike="noStrike" cap="none">
                 <a:solidFill>
                   <a:srgbClr val="FF0000"/>
                 </a:solidFill>
+                <a:latin typeface="Arial"/>
+                <a:ea typeface="Arial"/>
+                <a:cs typeface="Arial"/>
+                <a:sym typeface="Arial"/>
               </a:rPr>
               <a:t>Trade openness is the clearest positive FDI driver.</a:t>
             </a:r>
-            <a:endParaRPr sz="2400" b="1">
+            <a:endParaRPr sz="2400" b="1" i="0" u="none" strike="noStrike" cap="none">
               <a:solidFill>
                 <a:srgbClr val="FF0000"/>
               </a:solidFill>
+              <a:latin typeface="Arial"/>
+              <a:ea typeface="Arial"/>
+              <a:cs typeface="Arial"/>
+              <a:sym typeface="Arial"/>
             </a:endParaRPr>
           </a:p>
           <a:p>
-            <a:pPr marL="0" lvl="0" indent="0" algn="l" rtl="0">
+            <a:pPr marL="0" marR="0" lvl="0" indent="0" algn="l" rtl="0">
+              <a:lnSpc>
+                <a:spcPct val="100000"/>
+              </a:lnSpc>
               <a:spcBef>
                 <a:spcPts val="1200"/>
               </a:spcBef>
               <a:spcAft>
                 <a:spcPts val="0"/>
               </a:spcAft>
+              <a:buClr>
+                <a:srgbClr val="000000"/>
+              </a:buClr>
+              <a:buSzPts val="2800"/>
+              <a:buFont typeface="Arial"/>
               <a:buNone/>
             </a:pPr>
-            <a:endParaRPr sz="2800">
+            <a:endParaRPr sz="2800" b="0" i="0" u="none" strike="noStrike" cap="none">
               <a:solidFill>
                 <a:schemeClr val="dk1"/>
               </a:solidFill>
+              <a:latin typeface="Arial"/>
+              <a:ea typeface="Arial"/>
+              <a:cs typeface="Arial"/>
+              <a:sym typeface="Arial"/>
             </a:endParaRPr>
           </a:p>
         </p:txBody>
@@ -25788,7 +29310,7 @@
 </p:sld>
 </file>
 
-<file path=ppt/slides/slide12.xml><?xml version="1.0" encoding="utf-8"?>
+<file path=ppt/slides/slide13.xml><?xml version="1.0" encoding="utf-8"?>
 <p:sld xmlns:a="http://schemas.openxmlformats.org/drawingml/2006/main" xmlns:r="http://schemas.openxmlformats.org/officeDocument/2006/relationships" xmlns:p="http://schemas.openxmlformats.org/presentationml/2006/main">
   <p:cSld>
     <p:spTree>
@@ -25891,7 +29413,7 @@
         <p:spPr>
           <a:xfrm>
             <a:off x="667568" y="1834410"/>
-            <a:ext cx="10686232" cy="1310102"/>
+            <a:ext cx="10686300" cy="1281600"/>
           </a:xfrm>
           <a:prstGeom prst="rect">
             <a:avLst/>
@@ -25986,7 +29508,7 @@
                 <a:cs typeface="Arial"/>
                 <a:sym typeface="Arial"/>
               </a:rPr>
-              <a:t>In your chart, note relevant periods where  key structural breaks when regional trade agreements (e.g., RCEP, ASEAN-China FTA) were implemented.</a:t>
+              <a:t>In your chart, note relevant periods where key structural breaks when regional trade agreements (e.g., RCEP, ASEAN-China FTA) were implemented.</a:t>
             </a:r>
             <a:endParaRPr sz="1400" b="0" i="0" u="none" strike="noStrike" cap="none">
               <a:solidFill>
@@ -26025,7 +29547,7 @@
               <a:srgbClr val="082836"/>
             </a:solidFill>
             <a:prstDash val="solid"/>
-            <a:miter lim="80"/>
+            <a:miter lim="0"/>
             <a:headEnd type="none" w="sm" len="sm"/>
             <a:tailEnd type="none" w="sm" len="sm"/>
           </a:ln>
@@ -26299,7 +29821,7 @@
 </p:sld>
 </file>
 
-<file path=ppt/slides/slide13.xml><?xml version="1.0" encoding="utf-8"?>
+<file path=ppt/slides/slide14.xml><?xml version="1.0" encoding="utf-8"?>
 <p:sld xmlns:a="http://schemas.openxmlformats.org/drawingml/2006/main" xmlns:r="http://schemas.openxmlformats.org/officeDocument/2006/relationships" xmlns:p="http://schemas.openxmlformats.org/presentationml/2006/main">
   <p:cSld>
     <p:spTree>
@@ -26963,7 +30485,7 @@
               <a:schemeClr val="dk1"/>
             </a:solidFill>
             <a:prstDash val="dot"/>
-            <a:miter lim="80"/>
+            <a:miter lim="0"/>
             <a:headEnd type="none" w="sm" len="sm"/>
             <a:tailEnd type="none" w="sm" len="sm"/>
           </a:ln>
@@ -27034,7 +30556,7 @@
             </a:endParaRPr>
           </a:p>
           <a:p>
-            <a:pPr marL="0" marR="0" lvl="0" indent="-127000" algn="l" rtl="0">
+            <a:pPr marL="0" marR="0" lvl="0" indent="0" algn="l" rtl="0">
               <a:lnSpc>
                 <a:spcPct val="90000"/>
               </a:lnSpc>
@@ -27074,7 +30596,7 @@
             </a:endParaRPr>
           </a:p>
           <a:p>
-            <a:pPr marL="0" marR="0" lvl="0" indent="-127000" algn="l" rtl="0">
+            <a:pPr marL="0" marR="0" lvl="0" indent="0" algn="l" rtl="0">
               <a:lnSpc>
                 <a:spcPct val="90000"/>
               </a:lnSpc>
@@ -27126,7 +30648,7 @@
             </a:endParaRPr>
           </a:p>
           <a:p>
-            <a:pPr marL="0" marR="0" lvl="0" indent="-127000" algn="l" rtl="0">
+            <a:pPr marL="0" marR="0" lvl="0" indent="0" algn="l" rtl="0">
               <a:lnSpc>
                 <a:spcPct val="90000"/>
               </a:lnSpc>
@@ -27178,7 +30700,7 @@
             </a:endParaRPr>
           </a:p>
           <a:p>
-            <a:pPr marL="0" marR="0" lvl="0" indent="-127000" algn="l" rtl="0">
+            <a:pPr marL="0" marR="0" lvl="0" indent="0" algn="l" rtl="0">
               <a:lnSpc>
                 <a:spcPct val="90000"/>
               </a:lnSpc>
@@ -27230,7 +30752,7 @@
             </a:endParaRPr>
           </a:p>
           <a:p>
-            <a:pPr marL="0" marR="0" lvl="0" indent="-127000" algn="l" rtl="0">
+            <a:pPr marL="0" marR="0" lvl="0" indent="0" algn="l" rtl="0">
               <a:lnSpc>
                 <a:spcPct val="90000"/>
               </a:lnSpc>
@@ -27558,15 +31080,7 @@
               <a:buNone/>
             </a:pPr>
             <a:r>
-              <a:rPr lang="en-US" sz="1800" dirty="0">
-                <a:solidFill>
-                  <a:schemeClr val="dk1"/>
-                </a:solidFill>
-              </a:rPr>
-              <a:t>In 2010,</a:t>
-            </a:r>
-            <a:r>
-              <a:rPr lang="en-US" sz="1800" b="0" i="0" u="none" strike="noStrike" cap="none" dirty="0">
+              <a:rPr lang="en-US" sz="1800" b="0" i="0" u="none" strike="noStrike" cap="none">
                 <a:solidFill>
                   <a:schemeClr val="dk1"/>
                 </a:solidFill>
@@ -27575,49 +31089,9 @@
                 <a:cs typeface="Arial"/>
                 <a:sym typeface="Arial"/>
               </a:rPr>
-              <a:t> </a:t>
+              <a:t>In 2010, there is a sharp drop in employment in Agriculture, while employment in services and industry gain a larger share</a:t>
             </a:r>
-            <a:r>
-              <a:rPr lang="en-US" sz="1800" dirty="0">
-                <a:solidFill>
-                  <a:schemeClr val="dk1"/>
-                </a:solidFill>
-              </a:rPr>
-              <a:t>there is a sharp drop in employment in </a:t>
-            </a:r>
-            <a:r>
-              <a:rPr lang="en-US" sz="1800" b="0" i="0" u="none" strike="noStrike" cap="none" dirty="0">
-                <a:solidFill>
-                  <a:schemeClr val="dk1"/>
-                </a:solidFill>
-                <a:latin typeface="Arial"/>
-                <a:ea typeface="Arial"/>
-                <a:cs typeface="Arial"/>
-                <a:sym typeface="Arial"/>
-              </a:rPr>
-              <a:t>Agricultur</a:t>
-            </a:r>
-            <a:r>
-              <a:rPr lang="en-US" sz="1800" dirty="0">
-                <a:solidFill>
-                  <a:schemeClr val="dk1"/>
-                </a:solidFill>
-              </a:rPr>
-              <a:t>e</a:t>
-            </a:r>
-            <a:r>
-              <a:rPr lang="en-US" sz="1800" b="0" i="0" u="none" strike="noStrike" cap="none" dirty="0">
-                <a:solidFill>
-                  <a:schemeClr val="dk1"/>
-                </a:solidFill>
-                <a:latin typeface="Arial"/>
-                <a:ea typeface="Arial"/>
-                <a:cs typeface="Arial"/>
-                <a:sym typeface="Arial"/>
-              </a:rPr>
-              <a:t>, while employment in services and industry gain a larger share</a:t>
-            </a:r>
-            <a:endParaRPr sz="1400" b="0" i="0" u="none" strike="noStrike" cap="none" dirty="0">
+            <a:endParaRPr sz="1400" b="0" i="0" u="none" strike="noStrike" cap="none">
               <a:solidFill>
                 <a:srgbClr val="000000"/>
               </a:solidFill>
@@ -27649,7 +31123,7 @@
               <a:srgbClr val="FF0000"/>
             </a:solidFill>
             <a:prstDash val="solid"/>
-            <a:miter lim="80"/>
+            <a:miter lim="0"/>
             <a:headEnd type="none" w="sm" len="sm"/>
             <a:tailEnd type="none" w="sm" len="sm"/>
           </a:ln>
@@ -27732,7 +31206,7 @@
               <a:buNone/>
             </a:pPr>
             <a:r>
-              <a:rPr lang="en-US" sz="1800" b="1" i="0" u="none" strike="noStrike" cap="none" dirty="0">
+              <a:rPr lang="en-US" sz="1800" b="1" i="0" u="none" strike="noStrike" cap="none">
                 <a:solidFill>
                   <a:schemeClr val="dk1"/>
                 </a:solidFill>
@@ -27743,7 +31217,7 @@
               </a:rPr>
               <a:t>India is transitioning towards a service-led economy rather than a manufacturing economy</a:t>
             </a:r>
-            <a:endParaRPr sz="1400" b="0" i="0" u="none" strike="noStrike" cap="none" dirty="0">
+            <a:endParaRPr sz="1400" b="0" i="0" u="none" strike="noStrike" cap="none">
               <a:solidFill>
                 <a:srgbClr val="000000"/>
               </a:solidFill>
@@ -28336,7 +31810,7 @@
             <a:tbl>
               <a:tblPr firstRow="1" bandRow="1">
                 <a:noFill/>
-                <a:tableStyleId>{5E857613-3C74-4FD0-9007-D5EFDE0F1E00}</a:tableStyleId>
+                <a:tableStyleId>{0101B945-CFBE-4B7F-9C81-F9404CCB7111}</a:tableStyleId>
               </a:tblPr>
               <a:tblGrid>
                 <a:gridCol w="1313450">
@@ -28616,10 +32090,10 @@
                         <a:buNone/>
                       </a:pPr>
                       <a:r>
-                        <a:rPr lang="en-US" sz="1800" u="none" strike="noStrike" cap="none" dirty="0"/>
+                        <a:rPr lang="en-US" sz="1800" u="none" strike="noStrike" cap="none"/>
                         <a:t>Strong Relationship</a:t>
                       </a:r>
-                      <a:endParaRPr sz="1400" u="none" strike="noStrike" cap="none" dirty="0"/>
+                      <a:endParaRPr sz="1400" u="none" strike="noStrike" cap="none"/>
                     </a:p>
                   </a:txBody>
                   <a:tcPr marL="91450" marR="91450" marT="45725" marB="45725"/>
@@ -28901,7 +32375,7 @@
               <a:buNone/>
             </a:pPr>
             <a:r>
-              <a:rPr lang="en-US" sz="1800" b="1" i="0" u="none" strike="noStrike" cap="none">
+              <a:rPr lang="en-US" sz="1800" b="1" i="0" u="none" strike="noStrike" cap="none" dirty="0">
                 <a:solidFill>
                   <a:schemeClr val="dk1"/>
                 </a:solidFill>
@@ -28913,7 +32387,7 @@
               <a:t>R² = 0.0211</a:t>
             </a:r>
             <a:r>
-              <a:rPr lang="en-US" sz="1800" b="0" i="0" u="none" strike="noStrike" cap="none">
+              <a:rPr lang="en-US" sz="1800" b="0" i="0" u="none" strike="noStrike" cap="none" dirty="0">
                 <a:solidFill>
                   <a:schemeClr val="dk1"/>
                 </a:solidFill>
@@ -28925,7 +32399,7 @@
               <a:t> suggests that Capital per Worker Growth alone is </a:t>
             </a:r>
             <a:r>
-              <a:rPr lang="en-US" sz="1800" b="1" i="0" u="none" strike="noStrike" cap="none">
+              <a:rPr lang="en-US" sz="1800" b="1" i="0" u="none" strike="noStrike" cap="none" dirty="0">
                 <a:solidFill>
                   <a:schemeClr val="dk1"/>
                 </a:solidFill>
@@ -28937,7 +32411,7 @@
               <a:t>not a good predictor </a:t>
             </a:r>
             <a:r>
-              <a:rPr lang="en-US" sz="1800" b="0" i="0" u="none" strike="noStrike" cap="none">
+              <a:rPr lang="en-US" sz="1800" b="0" i="0" u="none" strike="noStrike" cap="none" dirty="0">
                 <a:solidFill>
                   <a:schemeClr val="dk1"/>
                 </a:solidFill>
@@ -28948,7 +32422,7 @@
               </a:rPr>
               <a:t>of manufacturing growth in India over 1992–2025</a:t>
             </a:r>
-            <a:endParaRPr sz="1400" b="0" i="0" u="none" strike="noStrike" cap="none">
+            <a:endParaRPr sz="1400" b="0" i="0" u="none" strike="noStrike" cap="none" dirty="0">
               <a:solidFill>
                 <a:srgbClr val="000000"/>
               </a:solidFill>
@@ -29213,7 +32687,7 @@
             <a:tbl>
               <a:tblPr firstRow="1" bandRow="1">
                 <a:noFill/>
-                <a:tableStyleId>{5E857613-3C74-4FD0-9007-D5EFDE0F1E00}</a:tableStyleId>
+                <a:tableStyleId>{0101B945-CFBE-4B7F-9C81-F9404CCB7111}</a:tableStyleId>
               </a:tblPr>
               <a:tblGrid>
                 <a:gridCol w="1313450">
@@ -30225,16 +33699,52 @@
           </a:p>
         </p:txBody>
       </p:sp>
+      <p:graphicFrame>
+        <p:nvGraphicFramePr>
+          <p:cNvPr id="3" name="Chart 2">
+            <a:extLst>
+              <a:ext uri="{FF2B5EF4-FFF2-40B4-BE49-F238E27FC236}">
+                <a16:creationId xmlns:a16="http://schemas.microsoft.com/office/drawing/2014/main" id="{A19CC370-4AB8-F3CD-467D-5E20660D172D}"/>
+              </a:ext>
+            </a:extLst>
+          </p:cNvPr>
+          <p:cNvGraphicFramePr>
+            <a:graphicFrameLocks/>
+          </p:cNvGraphicFramePr>
+          <p:nvPr>
+            <p:extLst>
+              <p:ext uri="{D42A27DB-BD31-4B8C-83A1-F6EECF244321}">
+                <p14:modId xmlns:p14="http://schemas.microsoft.com/office/powerpoint/2010/main" val="4063756346"/>
+              </p:ext>
+            </p:extLst>
+          </p:nvPr>
+        </p:nvGraphicFramePr>
+        <p:xfrm>
+          <a:off x="985646" y="1504474"/>
+          <a:ext cx="6841617" cy="4146518"/>
+        </p:xfrm>
+        <a:graphic>
+          <a:graphicData uri="http://schemas.openxmlformats.org/drawingml/2006/chart">
+            <c:chart xmlns:c="http://schemas.openxmlformats.org/drawingml/2006/chart" xmlns:r="http://schemas.openxmlformats.org/officeDocument/2006/relationships" r:id="rId3"/>
+          </a:graphicData>
+        </a:graphic>
+      </p:graphicFrame>
       <p:sp>
         <p:nvSpPr>
-          <p:cNvPr id="149" name="Google Shape;149;p8"/>
+          <p:cNvPr id="4" name="Google Shape;128;p5">
+            <a:extLst>
+              <a:ext uri="{FF2B5EF4-FFF2-40B4-BE49-F238E27FC236}">
+                <a16:creationId xmlns:a16="http://schemas.microsoft.com/office/drawing/2014/main" id="{E2A9198C-73B5-7DFF-B56A-98FBE492A417}"/>
+              </a:ext>
+            </a:extLst>
+          </p:cNvPr>
           <p:cNvSpPr txBox="1"/>
           <p:nvPr/>
         </p:nvSpPr>
         <p:spPr>
           <a:xfrm>
-            <a:off x="838199" y="1924424"/>
-            <a:ext cx="10515599" cy="1938992"/>
+            <a:off x="8400151" y="1859359"/>
+            <a:ext cx="3030680" cy="3139281"/>
           </a:xfrm>
           <a:prstGeom prst="rect">
             <a:avLst/>
@@ -30250,118 +33760,59 @@
           </a:bodyPr>
           <a:lstStyle/>
           <a:p>
-            <a:pPr marL="0" marR="0" lvl="0" indent="0" algn="l" rtl="0">
-              <a:lnSpc>
-                <a:spcPct val="100000"/>
-              </a:lnSpc>
-              <a:spcBef>
-                <a:spcPts val="0"/>
-              </a:spcBef>
-              <a:spcAft>
-                <a:spcPts val="0"/>
-              </a:spcAft>
-              <a:buClr>
-                <a:srgbClr val="000000"/>
-              </a:buClr>
-              <a:buSzPts val="2400"/>
-              <a:buFont typeface="Arial"/>
-              <a:buNone/>
+            <a:pPr lvl="0">
+              <a:buSzPts val="1800"/>
             </a:pPr>
             <a:r>
-              <a:rPr lang="en-US" sz="2400" b="1" i="0" u="none" strike="noStrike" cap="none">
-                <a:solidFill>
-                  <a:schemeClr val="dk1"/>
-                </a:solidFill>
-                <a:latin typeface="Arial"/>
-                <a:ea typeface="Arial"/>
-                <a:cs typeface="Arial"/>
-                <a:sym typeface="Arial"/>
-              </a:rPr>
-              <a:t>Key Chart 4: Source Country Mix (Stacked Bar Chart):</a:t>
+              <a:rPr lang="en-US" sz="1800" dirty="0"/>
+              <a:t>The chart shows that </a:t>
             </a:r>
             <a:r>
-              <a:rPr lang="en-US" sz="2400" b="0" i="0" u="none" strike="noStrike" cap="none">
-                <a:solidFill>
-                  <a:schemeClr val="dk1"/>
-                </a:solidFill>
-                <a:latin typeface="Arial"/>
-                <a:ea typeface="Arial"/>
-                <a:cs typeface="Arial"/>
-                <a:sym typeface="Arial"/>
-              </a:rPr>
-              <a:t> Plot a stacked bar chart over time identifying the top 3 nations bringing FDI into your host country.</a:t>
+              <a:rPr lang="en-US" sz="1800" b="1" dirty="0"/>
+              <a:t>Singapore</a:t>
             </a:r>
-            <a:endParaRPr sz="1400" b="0" i="0" u="none" strike="noStrike" cap="none">
+            <a:r>
+              <a:rPr lang="en-US" sz="1800" dirty="0"/>
+              <a:t>, </a:t>
+            </a:r>
+            <a:r>
+              <a:rPr lang="en-US" sz="1800" b="1" dirty="0"/>
+              <a:t>Mauritius</a:t>
+            </a:r>
+            <a:r>
+              <a:rPr lang="en-US" sz="1800" dirty="0"/>
+              <a:t>, and the </a:t>
+            </a:r>
+            <a:r>
+              <a:rPr lang="en-US" sz="1800" b="1" dirty="0"/>
+              <a:t>USA</a:t>
+            </a:r>
+            <a:r>
+              <a:rPr lang="en-US" sz="1800" dirty="0"/>
+              <a:t> are India's top 3 FDI source countries</a:t>
+            </a:r>
+          </a:p>
+          <a:p>
+            <a:pPr lvl="0">
+              <a:buSzPts val="1800"/>
+            </a:pPr>
+            <a:endParaRPr lang="en-US" sz="1800" dirty="0"/>
+          </a:p>
+          <a:p>
+            <a:pPr lvl="0">
+              <a:buSzPts val="1800"/>
+            </a:pPr>
+            <a:r>
+              <a:rPr lang="en-US" sz="1800" b="1" dirty="0"/>
+              <a:t>Singapore</a:t>
+            </a:r>
+            <a:r>
+              <a:rPr lang="en-US" sz="1800" dirty="0"/>
+              <a:t> has become particularly important in recent years, while the contribution of Mauritius and the USA has fluctuated over time</a:t>
+            </a:r>
+            <a:endParaRPr sz="1400" b="0" i="0" u="none" strike="noStrike" cap="none" dirty="0">
               <a:solidFill>
                 <a:srgbClr val="000000"/>
-              </a:solidFill>
-              <a:latin typeface="Arial"/>
-              <a:ea typeface="Arial"/>
-              <a:cs typeface="Arial"/>
-              <a:sym typeface="Arial"/>
-            </a:endParaRPr>
-          </a:p>
-          <a:p>
-            <a:pPr marL="0" marR="0" lvl="0" indent="0" algn="l" rtl="0">
-              <a:lnSpc>
-                <a:spcPct val="100000"/>
-              </a:lnSpc>
-              <a:spcBef>
-                <a:spcPts val="0"/>
-              </a:spcBef>
-              <a:spcAft>
-                <a:spcPts val="0"/>
-              </a:spcAft>
-              <a:buClr>
-                <a:srgbClr val="000000"/>
-              </a:buClr>
-              <a:buSzPts val="2400"/>
-              <a:buFont typeface="Arial"/>
-              <a:buNone/>
-            </a:pPr>
-            <a:r>
-              <a:rPr lang="en-US" sz="2400" b="0" i="0" u="none" strike="noStrike" cap="none">
-                <a:solidFill>
-                  <a:schemeClr val="dk1"/>
-                </a:solidFill>
-                <a:latin typeface="Arial"/>
-                <a:ea typeface="Arial"/>
-                <a:cs typeface="Arial"/>
-                <a:sym typeface="Arial"/>
-              </a:rPr>
-              <a:t>** you may need to obtain key data from the national statistical site of the host country </a:t>
-            </a:r>
-            <a:endParaRPr sz="1400" b="0" i="0" u="none" strike="noStrike" cap="none">
-              <a:solidFill>
-                <a:srgbClr val="000000"/>
-              </a:solidFill>
-              <a:latin typeface="Arial"/>
-              <a:ea typeface="Arial"/>
-              <a:cs typeface="Arial"/>
-              <a:sym typeface="Arial"/>
-            </a:endParaRPr>
-          </a:p>
-          <a:p>
-            <a:pPr marL="0" marR="0" lvl="0" indent="0" algn="l" rtl="0">
-              <a:lnSpc>
-                <a:spcPct val="100000"/>
-              </a:lnSpc>
-              <a:spcBef>
-                <a:spcPts val="0"/>
-              </a:spcBef>
-              <a:spcAft>
-                <a:spcPts val="0"/>
-              </a:spcAft>
-              <a:buClr>
-                <a:srgbClr val="000000"/>
-              </a:buClr>
-              <a:buSzPts val="2400"/>
-              <a:buFont typeface="Arial"/>
-              <a:buNone/>
-            </a:pPr>
-            <a:endParaRPr sz="2400" b="1" i="0" u="none" strike="noStrike" cap="none">
-              <a:solidFill>
-                <a:schemeClr val="dk1"/>
               </a:solidFill>
               <a:latin typeface="Arial"/>
               <a:ea typeface="Arial"/>
@@ -30376,6 +33827,81 @@
   <p:clrMapOvr>
     <a:masterClrMapping/>
   </p:clrMapOvr>
+  <p:timing>
+    <p:tnLst>
+      <p:par>
+        <p:cTn id="1" dur="indefinite" restart="never" nodeType="tmRoot">
+          <p:childTnLst>
+            <p:seq concurrent="1" nextAc="seek">
+              <p:cTn id="2" dur="indefinite" nodeType="mainSeq">
+                <p:childTnLst>
+                  <p:par>
+                    <p:cTn id="3" fill="hold">
+                      <p:stCondLst>
+                        <p:cond delay="indefinite"/>
+                      </p:stCondLst>
+                      <p:childTnLst>
+                        <p:par>
+                          <p:cTn id="4" fill="hold">
+                            <p:stCondLst>
+                              <p:cond delay="0"/>
+                            </p:stCondLst>
+                            <p:childTnLst>
+                              <p:par>
+                                <p:cTn id="5" presetID="1" presetClass="entr" presetSubtype="0" fill="hold" nodeType="clickEffect">
+                                  <p:stCondLst>
+                                    <p:cond delay="0"/>
+                                  </p:stCondLst>
+                                  <p:childTnLst>
+                                    <p:set>
+                                      <p:cBhvr>
+                                        <p:cTn id="6" dur="1" fill="hold">
+                                          <p:stCondLst>
+                                            <p:cond delay="0"/>
+                                          </p:stCondLst>
+                                        </p:cTn>
+                                        <p:tgtEl>
+                                          <p:spTgt spid="4"/>
+                                        </p:tgtEl>
+                                        <p:attrNameLst>
+                                          <p:attrName>style.visibility</p:attrName>
+                                        </p:attrNameLst>
+                                      </p:cBhvr>
+                                      <p:to>
+                                        <p:strVal val="visible"/>
+                                      </p:to>
+                                    </p:set>
+                                  </p:childTnLst>
+                                </p:cTn>
+                              </p:par>
+                            </p:childTnLst>
+                          </p:cTn>
+                        </p:par>
+                      </p:childTnLst>
+                    </p:cTn>
+                  </p:par>
+                </p:childTnLst>
+              </p:cTn>
+              <p:prevCondLst>
+                <p:cond evt="onPrev" delay="0">
+                  <p:tgtEl>
+                    <p:sldTgt/>
+                  </p:tgtEl>
+                </p:cond>
+              </p:prevCondLst>
+              <p:nextCondLst>
+                <p:cond evt="onNext" delay="0">
+                  <p:tgtEl>
+                    <p:sldTgt/>
+                  </p:tgtEl>
+                </p:cond>
+              </p:nextCondLst>
+            </p:seq>
+          </p:childTnLst>
+        </p:cTn>
+      </p:par>
+    </p:tnLst>
+  </p:timing>
 </p:sld>
 </file>
 
@@ -30450,16 +33976,52 @@
           </a:p>
         </p:txBody>
       </p:sp>
+      <p:graphicFrame>
+        <p:nvGraphicFramePr>
+          <p:cNvPr id="3" name="Chart 2">
+            <a:extLst>
+              <a:ext uri="{FF2B5EF4-FFF2-40B4-BE49-F238E27FC236}">
+                <a16:creationId xmlns:a16="http://schemas.microsoft.com/office/drawing/2014/main" id="{23D5C980-8149-41AB-8979-3D5F88D4E93A}"/>
+              </a:ext>
+            </a:extLst>
+          </p:cNvPr>
+          <p:cNvGraphicFramePr>
+            <a:graphicFrameLocks/>
+          </p:cNvGraphicFramePr>
+          <p:nvPr>
+            <p:extLst>
+              <p:ext uri="{D42A27DB-BD31-4B8C-83A1-F6EECF244321}">
+                <p14:modId xmlns:p14="http://schemas.microsoft.com/office/powerpoint/2010/main" val="1898803686"/>
+              </p:ext>
+            </p:extLst>
+          </p:nvPr>
+        </p:nvGraphicFramePr>
+        <p:xfrm>
+          <a:off x="183573" y="1497805"/>
+          <a:ext cx="8264236" cy="4050940"/>
+        </p:xfrm>
+        <a:graphic>
+          <a:graphicData uri="http://schemas.openxmlformats.org/drawingml/2006/chart">
+            <c:chart xmlns:c="http://schemas.openxmlformats.org/drawingml/2006/chart" xmlns:r="http://schemas.openxmlformats.org/officeDocument/2006/relationships" r:id="rId3"/>
+          </a:graphicData>
+        </a:graphic>
+      </p:graphicFrame>
       <p:sp>
         <p:nvSpPr>
-          <p:cNvPr id="155" name="Google Shape;155;p9"/>
+          <p:cNvPr id="6" name="Google Shape;128;p5">
+            <a:extLst>
+              <a:ext uri="{FF2B5EF4-FFF2-40B4-BE49-F238E27FC236}">
+                <a16:creationId xmlns:a16="http://schemas.microsoft.com/office/drawing/2014/main" id="{D255B165-8E7D-77E2-E89C-921E3306E99E}"/>
+              </a:ext>
+            </a:extLst>
+          </p:cNvPr>
           <p:cNvSpPr txBox="1"/>
           <p:nvPr/>
         </p:nvSpPr>
         <p:spPr>
           <a:xfrm>
-            <a:off x="709174" y="1885156"/>
-            <a:ext cx="10515599" cy="4524315"/>
+            <a:off x="8784615" y="1676636"/>
+            <a:ext cx="3030680" cy="3693278"/>
           </a:xfrm>
           <a:prstGeom prst="rect">
             <a:avLst/>
@@ -30475,330 +34037,51 @@
           </a:bodyPr>
           <a:lstStyle/>
           <a:p>
-            <a:pPr marL="0" marR="0" lvl="0" indent="0" algn="l" rtl="0">
-              <a:lnSpc>
-                <a:spcPct val="100000"/>
-              </a:lnSpc>
-              <a:spcBef>
-                <a:spcPts val="0"/>
-              </a:spcBef>
-              <a:spcAft>
-                <a:spcPts val="0"/>
-              </a:spcAft>
-              <a:buClr>
-                <a:srgbClr val="000000"/>
-              </a:buClr>
-              <a:buSzPts val="2400"/>
-              <a:buFont typeface="Arial"/>
-              <a:buNone/>
+            <a:pPr lvl="0">
+              <a:buSzPts val="1800"/>
             </a:pPr>
-            <a:endParaRPr sz="2400" b="1" i="0" u="none" strike="noStrike" cap="none">
-              <a:solidFill>
-                <a:schemeClr val="dk1"/>
-              </a:solidFill>
-              <a:latin typeface="Arial"/>
-              <a:ea typeface="Arial"/>
-              <a:cs typeface="Arial"/>
-              <a:sym typeface="Arial"/>
-            </a:endParaRPr>
+            <a:r>
+              <a:rPr lang="en-US" sz="1800" dirty="0"/>
+              <a:t>India and Singapore have become more economically connected since 2000. </a:t>
+            </a:r>
           </a:p>
           <a:p>
-            <a:pPr marL="0" marR="0" lvl="0" indent="0" algn="l" rtl="0">
-              <a:lnSpc>
-                <a:spcPct val="100000"/>
-              </a:lnSpc>
-              <a:spcBef>
-                <a:spcPts val="0"/>
-              </a:spcBef>
-              <a:spcAft>
-                <a:spcPts val="0"/>
-              </a:spcAft>
-              <a:buClr>
-                <a:srgbClr val="000000"/>
-              </a:buClr>
-              <a:buSzPts val="2400"/>
-              <a:buFont typeface="Arial"/>
-              <a:buNone/>
+            <a:pPr lvl="0">
+              <a:buSzPts val="1800"/>
+            </a:pPr>
+            <a:endParaRPr lang="en-US" sz="1800" dirty="0"/>
+          </a:p>
+          <a:p>
+            <a:pPr lvl="0">
+              <a:buSzPts val="1800"/>
             </a:pPr>
             <a:r>
-              <a:rPr lang="en-US" sz="2400" b="1" i="0" u="none" strike="noStrike" cap="none">
-                <a:solidFill>
-                  <a:schemeClr val="dk1"/>
-                </a:solidFill>
-                <a:latin typeface="Arial"/>
-                <a:ea typeface="Arial"/>
-                <a:cs typeface="Arial"/>
-                <a:sym typeface="Arial"/>
-              </a:rPr>
-              <a:t>Key Chart 5 : Bilateral Focus:</a:t>
+              <a:rPr lang="en-US" sz="1800" dirty="0"/>
+              <a:t>Both trade and FDI have grown strongly, despite some recent ups and downs. </a:t>
+            </a:r>
+          </a:p>
+          <a:p>
+            <a:pPr lvl="0">
+              <a:buSzPts val="1800"/>
+            </a:pPr>
+            <a:endParaRPr lang="en-US" sz="1800" dirty="0"/>
+          </a:p>
+          <a:p>
+            <a:pPr lvl="0">
+              <a:buSzPts val="1800"/>
+            </a:pPr>
+            <a:r>
+              <a:rPr lang="en-US" sz="1800" dirty="0"/>
+              <a:t>Overall, the long-term trend suggests </a:t>
             </a:r>
             <a:r>
-              <a:rPr lang="en-US" sz="2400" b="0" i="0" u="none" strike="noStrike" cap="none">
-                <a:solidFill>
-                  <a:schemeClr val="dk1"/>
-                </a:solidFill>
-                <a:latin typeface="Arial"/>
-                <a:ea typeface="Arial"/>
-                <a:cs typeface="Arial"/>
-                <a:sym typeface="Arial"/>
-              </a:rPr>
-              <a:t> Identify the </a:t>
+              <a:rPr lang="en-US" sz="1800" b="1" dirty="0"/>
+              <a:t>continued strengthening rather than a structural ceiling</a:t>
             </a:r>
-            <a:r>
-              <a:rPr lang="en-US" sz="2400" b="1" i="0" u="none" strike="noStrike" cap="none">
-                <a:solidFill>
-                  <a:schemeClr val="dk1"/>
-                </a:solidFill>
-                <a:latin typeface="Arial"/>
-                <a:ea typeface="Arial"/>
-                <a:cs typeface="Arial"/>
-                <a:sym typeface="Arial"/>
-              </a:rPr>
-              <a:t>single largest source </a:t>
-            </a:r>
-            <a:r>
-              <a:rPr lang="en-US" sz="2400" b="0" i="0" u="none" strike="noStrike" cap="none">
-                <a:solidFill>
-                  <a:schemeClr val="dk1"/>
-                </a:solidFill>
-                <a:latin typeface="Arial"/>
-                <a:ea typeface="Arial"/>
-                <a:cs typeface="Arial"/>
-                <a:sym typeface="Arial"/>
-              </a:rPr>
-              <a:t>country from your chart. </a:t>
-            </a:r>
-            <a:endParaRPr sz="1400" b="0" i="0" u="none" strike="noStrike" cap="none">
+            <a:endParaRPr sz="1800" b="0" i="0" u="none" strike="noStrike" cap="none" dirty="0">
               <a:solidFill>
                 <a:srgbClr val="000000"/>
               </a:solidFill>
-              <a:latin typeface="Arial"/>
-              <a:ea typeface="Arial"/>
-              <a:cs typeface="Arial"/>
-              <a:sym typeface="Arial"/>
-            </a:endParaRPr>
-          </a:p>
-          <a:p>
-            <a:pPr marL="0" marR="0" lvl="0" indent="0" algn="l" rtl="0">
-              <a:lnSpc>
-                <a:spcPct val="100000"/>
-              </a:lnSpc>
-              <a:spcBef>
-                <a:spcPts val="0"/>
-              </a:spcBef>
-              <a:spcAft>
-                <a:spcPts val="0"/>
-              </a:spcAft>
-              <a:buClr>
-                <a:srgbClr val="000000"/>
-              </a:buClr>
-              <a:buSzPts val="2400"/>
-              <a:buFont typeface="Arial"/>
-              <a:buNone/>
-            </a:pPr>
-            <a:endParaRPr sz="2400" b="0" i="0" u="none" strike="noStrike" cap="none">
-              <a:solidFill>
-                <a:schemeClr val="dk1"/>
-              </a:solidFill>
-              <a:latin typeface="Arial"/>
-              <a:ea typeface="Arial"/>
-              <a:cs typeface="Arial"/>
-              <a:sym typeface="Arial"/>
-            </a:endParaRPr>
-          </a:p>
-          <a:p>
-            <a:pPr marL="0" marR="0" lvl="0" indent="0" algn="l" rtl="0">
-              <a:lnSpc>
-                <a:spcPct val="100000"/>
-              </a:lnSpc>
-              <a:spcBef>
-                <a:spcPts val="0"/>
-              </a:spcBef>
-              <a:spcAft>
-                <a:spcPts val="0"/>
-              </a:spcAft>
-              <a:buClr>
-                <a:srgbClr val="000000"/>
-              </a:buClr>
-              <a:buSzPts val="2400"/>
-              <a:buFont typeface="Arial"/>
-              <a:buNone/>
-            </a:pPr>
-            <a:r>
-              <a:rPr lang="en-US" sz="2400" b="0" i="0" u="none" strike="noStrike" cap="none">
-                <a:solidFill>
-                  <a:schemeClr val="dk1"/>
-                </a:solidFill>
-                <a:latin typeface="Arial"/>
-                <a:ea typeface="Arial"/>
-                <a:cs typeface="Arial"/>
-                <a:sym typeface="Arial"/>
-              </a:rPr>
-              <a:t>Plot using </a:t>
-            </a:r>
-            <a:r>
-              <a:rPr lang="en-US" sz="2400" b="1" i="0" u="none" strike="noStrike" cap="none">
-                <a:solidFill>
-                  <a:schemeClr val="dk1"/>
-                </a:solidFill>
-                <a:latin typeface="Arial"/>
-                <a:ea typeface="Arial"/>
-                <a:cs typeface="Arial"/>
-                <a:sym typeface="Arial"/>
-              </a:rPr>
-              <a:t>line chart </a:t>
-            </a:r>
-            <a:r>
-              <a:rPr lang="en-US" sz="2400" b="0" i="0" u="none" strike="noStrike" cap="none">
-                <a:solidFill>
-                  <a:schemeClr val="dk1"/>
-                </a:solidFill>
-                <a:latin typeface="Arial"/>
-                <a:ea typeface="Arial"/>
-                <a:cs typeface="Arial"/>
-                <a:sym typeface="Arial"/>
-              </a:rPr>
-              <a:t>to analyze the long-term trendlines of both trade volumes (export and import)  and net FDI inflows </a:t>
-            </a:r>
-            <a:r>
-              <a:rPr lang="en-US" sz="2400" b="1" i="0" u="none" strike="noStrike" cap="none">
-                <a:solidFill>
-                  <a:schemeClr val="dk1"/>
-                </a:solidFill>
-                <a:latin typeface="Arial"/>
-                <a:ea typeface="Arial"/>
-                <a:cs typeface="Arial"/>
-                <a:sym typeface="Arial"/>
-              </a:rPr>
-              <a:t>from this partner</a:t>
-            </a:r>
-            <a:r>
-              <a:rPr lang="en-US" sz="2400" b="0" i="0" u="none" strike="noStrike" cap="none">
-                <a:solidFill>
-                  <a:schemeClr val="dk1"/>
-                </a:solidFill>
-                <a:latin typeface="Arial"/>
-                <a:ea typeface="Arial"/>
-                <a:cs typeface="Arial"/>
-                <a:sym typeface="Arial"/>
-              </a:rPr>
-              <a:t>. </a:t>
-            </a:r>
-            <a:endParaRPr sz="1400" b="0" i="0" u="none" strike="noStrike" cap="none">
-              <a:solidFill>
-                <a:srgbClr val="000000"/>
-              </a:solidFill>
-              <a:latin typeface="Arial"/>
-              <a:ea typeface="Arial"/>
-              <a:cs typeface="Arial"/>
-              <a:sym typeface="Arial"/>
-            </a:endParaRPr>
-          </a:p>
-          <a:p>
-            <a:pPr marL="0" marR="0" lvl="0" indent="0" algn="l" rtl="0">
-              <a:lnSpc>
-                <a:spcPct val="100000"/>
-              </a:lnSpc>
-              <a:spcBef>
-                <a:spcPts val="0"/>
-              </a:spcBef>
-              <a:spcAft>
-                <a:spcPts val="0"/>
-              </a:spcAft>
-              <a:buClr>
-                <a:srgbClr val="000000"/>
-              </a:buClr>
-              <a:buSzPts val="2400"/>
-              <a:buFont typeface="Arial"/>
-              <a:buNone/>
-            </a:pPr>
-            <a:r>
-              <a:rPr lang="en-US" sz="2400" b="0" i="0" u="none" strike="noStrike" cap="none">
-                <a:solidFill>
-                  <a:schemeClr val="dk1"/>
-                </a:solidFill>
-                <a:latin typeface="Arial"/>
-                <a:ea typeface="Arial"/>
-                <a:cs typeface="Arial"/>
-                <a:sym typeface="Arial"/>
-              </a:rPr>
-              <a:t>[You may need to use the combo chart – secondary axis to present the data clearly] </a:t>
-            </a:r>
-            <a:endParaRPr sz="1400" b="0" i="0" u="none" strike="noStrike" cap="none">
-              <a:solidFill>
-                <a:srgbClr val="000000"/>
-              </a:solidFill>
-              <a:latin typeface="Arial"/>
-              <a:ea typeface="Arial"/>
-              <a:cs typeface="Arial"/>
-              <a:sym typeface="Arial"/>
-            </a:endParaRPr>
-          </a:p>
-          <a:p>
-            <a:pPr marL="0" marR="0" lvl="0" indent="0" algn="l" rtl="0">
-              <a:lnSpc>
-                <a:spcPct val="100000"/>
-              </a:lnSpc>
-              <a:spcBef>
-                <a:spcPts val="0"/>
-              </a:spcBef>
-              <a:spcAft>
-                <a:spcPts val="0"/>
-              </a:spcAft>
-              <a:buClr>
-                <a:srgbClr val="000000"/>
-              </a:buClr>
-              <a:buSzPts val="2400"/>
-              <a:buFont typeface="Arial"/>
-              <a:buNone/>
-            </a:pPr>
-            <a:endParaRPr sz="2400" b="0" i="0" u="none" strike="noStrike" cap="none">
-              <a:solidFill>
-                <a:schemeClr val="dk1"/>
-              </a:solidFill>
-              <a:latin typeface="Arial"/>
-              <a:ea typeface="Arial"/>
-              <a:cs typeface="Arial"/>
-              <a:sym typeface="Arial"/>
-            </a:endParaRPr>
-          </a:p>
-          <a:p>
-            <a:pPr marL="0" marR="0" lvl="0" indent="0" algn="l" rtl="0">
-              <a:lnSpc>
-                <a:spcPct val="100000"/>
-              </a:lnSpc>
-              <a:spcBef>
-                <a:spcPts val="0"/>
-              </a:spcBef>
-              <a:spcAft>
-                <a:spcPts val="0"/>
-              </a:spcAft>
-              <a:buClr>
-                <a:srgbClr val="000000"/>
-              </a:buClr>
-              <a:buSzPts val="2400"/>
-              <a:buFont typeface="Arial"/>
-              <a:buNone/>
-            </a:pPr>
-            <a:r>
-              <a:rPr lang="en-US" sz="2400" b="0" i="0" u="none" strike="noStrike" cap="none">
-                <a:solidFill>
-                  <a:schemeClr val="dk1"/>
-                </a:solidFill>
-                <a:latin typeface="Arial"/>
-                <a:ea typeface="Arial"/>
-                <a:cs typeface="Arial"/>
-                <a:sym typeface="Arial"/>
-              </a:rPr>
-              <a:t>Discuss the trendlines and project  their future level of economic cooperation—will their interdependence strengthen, or are they hitting a structural ceiling?</a:t>
-            </a:r>
-            <a:endParaRPr sz="1400" b="0" i="0" u="none" strike="noStrike" cap="none">
-              <a:solidFill>
-                <a:srgbClr val="000000"/>
-              </a:solidFill>
-              <a:latin typeface="Arial"/>
-              <a:ea typeface="Arial"/>
-              <a:cs typeface="Arial"/>
               <a:sym typeface="Arial"/>
             </a:endParaRPr>
           </a:p>
@@ -30809,6 +34092,81 @@
   <p:clrMapOvr>
     <a:masterClrMapping/>
   </p:clrMapOvr>
+  <p:timing>
+    <p:tnLst>
+      <p:par>
+        <p:cTn id="1" dur="indefinite" restart="never" nodeType="tmRoot">
+          <p:childTnLst>
+            <p:seq concurrent="1" nextAc="seek">
+              <p:cTn id="2" dur="indefinite" nodeType="mainSeq">
+                <p:childTnLst>
+                  <p:par>
+                    <p:cTn id="3" fill="hold">
+                      <p:stCondLst>
+                        <p:cond delay="indefinite"/>
+                      </p:stCondLst>
+                      <p:childTnLst>
+                        <p:par>
+                          <p:cTn id="4" fill="hold">
+                            <p:stCondLst>
+                              <p:cond delay="0"/>
+                            </p:stCondLst>
+                            <p:childTnLst>
+                              <p:par>
+                                <p:cTn id="5" presetID="1" presetClass="entr" presetSubtype="0" fill="hold" nodeType="clickEffect">
+                                  <p:stCondLst>
+                                    <p:cond delay="0"/>
+                                  </p:stCondLst>
+                                  <p:childTnLst>
+                                    <p:set>
+                                      <p:cBhvr>
+                                        <p:cTn id="6" dur="1" fill="hold">
+                                          <p:stCondLst>
+                                            <p:cond delay="0"/>
+                                          </p:stCondLst>
+                                        </p:cTn>
+                                        <p:tgtEl>
+                                          <p:spTgt spid="6"/>
+                                        </p:tgtEl>
+                                        <p:attrNameLst>
+                                          <p:attrName>style.visibility</p:attrName>
+                                        </p:attrNameLst>
+                                      </p:cBhvr>
+                                      <p:to>
+                                        <p:strVal val="visible"/>
+                                      </p:to>
+                                    </p:set>
+                                  </p:childTnLst>
+                                </p:cTn>
+                              </p:par>
+                            </p:childTnLst>
+                          </p:cTn>
+                        </p:par>
+                      </p:childTnLst>
+                    </p:cTn>
+                  </p:par>
+                </p:childTnLst>
+              </p:cTn>
+              <p:prevCondLst>
+                <p:cond evt="onPrev" delay="0">
+                  <p:tgtEl>
+                    <p:sldTgt/>
+                  </p:tgtEl>
+                </p:cond>
+              </p:prevCondLst>
+              <p:nextCondLst>
+                <p:cond evt="onNext" delay="0">
+                  <p:tgtEl>
+                    <p:sldTgt/>
+                  </p:tgtEl>
+                </p:cond>
+              </p:nextCondLst>
+            </p:seq>
+          </p:childTnLst>
+        </p:cTn>
+      </p:par>
+    </p:tnLst>
+  </p:timing>
 </p:sld>
 </file>
 

--- a/ECON251/Assignment/T01_Group10_Presentation Slides.pptx
+++ b/ECON251/Assignment/T01_Group10_Presentation Slides.pptx
@@ -262,7 +262,7 @@
   </p:defaultTextStyle>
   <p:extLst>
     <p:ext uri="GoogleSlidesCustomDataVersion2">
-      <go:slidesCustomData xmlns:go="http://customooxmlschemas.google.com/" r:id="rId21" roundtripDataSignature="AMtx7miLVwvDE4oGi4T9zi9i/I29HfSYiQ=="/>
+      <go:slidesCustomData xmlns:go="http://customooxmlschemas.google.com/" r:id="rId21" roundtripDataSignature="AMtx7mimLR0ECmIGZEtsQXQzfYXuto4rtQ=="/>
     </p:ext>
   </p:extLst>
 </p:presentation>
@@ -4956,799 +4956,6 @@
 </c:chartSpace>
 </file>
 
-<file path=ppt/charts/chart6.xml><?xml version="1.0" encoding="utf-8"?>
-<c:chartSpace xmlns:c="http://schemas.openxmlformats.org/drawingml/2006/chart" xmlns:a="http://schemas.openxmlformats.org/drawingml/2006/main" xmlns:r="http://schemas.openxmlformats.org/officeDocument/2006/relationships" xmlns:c16r2="http://schemas.microsoft.com/office/drawing/2015/06/chart">
-  <c:date1904 val="0"/>
-  <c:lang val="en-US"/>
-  <c:roundedCorners val="0"/>
-  <mc:AlternateContent xmlns:mc="http://schemas.openxmlformats.org/markup-compatibility/2006">
-    <mc:Choice xmlns:c14="http://schemas.microsoft.com/office/drawing/2007/8/2/chart" Requires="c14">
-      <c14:style val="102"/>
-    </mc:Choice>
-    <mc:Fallback>
-      <c:style val="2"/>
-    </mc:Fallback>
-  </mc:AlternateContent>
-  <c:chart>
-    <c:title>
-      <c:tx>
-        <c:rich>
-          <a:bodyPr rot="0" spcFirstLastPara="1" vertOverflow="ellipsis" vert="horz" wrap="square" anchor="ctr" anchorCtr="1"/>
-          <a:lstStyle/>
-          <a:p>
-            <a:pPr>
-              <a:defRPr sz="1400" b="0" i="0" u="none" strike="noStrike" kern="1200" spc="0" baseline="0">
-                <a:solidFill>
-                  <a:schemeClr val="tx1">
-                    <a:lumMod val="65000"/>
-                    <a:lumOff val="35000"/>
-                  </a:schemeClr>
-                </a:solidFill>
-                <a:latin typeface="+mn-lt"/>
-                <a:ea typeface="+mn-ea"/>
-                <a:cs typeface="+mn-cs"/>
-              </a:defRPr>
-            </a:pPr>
-            <a:r>
-              <a:rPr lang="en-US" dirty="0"/>
-              <a:t>Trade Volume and key trade events </a:t>
-            </a:r>
-          </a:p>
-        </c:rich>
-      </c:tx>
-      <c:overlay val="0"/>
-      <c:spPr>
-        <a:noFill/>
-        <a:ln>
-          <a:noFill/>
-        </a:ln>
-        <a:effectLst/>
-      </c:spPr>
-      <c:txPr>
-        <a:bodyPr rot="0" spcFirstLastPara="1" vertOverflow="ellipsis" vert="horz" wrap="square" anchor="ctr" anchorCtr="1"/>
-        <a:lstStyle/>
-        <a:p>
-          <a:pPr>
-            <a:defRPr sz="1400" b="0" i="0" u="none" strike="noStrike" kern="1200" spc="0" baseline="0">
-              <a:solidFill>
-                <a:schemeClr val="tx1">
-                  <a:lumMod val="65000"/>
-                  <a:lumOff val="35000"/>
-                </a:schemeClr>
-              </a:solidFill>
-              <a:latin typeface="+mn-lt"/>
-              <a:ea typeface="+mn-ea"/>
-              <a:cs typeface="+mn-cs"/>
-            </a:defRPr>
-          </a:pPr>
-          <a:endParaRPr lang="en-US"/>
-        </a:p>
-      </c:txPr>
-    </c:title>
-    <c:autoTitleDeleted val="0"/>
-    <c:plotArea>
-      <c:layout>
-        <c:manualLayout>
-          <c:layoutTarget val="inner"/>
-          <c:xMode val="edge"/>
-          <c:yMode val="edge"/>
-          <c:x val="6.7659599038470311E-2"/>
-          <c:y val="0.13111111111111112"/>
-          <c:w val="0.89374549852761964"/>
-          <c:h val="0.70604257801108194"/>
-        </c:manualLayout>
-      </c:layout>
-      <c:barChart>
-        <c:barDir val="col"/>
-        <c:grouping val="clustered"/>
-        <c:varyColors val="0"/>
-        <c:ser>
-          <c:idx val="0"/>
-          <c:order val="0"/>
-          <c:tx>
-            <c:strRef>
-              <c:f>Sheet1!$B$1</c:f>
-              <c:strCache>
-                <c:ptCount val="1"/>
-                <c:pt idx="0">
-                  <c:v>TradeVolume</c:v>
-                </c:pt>
-              </c:strCache>
-            </c:strRef>
-          </c:tx>
-          <c:spPr>
-            <a:solidFill>
-              <a:schemeClr val="accent1"/>
-            </a:solidFill>
-            <a:ln>
-              <a:noFill/>
-            </a:ln>
-            <a:effectLst/>
-          </c:spPr>
-          <c:invertIfNegative val="0"/>
-          <c:dPt>
-            <c:idx val="2"/>
-            <c:invertIfNegative val="0"/>
-            <c:bubble3D val="0"/>
-            <c:spPr>
-              <a:solidFill>
-                <a:srgbClr val="FF0000"/>
-              </a:solidFill>
-              <a:ln>
-                <a:noFill/>
-              </a:ln>
-              <a:effectLst/>
-            </c:spPr>
-            <c:extLst>
-              <c:ext xmlns:c16="http://schemas.microsoft.com/office/drawing/2014/chart" uri="{C3380CC4-5D6E-409C-BE32-E72D297353CC}">
-                <c16:uniqueId val="{00000001-9B86-48A1-B749-A1A857986736}"/>
-              </c:ext>
-            </c:extLst>
-          </c:dPt>
-          <c:dPt>
-            <c:idx val="10"/>
-            <c:invertIfNegative val="0"/>
-            <c:bubble3D val="0"/>
-            <c:spPr>
-              <a:solidFill>
-                <a:srgbClr val="FF0000"/>
-              </a:solidFill>
-              <a:ln>
-                <a:noFill/>
-              </a:ln>
-              <a:effectLst/>
-            </c:spPr>
-            <c:extLst>
-              <c:ext xmlns:c16="http://schemas.microsoft.com/office/drawing/2014/chart" uri="{C3380CC4-5D6E-409C-BE32-E72D297353CC}">
-                <c16:uniqueId val="{00000003-9B86-48A1-B749-A1A857986736}"/>
-              </c:ext>
-            </c:extLst>
-          </c:dPt>
-          <c:dPt>
-            <c:idx val="22"/>
-            <c:invertIfNegative val="0"/>
-            <c:bubble3D val="0"/>
-            <c:spPr>
-              <a:solidFill>
-                <a:srgbClr val="FF0000"/>
-              </a:solidFill>
-              <a:ln>
-                <a:noFill/>
-              </a:ln>
-              <a:effectLst/>
-            </c:spPr>
-            <c:extLst>
-              <c:ext xmlns:c16="http://schemas.microsoft.com/office/drawing/2014/chart" uri="{C3380CC4-5D6E-409C-BE32-E72D297353CC}">
-                <c16:uniqueId val="{00000005-9B86-48A1-B749-A1A857986736}"/>
-              </c:ext>
-            </c:extLst>
-          </c:dPt>
-          <c:trendline>
-            <c:spPr>
-              <a:ln w="19050" cap="rnd">
-                <a:solidFill>
-                  <a:schemeClr val="accent1"/>
-                </a:solidFill>
-                <a:prstDash val="sysDot"/>
-              </a:ln>
-              <a:effectLst/>
-            </c:spPr>
-            <c:trendlineType val="linear"/>
-            <c:dispRSqr val="0"/>
-            <c:dispEq val="0"/>
-          </c:trendline>
-          <c:trendline>
-            <c:spPr>
-              <a:ln w="19050" cap="rnd">
-                <a:solidFill>
-                  <a:schemeClr val="accent1"/>
-                </a:solidFill>
-                <a:prstDash val="sysDot"/>
-              </a:ln>
-              <a:effectLst/>
-            </c:spPr>
-            <c:trendlineType val="linear"/>
-            <c:dispRSqr val="1"/>
-            <c:dispEq val="1"/>
-            <c:trendlineLbl>
-              <c:layout>
-                <c:manualLayout>
-                  <c:x val="-0.11008531144870677"/>
-                  <c:y val="-9.1067538126361654E-3"/>
-                </c:manualLayout>
-              </c:layout>
-              <c:numFmt formatCode="General" sourceLinked="0"/>
-              <c:spPr>
-                <a:noFill/>
-                <a:ln>
-                  <a:noFill/>
-                </a:ln>
-                <a:effectLst/>
-              </c:spPr>
-              <c:txPr>
-                <a:bodyPr rot="0" spcFirstLastPara="1" vertOverflow="ellipsis" vert="horz" wrap="square" anchor="ctr" anchorCtr="1"/>
-                <a:lstStyle/>
-                <a:p>
-                  <a:pPr>
-                    <a:defRPr sz="900" b="0" i="0" u="none" strike="noStrike" kern="1200" baseline="0">
-                      <a:solidFill>
-                        <a:schemeClr val="tx1">
-                          <a:lumMod val="65000"/>
-                          <a:lumOff val="35000"/>
-                        </a:schemeClr>
-                      </a:solidFill>
-                      <a:latin typeface="+mn-lt"/>
-                      <a:ea typeface="+mn-ea"/>
-                      <a:cs typeface="+mn-cs"/>
-                    </a:defRPr>
-                  </a:pPr>
-                  <a:endParaRPr lang="en-US"/>
-                </a:p>
-              </c:txPr>
-            </c:trendlineLbl>
-          </c:trendline>
-          <c:cat>
-            <c:numRef>
-              <c:f>Sheet1!$A$2:$A$26</c:f>
-              <c:numCache>
-                <c:formatCode>General</c:formatCode>
-                <c:ptCount val="25"/>
-                <c:pt idx="0">
-                  <c:v>2000</c:v>
-                </c:pt>
-                <c:pt idx="1">
-                  <c:v>2001</c:v>
-                </c:pt>
-                <c:pt idx="2">
-                  <c:v>2002</c:v>
-                </c:pt>
-                <c:pt idx="3">
-                  <c:v>2003</c:v>
-                </c:pt>
-                <c:pt idx="4">
-                  <c:v>2004</c:v>
-                </c:pt>
-                <c:pt idx="5">
-                  <c:v>2005</c:v>
-                </c:pt>
-                <c:pt idx="6">
-                  <c:v>2006</c:v>
-                </c:pt>
-                <c:pt idx="7">
-                  <c:v>2007</c:v>
-                </c:pt>
-                <c:pt idx="8">
-                  <c:v>2008</c:v>
-                </c:pt>
-                <c:pt idx="9">
-                  <c:v>2009</c:v>
-                </c:pt>
-                <c:pt idx="10">
-                  <c:v>2010</c:v>
-                </c:pt>
-                <c:pt idx="11">
-                  <c:v>2011</c:v>
-                </c:pt>
-                <c:pt idx="12">
-                  <c:v>2012</c:v>
-                </c:pt>
-                <c:pt idx="13">
-                  <c:v>2013</c:v>
-                </c:pt>
-                <c:pt idx="14">
-                  <c:v>2014</c:v>
-                </c:pt>
-                <c:pt idx="15">
-                  <c:v>2015</c:v>
-                </c:pt>
-                <c:pt idx="16">
-                  <c:v>2016</c:v>
-                </c:pt>
-                <c:pt idx="17">
-                  <c:v>2017</c:v>
-                </c:pt>
-                <c:pt idx="18">
-                  <c:v>2018</c:v>
-                </c:pt>
-                <c:pt idx="19">
-                  <c:v>2019</c:v>
-                </c:pt>
-                <c:pt idx="20">
-                  <c:v>2020</c:v>
-                </c:pt>
-                <c:pt idx="21">
-                  <c:v>2021</c:v>
-                </c:pt>
-                <c:pt idx="22">
-                  <c:v>2022</c:v>
-                </c:pt>
-                <c:pt idx="23">
-                  <c:v>2023</c:v>
-                </c:pt>
-                <c:pt idx="24">
-                  <c:v>2024</c:v>
-                </c:pt>
-              </c:numCache>
-            </c:numRef>
-          </c:cat>
-          <c:val>
-            <c:numRef>
-              <c:f>Sheet1!$B$2:$B$26</c:f>
-              <c:numCache>
-                <c:formatCode>General</c:formatCode>
-                <c:ptCount val="25"/>
-                <c:pt idx="0">
-                  <c:v>165</c:v>
-                </c:pt>
-                <c:pt idx="1">
-                  <c:v>132</c:v>
-                </c:pt>
-                <c:pt idx="2">
-                  <c:v>251</c:v>
-                </c:pt>
-                <c:pt idx="3">
-                  <c:v>317</c:v>
-                </c:pt>
-                <c:pt idx="4">
-                  <c:v>304</c:v>
-                </c:pt>
-                <c:pt idx="5">
-                  <c:v>343</c:v>
-                </c:pt>
-                <c:pt idx="6">
-                  <c:v>436</c:v>
-                </c:pt>
-                <c:pt idx="7">
-                  <c:v>450</c:v>
-                </c:pt>
-                <c:pt idx="8">
-                  <c:v>333</c:v>
-                </c:pt>
-                <c:pt idx="9">
-                  <c:v>522</c:v>
-                </c:pt>
-                <c:pt idx="10">
-                  <c:v>612</c:v>
-                </c:pt>
-                <c:pt idx="11">
-                  <c:v>571</c:v>
-                </c:pt>
-                <c:pt idx="12">
-                  <c:v>634</c:v>
-                </c:pt>
-                <c:pt idx="13">
-                  <c:v>609</c:v>
-                </c:pt>
-                <c:pt idx="14">
-                  <c:v>655</c:v>
-                </c:pt>
-                <c:pt idx="15">
-                  <c:v>729</c:v>
-                </c:pt>
-                <c:pt idx="16">
-                  <c:v>754</c:v>
-                </c:pt>
-                <c:pt idx="17">
-                  <c:v>832</c:v>
-                </c:pt>
-                <c:pt idx="18">
-                  <c:v>836</c:v>
-                </c:pt>
-                <c:pt idx="19">
-                  <c:v>861</c:v>
-                </c:pt>
-                <c:pt idx="20">
-                  <c:v>885</c:v>
-                </c:pt>
-                <c:pt idx="21">
-                  <c:v>1121</c:v>
-                </c:pt>
-                <c:pt idx="22">
-                  <c:v>1120</c:v>
-                </c:pt>
-                <c:pt idx="23">
-                  <c:v>1018</c:v>
-                </c:pt>
-                <c:pt idx="24">
-                  <c:v>1079</c:v>
-                </c:pt>
-              </c:numCache>
-            </c:numRef>
-          </c:val>
-          <c:extLst>
-            <c:ext xmlns:c16="http://schemas.microsoft.com/office/drawing/2014/chart" uri="{C3380CC4-5D6E-409C-BE32-E72D297353CC}">
-              <c16:uniqueId val="{00000008-9B86-48A1-B749-A1A857986736}"/>
-            </c:ext>
-          </c:extLst>
-        </c:ser>
-        <c:dLbls>
-          <c:showLegendKey val="0"/>
-          <c:showVal val="0"/>
-          <c:showCatName val="0"/>
-          <c:showSerName val="0"/>
-          <c:showPercent val="0"/>
-          <c:showBubbleSize val="0"/>
-        </c:dLbls>
-        <c:gapWidth val="219"/>
-        <c:overlap val="-27"/>
-        <c:axId val="1456237551"/>
-        <c:axId val="1451558207"/>
-        <c:extLst>
-          <c:ext xmlns:c15="http://schemas.microsoft.com/office/drawing/2012/chart" uri="{02D57815-91ED-43cb-92C2-25804820EDAC}">
-            <c15:filteredBarSeries>
-              <c15:ser>
-                <c:idx val="1"/>
-                <c:order val="1"/>
-                <c:tx>
-                  <c:strRef>
-                    <c:extLst>
-                      <c:ext uri="{02D57815-91ED-43cb-92C2-25804820EDAC}">
-                        <c15:formulaRef>
-                          <c15:sqref>Sheet1!$C$1</c15:sqref>
-                        </c15:formulaRef>
-                      </c:ext>
-                    </c:extLst>
-                    <c:strCache>
-                      <c:ptCount val="1"/>
-                      <c:pt idx="0">
-                        <c:v>Key event no</c:v>
-                      </c:pt>
-                    </c:strCache>
-                  </c:strRef>
-                </c:tx>
-                <c:spPr>
-                  <a:solidFill>
-                    <a:schemeClr val="accent2"/>
-                  </a:solidFill>
-                  <a:ln>
-                    <a:noFill/>
-                  </a:ln>
-                  <a:effectLst/>
-                </c:spPr>
-                <c:invertIfNegative val="0"/>
-                <c:dLbls>
-                  <c:dLbl>
-                    <c:idx val="2"/>
-                    <c:showLegendKey val="0"/>
-                    <c:showVal val="1"/>
-                    <c:showCatName val="0"/>
-                    <c:showSerName val="0"/>
-                    <c:showPercent val="0"/>
-                    <c:showBubbleSize val="0"/>
-                    <c:extLst>
-                      <c:ext uri="{CE6537A1-D6FC-4f65-9D91-7224C49458BB}"/>
-                      <c:ext xmlns:c16="http://schemas.microsoft.com/office/drawing/2014/chart" uri="{C3380CC4-5D6E-409C-BE32-E72D297353CC}">
-                        <c16:uniqueId val="{00000009-9B86-48A1-B749-A1A857986736}"/>
-                      </c:ext>
-                    </c:extLst>
-                  </c:dLbl>
-                  <c:spPr>
-                    <a:noFill/>
-                    <a:ln>
-                      <a:noFill/>
-                    </a:ln>
-                    <a:effectLst/>
-                  </c:spPr>
-                  <c:txPr>
-                    <a:bodyPr rot="0" spcFirstLastPara="1" vertOverflow="ellipsis" vert="horz" wrap="square" lIns="38100" tIns="19050" rIns="38100" bIns="19050" anchor="ctr" anchorCtr="1">
-                      <a:spAutoFit/>
-                    </a:bodyPr>
-                    <a:lstStyle/>
-                    <a:p>
-                      <a:pPr>
-                        <a:defRPr sz="900" b="0" i="0" u="none" strike="noStrike" kern="1200" baseline="0">
-                          <a:solidFill>
-                            <a:schemeClr val="tx1">
-                              <a:lumMod val="75000"/>
-                              <a:lumOff val="25000"/>
-                            </a:schemeClr>
-                          </a:solidFill>
-                          <a:latin typeface="+mn-lt"/>
-                          <a:ea typeface="+mn-ea"/>
-                          <a:cs typeface="+mn-cs"/>
-                        </a:defRPr>
-                      </a:pPr>
-                      <a:endParaRPr lang="en-US"/>
-                    </a:p>
-                  </c:txPr>
-                  <c:showLegendKey val="0"/>
-                  <c:showVal val="0"/>
-                  <c:showCatName val="0"/>
-                  <c:showSerName val="0"/>
-                  <c:showPercent val="0"/>
-                  <c:showBubbleSize val="0"/>
-                  <c:extLst>
-                    <c:ext uri="{CE6537A1-D6FC-4f65-9D91-7224C49458BB}">
-                      <c15:showLeaderLines val="1"/>
-                      <c15:leaderLines>
-                        <c:spPr>
-                          <a:ln w="9525" cap="flat" cmpd="sng" algn="ctr">
-                            <a:solidFill>
-                              <a:schemeClr val="tx1">
-                                <a:lumMod val="35000"/>
-                                <a:lumOff val="65000"/>
-                              </a:schemeClr>
-                            </a:solidFill>
-                            <a:round/>
-                          </a:ln>
-                          <a:effectLst/>
-                        </c:spPr>
-                      </c15:leaderLines>
-                    </c:ext>
-                  </c:extLst>
-                </c:dLbls>
-                <c:cat>
-                  <c:numRef>
-                    <c:extLst>
-                      <c:ext uri="{02D57815-91ED-43cb-92C2-25804820EDAC}">
-                        <c15:formulaRef>
-                          <c15:sqref>Sheet1!$A$2:$A$26</c15:sqref>
-                        </c15:formulaRef>
-                      </c:ext>
-                    </c:extLst>
-                    <c:numCache>
-                      <c:formatCode>General</c:formatCode>
-                      <c:ptCount val="25"/>
-                      <c:pt idx="0">
-                        <c:v>2000</c:v>
-                      </c:pt>
-                      <c:pt idx="1">
-                        <c:v>2001</c:v>
-                      </c:pt>
-                      <c:pt idx="2">
-                        <c:v>2002</c:v>
-                      </c:pt>
-                      <c:pt idx="3">
-                        <c:v>2003</c:v>
-                      </c:pt>
-                      <c:pt idx="4">
-                        <c:v>2004</c:v>
-                      </c:pt>
-                      <c:pt idx="5">
-                        <c:v>2005</c:v>
-                      </c:pt>
-                      <c:pt idx="6">
-                        <c:v>2006</c:v>
-                      </c:pt>
-                      <c:pt idx="7">
-                        <c:v>2007</c:v>
-                      </c:pt>
-                      <c:pt idx="8">
-                        <c:v>2008</c:v>
-                      </c:pt>
-                      <c:pt idx="9">
-                        <c:v>2009</c:v>
-                      </c:pt>
-                      <c:pt idx="10">
-                        <c:v>2010</c:v>
-                      </c:pt>
-                      <c:pt idx="11">
-                        <c:v>2011</c:v>
-                      </c:pt>
-                      <c:pt idx="12">
-                        <c:v>2012</c:v>
-                      </c:pt>
-                      <c:pt idx="13">
-                        <c:v>2013</c:v>
-                      </c:pt>
-                      <c:pt idx="14">
-                        <c:v>2014</c:v>
-                      </c:pt>
-                      <c:pt idx="15">
-                        <c:v>2015</c:v>
-                      </c:pt>
-                      <c:pt idx="16">
-                        <c:v>2016</c:v>
-                      </c:pt>
-                      <c:pt idx="17">
-                        <c:v>2017</c:v>
-                      </c:pt>
-                      <c:pt idx="18">
-                        <c:v>2018</c:v>
-                      </c:pt>
-                      <c:pt idx="19">
-                        <c:v>2019</c:v>
-                      </c:pt>
-                      <c:pt idx="20">
-                        <c:v>2020</c:v>
-                      </c:pt>
-                      <c:pt idx="21">
-                        <c:v>2021</c:v>
-                      </c:pt>
-                      <c:pt idx="22">
-                        <c:v>2022</c:v>
-                      </c:pt>
-                      <c:pt idx="23">
-                        <c:v>2023</c:v>
-                      </c:pt>
-                      <c:pt idx="24">
-                        <c:v>2024</c:v>
-                      </c:pt>
-                    </c:numCache>
-                  </c:numRef>
-                </c:cat>
-                <c:val>
-                  <c:numRef>
-                    <c:extLst>
-                      <c:ext uri="{02D57815-91ED-43cb-92C2-25804820EDAC}">
-                        <c15:formulaRef>
-                          <c15:sqref>Sheet1!$C$2:$C$26</c15:sqref>
-                        </c15:formulaRef>
-                      </c:ext>
-                    </c:extLst>
-                    <c:numCache>
-                      <c:formatCode>General</c:formatCode>
-                      <c:ptCount val="25"/>
-                      <c:pt idx="2">
-                        <c:v>251</c:v>
-                      </c:pt>
-                      <c:pt idx="8">
-                        <c:v>3</c:v>
-                      </c:pt>
-                      <c:pt idx="10">
-                        <c:v>612</c:v>
-                      </c:pt>
-                      <c:pt idx="20">
-                        <c:v>885</c:v>
-                      </c:pt>
-                      <c:pt idx="22">
-                        <c:v>1120</c:v>
-                      </c:pt>
-                    </c:numCache>
-                  </c:numRef>
-                </c:val>
-                <c:extLst>
-                  <c:ext xmlns:c16="http://schemas.microsoft.com/office/drawing/2014/chart" uri="{C3380CC4-5D6E-409C-BE32-E72D297353CC}">
-                    <c16:uniqueId val="{0000000A-9B86-48A1-B749-A1A857986736}"/>
-                  </c:ext>
-                </c:extLst>
-              </c15:ser>
-            </c15:filteredBarSeries>
-          </c:ext>
-        </c:extLst>
-      </c:barChart>
-      <c:catAx>
-        <c:axId val="1456237551"/>
-        <c:scaling>
-          <c:orientation val="minMax"/>
-        </c:scaling>
-        <c:delete val="0"/>
-        <c:axPos val="b"/>
-        <c:numFmt formatCode="General" sourceLinked="1"/>
-        <c:majorTickMark val="none"/>
-        <c:minorTickMark val="none"/>
-        <c:tickLblPos val="nextTo"/>
-        <c:spPr>
-          <a:noFill/>
-          <a:ln w="9525" cap="flat" cmpd="sng" algn="ctr">
-            <a:solidFill>
-              <a:schemeClr val="tx1">
-                <a:lumMod val="15000"/>
-                <a:lumOff val="85000"/>
-              </a:schemeClr>
-            </a:solidFill>
-            <a:round/>
-          </a:ln>
-          <a:effectLst/>
-        </c:spPr>
-        <c:txPr>
-          <a:bodyPr rot="-60000000" spcFirstLastPara="1" vertOverflow="ellipsis" vert="horz" wrap="square" anchor="ctr" anchorCtr="1"/>
-          <a:lstStyle/>
-          <a:p>
-            <a:pPr>
-              <a:defRPr sz="900" b="0" i="0" u="none" strike="noStrike" kern="1200" baseline="0">
-                <a:solidFill>
-                  <a:schemeClr val="tx1">
-                    <a:lumMod val="65000"/>
-                    <a:lumOff val="35000"/>
-                  </a:schemeClr>
-                </a:solidFill>
-                <a:latin typeface="+mn-lt"/>
-                <a:ea typeface="+mn-ea"/>
-                <a:cs typeface="+mn-cs"/>
-              </a:defRPr>
-            </a:pPr>
-            <a:endParaRPr lang="en-US"/>
-          </a:p>
-        </c:txPr>
-        <c:crossAx val="1451558207"/>
-        <c:crosses val="autoZero"/>
-        <c:auto val="1"/>
-        <c:lblAlgn val="ctr"/>
-        <c:lblOffset val="100"/>
-        <c:noMultiLvlLbl val="0"/>
-      </c:catAx>
-      <c:valAx>
-        <c:axId val="1451558207"/>
-        <c:scaling>
-          <c:orientation val="minMax"/>
-        </c:scaling>
-        <c:delete val="0"/>
-        <c:axPos val="l"/>
-        <c:majorGridlines>
-          <c:spPr>
-            <a:ln w="9525" cap="flat" cmpd="sng" algn="ctr">
-              <a:solidFill>
-                <a:schemeClr val="tx1">
-                  <a:lumMod val="15000"/>
-                  <a:lumOff val="85000"/>
-                </a:schemeClr>
-              </a:solidFill>
-              <a:round/>
-            </a:ln>
-            <a:effectLst/>
-          </c:spPr>
-        </c:majorGridlines>
-        <c:numFmt formatCode="General" sourceLinked="1"/>
-        <c:majorTickMark val="none"/>
-        <c:minorTickMark val="none"/>
-        <c:tickLblPos val="nextTo"/>
-        <c:spPr>
-          <a:noFill/>
-          <a:ln>
-            <a:noFill/>
-          </a:ln>
-          <a:effectLst/>
-        </c:spPr>
-        <c:txPr>
-          <a:bodyPr rot="-60000000" spcFirstLastPara="1" vertOverflow="ellipsis" vert="horz" wrap="square" anchor="ctr" anchorCtr="1"/>
-          <a:lstStyle/>
-          <a:p>
-            <a:pPr>
-              <a:defRPr sz="900" b="0" i="0" u="none" strike="noStrike" kern="1200" baseline="0">
-                <a:solidFill>
-                  <a:schemeClr val="tx1">
-                    <a:lumMod val="65000"/>
-                    <a:lumOff val="35000"/>
-                  </a:schemeClr>
-                </a:solidFill>
-                <a:latin typeface="+mn-lt"/>
-                <a:ea typeface="+mn-ea"/>
-                <a:cs typeface="+mn-cs"/>
-              </a:defRPr>
-            </a:pPr>
-            <a:endParaRPr lang="en-US"/>
-          </a:p>
-        </c:txPr>
-        <c:crossAx val="1456237551"/>
-        <c:crosses val="autoZero"/>
-        <c:crossBetween val="between"/>
-      </c:valAx>
-      <c:spPr>
-        <a:noFill/>
-        <a:ln>
-          <a:noFill/>
-        </a:ln>
-        <a:effectLst/>
-      </c:spPr>
-    </c:plotArea>
-    <c:plotVisOnly val="1"/>
-    <c:dispBlanksAs val="gap"/>
-    <c:showDLblsOverMax val="0"/>
-  </c:chart>
-  <c:spPr>
-    <a:noFill/>
-    <a:ln>
-      <a:noFill/>
-    </a:ln>
-    <a:effectLst/>
-  </c:spPr>
-  <c:txPr>
-    <a:bodyPr/>
-    <a:lstStyle/>
-    <a:p>
-      <a:pPr>
-        <a:defRPr/>
-      </a:pPr>
-      <a:endParaRPr lang="en-US"/>
-    </a:p>
-  </c:txPr>
-  <c:externalData r:id="rId3">
-    <c:autoUpdate val="0"/>
-  </c:externalData>
-</c:chartSpace>
-</file>
-
 <file path=ppt/charts/colors1.xml><?xml version="1.0" encoding="utf-8"?>
 <cs:colorStyle xmlns:cs="http://schemas.microsoft.com/office/drawing/2012/chartStyle" xmlns:a="http://schemas.openxmlformats.org/drawingml/2006/main" meth="cycle" id="10">
   <a:schemeClr val="accent1"/>
@@ -5910,46 +5117,6 @@
 </file>
 
 <file path=ppt/charts/colors5.xml><?xml version="1.0" encoding="utf-8"?>
-<cs:colorStyle xmlns:cs="http://schemas.microsoft.com/office/drawing/2012/chartStyle" xmlns:a="http://schemas.openxmlformats.org/drawingml/2006/main" meth="cycle" id="10">
-  <a:schemeClr val="accent1"/>
-  <a:schemeClr val="accent2"/>
-  <a:schemeClr val="accent3"/>
-  <a:schemeClr val="accent4"/>
-  <a:schemeClr val="accent5"/>
-  <a:schemeClr val="accent6"/>
-  <cs:variation/>
-  <cs:variation>
-    <a:lumMod val="60000"/>
-  </cs:variation>
-  <cs:variation>
-    <a:lumMod val="80000"/>
-    <a:lumOff val="20000"/>
-  </cs:variation>
-  <cs:variation>
-    <a:lumMod val="80000"/>
-  </cs:variation>
-  <cs:variation>
-    <a:lumMod val="60000"/>
-    <a:lumOff val="40000"/>
-  </cs:variation>
-  <cs:variation>
-    <a:lumMod val="50000"/>
-  </cs:variation>
-  <cs:variation>
-    <a:lumMod val="70000"/>
-    <a:lumOff val="30000"/>
-  </cs:variation>
-  <cs:variation>
-    <a:lumMod val="70000"/>
-  </cs:variation>
-  <cs:variation>
-    <a:lumMod val="50000"/>
-    <a:lumOff val="50000"/>
-  </cs:variation>
-</cs:colorStyle>
-</file>
-
-<file path=ppt/charts/colors6.xml><?xml version="1.0" encoding="utf-8"?>
 <cs:colorStyle xmlns:cs="http://schemas.microsoft.com/office/drawing/2012/chartStyle" xmlns:a="http://schemas.openxmlformats.org/drawingml/2006/main" meth="cycle" id="10">
   <a:schemeClr val="accent1"/>
   <a:schemeClr val="accent2"/>
@@ -8534,509 +7701,6 @@
 </cs:chartStyle>
 </file>
 
-<file path=ppt/charts/style6.xml><?xml version="1.0" encoding="utf-8"?>
-<cs:chartStyle xmlns:cs="http://schemas.microsoft.com/office/drawing/2012/chartStyle" xmlns:a="http://schemas.openxmlformats.org/drawingml/2006/main" id="201">
-  <cs:axisTitle>
-    <cs:lnRef idx="0"/>
-    <cs:fillRef idx="0"/>
-    <cs:effectRef idx="0"/>
-    <cs:fontRef idx="minor">
-      <a:schemeClr val="tx1">
-        <a:lumMod val="65000"/>
-        <a:lumOff val="35000"/>
-      </a:schemeClr>
-    </cs:fontRef>
-    <cs:defRPr sz="1000" kern="1200"/>
-  </cs:axisTitle>
-  <cs:categoryAxis>
-    <cs:lnRef idx="0"/>
-    <cs:fillRef idx="0"/>
-    <cs:effectRef idx="0"/>
-    <cs:fontRef idx="minor">
-      <a:schemeClr val="tx1">
-        <a:lumMod val="65000"/>
-        <a:lumOff val="35000"/>
-      </a:schemeClr>
-    </cs:fontRef>
-    <cs:spPr>
-      <a:ln w="9525" cap="flat" cmpd="sng" algn="ctr">
-        <a:solidFill>
-          <a:schemeClr val="tx1">
-            <a:lumMod val="15000"/>
-            <a:lumOff val="85000"/>
-          </a:schemeClr>
-        </a:solidFill>
-        <a:round/>
-      </a:ln>
-    </cs:spPr>
-    <cs:defRPr sz="900" kern="1200"/>
-  </cs:categoryAxis>
-  <cs:chartArea mods="allowNoFillOverride allowNoLineOverride">
-    <cs:lnRef idx="0"/>
-    <cs:fillRef idx="0"/>
-    <cs:effectRef idx="0"/>
-    <cs:fontRef idx="minor">
-      <a:schemeClr val="tx1"/>
-    </cs:fontRef>
-    <cs:spPr>
-      <a:solidFill>
-        <a:schemeClr val="bg1"/>
-      </a:solidFill>
-      <a:ln w="9525" cap="flat" cmpd="sng" algn="ctr">
-        <a:solidFill>
-          <a:schemeClr val="tx1">
-            <a:lumMod val="15000"/>
-            <a:lumOff val="85000"/>
-          </a:schemeClr>
-        </a:solidFill>
-        <a:round/>
-      </a:ln>
-    </cs:spPr>
-    <cs:defRPr sz="1000" kern="1200"/>
-  </cs:chartArea>
-  <cs:dataLabel>
-    <cs:lnRef idx="0"/>
-    <cs:fillRef idx="0"/>
-    <cs:effectRef idx="0"/>
-    <cs:fontRef idx="minor">
-      <a:schemeClr val="tx1">
-        <a:lumMod val="75000"/>
-        <a:lumOff val="25000"/>
-      </a:schemeClr>
-    </cs:fontRef>
-    <cs:defRPr sz="900" kern="1200"/>
-  </cs:dataLabel>
-  <cs:dataLabelCallout>
-    <cs:lnRef idx="0"/>
-    <cs:fillRef idx="0"/>
-    <cs:effectRef idx="0"/>
-    <cs:fontRef idx="minor">
-      <a:schemeClr val="dk1">
-        <a:lumMod val="65000"/>
-        <a:lumOff val="35000"/>
-      </a:schemeClr>
-    </cs:fontRef>
-    <cs:spPr>
-      <a:solidFill>
-        <a:schemeClr val="lt1"/>
-      </a:solidFill>
-      <a:ln>
-        <a:solidFill>
-          <a:schemeClr val="dk1">
-            <a:lumMod val="25000"/>
-            <a:lumOff val="75000"/>
-          </a:schemeClr>
-        </a:solidFill>
-      </a:ln>
-    </cs:spPr>
-    <cs:defRPr sz="900" kern="1200"/>
-    <cs:bodyPr rot="0" spcFirstLastPara="1" vertOverflow="clip" horzOverflow="clip" vert="horz" wrap="square" lIns="36576" tIns="18288" rIns="36576" bIns="18288" anchor="ctr" anchorCtr="1">
-      <a:spAutoFit/>
-    </cs:bodyPr>
-  </cs:dataLabelCallout>
-  <cs:dataPoint>
-    <cs:lnRef idx="0"/>
-    <cs:fillRef idx="1">
-      <cs:styleClr val="auto"/>
-    </cs:fillRef>
-    <cs:effectRef idx="0"/>
-    <cs:fontRef idx="minor">
-      <a:schemeClr val="tx1"/>
-    </cs:fontRef>
-  </cs:dataPoint>
-  <cs:dataPoint3D>
-    <cs:lnRef idx="0"/>
-    <cs:fillRef idx="1">
-      <cs:styleClr val="auto"/>
-    </cs:fillRef>
-    <cs:effectRef idx="0"/>
-    <cs:fontRef idx="minor">
-      <a:schemeClr val="tx1"/>
-    </cs:fontRef>
-  </cs:dataPoint3D>
-  <cs:dataPointLine>
-    <cs:lnRef idx="0">
-      <cs:styleClr val="auto"/>
-    </cs:lnRef>
-    <cs:fillRef idx="1"/>
-    <cs:effectRef idx="0"/>
-    <cs:fontRef idx="minor">
-      <a:schemeClr val="tx1"/>
-    </cs:fontRef>
-    <cs:spPr>
-      <a:ln w="28575" cap="rnd">
-        <a:solidFill>
-          <a:schemeClr val="phClr"/>
-        </a:solidFill>
-        <a:round/>
-      </a:ln>
-    </cs:spPr>
-  </cs:dataPointLine>
-  <cs:dataPointMarker>
-    <cs:lnRef idx="0">
-      <cs:styleClr val="auto"/>
-    </cs:lnRef>
-    <cs:fillRef idx="1">
-      <cs:styleClr val="auto"/>
-    </cs:fillRef>
-    <cs:effectRef idx="0"/>
-    <cs:fontRef idx="minor">
-      <a:schemeClr val="tx1"/>
-    </cs:fontRef>
-    <cs:spPr>
-      <a:ln w="9525">
-        <a:solidFill>
-          <a:schemeClr val="phClr"/>
-        </a:solidFill>
-      </a:ln>
-    </cs:spPr>
-  </cs:dataPointMarker>
-  <cs:dataPointMarkerLayout symbol="circle" size="5"/>
-  <cs:dataPointWireframe>
-    <cs:lnRef idx="0">
-      <cs:styleClr val="auto"/>
-    </cs:lnRef>
-    <cs:fillRef idx="1"/>
-    <cs:effectRef idx="0"/>
-    <cs:fontRef idx="minor">
-      <a:schemeClr val="tx1"/>
-    </cs:fontRef>
-    <cs:spPr>
-      <a:ln w="9525" cap="rnd">
-        <a:solidFill>
-          <a:schemeClr val="phClr"/>
-        </a:solidFill>
-        <a:round/>
-      </a:ln>
-    </cs:spPr>
-  </cs:dataPointWireframe>
-  <cs:dataTable>
-    <cs:lnRef idx="0"/>
-    <cs:fillRef idx="0"/>
-    <cs:effectRef idx="0"/>
-    <cs:fontRef idx="minor">
-      <a:schemeClr val="tx1">
-        <a:lumMod val="65000"/>
-        <a:lumOff val="35000"/>
-      </a:schemeClr>
-    </cs:fontRef>
-    <cs:spPr>
-      <a:noFill/>
-      <a:ln w="9525" cap="flat" cmpd="sng" algn="ctr">
-        <a:solidFill>
-          <a:schemeClr val="tx1">
-            <a:lumMod val="15000"/>
-            <a:lumOff val="85000"/>
-          </a:schemeClr>
-        </a:solidFill>
-        <a:round/>
-      </a:ln>
-    </cs:spPr>
-    <cs:defRPr sz="900" kern="1200"/>
-  </cs:dataTable>
-  <cs:downBar>
-    <cs:lnRef idx="0"/>
-    <cs:fillRef idx="0"/>
-    <cs:effectRef idx="0"/>
-    <cs:fontRef idx="minor">
-      <a:schemeClr val="dk1"/>
-    </cs:fontRef>
-    <cs:spPr>
-      <a:solidFill>
-        <a:schemeClr val="dk1">
-          <a:lumMod val="65000"/>
-          <a:lumOff val="35000"/>
-        </a:schemeClr>
-      </a:solidFill>
-      <a:ln w="9525">
-        <a:solidFill>
-          <a:schemeClr val="tx1">
-            <a:lumMod val="65000"/>
-            <a:lumOff val="35000"/>
-          </a:schemeClr>
-        </a:solidFill>
-      </a:ln>
-    </cs:spPr>
-  </cs:downBar>
-  <cs:dropLine>
-    <cs:lnRef idx="0"/>
-    <cs:fillRef idx="0"/>
-    <cs:effectRef idx="0"/>
-    <cs:fontRef idx="minor">
-      <a:schemeClr val="tx1"/>
-    </cs:fontRef>
-    <cs:spPr>
-      <a:ln w="9525" cap="flat" cmpd="sng" algn="ctr">
-        <a:solidFill>
-          <a:schemeClr val="tx1">
-            <a:lumMod val="35000"/>
-            <a:lumOff val="65000"/>
-          </a:schemeClr>
-        </a:solidFill>
-        <a:round/>
-      </a:ln>
-    </cs:spPr>
-  </cs:dropLine>
-  <cs:errorBar>
-    <cs:lnRef idx="0"/>
-    <cs:fillRef idx="0"/>
-    <cs:effectRef idx="0"/>
-    <cs:fontRef idx="minor">
-      <a:schemeClr val="tx1"/>
-    </cs:fontRef>
-    <cs:spPr>
-      <a:ln w="9525" cap="flat" cmpd="sng" algn="ctr">
-        <a:solidFill>
-          <a:schemeClr val="tx1">
-            <a:lumMod val="65000"/>
-            <a:lumOff val="35000"/>
-          </a:schemeClr>
-        </a:solidFill>
-        <a:round/>
-      </a:ln>
-    </cs:spPr>
-  </cs:errorBar>
-  <cs:floor>
-    <cs:lnRef idx="0"/>
-    <cs:fillRef idx="0"/>
-    <cs:effectRef idx="0"/>
-    <cs:fontRef idx="minor">
-      <a:schemeClr val="tx1"/>
-    </cs:fontRef>
-    <cs:spPr>
-      <a:noFill/>
-      <a:ln>
-        <a:noFill/>
-      </a:ln>
-    </cs:spPr>
-  </cs:floor>
-  <cs:gridlineMajor>
-    <cs:lnRef idx="0"/>
-    <cs:fillRef idx="0"/>
-    <cs:effectRef idx="0"/>
-    <cs:fontRef idx="minor">
-      <a:schemeClr val="tx1"/>
-    </cs:fontRef>
-    <cs:spPr>
-      <a:ln w="9525" cap="flat" cmpd="sng" algn="ctr">
-        <a:solidFill>
-          <a:schemeClr val="tx1">
-            <a:lumMod val="15000"/>
-            <a:lumOff val="85000"/>
-          </a:schemeClr>
-        </a:solidFill>
-        <a:round/>
-      </a:ln>
-    </cs:spPr>
-  </cs:gridlineMajor>
-  <cs:gridlineMinor>
-    <cs:lnRef idx="0"/>
-    <cs:fillRef idx="0"/>
-    <cs:effectRef idx="0"/>
-    <cs:fontRef idx="minor">
-      <a:schemeClr val="tx1"/>
-    </cs:fontRef>
-    <cs:spPr>
-      <a:ln w="9525" cap="flat" cmpd="sng" algn="ctr">
-        <a:solidFill>
-          <a:schemeClr val="tx1">
-            <a:lumMod val="5000"/>
-            <a:lumOff val="95000"/>
-          </a:schemeClr>
-        </a:solidFill>
-        <a:round/>
-      </a:ln>
-    </cs:spPr>
-  </cs:gridlineMinor>
-  <cs:hiLoLine>
-    <cs:lnRef idx="0"/>
-    <cs:fillRef idx="0"/>
-    <cs:effectRef idx="0"/>
-    <cs:fontRef idx="minor">
-      <a:schemeClr val="tx1"/>
-    </cs:fontRef>
-    <cs:spPr>
-      <a:ln w="9525" cap="flat" cmpd="sng" algn="ctr">
-        <a:solidFill>
-          <a:schemeClr val="tx1">
-            <a:lumMod val="75000"/>
-            <a:lumOff val="25000"/>
-          </a:schemeClr>
-        </a:solidFill>
-        <a:round/>
-      </a:ln>
-    </cs:spPr>
-  </cs:hiLoLine>
-  <cs:leaderLine>
-    <cs:lnRef idx="0"/>
-    <cs:fillRef idx="0"/>
-    <cs:effectRef idx="0"/>
-    <cs:fontRef idx="minor">
-      <a:schemeClr val="tx1"/>
-    </cs:fontRef>
-    <cs:spPr>
-      <a:ln w="9525" cap="flat" cmpd="sng" algn="ctr">
-        <a:solidFill>
-          <a:schemeClr val="tx1">
-            <a:lumMod val="35000"/>
-            <a:lumOff val="65000"/>
-          </a:schemeClr>
-        </a:solidFill>
-        <a:round/>
-      </a:ln>
-    </cs:spPr>
-  </cs:leaderLine>
-  <cs:legend>
-    <cs:lnRef idx="0"/>
-    <cs:fillRef idx="0"/>
-    <cs:effectRef idx="0"/>
-    <cs:fontRef idx="minor">
-      <a:schemeClr val="tx1">
-        <a:lumMod val="65000"/>
-        <a:lumOff val="35000"/>
-      </a:schemeClr>
-    </cs:fontRef>
-    <cs:defRPr sz="900" kern="1200"/>
-  </cs:legend>
-  <cs:plotArea mods="allowNoFillOverride allowNoLineOverride">
-    <cs:lnRef idx="0"/>
-    <cs:fillRef idx="0"/>
-    <cs:effectRef idx="0"/>
-    <cs:fontRef idx="minor">
-      <a:schemeClr val="tx1"/>
-    </cs:fontRef>
-  </cs:plotArea>
-  <cs:plotArea3D mods="allowNoFillOverride allowNoLineOverride">
-    <cs:lnRef idx="0"/>
-    <cs:fillRef idx="0"/>
-    <cs:effectRef idx="0"/>
-    <cs:fontRef idx="minor">
-      <a:schemeClr val="tx1"/>
-    </cs:fontRef>
-  </cs:plotArea3D>
-  <cs:seriesAxis>
-    <cs:lnRef idx="0"/>
-    <cs:fillRef idx="0"/>
-    <cs:effectRef idx="0"/>
-    <cs:fontRef idx="minor">
-      <a:schemeClr val="tx1">
-        <a:lumMod val="65000"/>
-        <a:lumOff val="35000"/>
-      </a:schemeClr>
-    </cs:fontRef>
-    <cs:defRPr sz="900" kern="1200"/>
-  </cs:seriesAxis>
-  <cs:seriesLine>
-    <cs:lnRef idx="0"/>
-    <cs:fillRef idx="0"/>
-    <cs:effectRef idx="0"/>
-    <cs:fontRef idx="minor">
-      <a:schemeClr val="tx1"/>
-    </cs:fontRef>
-    <cs:spPr>
-      <a:ln w="9525" cap="flat" cmpd="sng" algn="ctr">
-        <a:solidFill>
-          <a:schemeClr val="tx1">
-            <a:lumMod val="35000"/>
-            <a:lumOff val="65000"/>
-          </a:schemeClr>
-        </a:solidFill>
-        <a:round/>
-      </a:ln>
-    </cs:spPr>
-  </cs:seriesLine>
-  <cs:title>
-    <cs:lnRef idx="0"/>
-    <cs:fillRef idx="0"/>
-    <cs:effectRef idx="0"/>
-    <cs:fontRef idx="minor">
-      <a:schemeClr val="tx1">
-        <a:lumMod val="65000"/>
-        <a:lumOff val="35000"/>
-      </a:schemeClr>
-    </cs:fontRef>
-    <cs:defRPr sz="1400" b="0" kern="1200" spc="0" baseline="0"/>
-  </cs:title>
-  <cs:trendline>
-    <cs:lnRef idx="0">
-      <cs:styleClr val="auto"/>
-    </cs:lnRef>
-    <cs:fillRef idx="0"/>
-    <cs:effectRef idx="0"/>
-    <cs:fontRef idx="minor">
-      <a:schemeClr val="tx1"/>
-    </cs:fontRef>
-    <cs:spPr>
-      <a:ln w="19050" cap="rnd">
-        <a:solidFill>
-          <a:schemeClr val="phClr"/>
-        </a:solidFill>
-        <a:prstDash val="sysDot"/>
-      </a:ln>
-    </cs:spPr>
-  </cs:trendline>
-  <cs:trendlineLabel>
-    <cs:lnRef idx="0"/>
-    <cs:fillRef idx="0"/>
-    <cs:effectRef idx="0"/>
-    <cs:fontRef idx="minor">
-      <a:schemeClr val="tx1">
-        <a:lumMod val="65000"/>
-        <a:lumOff val="35000"/>
-      </a:schemeClr>
-    </cs:fontRef>
-    <cs:defRPr sz="900" kern="1200"/>
-  </cs:trendlineLabel>
-  <cs:upBar>
-    <cs:lnRef idx="0"/>
-    <cs:fillRef idx="0"/>
-    <cs:effectRef idx="0"/>
-    <cs:fontRef idx="minor">
-      <a:schemeClr val="dk1"/>
-    </cs:fontRef>
-    <cs:spPr>
-      <a:solidFill>
-        <a:schemeClr val="lt1"/>
-      </a:solidFill>
-      <a:ln w="9525">
-        <a:solidFill>
-          <a:schemeClr val="tx1">
-            <a:lumMod val="15000"/>
-            <a:lumOff val="85000"/>
-          </a:schemeClr>
-        </a:solidFill>
-      </a:ln>
-    </cs:spPr>
-  </cs:upBar>
-  <cs:valueAxis>
-    <cs:lnRef idx="0"/>
-    <cs:fillRef idx="0"/>
-    <cs:effectRef idx="0"/>
-    <cs:fontRef idx="minor">
-      <a:schemeClr val="tx1">
-        <a:lumMod val="65000"/>
-        <a:lumOff val="35000"/>
-      </a:schemeClr>
-    </cs:fontRef>
-    <cs:defRPr sz="900" kern="1200"/>
-  </cs:valueAxis>
-  <cs:wall>
-    <cs:lnRef idx="0"/>
-    <cs:fillRef idx="0"/>
-    <cs:effectRef idx="0"/>
-    <cs:fontRef idx="minor">
-      <a:schemeClr val="tx1"/>
-    </cs:fontRef>
-    <cs:spPr>
-      <a:noFill/>
-      <a:ln>
-        <a:noFill/>
-      </a:ln>
-    </cs:spPr>
-  </cs:wall>
-</cs:chartStyle>
-</file>
-
 <file path=ppt/notesMasters/notesMaster1.xml><?xml version="1.0" encoding="utf-8"?>
 <p:notesMaster xmlns:a="http://schemas.openxmlformats.org/drawingml/2006/main" xmlns:r="http://schemas.openxmlformats.org/officeDocument/2006/relationships" xmlns:mc="http://schemas.openxmlformats.org/markup-compatibility/2006" xmlns:mv="urn:schemas-microsoft-com:mac:vml" xmlns:p="http://schemas.openxmlformats.org/presentationml/2006/main" xmlns:c="http://schemas.openxmlformats.org/drawingml/2006/chart" xmlns:dgm="http://schemas.openxmlformats.org/drawingml/2006/diagram" xmlns:o="urn:schemas-microsoft-com:office:office" xmlns:v="urn:schemas-microsoft-com:vml" xmlns:pvml="urn:schemas-microsoft-com:office:powerpoint" xmlns:com="http://schemas.openxmlformats.org/drawingml/2006/compatibility" xmlns:p14="http://schemas.microsoft.com/office/powerpoint/2010/main" xmlns:p15="http://schemas.microsoft.com/office/powerpoint/2012/main" xmlns:ahyp="http://schemas.microsoft.com/office/drawing/2018/hyperlinkcolor">
   <p:cSld>
@@ -10986,7 +9650,7 @@
   <p:cSld>
     <p:spTree>
       <p:nvGrpSpPr>
-        <p:cNvPr id="193" name="Shape 193"/>
+        <p:cNvPr id="189" name="Shape 189"/>
         <p:cNvGrpSpPr/>
         <p:nvPr/>
       </p:nvGrpSpPr>
@@ -11000,7 +9664,7 @@
       </p:grpSpPr>
       <p:sp>
         <p:nvSpPr>
-          <p:cNvPr id="194" name="Google Shape;194;p12:notes"/>
+          <p:cNvPr id="190" name="Google Shape;190;p12:notes"/>
           <p:cNvSpPr txBox="1"/>
           <p:nvPr>
             <p:ph idx="1" type="body"/>
@@ -11047,7 +9711,7 @@
       </p:sp>
       <p:sp>
         <p:nvSpPr>
-          <p:cNvPr id="195" name="Google Shape;195;p12:notes"/>
+          <p:cNvPr id="191" name="Google Shape;191;p12:notes"/>
           <p:cNvSpPr/>
           <p:nvPr>
             <p:ph idx="2" type="sldImg"/>
@@ -25985,7 +24649,7 @@
             <a:tbl>
               <a:tblPr bandRow="1" firstRow="1">
                 <a:noFill/>
-                <a:tableStyleId>{9DA2678F-233F-48CC-94EE-994D6B8C5B0A}</a:tableStyleId>
+                <a:tableStyleId>{830A90A3-16FE-4105-A45D-5CC6A08BFFB0}</a:tableStyleId>
               </a:tblPr>
               <a:tblGrid>
                 <a:gridCol w="3792725"/>
@@ -26497,7 +25161,7 @@
             <a:tbl>
               <a:tblPr>
                 <a:noFill/>
-                <a:tableStyleId>{E4CAB7CC-72FD-4D0D-A185-EB4FF6D3F4A1}</a:tableStyleId>
+                <a:tableStyleId>{C993DAEF-F3E4-4172-98C6-BCE7FC111EAD}</a:tableStyleId>
               </a:tblPr>
               <a:tblGrid>
                 <a:gridCol w="2571750"/>
@@ -28507,8 +27171,8 @@
         </p:nvSpPr>
         <p:spPr>
           <a:xfrm>
-            <a:off x="838200" y="651226"/>
-            <a:ext cx="10515600" cy="1325563"/>
+            <a:off x="838200" y="499300"/>
+            <a:ext cx="9937200" cy="726900"/>
           </a:xfrm>
           <a:prstGeom prst="rect">
             <a:avLst/>
@@ -28520,7 +27184,7 @@
         </p:spPr>
         <p:txBody>
           <a:bodyPr anchorCtr="0" anchor="ctr" bIns="45700" lIns="91425" spcFirstLastPara="1" rIns="91425" wrap="square" tIns="45700">
-            <a:normAutofit fontScale="90000"/>
+            <a:noAutofit/>
           </a:bodyPr>
           <a:lstStyle/>
           <a:p>
@@ -28537,19 +27201,16 @@
               <a:buClr>
                 <a:schemeClr val="dk1"/>
               </a:buClr>
-              <a:buSzPct val="100000"/>
+              <a:buSzPts val="3960"/>
               <a:buFont typeface="Play"/>
               <a:buNone/>
             </a:pPr>
             <a:r>
-              <a:rPr lang="en-US"/>
+              <a:rPr lang="en-US" sz="2560"/>
               <a:t>5. </a:t>
             </a:r>
             <a:r>
-              <a:rPr lang="en-US">
-                <a:solidFill>
-                  <a:srgbClr val="FF0000"/>
-                </a:solidFill>
+              <a:rPr lang="en-US" sz="2560">
                 <a:latin typeface="Arial"/>
                 <a:ea typeface="Arial"/>
                 <a:cs typeface="Arial"/>
@@ -28557,31 +27218,47 @@
               </a:rPr>
               <a:t>THE CHINA DYNAMIC (COLLABORATION VS. COMPETITION)</a:t>
             </a:r>
-            <a:br>
-              <a:rPr lang="en-US">
-                <a:solidFill>
-                  <a:srgbClr val="FF0000"/>
-                </a:solidFill>
-                <a:latin typeface="Arial"/>
-                <a:ea typeface="Arial"/>
-                <a:cs typeface="Arial"/>
-                <a:sym typeface="Arial"/>
-              </a:rPr>
-            </a:br>
-            <a:endParaRPr/>
+            <a:endParaRPr sz="2560"/>
           </a:p>
         </p:txBody>
       </p:sp>
+      <p:pic>
+        <p:nvPicPr>
+          <p:cNvPr id="187" name="Google Shape;187;p11" title="India-China Bilateral Trade.png"/>
+          <p:cNvPicPr preferRelativeResize="0"/>
+          <p:nvPr/>
+        </p:nvPicPr>
+        <p:blipFill rotWithShape="1">
+          <a:blip r:embed="rId3">
+            <a:alphaModFix/>
+          </a:blip>
+          <a:srcRect b="-1660" l="0" r="0" t="1660"/>
+          <a:stretch/>
+        </p:blipFill>
+        <p:spPr>
+          <a:xfrm>
+            <a:off x="838200" y="1550639"/>
+            <a:ext cx="8228700" cy="4576411"/>
+          </a:xfrm>
+          <a:prstGeom prst="rect">
+            <a:avLst/>
+          </a:prstGeom>
+          <a:noFill/>
+          <a:ln>
+            <a:noFill/>
+          </a:ln>
+        </p:spPr>
+      </p:pic>
       <p:sp>
         <p:nvSpPr>
-          <p:cNvPr id="187" name="Google Shape;187;p11"/>
+          <p:cNvPr id="188" name="Google Shape;188;p11"/>
           <p:cNvSpPr txBox="1"/>
           <p:nvPr/>
         </p:nvSpPr>
         <p:spPr>
           <a:xfrm>
-            <a:off x="667568" y="1834410"/>
-            <a:ext cx="10686300" cy="1281600"/>
+            <a:off x="9375473" y="1550651"/>
+            <a:ext cx="2515800" cy="4525200"/>
           </a:xfrm>
           <a:prstGeom prst="rect">
             <a:avLst/>
@@ -28599,46 +27276,91 @@
           <a:p>
             <a:pPr indent="0" lvl="0" marL="0" marR="0" rtl="0" algn="l">
               <a:lnSpc>
-                <a:spcPct val="115000"/>
-              </a:lnSpc>
-              <a:spcBef>
-                <a:spcPts val="0"/>
-              </a:spcBef>
-              <a:spcAft>
-                <a:spcPts val="0"/>
-              </a:spcAft>
-              <a:buClr>
-                <a:srgbClr val="000000"/>
-              </a:buClr>
-              <a:buSzPts val="2400"/>
-              <a:buFont typeface="Arial"/>
+                <a:spcPct val="100000"/>
+              </a:lnSpc>
+              <a:spcBef>
+                <a:spcPts val="0"/>
+              </a:spcBef>
+              <a:spcAft>
+                <a:spcPts val="0"/>
+              </a:spcAft>
               <a:buNone/>
             </a:pPr>
             <a:r>
-              <a:rPr b="1" i="0" lang="en-US" sz="2400" u="none" cap="none" strike="noStrike">
+              <a:rPr lang="en-US" sz="1600"/>
+              <a:t>Since </a:t>
+            </a:r>
+            <a:r>
+              <a:rPr b="1" lang="en-US" sz="1600"/>
+              <a:t>China</a:t>
+            </a:r>
+            <a:r>
+              <a:rPr lang="en-US" sz="1600"/>
+              <a:t> joined </a:t>
+            </a:r>
+            <a:r>
+              <a:rPr b="1" lang="en-US" sz="1600"/>
+              <a:t>WTO</a:t>
+            </a:r>
+            <a:r>
+              <a:rPr lang="en-US" sz="1600"/>
+              <a:t> in </a:t>
+            </a:r>
+            <a:r>
+              <a:rPr b="1" lang="en-US" sz="1600"/>
+              <a:t>2001</a:t>
+            </a:r>
+            <a:r>
+              <a:rPr lang="en-US" sz="1600"/>
+              <a:t>, bilateral trade between </a:t>
+            </a:r>
+            <a:r>
+              <a:rPr b="1" lang="en-US" sz="1600"/>
+              <a:t>India</a:t>
+            </a:r>
+            <a:r>
+              <a:rPr lang="en-US" sz="1600"/>
+              <a:t> and </a:t>
+            </a:r>
+            <a:r>
+              <a:rPr b="1" lang="en-US" sz="1600"/>
+              <a:t>China </a:t>
+            </a:r>
+            <a:r>
+              <a:rPr lang="en-US" sz="1600"/>
+              <a:t>has grown drastically</a:t>
+            </a:r>
+            <a:r>
+              <a:rPr b="0" i="0" lang="en-US" sz="1600" u="none" cap="none" strike="noStrike">
                 <a:solidFill>
-                  <a:schemeClr val="dk1"/>
+                  <a:srgbClr val="000000"/>
                 </a:solidFill>
                 <a:latin typeface="Arial"/>
                 <a:ea typeface="Arial"/>
                 <a:cs typeface="Arial"/>
                 <a:sym typeface="Arial"/>
               </a:rPr>
-              <a:t>Key Chart 6: </a:t>
+              <a:t>.  </a:t>
             </a:r>
+            <a:endParaRPr sz="1200"/>
+          </a:p>
+          <a:p>
+            <a:pPr indent="0" lvl="0" marL="0" marR="0" rtl="0" algn="l">
+              <a:lnSpc>
+                <a:spcPct val="100000"/>
+              </a:lnSpc>
+              <a:spcBef>
+                <a:spcPts val="0"/>
+              </a:spcBef>
+              <a:spcAft>
+                <a:spcPts val="0"/>
+              </a:spcAft>
+              <a:buNone/>
+            </a:pPr>
             <a:r>
-              <a:rPr b="0" i="0" lang="en-US" sz="2000" u="none" cap="none" strike="noStrike">
-                <a:solidFill>
-                  <a:schemeClr val="dk1"/>
-                </a:solidFill>
-                <a:latin typeface="Arial"/>
-                <a:ea typeface="Arial"/>
-                <a:cs typeface="Arial"/>
-                <a:sym typeface="Arial"/>
-              </a:rPr>
-              <a:t>Trade &amp; Pacts (Line Chart): Plot the growth rate of bilateral trade with China. </a:t>
+              <a:t/>
             </a:r>
-            <a:endParaRPr b="0" i="0" sz="1400" u="none" cap="none" strike="noStrike">
+            <a:endParaRPr b="0" i="0" sz="1600" u="none" cap="none" strike="noStrike">
               <a:solidFill>
                 <a:srgbClr val="000000"/>
               </a:solidFill>
@@ -28649,164 +27371,66 @@
             </a:endParaRPr>
           </a:p>
           <a:p>
-            <a:pPr indent="-342900" lvl="0" marL="342900" marR="0" rtl="0" algn="l">
-              <a:lnSpc>
-                <a:spcPct val="115000"/>
-              </a:lnSpc>
-              <a:spcBef>
-                <a:spcPts val="800"/>
-              </a:spcBef>
-              <a:spcAft>
-                <a:spcPts val="0"/>
-              </a:spcAft>
-              <a:buClr>
-                <a:schemeClr val="dk1"/>
-              </a:buClr>
-              <a:buSzPts val="1000"/>
-              <a:buFont typeface="Noto Sans Symbols"/>
-              <a:buChar char="∙"/>
+            <a:pPr indent="0" lvl="0" marL="0" marR="0" rtl="0" algn="l">
+              <a:lnSpc>
+                <a:spcPct val="100000"/>
+              </a:lnSpc>
+              <a:spcBef>
+                <a:spcPts val="0"/>
+              </a:spcBef>
+              <a:spcAft>
+                <a:spcPts val="0"/>
+              </a:spcAft>
+              <a:buNone/>
             </a:pPr>
             <a:r>
-              <a:rPr b="0" i="0" lang="en-US" sz="2000" u="none" cap="none" strike="noStrike">
-                <a:solidFill>
-                  <a:schemeClr val="dk1"/>
-                </a:solidFill>
-                <a:latin typeface="Arial"/>
-                <a:ea typeface="Arial"/>
-                <a:cs typeface="Arial"/>
-                <a:sym typeface="Arial"/>
-              </a:rPr>
-              <a:t>In your chart, note relevant periods where key structural breaks when regional trade agreements (e.g., RCEP, ASEAN-China FTA) were implemented.</a:t>
+              <a:rPr lang="en-US" sz="1600"/>
+              <a:t>The </a:t>
             </a:r>
-            <a:endParaRPr b="0" i="0" sz="1400" u="none" cap="none" strike="noStrike">
-              <a:solidFill>
-                <a:srgbClr val="000000"/>
-              </a:solidFill>
-              <a:latin typeface="Arial"/>
-              <a:ea typeface="Arial"/>
-              <a:cs typeface="Arial"/>
-              <a:sym typeface="Arial"/>
-            </a:endParaRPr>
+            <a:r>
+              <a:rPr b="1" lang="en-US" sz="1600"/>
+              <a:t>Global Financial Crisis</a:t>
+            </a:r>
+            <a:r>
+              <a:rPr lang="en-US" sz="1600"/>
+              <a:t> in </a:t>
+            </a:r>
+            <a:r>
+              <a:rPr b="1" lang="en-US" sz="1600"/>
+              <a:t>2008</a:t>
+            </a:r>
+            <a:r>
+              <a:rPr lang="en-US" sz="1600"/>
+              <a:t> caused trade to decrease abruptly into the </a:t>
+            </a:r>
+            <a:r>
+              <a:rPr b="1" lang="en-US" sz="1600"/>
+              <a:t>negative</a:t>
+            </a:r>
+            <a:r>
+              <a:rPr lang="en-US" sz="1600"/>
+              <a:t> zone.</a:t>
+            </a:r>
+            <a:endParaRPr sz="1600"/>
           </a:p>
-        </p:txBody>
-      </p:sp>
-      <p:sp>
-        <p:nvSpPr>
-          <p:cNvPr id="188" name="Google Shape;188;p11"/>
-          <p:cNvSpPr/>
-          <p:nvPr/>
-        </p:nvSpPr>
-        <p:spPr>
-          <a:xfrm>
-            <a:off x="3130277" y="4807612"/>
-            <a:ext cx="1245379" cy="650739"/>
-          </a:xfrm>
-          <a:prstGeom prst="rightArrow">
-            <a:avLst>
-              <a:gd fmla="val 50000" name="adj1"/>
-              <a:gd fmla="val 50000" name="adj2"/>
-            </a:avLst>
-          </a:prstGeom>
-          <a:solidFill>
-            <a:schemeClr val="accent1"/>
-          </a:solidFill>
-          <a:ln cap="flat" cmpd="sng" w="19050">
-            <a:solidFill>
-              <a:srgbClr val="082836"/>
-            </a:solidFill>
-            <a:prstDash val="solid"/>
-            <a:miter lim="0"/>
-            <a:headEnd len="sm" w="sm" type="none"/>
-            <a:tailEnd len="sm" w="sm" type="none"/>
-          </a:ln>
-        </p:spPr>
-        <p:txBody>
-          <a:bodyPr anchorCtr="0" anchor="ctr" bIns="45700" lIns="91425" spcFirstLastPara="1" rIns="91425" wrap="square" tIns="45700">
-            <a:noAutofit/>
-          </a:bodyPr>
-          <a:lstStyle/>
           <a:p>
-            <a:pPr indent="0" lvl="0" marL="0" marR="0" rtl="0" algn="ctr">
-              <a:lnSpc>
-                <a:spcPct val="100000"/>
-              </a:lnSpc>
-              <a:spcBef>
-                <a:spcPts val="0"/>
-              </a:spcBef>
-              <a:spcAft>
-                <a:spcPts val="0"/>
-              </a:spcAft>
-              <a:buClr>
-                <a:srgbClr val="000000"/>
-              </a:buClr>
-              <a:buSzPts val="1800"/>
-              <a:buFont typeface="Arial"/>
+            <a:pPr indent="0" lvl="0" marL="0" marR="0" rtl="0" algn="l">
+              <a:lnSpc>
+                <a:spcPct val="100000"/>
+              </a:lnSpc>
+              <a:spcBef>
+                <a:spcPts val="0"/>
+              </a:spcBef>
+              <a:spcAft>
+                <a:spcPts val="0"/>
+              </a:spcAft>
               <a:buNone/>
             </a:pPr>
             <a:r>
-              <a:rPr b="0" i="0" lang="en-US" sz="1800" u="none" cap="none" strike="noStrike">
-                <a:solidFill>
-                  <a:schemeClr val="lt1"/>
-                </a:solidFill>
-                <a:latin typeface="Arial"/>
-                <a:ea typeface="Arial"/>
-                <a:cs typeface="Arial"/>
-                <a:sym typeface="Arial"/>
-              </a:rPr>
-              <a:t>Sample </a:t>
+              <a:t/>
             </a:r>
-            <a:endParaRPr b="0" i="0" sz="1800" u="none" cap="none" strike="noStrike">
-              <a:solidFill>
-                <a:schemeClr val="lt1"/>
-              </a:solidFill>
-              <a:latin typeface="Arial"/>
-              <a:ea typeface="Arial"/>
-              <a:cs typeface="Arial"/>
-              <a:sym typeface="Arial"/>
-            </a:endParaRPr>
+            <a:endParaRPr sz="1600"/>
           </a:p>
-        </p:txBody>
-      </p:sp>
-      <p:graphicFrame>
-        <p:nvGraphicFramePr>
-          <p:cNvPr id="189" name="Google Shape;189;p11"/>
-          <p:cNvGraphicFramePr/>
-          <p:nvPr/>
-        </p:nvGraphicFramePr>
-        <p:xfrm>
-          <a:off x="5337849" y="3536813"/>
-          <a:ext cx="5264944" cy="2914650"/>
-        </p:xfrm>
-        <a:graphic>
-          <a:graphicData uri="http://schemas.openxmlformats.org/drawingml/2006/chart">
-            <c:chart r:id="rId3"/>
-          </a:graphicData>
-        </a:graphic>
-      </p:graphicFrame>
-      <p:sp>
-        <p:nvSpPr>
-          <p:cNvPr id="190" name="Google Shape;190;p11"/>
-          <p:cNvSpPr txBox="1"/>
-          <p:nvPr/>
-        </p:nvSpPr>
-        <p:spPr>
-          <a:xfrm>
-            <a:off x="5811718" y="5232263"/>
-            <a:ext cx="971551" cy="371476"/>
-          </a:xfrm>
-          <a:prstGeom prst="rect">
-            <a:avLst/>
-          </a:prstGeom>
-          <a:noFill/>
-          <a:ln>
-            <a:noFill/>
-          </a:ln>
-        </p:spPr>
-        <p:txBody>
-          <a:bodyPr anchorCtr="0" anchor="t" bIns="45700" lIns="91425" spcFirstLastPara="1" rIns="91425" wrap="square" tIns="45700">
-            <a:noAutofit/>
-          </a:bodyPr>
-          <a:lstStyle/>
           <a:p>
             <a:pPr indent="0" lvl="0" marL="0" marR="0" rtl="0" algn="l">
               <a:lnSpc>
@@ -28818,166 +27442,69 @@
               <a:spcAft>
                 <a:spcPts val="0"/>
               </a:spcAft>
-              <a:buClr>
-                <a:srgbClr val="000000"/>
-              </a:buClr>
-              <a:buSzPts val="1000"/>
-              <a:buFont typeface="Arial"/>
               <a:buNone/>
             </a:pPr>
             <a:r>
-              <a:rPr b="0" i="0" lang="en-US" sz="1000" u="none" cap="none" strike="noStrike">
-                <a:solidFill>
-                  <a:schemeClr val="dk1"/>
-                </a:solidFill>
-                <a:latin typeface="Arial"/>
-                <a:ea typeface="Arial"/>
-                <a:cs typeface="Arial"/>
-                <a:sym typeface="Arial"/>
-              </a:rPr>
-              <a:t>US-SG FTA </a:t>
+              <a:rPr lang="en-US" sz="1600"/>
+              <a:t>When </a:t>
             </a:r>
-            <a:endParaRPr b="0" i="0" sz="1400" u="none" cap="none" strike="noStrike">
-              <a:solidFill>
-                <a:srgbClr val="000000"/>
-              </a:solidFill>
-              <a:latin typeface="Arial"/>
-              <a:ea typeface="Arial"/>
-              <a:cs typeface="Arial"/>
-              <a:sym typeface="Arial"/>
-            </a:endParaRPr>
-          </a:p>
-        </p:txBody>
-      </p:sp>
-      <p:sp>
-        <p:nvSpPr>
-          <p:cNvPr id="191" name="Google Shape;191;p11"/>
-          <p:cNvSpPr txBox="1"/>
-          <p:nvPr/>
-        </p:nvSpPr>
-        <p:spPr>
-          <a:xfrm>
-            <a:off x="7083306" y="4565513"/>
-            <a:ext cx="1262063" cy="371476"/>
-          </a:xfrm>
-          <a:prstGeom prst="rect">
-            <a:avLst/>
-          </a:prstGeom>
-          <a:noFill/>
-          <a:ln>
-            <a:noFill/>
-          </a:ln>
-        </p:spPr>
-        <p:txBody>
-          <a:bodyPr anchorCtr="0" anchor="t" bIns="45700" lIns="91425" spcFirstLastPara="1" rIns="91425" wrap="square" tIns="45700">
-            <a:noAutofit/>
-          </a:bodyPr>
-          <a:lstStyle/>
-          <a:p>
-            <a:pPr indent="0" lvl="0" marL="0" marR="0" rtl="0" algn="l">
-              <a:lnSpc>
-                <a:spcPct val="100000"/>
-              </a:lnSpc>
-              <a:spcBef>
-                <a:spcPts val="0"/>
-              </a:spcBef>
-              <a:spcAft>
-                <a:spcPts val="0"/>
-              </a:spcAft>
-              <a:buClr>
-                <a:srgbClr val="000000"/>
-              </a:buClr>
-              <a:buSzPts val="1000"/>
-              <a:buFont typeface="Arial"/>
-              <a:buNone/>
-            </a:pPr>
             <a:r>
-              <a:rPr b="0" i="0" lang="en-US" sz="1000" u="none" cap="none" strike="noStrike">
-                <a:solidFill>
-                  <a:schemeClr val="dk1"/>
-                </a:solidFill>
-                <a:latin typeface="Arial"/>
-                <a:ea typeface="Arial"/>
-                <a:cs typeface="Arial"/>
-                <a:sym typeface="Arial"/>
-              </a:rPr>
-              <a:t>ASEAN China FTA</a:t>
+              <a:rPr b="1" lang="en-US" sz="1600"/>
+              <a:t>India</a:t>
             </a:r>
-            <a:endParaRPr b="0" i="0" sz="1400" u="none" cap="none" strike="noStrike">
-              <a:solidFill>
-                <a:srgbClr val="000000"/>
-              </a:solidFill>
-              <a:latin typeface="Arial"/>
-              <a:ea typeface="Arial"/>
-              <a:cs typeface="Arial"/>
-              <a:sym typeface="Arial"/>
-            </a:endParaRPr>
-          </a:p>
-        </p:txBody>
-      </p:sp>
-      <p:sp>
-        <p:nvSpPr>
-          <p:cNvPr id="192" name="Google Shape;192;p11"/>
-          <p:cNvSpPr txBox="1"/>
-          <p:nvPr/>
-        </p:nvSpPr>
-        <p:spPr>
-          <a:xfrm>
-            <a:off x="9764593" y="3698738"/>
-            <a:ext cx="971551" cy="371476"/>
-          </a:xfrm>
-          <a:prstGeom prst="rect">
-            <a:avLst/>
-          </a:prstGeom>
-          <a:noFill/>
-          <a:ln>
-            <a:noFill/>
-          </a:ln>
-        </p:spPr>
-        <p:txBody>
-          <a:bodyPr anchorCtr="0" anchor="t" bIns="45700" lIns="91425" spcFirstLastPara="1" rIns="91425" wrap="square" tIns="45700">
-            <a:noAutofit/>
-          </a:bodyPr>
-          <a:lstStyle/>
-          <a:p>
-            <a:pPr indent="0" lvl="0" marL="0" marR="0" rtl="0" algn="l">
-              <a:lnSpc>
-                <a:spcPct val="100000"/>
-              </a:lnSpc>
-              <a:spcBef>
-                <a:spcPts val="0"/>
-              </a:spcBef>
-              <a:spcAft>
-                <a:spcPts val="0"/>
-              </a:spcAft>
-              <a:buClr>
-                <a:srgbClr val="000000"/>
-              </a:buClr>
-              <a:buSzPts val="1000"/>
-              <a:buFont typeface="Arial"/>
-              <a:buNone/>
-            </a:pPr>
             <a:r>
-              <a:rPr b="0" i="0" lang="en-US" sz="1000" u="none" cap="none" strike="noStrike">
-                <a:solidFill>
-                  <a:schemeClr val="dk1"/>
-                </a:solidFill>
-                <a:latin typeface="Arial"/>
-                <a:ea typeface="Arial"/>
-                <a:cs typeface="Arial"/>
-                <a:sym typeface="Arial"/>
-              </a:rPr>
+              <a:rPr lang="en-US" sz="1600"/>
+              <a:t> withdrew from </a:t>
+            </a:r>
+            <a:r>
+              <a:rPr b="1" lang="en-US" sz="1600"/>
               <a:t>RCEP</a:t>
             </a:r>
-            <a:endParaRPr b="0" i="0" sz="1400" u="none" cap="none" strike="noStrike">
-              <a:solidFill>
-                <a:srgbClr val="000000"/>
-              </a:solidFill>
-              <a:latin typeface="Arial"/>
-              <a:ea typeface="Arial"/>
-              <a:cs typeface="Arial"/>
-              <a:sym typeface="Arial"/>
-            </a:endParaRPr>
+            <a:r>
+              <a:rPr lang="en-US" sz="1600"/>
+              <a:t> in </a:t>
+            </a:r>
+            <a:r>
+              <a:rPr b="1" lang="en-US" sz="1600"/>
+              <a:t>2019</a:t>
+            </a:r>
+            <a:r>
+              <a:rPr lang="en-US" sz="1600"/>
+              <a:t>, it also caused a </a:t>
+            </a:r>
+            <a:r>
+              <a:rPr b="1" lang="en-US" sz="1600"/>
+              <a:t>decrease</a:t>
+            </a:r>
+            <a:r>
+              <a:rPr lang="en-US" sz="1600"/>
+              <a:t> in the trade before then </a:t>
+            </a:r>
+            <a:r>
+              <a:rPr b="1" lang="en-US" sz="1600"/>
+              <a:t>spiking up</a:t>
+            </a:r>
+            <a:r>
+              <a:rPr lang="en-US" sz="1600"/>
+              <a:t> again in </a:t>
+            </a:r>
+            <a:r>
+              <a:rPr b="1" lang="en-US" sz="1600"/>
+              <a:t>2021</a:t>
+            </a:r>
+            <a:r>
+              <a:rPr lang="en-US" sz="1600"/>
+              <a:t> due to </a:t>
+            </a:r>
+            <a:r>
+              <a:rPr b="1" lang="en-US" sz="1600"/>
+              <a:t>post-COVID</a:t>
+            </a:r>
+            <a:r>
+              <a:rPr lang="en-US" sz="1600"/>
+              <a:t> demands.</a:t>
+            </a:r>
+            <a:endParaRPr sz="1600"/>
           </a:p>
         </p:txBody>
       </p:sp>
@@ -28994,7 +27521,7 @@
   <p:cSld>
     <p:spTree>
       <p:nvGrpSpPr>
-        <p:cNvPr id="196" name="Shape 196"/>
+        <p:cNvPr id="192" name="Shape 192"/>
         <p:cNvGrpSpPr/>
         <p:nvPr/>
       </p:nvGrpSpPr>
@@ -29008,7 +27535,7 @@
       </p:grpSpPr>
       <p:sp>
         <p:nvSpPr>
-          <p:cNvPr id="197" name="Google Shape;197;p12"/>
+          <p:cNvPr id="193" name="Google Shape;193;p12"/>
           <p:cNvSpPr txBox="1"/>
           <p:nvPr>
             <p:ph type="title"/>
@@ -29058,16 +27585,24 @@
           </a:p>
         </p:txBody>
       </p:sp>
-      <p:sp>
-        <p:nvSpPr>
-          <p:cNvPr id="198" name="Google Shape;198;p12"/>
-          <p:cNvSpPr txBox="1"/>
+      <p:pic>
+        <p:nvPicPr>
+          <p:cNvPr id="194" name="Google Shape;194;p12" title="China Value Added % of Total India Exports.png"/>
+          <p:cNvPicPr preferRelativeResize="0"/>
           <p:nvPr/>
-        </p:nvSpPr>
+        </p:nvPicPr>
+        <p:blipFill>
+          <a:blip r:embed="rId3">
+            <a:alphaModFix/>
+          </a:blip>
+          <a:stretch>
+            <a:fillRect/>
+          </a:stretch>
+        </p:blipFill>
         <p:spPr>
           <a:xfrm>
-            <a:off x="942448" y="1581968"/>
-            <a:ext cx="8796191" cy="2862322"/>
+            <a:off x="606225" y="1611113"/>
+            <a:ext cx="7753350" cy="4791075"/>
           </a:xfrm>
           <a:prstGeom prst="rect">
             <a:avLst/>
@@ -29077,315 +27612,7 @@
             <a:noFill/>
           </a:ln>
         </p:spPr>
-        <p:txBody>
-          <a:bodyPr anchorCtr="0" anchor="t" bIns="45700" lIns="91425" spcFirstLastPara="1" rIns="91425" wrap="square" tIns="45700">
-            <a:spAutoFit/>
-          </a:bodyPr>
-          <a:lstStyle/>
-          <a:p>
-            <a:pPr indent="0" lvl="0" marL="0" marR="0" rtl="0" algn="l">
-              <a:lnSpc>
-                <a:spcPct val="100000"/>
-              </a:lnSpc>
-              <a:spcBef>
-                <a:spcPts val="0"/>
-              </a:spcBef>
-              <a:spcAft>
-                <a:spcPts val="0"/>
-              </a:spcAft>
-              <a:buClr>
-                <a:srgbClr val="000000"/>
-              </a:buClr>
-              <a:buSzPts val="1800"/>
-              <a:buFont typeface="Arial"/>
-              <a:buNone/>
-            </a:pPr>
-            <a:r>
-              <a:rPr b="0" i="0" lang="en-US" sz="1800" u="none" cap="none" strike="noStrike">
-                <a:solidFill>
-                  <a:schemeClr val="dk1"/>
-                </a:solidFill>
-                <a:latin typeface="Arial"/>
-                <a:ea typeface="Arial"/>
-                <a:cs typeface="Arial"/>
-                <a:sym typeface="Arial"/>
-              </a:rPr>
-              <a:t>Discussion here is open ended. </a:t>
-            </a:r>
-            <a:endParaRPr b="0" i="0" sz="1400" u="none" cap="none" strike="noStrike">
-              <a:solidFill>
-                <a:srgbClr val="000000"/>
-              </a:solidFill>
-              <a:latin typeface="Arial"/>
-              <a:ea typeface="Arial"/>
-              <a:cs typeface="Arial"/>
-              <a:sym typeface="Arial"/>
-            </a:endParaRPr>
-          </a:p>
-          <a:p>
-            <a:pPr indent="0" lvl="0" marL="0" marR="0" rtl="0" algn="l">
-              <a:lnSpc>
-                <a:spcPct val="100000"/>
-              </a:lnSpc>
-              <a:spcBef>
-                <a:spcPts val="0"/>
-              </a:spcBef>
-              <a:spcAft>
-                <a:spcPts val="0"/>
-              </a:spcAft>
-              <a:buClr>
-                <a:srgbClr val="000000"/>
-              </a:buClr>
-              <a:buSzPts val="1800"/>
-              <a:buFont typeface="Arial"/>
-              <a:buNone/>
-            </a:pPr>
-            <a:r>
-              <a:t/>
-            </a:r>
-            <a:endParaRPr b="0" i="0" sz="1800" u="none" cap="none" strike="noStrike">
-              <a:solidFill>
-                <a:schemeClr val="dk1"/>
-              </a:solidFill>
-              <a:latin typeface="Arial"/>
-              <a:ea typeface="Arial"/>
-              <a:cs typeface="Arial"/>
-              <a:sym typeface="Arial"/>
-            </a:endParaRPr>
-          </a:p>
-          <a:p>
-            <a:pPr indent="0" lvl="0" marL="0" marR="0" rtl="0" algn="l">
-              <a:lnSpc>
-                <a:spcPct val="100000"/>
-              </a:lnSpc>
-              <a:spcBef>
-                <a:spcPts val="0"/>
-              </a:spcBef>
-              <a:spcAft>
-                <a:spcPts val="0"/>
-              </a:spcAft>
-              <a:buClr>
-                <a:srgbClr val="000000"/>
-              </a:buClr>
-              <a:buSzPts val="1800"/>
-              <a:buFont typeface="Arial"/>
-              <a:buNone/>
-            </a:pPr>
-            <a:r>
-              <a:rPr b="0" i="0" lang="en-US" sz="1800" u="none" cap="none" strike="noStrike">
-                <a:solidFill>
-                  <a:schemeClr val="dk1"/>
-                </a:solidFill>
-                <a:latin typeface="Arial"/>
-                <a:ea typeface="Arial"/>
-                <a:cs typeface="Arial"/>
-                <a:sym typeface="Arial"/>
-              </a:rPr>
-              <a:t>Suggestion 1: Compute the GVC backward participation rate </a:t>
-            </a:r>
-            <a:endParaRPr b="0" i="0" sz="1400" u="none" cap="none" strike="noStrike">
-              <a:solidFill>
-                <a:srgbClr val="000000"/>
-              </a:solidFill>
-              <a:latin typeface="Arial"/>
-              <a:ea typeface="Arial"/>
-              <a:cs typeface="Arial"/>
-              <a:sym typeface="Arial"/>
-            </a:endParaRPr>
-          </a:p>
-          <a:p>
-            <a:pPr indent="0" lvl="0" marL="0" marR="0" rtl="0" algn="l">
-              <a:lnSpc>
-                <a:spcPct val="100000"/>
-              </a:lnSpc>
-              <a:spcBef>
-                <a:spcPts val="0"/>
-              </a:spcBef>
-              <a:spcAft>
-                <a:spcPts val="0"/>
-              </a:spcAft>
-              <a:buClr>
-                <a:srgbClr val="000000"/>
-              </a:buClr>
-              <a:buSzPts val="1800"/>
-              <a:buFont typeface="Arial"/>
-              <a:buNone/>
-            </a:pPr>
-            <a:r>
-              <a:rPr b="0" i="0" lang="en-US" sz="1800" u="none" cap="none" strike="noStrike">
-                <a:solidFill>
-                  <a:schemeClr val="dk1"/>
-                </a:solidFill>
-                <a:latin typeface="Arial"/>
-                <a:ea typeface="Arial"/>
-                <a:cs typeface="Arial"/>
-                <a:sym typeface="Arial"/>
-              </a:rPr>
-              <a:t>(  = foreign value added from china / total export of host country ) and interpret the values </a:t>
-            </a:r>
-            <a:endParaRPr b="0" i="0" sz="1400" u="none" cap="none" strike="noStrike">
-              <a:solidFill>
-                <a:srgbClr val="000000"/>
-              </a:solidFill>
-              <a:latin typeface="Arial"/>
-              <a:ea typeface="Arial"/>
-              <a:cs typeface="Arial"/>
-              <a:sym typeface="Arial"/>
-            </a:endParaRPr>
-          </a:p>
-          <a:p>
-            <a:pPr indent="0" lvl="0" marL="0" marR="0" rtl="0" algn="l">
-              <a:lnSpc>
-                <a:spcPct val="100000"/>
-              </a:lnSpc>
-              <a:spcBef>
-                <a:spcPts val="0"/>
-              </a:spcBef>
-              <a:spcAft>
-                <a:spcPts val="0"/>
-              </a:spcAft>
-              <a:buClr>
-                <a:srgbClr val="000000"/>
-              </a:buClr>
-              <a:buSzPts val="1800"/>
-              <a:buFont typeface="Arial"/>
-              <a:buNone/>
-            </a:pPr>
-            <a:r>
-              <a:t/>
-            </a:r>
-            <a:endParaRPr b="0" i="0" sz="1800" u="none" cap="none" strike="noStrike">
-              <a:solidFill>
-                <a:schemeClr val="dk1"/>
-              </a:solidFill>
-              <a:latin typeface="Arial"/>
-              <a:ea typeface="Arial"/>
-              <a:cs typeface="Arial"/>
-              <a:sym typeface="Arial"/>
-            </a:endParaRPr>
-          </a:p>
-          <a:p>
-            <a:pPr indent="0" lvl="0" marL="0" marR="0" rtl="0" algn="l">
-              <a:lnSpc>
-                <a:spcPct val="100000"/>
-              </a:lnSpc>
-              <a:spcBef>
-                <a:spcPts val="0"/>
-              </a:spcBef>
-              <a:spcAft>
-                <a:spcPts val="0"/>
-              </a:spcAft>
-              <a:buClr>
-                <a:srgbClr val="000000"/>
-              </a:buClr>
-              <a:buSzPts val="1800"/>
-              <a:buFont typeface="Arial"/>
-              <a:buNone/>
-            </a:pPr>
-            <a:r>
-              <a:rPr b="0" i="0" lang="en-US" sz="1800" u="none" cap="none" strike="noStrike">
-                <a:solidFill>
-                  <a:schemeClr val="dk1"/>
-                </a:solidFill>
-                <a:latin typeface="Arial"/>
-                <a:ea typeface="Arial"/>
-                <a:cs typeface="Arial"/>
-                <a:sym typeface="Arial"/>
-              </a:rPr>
-              <a:t>Suggestion 2:  Run a regression on</a:t>
-            </a:r>
-            <a:endParaRPr b="0" i="0" sz="1400" u="none" cap="none" strike="noStrike">
-              <a:solidFill>
-                <a:srgbClr val="000000"/>
-              </a:solidFill>
-              <a:latin typeface="Arial"/>
-              <a:ea typeface="Arial"/>
-              <a:cs typeface="Arial"/>
-              <a:sym typeface="Arial"/>
-            </a:endParaRPr>
-          </a:p>
-          <a:p>
-            <a:pPr indent="0" lvl="0" marL="0" marR="0" rtl="0" algn="l">
-              <a:lnSpc>
-                <a:spcPct val="100000"/>
-              </a:lnSpc>
-              <a:spcBef>
-                <a:spcPts val="0"/>
-              </a:spcBef>
-              <a:spcAft>
-                <a:spcPts val="0"/>
-              </a:spcAft>
-              <a:buClr>
-                <a:srgbClr val="000000"/>
-              </a:buClr>
-              <a:buSzPts val="1800"/>
-              <a:buFont typeface="Arial"/>
-              <a:buNone/>
-            </a:pPr>
-            <a:r>
-              <a:rPr b="0" i="0" lang="en-US" sz="1800" u="none" cap="none" strike="noStrike">
-                <a:solidFill>
-                  <a:schemeClr val="dk1"/>
-                </a:solidFill>
-                <a:latin typeface="Arial"/>
-                <a:ea typeface="Arial"/>
-                <a:cs typeface="Arial"/>
-                <a:sym typeface="Arial"/>
-              </a:rPr>
-              <a:t>Y ( FDI flows from China) </a:t>
-            </a:r>
-            <a:endParaRPr b="0" i="0" sz="1400" u="none" cap="none" strike="noStrike">
-              <a:solidFill>
-                <a:srgbClr val="000000"/>
-              </a:solidFill>
-              <a:latin typeface="Arial"/>
-              <a:ea typeface="Arial"/>
-              <a:cs typeface="Arial"/>
-              <a:sym typeface="Arial"/>
-            </a:endParaRPr>
-          </a:p>
-          <a:p>
-            <a:pPr indent="0" lvl="0" marL="0" marR="0" rtl="0" algn="l">
-              <a:lnSpc>
-                <a:spcPct val="100000"/>
-              </a:lnSpc>
-              <a:spcBef>
-                <a:spcPts val="0"/>
-              </a:spcBef>
-              <a:spcAft>
-                <a:spcPts val="0"/>
-              </a:spcAft>
-              <a:buClr>
-                <a:srgbClr val="000000"/>
-              </a:buClr>
-              <a:buSzPts val="1800"/>
-              <a:buFont typeface="Arial"/>
-              <a:buNone/>
-            </a:pPr>
-            <a:r>
-              <a:rPr b="0" i="0" lang="en-US" sz="1800" u="none" cap="none" strike="noStrike">
-                <a:solidFill>
-                  <a:schemeClr val="dk1"/>
-                </a:solidFill>
-                <a:latin typeface="Arial"/>
-                <a:ea typeface="Arial"/>
-                <a:cs typeface="Arial"/>
-                <a:sym typeface="Arial"/>
-              </a:rPr>
-              <a:t>X variables : volume of bilateral trade, number of  new trade pacts, + 1 or 2 other variables </a:t>
-            </a:r>
-            <a:endParaRPr b="0" i="0" sz="1800" u="none" cap="none" strike="noStrike">
-              <a:solidFill>
-                <a:schemeClr val="dk1"/>
-              </a:solidFill>
-              <a:latin typeface="Arial"/>
-              <a:ea typeface="Arial"/>
-              <a:cs typeface="Arial"/>
-              <a:sym typeface="Arial"/>
-            </a:endParaRPr>
-          </a:p>
-        </p:txBody>
-      </p:sp>
+      </p:pic>
     </p:spTree>
   </p:cSld>
   <p:clrMapOvr>
@@ -30990,7 +29217,7 @@
             <a:tbl>
               <a:tblPr bandRow="1" firstRow="1">
                 <a:noFill/>
-                <a:tableStyleId>{9DA2678F-233F-48CC-94EE-994D6B8C5B0A}</a:tableStyleId>
+                <a:tableStyleId>{830A90A3-16FE-4105-A45D-5CC6A08BFFB0}</a:tableStyleId>
               </a:tblPr>
               <a:tblGrid>
                 <a:gridCol w="1313450"/>
@@ -31836,7 +30063,7 @@
             <a:tbl>
               <a:tblPr bandRow="1" firstRow="1">
                 <a:noFill/>
-                <a:tableStyleId>{9DA2678F-233F-48CC-94EE-994D6B8C5B0A}</a:tableStyleId>
+                <a:tableStyleId>{830A90A3-16FE-4105-A45D-5CC6A08BFFB0}</a:tableStyleId>
               </a:tblPr>
               <a:tblGrid>
                 <a:gridCol w="1313450"/>
